--- a/银行流水分享_V1.9.pptx
+++ b/银行流水分享_V1.9.pptx
@@ -2055,24 +2055,14 @@
               </a:lnSpc>
             </a:pPr>
             <a:r>
-              <a:rPr lang="zh-CN" altLang="en-US" sz="2000" b="1" noProof="1">
+              <a:rPr sz="2000" b="1" lang="zh-CN">
                 <a:solidFill>
                   <a:srgbClr val="0A0A0A"/>
                 </a:solidFill>
-                <a:latin typeface="微软雅黑" panose="020B0503020204020204" pitchFamily="34" charset="-122"/>
-                <a:ea typeface="微软雅黑" panose="020B0503020204020204" pitchFamily="34" charset="-122"/>
+                <a:latin typeface="微软雅黑"/>
+                <a:ea typeface="微软雅黑"/>
               </a:rPr>
-              <a:t>银行流水</a:t>
-            </a:r>
-            <a:r>
-              <a:rPr lang="zh-CN" sz="2000" b="1" noProof="1">
-                <a:solidFill>
-                  <a:srgbClr val="0A0A0A"/>
-                </a:solidFill>
-                <a:latin typeface="微软雅黑" panose="020B0503020204020204" pitchFamily="34" charset="-122"/>
-                <a:ea typeface="微软雅黑" panose="020B0503020204020204" pitchFamily="34" charset="-122"/>
-              </a:rPr>
-              <a:t>识别决定收入、支出与负债计算结果，是信审判断的直接输入</a:t>
+              <a:t>银行流水识别，不只是交易分类，更是信审的底层决策能力</a:t>
             </a:r>
             <a:endParaRPr lang="en-US" sz="2000" noProof="1">
               <a:latin typeface="微软雅黑" panose="020B0503020204020204" pitchFamily="34" charset="-122"/>
@@ -2115,14 +2105,14 @@
               </a:lnSpc>
             </a:pPr>
             <a:r>
-              <a:rPr lang="zh-CN" altLang="zh-CN" sz="1800" noProof="1">
+              <a:rPr sz="1800" b="0" lang="zh-CN">
                 <a:solidFill>
                   <a:srgbClr val="606060"/>
                 </a:solidFill>
-                <a:latin typeface="微软雅黑" panose="020B0503020204020204" pitchFamily="34" charset="-122"/>
-                <a:ea typeface="微软雅黑" panose="020B0503020204020204" pitchFamily="34" charset="-122"/>
+                <a:latin typeface="微软雅黑"/>
+                <a:ea typeface="微软雅黑"/>
               </a:rPr>
-              <a:t>客户有多少稳定收入、承担多少必要支出、正在偿还哪些贷款，以及是否具备新增还款能力。</a:t>
+              <a:t>从收入、必要支出到存量负债，直接决定 Serviceability 与客户新增授信空间</a:t>
             </a:r>
             <a:endParaRPr lang="en-US" altLang="zh-CN" sz="1800" noProof="1">
               <a:latin typeface="微软雅黑" panose="020B0503020204020204" pitchFamily="34" charset="-122"/>
@@ -6321,14 +6311,14 @@
               </a:defRPr>
             </a:pPr>
             <a:r>
-              <a:rPr lang="zh-CN" altLang="en-US" sz="2000" b="1" noProof="1">
+              <a:rPr sz="2000" b="1" lang="zh-CN">
                 <a:solidFill>
                   <a:srgbClr val="0A0A0A"/>
                 </a:solidFill>
                 <a:latin typeface="微软雅黑"/>
                 <a:ea typeface="微软雅黑"/>
               </a:rPr>
-              <a:t>从一笔交易到完整客户财务画像直接回答新增还款能力</a:t>
+              <a:t>从一笔交易出发，直接还原客户真实偿债能力</a:t>
             </a:r>
           </a:p>
         </p:txBody>
@@ -6382,34 +6372,14 @@
               </a:defRPr>
             </a:pPr>
             <a:r>
-              <a:rPr lang="zh-CN" altLang="en-US" dirty="0" sz="1800">
+              <a:rPr sz="1800" b="0" lang="zh-CN">
                 <a:solidFill>
                   <a:srgbClr val="606060"/>
                 </a:solidFill>
                 <a:latin typeface="微软雅黑"/>
                 <a:ea typeface="微软雅黑"/>
               </a:rPr>
-              <a:t>原始流水 → 单笔交易识别 → 用户</a:t>
-            </a:r>
-            <a:r>
-              <a:rPr lang="zh-CN" altLang="zh-CN" dirty="0" sz="1800">
-                <a:solidFill>
-                  <a:srgbClr val="606060"/>
-                </a:solidFill>
-                <a:latin typeface="微软雅黑"/>
-                <a:ea typeface="微软雅黑"/>
-              </a:rPr>
-              <a:t>/</a:t>
-            </a:r>
-            <a:r>
-              <a:rPr lang="zh-CN" altLang="en-US" dirty="0" sz="1800">
-                <a:solidFill>
-                  <a:srgbClr val="606060"/>
-                </a:solidFill>
-                <a:latin typeface="微软雅黑"/>
-                <a:ea typeface="微软雅黑"/>
-              </a:rPr>
-              <a:t>贷款汇总</a:t>
+              <a:t>原始流水 → 单笔交易识别 → 用户/贷款汇总，将分散交易转化为可直接用于信审的财务画像</a:t>
             </a:r>
             <a:endParaRPr kumimoji="0" lang="en-US" altLang="zh-CN" sz="1800" b="0" i="0" u="none" strike="noStrike" kern="1200" cap="none" spc="0" normalizeH="0" baseline="0" noProof="1">
               <a:ln>
@@ -11669,14 +11639,14 @@
               </a:lnSpc>
             </a:pPr>
             <a:r>
-              <a:rPr lang="zh-CN" altLang="zh-CN" sz="2000" b="1" noProof="1">
+              <a:rPr sz="2000" b="1" lang="zh-CN">
                 <a:solidFill>
                   <a:srgbClr val="0A0A0A"/>
                 </a:solidFill>
-                <a:latin typeface="微软雅黑" panose="020B0503020204020204" pitchFamily="34" charset="-122"/>
-                <a:ea typeface="微软雅黑" panose="020B0503020204020204" pitchFamily="34" charset="-122"/>
+                <a:latin typeface="微软雅黑"/>
+                <a:ea typeface="微软雅黑"/>
               </a:rPr>
-              <a:t>多引擎分工分类，AI 建设与维护知识库并驱动持续优化闭环</a:t>
+              <a:t>真正的壁垒，不只是模型，而是一套持续进化的分类体系</a:t>
             </a:r>
             <a:endParaRPr lang="en-US" altLang="zh-CN" sz="2000" noProof="1">
               <a:latin typeface="微软雅黑" panose="020B0503020204020204" pitchFamily="34" charset="-122"/>
@@ -11719,14 +11689,14 @@
               </a:lnSpc>
             </a:pPr>
             <a:r>
-              <a:rPr lang="zh-CN" altLang="zh-CN" sz="1800" noProof="1">
+              <a:rPr sz="1800" b="0" lang="zh-CN">
                 <a:solidFill>
                   <a:srgbClr val="606060"/>
                 </a:solidFill>
-                <a:latin typeface="微软雅黑" panose="020B0503020204020204" pitchFamily="34" charset="-122"/>
-                <a:ea typeface="微软雅黑" panose="020B0503020204020204" pitchFamily="34" charset="-122"/>
+                <a:latin typeface="微软雅黑"/>
+                <a:ea typeface="微软雅黑"/>
               </a:rPr>
-              <a:t>流水依次经过多个分类引擎，各引擎输出交易类别、交易对手，后续引擎发现更明确证据可修正前序分类</a:t>
+              <a:t>多引擎分工 + AI 知识库 + 质量 Agent，持续发现问题、修正分类并沉淀能力</a:t>
             </a:r>
             <a:endParaRPr lang="en-US" altLang="zh-CN" sz="1800" noProof="1">
               <a:latin typeface="微软雅黑" panose="020B0503020204020204" pitchFamily="34" charset="-122"/>
@@ -16694,21 +16664,14 @@
               </a:defRPr>
             </a:pPr>
             <a:r>
-              <a:rPr kumimoji="0" lang="zh-CN" altLang="zh-CN" sz="2000" b="1" i="0" u="none" strike="noStrike" kern="1200" cap="none" spc="0" normalizeH="0" baseline="0" noProof="1">
-                <a:ln>
-                  <a:noFill/>
-                </a:ln>
+              <a:rPr sz="2000" b="1" lang="zh-CN">
                 <a:solidFill>
                   <a:srgbClr val="0A0A0A"/>
                 </a:solidFill>
-                <a:effectLst/>
-                <a:uLnTx/>
-                <a:uFillTx/>
-                <a:latin typeface="微软雅黑" panose="020B0503020204020204" pitchFamily="34" charset="-122"/>
-                <a:ea typeface="微软雅黑" panose="020B0503020204020204" pitchFamily="34" charset="-122"/>
-                <a:cs typeface="+mn-cs"/>
+                <a:latin typeface="微软雅黑"/>
+                <a:ea typeface="微软雅黑"/>
               </a:rPr>
-              <a:t>Liability 贷款识别：覆盖、一致性与精度全面优于 illion</a:t>
+              <a:t>OOT实测：自主 Liability 能力已具备替代 illion 的基础</a:t>
             </a:r>
             <a:endParaRPr kumimoji="0" lang="en-US" altLang="zh-CN" sz="2000" b="0" i="0" u="none" strike="noStrike" kern="1200" cap="none" spc="0" normalizeH="0" baseline="0" noProof="1">
               <a:ln>
@@ -22220,14 +22183,14 @@
               </a:lnSpc>
             </a:pPr>
             <a:r>
-              <a:rPr sz="1800" lang="zh-CN">
+              <a:rPr sz="1800" b="0" lang="zh-CN">
                 <a:solidFill>
                   <a:srgbClr val="606060"/>
                 </a:solidFill>
                 <a:latin typeface="微软雅黑"/>
                 <a:ea typeface="微软雅黑"/>
               </a:rPr>
-              <a:t>OOT 样本：1,519 申请 ｜ 1,958,480 笔交易，覆盖不同贷款类型与还款模式</a:t>
+              <a:t>让客户负债画像更接近真实状态，核心负债识别能力自主可控，为后续规则与模型优化保留更大空间</a:t>
             </a:r>
           </a:p>
         </p:txBody>

--- a/银行流水分享_V1.9.pptx
+++ b/银行流水分享_V1.9.pptx
@@ -17133,7 +17133,7 @@
                           <a:latin typeface="微软雅黑"/>
                           <a:ea typeface="微软雅黑"/>
                         </a:rPr>
-                        <a:t>Home loan - Receipt ... To Orange Everyday</a:t>
+                        <a:t>BPAY HOME LOAN A/C 4312-8901 REF 884231907</a:t>
                       </a:r>
                     </a:p>
                   </a:txBody>
@@ -17691,7 +17691,7 @@
                           <a:latin typeface="微软雅黑"/>
                           <a:ea typeface="微软雅黑"/>
                         </a:rPr>
-                        <a:t>MoneySpot Loan Disbursement</a:t>
+                        <a:t>MONEYSPOT LOAN DISB REF 1002345678</a:t>
                       </a:r>
                     </a:p>
                   </a:txBody>
@@ -17956,7 +17956,7 @@
                           <a:latin typeface="微软雅黑"/>
                           <a:ea typeface="微软雅黑"/>
                         </a:rPr>
-                        <a:t>MoneySpot Repayment</a:t>
+                        <a:t>MONEYSPOT REPAY REF 2009456712</a:t>
                       </a:r>
                     </a:p>
                   </a:txBody>
@@ -18233,7 +18233,7 @@
                           <a:latin typeface="微软雅黑"/>
                           <a:ea typeface="微软雅黑"/>
                         </a:rPr>
-                        <a:t>MoneySpot Repayment</a:t>
+                        <a:t>MONEYSPOT REPAY REF 3001876543</a:t>
                       </a:r>
                     </a:p>
                   </a:txBody>
@@ -18510,7 +18510,7 @@
                           <a:latin typeface="微软雅黑"/>
                           <a:ea typeface="微软雅黑"/>
                         </a:rPr>
-                        <a:t>MoneySpot Repayment</a:t>
+                        <a:t>MONEYSPOT REPAY REF 4002233445</a:t>
                       </a:r>
                     </a:p>
                   </a:txBody>
@@ -18787,7 +18787,7 @@
                           <a:latin typeface="微软雅黑"/>
                           <a:ea typeface="微软雅黑"/>
                         </a:rPr>
-                        <a:t>MoneySpot Repayment</a:t>
+                        <a:t>MONEYSPOT REPAY REF 5009876543</a:t>
                       </a:r>
                     </a:p>
                   </a:txBody>
@@ -19357,7 +19357,7 @@
                           <a:latin typeface="微软雅黑"/>
                           <a:ea typeface="微软雅黑"/>
                         </a:rPr>
-                        <a:t>Credit24 Loan Advance</a:t>
+                        <a:t>CREDIT24 ADVANCE REF 6001122334</a:t>
                       </a:r>
                     </a:p>
                   </a:txBody>
@@ -19622,7 +19622,7 @@
                           <a:latin typeface="微软雅黑"/>
                           <a:ea typeface="微软雅黑"/>
                         </a:rPr>
-                        <a:t>Credit24 Repayment</a:t>
+                        <a:t>CREDIT24 REPAY REF 7009988776</a:t>
                       </a:r>
                     </a:p>
                   </a:txBody>
@@ -19899,7 +19899,7 @@
                           <a:latin typeface="微软雅黑"/>
                           <a:ea typeface="微软雅黑"/>
                         </a:rPr>
-                        <a:t>Credit24 Repayment</a:t>
+                        <a:t>CREDIT24 REPAY REF 8005566778</a:t>
                       </a:r>
                     </a:p>
                   </a:txBody>

--- a/银行流水分享_V1.9.pptx
+++ b/银行流水分享_V1.9.pptx
@@ -22223,7 +22223,7 @@
               </a:lnSpc>
             </a:pPr>
             <a:r>
-              <a:rPr sz="2000" b="1" lang="zh-CN">
+              <a:rPr sz="1600" b="1" lang="zh-CN">
                 <a:solidFill>
                   <a:srgbClr val="1F4E79"/>
                 </a:solidFill>
@@ -22297,7 +22297,7 @@
               </a:lnSpc>
             </a:pPr>
             <a:r>
-              <a:rPr sz="2000" b="1" lang="zh-CN">
+              <a:rPr sz="1600" b="1" lang="zh-CN">
                 <a:solidFill>
                   <a:srgbClr val="1F4E79"/>
                 </a:solidFill>

--- a/银行流水分享_V1.9.pptx
+++ b/银行流水分享_V1.9.pptx
@@ -10072,9 +10072,9 @@
           <a:p>
             <a:pPr algn="l"/>
             <a:r>
-              <a:rPr lang="zh-CN" sz="800" b="0">
+              <a:rPr lang="zh-CN" sz="1000" b="1">
                 <a:solidFill>
-                  <a:srgbClr val="606060"/>
+                  <a:srgbClr val="1F4E79"/>
                 </a:solidFill>
                 <a:latin typeface="微软雅黑"/>
                 <a:ea typeface="微软雅黑"/>
@@ -10085,9 +10085,9 @@
           <a:p>
             <a:pPr algn="l"/>
             <a:r>
-              <a:rPr lang="zh-CN" sz="1500" b="1">
+              <a:rPr lang="zh-CN" sz="800" b="0">
                 <a:solidFill>
-                  <a:srgbClr val="1F4E79"/>
+                  <a:srgbClr val="606060"/>
                 </a:solidFill>
                 <a:latin typeface="微软雅黑"/>
                 <a:ea typeface="微软雅黑"/>
@@ -10121,9 +10121,9 @@
           <a:p>
             <a:pPr algn="l"/>
             <a:r>
-              <a:rPr lang="zh-CN" sz="800" b="0">
+              <a:rPr lang="zh-CN" sz="1000" b="1">
                 <a:solidFill>
-                  <a:srgbClr val="606060"/>
+                  <a:srgbClr val="1F4E79"/>
                 </a:solidFill>
                 <a:latin typeface="微软雅黑"/>
                 <a:ea typeface="微软雅黑"/>
@@ -10134,9 +10134,9 @@
           <a:p>
             <a:pPr algn="l"/>
             <a:r>
-              <a:rPr lang="zh-CN" sz="1500" b="1">
+              <a:rPr lang="zh-CN" sz="800" b="0">
                 <a:solidFill>
-                  <a:srgbClr val="1F4E79"/>
+                  <a:srgbClr val="606060"/>
                 </a:solidFill>
                 <a:latin typeface="微软雅黑"/>
                 <a:ea typeface="微软雅黑"/>
@@ -10170,9 +10170,9 @@
           <a:p>
             <a:pPr algn="l"/>
             <a:r>
-              <a:rPr lang="zh-CN" sz="800" b="0">
+              <a:rPr lang="zh-CN" sz="1000" b="1">
                 <a:solidFill>
-                  <a:srgbClr val="606060"/>
+                  <a:srgbClr val="1F4E79"/>
                 </a:solidFill>
                 <a:latin typeface="微软雅黑"/>
                 <a:ea typeface="微软雅黑"/>
@@ -10183,9 +10183,9 @@
           <a:p>
             <a:pPr algn="l"/>
             <a:r>
-              <a:rPr lang="zh-CN" sz="1500" b="1">
+              <a:rPr lang="zh-CN" sz="800" b="0">
                 <a:solidFill>
-                  <a:srgbClr val="1F4E79"/>
+                  <a:srgbClr val="606060"/>
                 </a:solidFill>
                 <a:latin typeface="微软雅黑"/>
                 <a:ea typeface="微软雅黑"/>
@@ -10347,9 +10347,9 @@
           <a:p>
             <a:pPr algn="l"/>
             <a:r>
-              <a:rPr lang="zh-CN" sz="800" b="0">
+              <a:rPr lang="zh-CN" sz="1000" b="1">
                 <a:solidFill>
-                  <a:srgbClr val="606060"/>
+                  <a:srgbClr val="1F4E79"/>
                 </a:solidFill>
                 <a:latin typeface="微软雅黑"/>
                 <a:ea typeface="微软雅黑"/>
@@ -10360,9 +10360,9 @@
           <a:p>
             <a:pPr algn="l"/>
             <a:r>
-              <a:rPr lang="zh-CN" sz="1500" b="1">
+              <a:rPr lang="zh-CN" sz="800" b="0">
                 <a:solidFill>
-                  <a:srgbClr val="1F4E79"/>
+                  <a:srgbClr val="606060"/>
                 </a:solidFill>
                 <a:latin typeface="微软雅黑"/>
                 <a:ea typeface="微软雅黑"/>
@@ -10396,9 +10396,9 @@
           <a:p>
             <a:pPr algn="l"/>
             <a:r>
-              <a:rPr lang="zh-CN" sz="800" b="0">
+              <a:rPr lang="zh-CN" sz="1000" b="1">
                 <a:solidFill>
-                  <a:srgbClr val="606060"/>
+                  <a:srgbClr val="1F4E79"/>
                 </a:solidFill>
                 <a:latin typeface="微软雅黑"/>
                 <a:ea typeface="微软雅黑"/>
@@ -10409,9 +10409,9 @@
           <a:p>
             <a:pPr algn="l"/>
             <a:r>
-              <a:rPr lang="zh-CN" sz="1500" b="1">
+              <a:rPr lang="zh-CN" sz="800" b="0">
                 <a:solidFill>
-                  <a:srgbClr val="1F4E79"/>
+                  <a:srgbClr val="606060"/>
                 </a:solidFill>
                 <a:latin typeface="微软雅黑"/>
                 <a:ea typeface="微软雅黑"/>
@@ -10422,7 +10422,7 @@
           <a:p>
             <a:pPr algn="l"/>
             <a:r>
-              <a:rPr lang="zh-CN" sz="750" b="0">
+              <a:rPr lang="zh-CN" sz="800" b="0">
                 <a:solidFill>
                   <a:srgbClr val="606060"/>
                 </a:solidFill>
@@ -10458,9 +10458,9 @@
           <a:p>
             <a:pPr algn="l"/>
             <a:r>
-              <a:rPr lang="zh-CN" sz="800" b="0">
+              <a:rPr lang="zh-CN" sz="1000" b="1">
                 <a:solidFill>
-                  <a:srgbClr val="606060"/>
+                  <a:srgbClr val="1F4E79"/>
                 </a:solidFill>
                 <a:latin typeface="微软雅黑"/>
                 <a:ea typeface="微软雅黑"/>
@@ -10471,9 +10471,9 @@
           <a:p>
             <a:pPr algn="l"/>
             <a:r>
-              <a:rPr lang="zh-CN" sz="1500" b="1">
+              <a:rPr lang="zh-CN" sz="800" b="0">
                 <a:solidFill>
-                  <a:srgbClr val="1F4E79"/>
+                  <a:srgbClr val="606060"/>
                 </a:solidFill>
                 <a:latin typeface="微软雅黑"/>
                 <a:ea typeface="微软雅黑"/>
@@ -10618,7 +10618,7 @@
         <p:spPr>
           <a:xfrm>
             <a:off x="749808" y="5248656"/>
-            <a:ext cx="1600200" cy="603504"/>
+            <a:ext cx="1600200" cy="475488"/>
           </a:xfrm>
           <a:prstGeom prst="rect">
             <a:avLst/>
@@ -10675,7 +10675,7 @@
         <p:spPr>
           <a:xfrm>
             <a:off x="2450592" y="5248656"/>
-            <a:ext cx="1600200" cy="603504"/>
+            <a:ext cx="1600200" cy="475488"/>
           </a:xfrm>
           <a:prstGeom prst="rect">
             <a:avLst/>
@@ -10732,7 +10732,7 @@
         <p:spPr>
           <a:xfrm>
             <a:off x="4151376" y="5248656"/>
-            <a:ext cx="1600200" cy="603504"/>
+            <a:ext cx="1600200" cy="475488"/>
           </a:xfrm>
           <a:prstGeom prst="rect">
             <a:avLst/>
@@ -10789,7 +10789,7 @@
         <p:spPr>
           <a:xfrm>
             <a:off x="749808" y="5779008"/>
-            <a:ext cx="1170432" cy="603504"/>
+            <a:ext cx="1170432" cy="475488"/>
           </a:xfrm>
           <a:prstGeom prst="rect">
             <a:avLst/>
@@ -10832,7 +10832,7 @@
                 <a:latin typeface="微软雅黑"/>
                 <a:ea typeface="微软雅黑"/>
               </a:rPr>
-              <a:t>是</a:t>
+              <a:t>True</a:t>
             </a:r>
           </a:p>
         </p:txBody>
@@ -10846,7 +10846,7 @@
         <p:spPr>
           <a:xfrm>
             <a:off x="2020824" y="5779008"/>
-            <a:ext cx="1170432" cy="603504"/>
+            <a:ext cx="1170432" cy="475488"/>
           </a:xfrm>
           <a:prstGeom prst="rect">
             <a:avLst/>
@@ -10889,7 +10889,7 @@
                 <a:latin typeface="微软雅黑"/>
                 <a:ea typeface="微软雅黑"/>
               </a:rPr>
-              <a:t>是</a:t>
+              <a:t>True</a:t>
             </a:r>
           </a:p>
         </p:txBody>
@@ -10903,7 +10903,7 @@
         <p:spPr>
           <a:xfrm>
             <a:off x="3291839" y="5779008"/>
-            <a:ext cx="1170432" cy="603504"/>
+            <a:ext cx="1170432" cy="475488"/>
           </a:xfrm>
           <a:prstGeom prst="rect">
             <a:avLst/>
@@ -10946,7 +10946,7 @@
                 <a:latin typeface="微软雅黑"/>
                 <a:ea typeface="微软雅黑"/>
               </a:rPr>
-              <a:t>是</a:t>
+              <a:t>True</a:t>
             </a:r>
           </a:p>
         </p:txBody>
@@ -10960,7 +10960,7 @@
         <p:spPr>
           <a:xfrm>
             <a:off x="4562856" y="5779008"/>
-            <a:ext cx="1170432" cy="603504"/>
+            <a:ext cx="1170432" cy="475488"/>
           </a:xfrm>
           <a:prstGeom prst="rect">
             <a:avLst/>
@@ -11003,7 +11003,7 @@
                 <a:latin typeface="微软雅黑"/>
                 <a:ea typeface="微软雅黑"/>
               </a:rPr>
-              <a:t>否</a:t>
+              <a:t>False</a:t>
             </a:r>
           </a:p>
         </p:txBody>
@@ -11017,7 +11017,7 @@
         <p:spPr>
           <a:xfrm>
             <a:off x="6400800" y="5248656"/>
-            <a:ext cx="1600200" cy="603504"/>
+            <a:ext cx="1600200" cy="475488"/>
           </a:xfrm>
           <a:prstGeom prst="rect">
             <a:avLst/>
@@ -11074,7 +11074,7 @@
         <p:spPr>
           <a:xfrm>
             <a:off x="8101583" y="5248656"/>
-            <a:ext cx="1600200" cy="603504"/>
+            <a:ext cx="1600200" cy="475488"/>
           </a:xfrm>
           <a:prstGeom prst="rect">
             <a:avLst/>
@@ -11131,7 +11131,7 @@
         <p:spPr>
           <a:xfrm>
             <a:off x="9802368" y="5248656"/>
-            <a:ext cx="1600200" cy="603504"/>
+            <a:ext cx="1600200" cy="475488"/>
           </a:xfrm>
           <a:prstGeom prst="rect">
             <a:avLst/>
@@ -11188,7 +11188,7 @@
         <p:spPr>
           <a:xfrm>
             <a:off x="6400800" y="5779008"/>
-            <a:ext cx="1170432" cy="603504"/>
+            <a:ext cx="1170432" cy="475488"/>
           </a:xfrm>
           <a:prstGeom prst="rect">
             <a:avLst/>
@@ -11245,7 +11245,7 @@
         <p:spPr>
           <a:xfrm>
             <a:off x="7671816" y="5779008"/>
-            <a:ext cx="1170432" cy="603504"/>
+            <a:ext cx="1170432" cy="475488"/>
           </a:xfrm>
           <a:prstGeom prst="rect">
             <a:avLst/>
@@ -11302,7 +11302,7 @@
         <p:spPr>
           <a:xfrm>
             <a:off x="8942832" y="5779008"/>
-            <a:ext cx="1170432" cy="603504"/>
+            <a:ext cx="1170432" cy="475488"/>
           </a:xfrm>
           <a:prstGeom prst="rect">
             <a:avLst/>
@@ -11345,7 +11345,7 @@
                 <a:latin typeface="微软雅黑"/>
                 <a:ea typeface="微软雅黑"/>
               </a:rPr>
-              <a:t>否</a:t>
+              <a:t>False</a:t>
             </a:r>
           </a:p>
         </p:txBody>
@@ -11359,7 +11359,7 @@
         <p:spPr>
           <a:xfrm>
             <a:off x="10213848" y="5779008"/>
-            <a:ext cx="1170432" cy="603504"/>
+            <a:ext cx="1170432" cy="475488"/>
           </a:xfrm>
           <a:prstGeom prst="rect">
             <a:avLst/>

--- a/银行流水分享_V1.9.pptx
+++ b/银行流水分享_V1.9.pptx
@@ -8172,7 +8172,7 @@
                           <a:latin typeface="微软雅黑"/>
                           <a:ea typeface="微软雅黑"/>
                         </a:rPr>
-                        <a:t>一级分类</a:t>
+                        <a:t>分类</a:t>
                       </a:r>
                     </a:p>
                   </a:txBody>
@@ -11402,7 +11402,7 @@
                 <a:latin typeface="微软雅黑"/>
                 <a:ea typeface="微软雅黑"/>
               </a:rPr>
-              <a:t>【待补充】</a:t>
+              <a:t>42%</a:t>
             </a:r>
           </a:p>
         </p:txBody>
@@ -11769,25 +11769,9 @@
           <a:bodyPr wrap="none" lIns="0" tIns="0" rIns="0" bIns="0" rtlCol="0" anchor="ctr"/>
           <a:lstStyle/>
           <a:p>
-            <a:pPr algn="l">
-              <a:lnSpc>
-                <a:spcPct val="125000"/>
-              </a:lnSpc>
-            </a:pPr>
             <a:r>
-              <a:rPr sz="1400" b="1">
-                <a:solidFill>
-                  <a:srgbClr val="0A0A0A"/>
-                </a:solidFill>
-                <a:latin typeface="微软雅黑"/>
-                <a:ea typeface="微软雅黑"/>
-              </a:rPr>
-              <a:t>1. AI 建设与维护知识库</a:t>
+              <a:t>1. AI 知识库 Agent：建设与维护</a:t>
             </a:r>
-            <a:endParaRPr lang="en-US" sz="1400" noProof="1">
-              <a:latin typeface="微软雅黑" panose="020B0503020204020204" pitchFamily="34" charset="-122"/>
-              <a:ea typeface="微软雅黑" panose="020B0503020204020204" pitchFamily="34" charset="-122"/>
-            </a:endParaRPr>
           </a:p>
         </p:txBody>
       </p:sp>

--- a/银行流水分享_V1.9.pptx
+++ b/银行流水分享_V1.9.pptx
@@ -11416,7 +11416,7 @@
         <p:spPr>
           <a:xfrm>
             <a:off x="393192" y="1115568"/>
-            <a:ext cx="73152" cy="228600"/>
+            <a:ext cx="76200" cy="228600"/>
           </a:xfrm>
           <a:prstGeom prst="rect">
             <a:avLst/>
@@ -11460,7 +11460,7 @@
         <p:spPr>
           <a:xfrm>
             <a:off x="393192" y="2523744"/>
-            <a:ext cx="73152" cy="228600"/>
+            <a:ext cx="76200" cy="228600"/>
           </a:xfrm>
           <a:prstGeom prst="rect">
             <a:avLst/>
@@ -11504,7 +11504,7 @@
         <p:spPr>
           <a:xfrm>
             <a:off x="393192" y="3986784"/>
-            <a:ext cx="73152" cy="228600"/>
+            <a:ext cx="76200" cy="228600"/>
           </a:xfrm>
           <a:prstGeom prst="rect">
             <a:avLst/>
@@ -11720,7 +11720,7 @@
         <p:spPr>
           <a:xfrm>
             <a:off x="568717" y="1732980"/>
-            <a:ext cx="50800" cy="165100"/>
+            <a:ext cx="76200" cy="228600"/>
           </a:xfrm>
           <a:prstGeom prst="rect">
             <a:avLst/>
@@ -14550,7 +14550,7 @@
         <p:spPr>
           <a:xfrm>
             <a:off x="6285857" y="1737516"/>
-            <a:ext cx="50800" cy="165100"/>
+            <a:ext cx="76200" cy="228600"/>
           </a:xfrm>
           <a:prstGeom prst="rect">
             <a:avLst/>
@@ -16030,7 +16030,7 @@
         <p:spPr>
           <a:xfrm>
             <a:off x="6217920" y="3776472"/>
-            <a:ext cx="54864" cy="228600"/>
+            <a:ext cx="76200" cy="228600"/>
           </a:xfrm>
           <a:prstGeom prst="rect">
             <a:avLst/>
@@ -16075,7 +16075,7 @@
         <p:spPr>
           <a:xfrm>
             <a:off x="6217920" y="5285232"/>
-            <a:ext cx="54864" cy="228600"/>
+            <a:ext cx="76200" cy="228600"/>
           </a:xfrm>
           <a:prstGeom prst="rect">
             <a:avLst/>
@@ -20707,7 +20707,7 @@
         <p:spPr>
           <a:xfrm>
             <a:off x="4681727" y="2218945"/>
-            <a:ext cx="45720" cy="274320"/>
+            <a:ext cx="76200" cy="228600"/>
           </a:xfrm>
           <a:prstGeom prst="rect">
             <a:avLst/>
@@ -21186,7 +21186,7 @@
         <p:spPr>
           <a:xfrm>
             <a:off x="4681727" y="4425696"/>
-            <a:ext cx="45720" cy="274320"/>
+            <a:ext cx="76200" cy="228600"/>
           </a:xfrm>
           <a:prstGeom prst="rect">
             <a:avLst/>
@@ -21665,7 +21665,7 @@
         <p:spPr>
           <a:xfrm>
             <a:off x="4681727" y="6327647"/>
-            <a:ext cx="45720" cy="274320"/>
+            <a:ext cx="76200" cy="228600"/>
           </a:xfrm>
           <a:prstGeom prst="rect">
             <a:avLst/>

--- a/银行流水分享_V1.9.pptx
+++ b/银行流水分享_V1.9.pptx
@@ -7,6 +7,7 @@
   <p:sldIdLst>
     <p:sldId id="260" r:id="rId2"/>
     <p:sldId id="269" r:id="rId3"/>
+    <p:sldId id="281" r:id="rId15"/>
     <p:sldId id="280" r:id="rId4"/>
     <p:sldId id="279" r:id="rId5"/>
   </p:sldIdLst>
@@ -22340,6 +22341,5302 @@
 </p:sld>
 </file>
 
+<file path=ppt/slides/slide5.xml><?xml version="1.0" encoding="utf-8"?>
+<p:sld xmlns:a="http://schemas.openxmlformats.org/drawingml/2006/main" xmlns:p="http://schemas.openxmlformats.org/presentationml/2006/main" xmlns:r="http://schemas.openxmlformats.org/officeDocument/2006/relationships">
+  <p:cSld>
+    <p:spTree>
+      <p:nvGrpSpPr>
+        <p:cNvPr id="1" name=""/>
+        <p:cNvGrpSpPr/>
+        <p:nvPr/>
+      </p:nvGrpSpPr>
+      <p:grpSpPr/>
+      <p:sp>
+        <p:nvSpPr>
+          <p:cNvPr id="2" name="title-c">
+            <a:extLst>
+              <a:ext uri="{FF2B5EF4-FFF2-40B4-BE49-F238E27FC236}">
+                <a16:creationId xmlns:a16="http://schemas.microsoft.com/office/drawing/2014/main" id="{8355AB41-3856-43D4-91F4-2CF8E6943019}"/>
+              </a:ext>
+            </a:extLst>
+          </p:cNvPr>
+          <p:cNvSpPr txBox="1"/>
+          <p:nvPr/>
+        </p:nvSpPr>
+        <p:spPr>
+          <a:xfrm>
+            <a:off x="603504" y="210312"/>
+            <a:ext cx="8887968" cy="356616"/>
+          </a:xfrm>
+          <a:prstGeom prst="rect">
+            <a:avLst/>
+          </a:prstGeom>
+          <a:noFill/>
+          <a:ln>
+            <a:noFill/>
+          </a:ln>
+        </p:spPr>
+        <p:txBody>
+          <a:bodyPr wrap="none" lIns="0" tIns="0" rIns="0" bIns="0" rtlCol="0" anchor="ctr"/>
+          <a:lstStyle/>
+          <a:p>
+            <a:pPr marL="0" marR="0" lvl="0" indent="0" algn="l" defTabSz="914400" rtl="0" eaLnBrk="1" fontAlgn="auto" latinLnBrk="1" hangingPunct="1">
+              <a:lnSpc>
+                <a:spcPct val="130000"/>
+              </a:lnSpc>
+              <a:spcBef>
+                <a:spcPts val="0"/>
+              </a:spcBef>
+              <a:spcAft>
+                <a:spcPts val="0"/>
+              </a:spcAft>
+              <a:buClrTx/>
+              <a:buSzTx/>
+              <a:buFontTx/>
+              <a:buNone/>
+              <a:tabLst/>
+              <a:defRPr>
+                <a:latin typeface="微软雅黑"/>
+                <a:ea typeface="微软雅黑"/>
+              </a:defRPr>
+            </a:pPr>
+            <a:r>
+              <a:rPr sz="2000" b="1" lang="zh-CN">
+                <a:solidFill>
+                  <a:srgbClr val="0A0A0A"/>
+                </a:solidFill>
+                <a:latin typeface="微软雅黑"/>
+                <a:ea typeface="微软雅黑"/>
+              </a:rPr>
+              <a:t>从一笔交易出发，直接还原客户真实偿债能力</a:t>
+            </a:r>
+          </a:p>
+        </p:txBody>
+      </p:sp>
+      <p:sp>
+        <p:nvSpPr>
+          <p:cNvPr id="3" name="文本框 2-c">
+            <a:extLst>
+              <a:ext uri="{FF2B5EF4-FFF2-40B4-BE49-F238E27FC236}">
+                <a16:creationId xmlns:a16="http://schemas.microsoft.com/office/drawing/2014/main" id="{63E6C3C0-EF83-43D9-A24C-47B1A5AB43C9}"/>
+              </a:ext>
+            </a:extLst>
+          </p:cNvPr>
+          <p:cNvSpPr txBox="1"/>
+          <p:nvPr/>
+        </p:nvSpPr>
+        <p:spPr>
+          <a:xfrm>
+            <a:off x="512064" y="585216"/>
+            <a:ext cx="10899648" cy="438912"/>
+          </a:xfrm>
+          <a:prstGeom prst="rect">
+            <a:avLst/>
+          </a:prstGeom>
+          <a:noFill/>
+        </p:spPr>
+        <p:txBody>
+          <a:bodyPr wrap="square">
+            <a:spAutoFit/>
+          </a:bodyPr>
+          <a:lstStyle/>
+          <a:p>
+            <a:pPr marL="0" marR="0" lvl="0" indent="0" algn="l" defTabSz="914400" rtl="0" eaLnBrk="1" fontAlgn="auto" latinLnBrk="0" hangingPunct="1">
+              <a:lnSpc>
+                <a:spcPct val="140000"/>
+              </a:lnSpc>
+              <a:spcBef>
+                <a:spcPts val="0"/>
+              </a:spcBef>
+              <a:spcAft>
+                <a:spcPts val="0"/>
+              </a:spcAft>
+              <a:buClrTx/>
+              <a:buSzTx/>
+              <a:buFontTx/>
+              <a:buNone/>
+              <a:tabLst/>
+              <a:defRPr>
+                <a:latin typeface="微软雅黑"/>
+                <a:ea typeface="微软雅黑"/>
+              </a:defRPr>
+            </a:pPr>
+            <a:r>
+              <a:rPr sz="1800" b="0" lang="zh-CN">
+                <a:solidFill>
+                  <a:srgbClr val="606060"/>
+                </a:solidFill>
+                <a:latin typeface="微软雅黑"/>
+                <a:ea typeface="微软雅黑"/>
+              </a:rPr>
+              <a:t>原始流水 → 单笔交易识别 → 用户/贷款汇总，将分散交易转化为可直接用于信审的财务画像</a:t>
+            </a:r>
+            <a:endParaRPr kumimoji="0" lang="en-US" altLang="zh-CN" sz="1800" b="0" i="0" u="none" strike="noStrike" kern="1200" cap="none" spc="0" normalizeH="0" baseline="0" noProof="1">
+              <a:ln>
+                <a:noFill/>
+              </a:ln>
+              <a:solidFill>
+                <a:prstClr val="black"/>
+              </a:solidFill>
+              <a:effectLst/>
+              <a:uLnTx/>
+              <a:uFillTx/>
+              <a:latin typeface="微软雅黑" panose="020B0503020204020204" pitchFamily="34" charset="-122"/>
+              <a:ea typeface="微软雅黑" panose="020B0503020204020204" pitchFamily="34" charset="-122"/>
+              <a:cs typeface="+mn-cs"/>
+            </a:endParaRPr>
+          </a:p>
+        </p:txBody>
+      </p:sp>
+      <p:sp>
+        <p:nvSpPr>
+          <p:cNvPr id="6" name="s1-title-c">
+            <a:extLst>
+              <a:ext uri="{FF2B5EF4-FFF2-40B4-BE49-F238E27FC236}">
+                <a16:creationId xmlns:a16="http://schemas.microsoft.com/office/drawing/2014/main" id="{048C4CBE-160F-411B-AF93-58FE8230110E}"/>
+              </a:ext>
+            </a:extLst>
+          </p:cNvPr>
+          <p:cNvSpPr txBox="1"/>
+          <p:nvPr/>
+        </p:nvSpPr>
+        <p:spPr>
+          <a:xfrm>
+            <a:off x="568385" y="1113405"/>
+            <a:ext cx="3810000" cy="228600"/>
+          </a:xfrm>
+          <a:prstGeom prst="rect">
+            <a:avLst/>
+          </a:prstGeom>
+          <a:noFill/>
+          <a:ln>
+            <a:noFill/>
+          </a:ln>
+        </p:spPr>
+        <p:txBody>
+          <a:bodyPr wrap="none" lIns="0" tIns="0" rIns="0" bIns="0" rtlCol="0" anchor="ctr"/>
+          <a:lstStyle/>
+          <a:p>
+            <a:pPr marL="0" marR="0" lvl="0" indent="0" algn="l" defTabSz="914400" rtl="0" eaLnBrk="1" fontAlgn="auto" latinLnBrk="0" hangingPunct="1">
+              <a:lnSpc>
+                <a:spcPct val="125000"/>
+              </a:lnSpc>
+              <a:spcBef>
+                <a:spcPts val="0"/>
+              </a:spcBef>
+              <a:spcAft>
+                <a:spcPts val="0"/>
+              </a:spcAft>
+              <a:buClrTx/>
+              <a:buSzTx/>
+              <a:buFontTx/>
+              <a:buNone/>
+              <a:tabLst/>
+              <a:defRPr>
+                <a:latin typeface="微软雅黑"/>
+                <a:ea typeface="微软雅黑"/>
+              </a:defRPr>
+            </a:pPr>
+            <a:r>
+              <a:rPr kumimoji="0" lang="en-US" altLang="zh-CN" sz="1200" b="1" i="0" u="none" strike="noStrike" kern="1200" cap="none" spc="0" normalizeH="0" baseline="0" noProof="0" dirty="0">
+                <a:ln>
+                  <a:noFill/>
+                </a:ln>
+                <a:solidFill>
+                  <a:srgbClr val="0A0A0A"/>
+                </a:solidFill>
+                <a:effectLst/>
+                <a:uLnTx/>
+                <a:uFillTx/>
+                <a:latin typeface="微软雅黑"/>
+                <a:ea typeface="微软雅黑"/>
+                <a:cs typeface="+mn-cs"/>
+              </a:rPr>
+              <a:t>1. </a:t>
+            </a:r>
+            <a:r>
+              <a:rPr kumimoji="0" lang="zh-CN" altLang="en-US" sz="1200" b="1" i="0" u="none" strike="noStrike" kern="1200" cap="none" spc="0" normalizeH="0" baseline="0" noProof="0" dirty="0">
+                <a:ln>
+                  <a:noFill/>
+                </a:ln>
+                <a:solidFill>
+                  <a:srgbClr val="0A0A0A"/>
+                </a:solidFill>
+                <a:effectLst/>
+                <a:uLnTx/>
+                <a:uFillTx/>
+                <a:latin typeface="微软雅黑"/>
+                <a:ea typeface="微软雅黑"/>
+                <a:cs typeface="+mn-cs"/>
+              </a:rPr>
+              <a:t>原始银行流水（输入示例）</a:t>
+            </a:r>
+            <a:endParaRPr kumimoji="0" lang="en-US" sz="1200" b="0" i="0" u="none" strike="noStrike" kern="1200" cap="none" spc="0" normalizeH="0" baseline="0" noProof="1">
+              <a:ln>
+                <a:noFill/>
+              </a:ln>
+              <a:solidFill>
+                <a:prstClr val="black"/>
+              </a:solidFill>
+              <a:effectLst/>
+              <a:uLnTx/>
+              <a:uFillTx/>
+              <a:latin typeface="微软雅黑" panose="020B0503020204020204" pitchFamily="34" charset="-122"/>
+              <a:ea typeface="微软雅黑" panose="020B0503020204020204" pitchFamily="34" charset="-122"/>
+              <a:cs typeface="+mn-cs"/>
+            </a:endParaRPr>
+          </a:p>
+        </p:txBody>
+      </p:sp>
+      <p:sp>
+        <p:nvSpPr>
+          <p:cNvPr id="10" name="s2-title-c">
+            <a:extLst>
+              <a:ext uri="{FF2B5EF4-FFF2-40B4-BE49-F238E27FC236}">
+                <a16:creationId xmlns:a16="http://schemas.microsoft.com/office/drawing/2014/main" id="{C74CD74D-A21D-4088-B06A-64E758567EE9}"/>
+              </a:ext>
+            </a:extLst>
+          </p:cNvPr>
+          <p:cNvSpPr txBox="1"/>
+          <p:nvPr/>
+        </p:nvSpPr>
+        <p:spPr>
+          <a:xfrm>
+            <a:off x="568386" y="2523256"/>
+            <a:ext cx="5943600" cy="228600"/>
+          </a:xfrm>
+          <a:prstGeom prst="rect">
+            <a:avLst/>
+          </a:prstGeom>
+          <a:noFill/>
+          <a:ln>
+            <a:noFill/>
+          </a:ln>
+        </p:spPr>
+        <p:txBody>
+          <a:bodyPr wrap="none" lIns="0" tIns="0" rIns="0" bIns="0" rtlCol="0" anchor="ctr"/>
+          <a:lstStyle/>
+          <a:p>
+            <a:pPr marL="0" marR="0" lvl="0" indent="0" algn="l" defTabSz="914400" rtl="0" eaLnBrk="1" fontAlgn="auto" latinLnBrk="0" hangingPunct="1">
+              <a:lnSpc>
+                <a:spcPct val="125000"/>
+              </a:lnSpc>
+              <a:spcBef>
+                <a:spcPts val="0"/>
+              </a:spcBef>
+              <a:spcAft>
+                <a:spcPts val="0"/>
+              </a:spcAft>
+              <a:buClrTx/>
+              <a:buSzTx/>
+              <a:buFontTx/>
+              <a:buNone/>
+              <a:tabLst/>
+              <a:defRPr>
+                <a:latin typeface="微软雅黑"/>
+                <a:ea typeface="微软雅黑"/>
+              </a:defRPr>
+            </a:pPr>
+            <a:r>
+              <a:rPr kumimoji="0" lang="en-US" altLang="zh-CN" sz="1200" b="1" i="0" u="none" strike="noStrike" kern="1200" cap="none" spc="0" normalizeH="0" baseline="0" noProof="0">
+                <a:ln>
+                  <a:noFill/>
+                </a:ln>
+                <a:solidFill>
+                  <a:srgbClr val="0A0A0A"/>
+                </a:solidFill>
+                <a:effectLst/>
+                <a:uLnTx/>
+                <a:uFillTx/>
+                <a:latin typeface="微软雅黑"/>
+                <a:ea typeface="微软雅黑"/>
+                <a:cs typeface="+mn-cs"/>
+              </a:rPr>
+              <a:t>2. </a:t>
+            </a:r>
+            <a:r>
+              <a:rPr kumimoji="0" lang="zh-CN" altLang="en-US" sz="1200" b="1" i="0" u="none" strike="noStrike" kern="1200" cap="none" spc="0" normalizeH="0" baseline="0" noProof="0">
+                <a:ln>
+                  <a:noFill/>
+                </a:ln>
+                <a:solidFill>
+                  <a:srgbClr val="0A0A0A"/>
+                </a:solidFill>
+                <a:effectLst/>
+                <a:uLnTx/>
+                <a:uFillTx/>
+                <a:latin typeface="微软雅黑"/>
+                <a:ea typeface="微软雅黑"/>
+                <a:cs typeface="+mn-cs"/>
+              </a:rPr>
+              <a:t>交易明细维度：理解每一笔交易（输出示例）</a:t>
+            </a:r>
+            <a:endParaRPr kumimoji="0" lang="en-US" sz="1200" b="1" i="0" u="none" strike="noStrike" kern="1200" cap="none" spc="0" normalizeH="0" baseline="0" noProof="1">
+              <a:ln>
+                <a:noFill/>
+              </a:ln>
+              <a:solidFill>
+                <a:srgbClr val="0A0A0A"/>
+              </a:solidFill>
+              <a:effectLst/>
+              <a:uLnTx/>
+              <a:uFillTx/>
+              <a:latin typeface="微软雅黑"/>
+              <a:ea typeface="微软雅黑"/>
+              <a:cs typeface="+mn-cs"/>
+            </a:endParaRPr>
+          </a:p>
+        </p:txBody>
+      </p:sp>
+      <p:sp>
+        <p:nvSpPr>
+          <p:cNvPr id="13" name="s3-title-c">
+            <a:extLst>
+              <a:ext uri="{FF2B5EF4-FFF2-40B4-BE49-F238E27FC236}">
+                <a16:creationId xmlns:a16="http://schemas.microsoft.com/office/drawing/2014/main" id="{B2B5F18D-2962-46FD-9E6E-562ACD32D72F}"/>
+              </a:ext>
+            </a:extLst>
+          </p:cNvPr>
+          <p:cNvSpPr txBox="1"/>
+          <p:nvPr/>
+        </p:nvSpPr>
+        <p:spPr>
+          <a:xfrm>
+            <a:off x="568385" y="3989324"/>
+            <a:ext cx="5943600" cy="228600"/>
+          </a:xfrm>
+          <a:prstGeom prst="rect">
+            <a:avLst/>
+          </a:prstGeom>
+          <a:noFill/>
+          <a:ln>
+            <a:noFill/>
+          </a:ln>
+        </p:spPr>
+        <p:txBody>
+          <a:bodyPr wrap="none" lIns="0" tIns="0" rIns="0" bIns="0" rtlCol="0" anchor="ctr"/>
+          <a:lstStyle/>
+          <a:p>
+            <a:pPr marL="0" marR="0" lvl="0" indent="0" algn="l" defTabSz="914400" rtl="0" eaLnBrk="1" fontAlgn="auto" latinLnBrk="0" hangingPunct="1">
+              <a:lnSpc>
+                <a:spcPct val="125000"/>
+              </a:lnSpc>
+              <a:spcBef>
+                <a:spcPts val="0"/>
+              </a:spcBef>
+              <a:spcAft>
+                <a:spcPts val="0"/>
+              </a:spcAft>
+              <a:buClrTx/>
+              <a:buSzTx/>
+              <a:buFontTx/>
+              <a:buNone/>
+              <a:tabLst/>
+              <a:defRPr>
+                <a:latin typeface="微软雅黑"/>
+                <a:ea typeface="微软雅黑"/>
+              </a:defRPr>
+            </a:pPr>
+            <a:r>
+              <a:rPr kumimoji="0" lang="en-US" altLang="zh-CN" sz="1200" b="1" i="0" u="none" strike="noStrike" kern="1200" cap="none" spc="0" normalizeH="0" baseline="0" noProof="0" dirty="0">
+                <a:ln>
+                  <a:noFill/>
+                </a:ln>
+                <a:solidFill>
+                  <a:srgbClr val="0A0A0A"/>
+                </a:solidFill>
+                <a:effectLst/>
+                <a:uLnTx/>
+                <a:uFillTx/>
+                <a:latin typeface="微软雅黑"/>
+                <a:ea typeface="微软雅黑"/>
+                <a:cs typeface="+mn-cs"/>
+              </a:rPr>
+              <a:t>3. </a:t>
+            </a:r>
+            <a:r>
+              <a:rPr kumimoji="0" lang="zh-CN" altLang="en-US" sz="1200" b="1" i="0" u="none" strike="noStrike" kern="1200" cap="none" spc="0" normalizeH="0" baseline="0" noProof="0" dirty="0">
+                <a:ln>
+                  <a:noFill/>
+                </a:ln>
+                <a:solidFill>
+                  <a:srgbClr val="0A0A0A"/>
+                </a:solidFill>
+                <a:effectLst/>
+                <a:uLnTx/>
+                <a:uFillTx/>
+                <a:latin typeface="微软雅黑"/>
+                <a:ea typeface="微软雅黑"/>
+                <a:cs typeface="+mn-cs"/>
+              </a:rPr>
+              <a:t>用户汇总维度：形成完整负债画像（输出示例）</a:t>
+            </a:r>
+            <a:endParaRPr kumimoji="0" lang="en-US" sz="1200" b="1" i="0" u="none" strike="noStrike" kern="1200" cap="none" spc="0" normalizeH="0" baseline="0" noProof="1">
+              <a:ln>
+                <a:noFill/>
+              </a:ln>
+              <a:solidFill>
+                <a:srgbClr val="0A0A0A"/>
+              </a:solidFill>
+              <a:effectLst/>
+              <a:uLnTx/>
+              <a:uFillTx/>
+              <a:latin typeface="微软雅黑"/>
+              <a:ea typeface="微软雅黑"/>
+              <a:cs typeface="+mn-cs"/>
+            </a:endParaRPr>
+          </a:p>
+        </p:txBody>
+      </p:sp>
+      <p:graphicFrame>
+        <p:nvGraphicFramePr>
+          <p:cNvPr id="15" name="init-table-c">
+            <a:extLst>
+              <a:ext uri="{FF2B5EF4-FFF2-40B4-BE49-F238E27FC236}">
+                <a16:creationId xmlns:a16="http://schemas.microsoft.com/office/drawing/2014/main" id="{B20AEE83-7381-40E9-867F-987DE9C5BE2C}"/>
+              </a:ext>
+            </a:extLst>
+          </p:cNvPr>
+          <p:cNvGraphicFramePr>
+            <a:graphicFrameLocks noGrp="1"/>
+          </p:cNvGraphicFramePr>
+          <p:nvPr>
+            <p:extLst>
+              <p:ext uri="{D42A27DB-BD31-4B8C-83A1-F6EECF244321}">
+                <p14:modId xmlns:p14="http://schemas.microsoft.com/office/powerpoint/2010/main" val="4096992607"/>
+              </p:ext>
+            </p:extLst>
+          </p:nvPr>
+        </p:nvGraphicFramePr>
+        <p:xfrm>
+          <a:off x="568385" y="1435904"/>
+          <a:ext cx="10901630" cy="1022238"/>
+        </p:xfrm>
+        <a:graphic>
+          <a:graphicData uri="http://schemas.openxmlformats.org/drawingml/2006/table">
+            <a:tbl>
+              <a:tblPr/>
+              <a:tblGrid>
+                <a:gridCol w="1326689">
+                  <a:extLst>
+                    <a:ext uri="{9D8B030D-6E8A-4147-A177-3AD203B41FA5}">
+                      <a16:colId xmlns:a16="http://schemas.microsoft.com/office/drawing/2014/main" val="20000"/>
+                    </a:ext>
+                  </a:extLst>
+                </a:gridCol>
+                <a:gridCol w="1679834">
+                  <a:extLst>
+                    <a:ext uri="{9D8B030D-6E8A-4147-A177-3AD203B41FA5}">
+                      <a16:colId xmlns:a16="http://schemas.microsoft.com/office/drawing/2014/main" val="20001"/>
+                    </a:ext>
+                  </a:extLst>
+                </a:gridCol>
+                <a:gridCol w="1738206">
+                  <a:extLst>
+                    <a:ext uri="{9D8B030D-6E8A-4147-A177-3AD203B41FA5}">
+                      <a16:colId xmlns:a16="http://schemas.microsoft.com/office/drawing/2014/main" val="20002"/>
+                    </a:ext>
+                  </a:extLst>
+                </a:gridCol>
+                <a:gridCol w="6156901">
+                  <a:extLst>
+                    <a:ext uri="{9D8B030D-6E8A-4147-A177-3AD203B41FA5}">
+                      <a16:colId xmlns:a16="http://schemas.microsoft.com/office/drawing/2014/main" val="4140160165"/>
+                    </a:ext>
+                  </a:extLst>
+                </a:gridCol>
+              </a:tblGrid>
+              <a:tr h="170373">
+                <a:tc>
+                  <a:txBody>
+                    <a:bodyPr/>
+                    <a:lstStyle/>
+                    <a:p>
+                      <a:pPr marL="0" algn="ctr" defTabSz="914400" rtl="0" eaLnBrk="1" latinLnBrk="0" hangingPunct="1"/>
+                      <a:r>
+                        <a:rPr sz="800" b="1" kern="1200" dirty="0" err="1">
+                          <a:solidFill>
+                            <a:srgbClr val="0A0A0A"/>
+                          </a:solidFill>
+                          <a:latin typeface="微软雅黑" panose="020B0503020204020204" pitchFamily="34" charset="-122"/>
+                          <a:ea typeface="微软雅黑" panose="020B0503020204020204" pitchFamily="34" charset="-122"/>
+                          <a:cs typeface="+mn-cs"/>
+                        </a:rPr>
+                        <a:t>日期</a:t>
+                      </a:r>
+                      <a:endParaRPr sz="800" b="1" kern="1200" dirty="0">
+                        <a:solidFill>
+                          <a:srgbClr val="0A0A0A"/>
+                        </a:solidFill>
+                        <a:latin typeface="微软雅黑" panose="020B0503020204020204" pitchFamily="34" charset="-122"/>
+                        <a:ea typeface="微软雅黑" panose="020B0503020204020204" pitchFamily="34" charset="-122"/>
+                        <a:cs typeface="+mn-cs"/>
+                      </a:endParaRPr>
+                    </a:p>
+                  </a:txBody>
+                  <a:tcPr marL="27432" marR="27432" marT="9144" marB="9144">
+                    <a:lnL>
+                      <a:noFill/>
+                    </a:lnL>
+                    <a:lnR>
+                      <a:noFill/>
+                    </a:lnR>
+                    <a:lnT>
+                      <a:noFill/>
+                    </a:lnT>
+                    <a:lnB w="19050">
+                      <a:solidFill>
+                        <a:srgbClr val="0A0A0A"/>
+                      </a:solidFill>
+                    </a:lnB>
+                    <a:noFill/>
+                  </a:tcPr>
+                </a:tc>
+                <a:tc>
+                  <a:txBody>
+                    <a:bodyPr/>
+                    <a:lstStyle/>
+                    <a:p>
+                      <a:pPr marL="0" algn="ctr" defTabSz="914400" rtl="0" eaLnBrk="1" latinLnBrk="0" hangingPunct="1"/>
+                      <a:r>
+                        <a:rPr sz="800" b="1" kern="1200" dirty="0" err="1">
+                          <a:solidFill>
+                            <a:srgbClr val="0A0A0A"/>
+                          </a:solidFill>
+                          <a:latin typeface="微软雅黑" panose="020B0503020204020204" pitchFamily="34" charset="-122"/>
+                          <a:ea typeface="微软雅黑" panose="020B0503020204020204" pitchFamily="34" charset="-122"/>
+                          <a:cs typeface="+mn-cs"/>
+                        </a:rPr>
+                        <a:t>金额</a:t>
+                      </a:r>
+                      <a:endParaRPr sz="800" b="1" kern="1200" dirty="0">
+                        <a:solidFill>
+                          <a:srgbClr val="0A0A0A"/>
+                        </a:solidFill>
+                        <a:latin typeface="微软雅黑" panose="020B0503020204020204" pitchFamily="34" charset="-122"/>
+                        <a:ea typeface="微软雅黑" panose="020B0503020204020204" pitchFamily="34" charset="-122"/>
+                        <a:cs typeface="+mn-cs"/>
+                      </a:endParaRPr>
+                    </a:p>
+                  </a:txBody>
+                  <a:tcPr marL="27432" marR="27432" marT="9144" marB="9144">
+                    <a:lnL>
+                      <a:noFill/>
+                    </a:lnL>
+                    <a:lnR>
+                      <a:noFill/>
+                    </a:lnR>
+                    <a:lnT>
+                      <a:noFill/>
+                    </a:lnT>
+                    <a:lnB w="19050">
+                      <a:solidFill>
+                        <a:srgbClr val="0A0A0A"/>
+                      </a:solidFill>
+                    </a:lnB>
+                    <a:noFill/>
+                  </a:tcPr>
+                </a:tc>
+                <a:tc>
+                  <a:txBody>
+                    <a:bodyPr/>
+                    <a:lstStyle/>
+                    <a:p>
+                      <a:pPr marL="0" algn="ctr" defTabSz="914400" rtl="0" eaLnBrk="1" latinLnBrk="0" hangingPunct="1"/>
+                      <a:r>
+                        <a:rPr sz="800" b="1" kern="1200" dirty="0" err="1">
+                          <a:solidFill>
+                            <a:srgbClr val="0A0A0A"/>
+                          </a:solidFill>
+                          <a:latin typeface="微软雅黑" panose="020B0503020204020204" pitchFamily="34" charset="-122"/>
+                          <a:ea typeface="微软雅黑" panose="020B0503020204020204" pitchFamily="34" charset="-122"/>
+                          <a:cs typeface="+mn-cs"/>
+                        </a:rPr>
+                        <a:t>方向</a:t>
+                      </a:r>
+                      <a:endParaRPr sz="800" b="1" kern="1200" dirty="0">
+                        <a:solidFill>
+                          <a:srgbClr val="0A0A0A"/>
+                        </a:solidFill>
+                        <a:latin typeface="微软雅黑" panose="020B0503020204020204" pitchFamily="34" charset="-122"/>
+                        <a:ea typeface="微软雅黑" panose="020B0503020204020204" pitchFamily="34" charset="-122"/>
+                        <a:cs typeface="+mn-cs"/>
+                      </a:endParaRPr>
+                    </a:p>
+                  </a:txBody>
+                  <a:tcPr marL="27432" marR="27432" marT="9144" marB="9144">
+                    <a:lnL>
+                      <a:noFill/>
+                    </a:lnL>
+                    <a:lnR>
+                      <a:noFill/>
+                    </a:lnR>
+                    <a:lnT>
+                      <a:noFill/>
+                    </a:lnT>
+                    <a:lnB w="19050">
+                      <a:solidFill>
+                        <a:srgbClr val="0A0A0A"/>
+                      </a:solidFill>
+                    </a:lnB>
+                    <a:noFill/>
+                  </a:tcPr>
+                </a:tc>
+                <a:tc>
+                  <a:txBody>
+                    <a:bodyPr/>
+                    <a:lstStyle/>
+                    <a:p>
+                      <a:pPr marL="0" algn="ctr" defTabSz="914400" rtl="0" eaLnBrk="1" latinLnBrk="0" hangingPunct="1"/>
+                      <a:r>
+                        <a:rPr sz="800" b="1" kern="1200" dirty="0" err="1">
+                          <a:solidFill>
+                            <a:srgbClr val="0A0A0A"/>
+                          </a:solidFill>
+                          <a:latin typeface="微软雅黑" panose="020B0503020204020204" pitchFamily="34" charset="-122"/>
+                          <a:ea typeface="微软雅黑" panose="020B0503020204020204" pitchFamily="34" charset="-122"/>
+                          <a:cs typeface="+mn-cs"/>
+                        </a:rPr>
+                        <a:t>交易描述</a:t>
+                      </a:r>
+                      <a:endParaRPr sz="800" b="1" kern="1200" dirty="0">
+                        <a:solidFill>
+                          <a:srgbClr val="0A0A0A"/>
+                        </a:solidFill>
+                        <a:latin typeface="微软雅黑" panose="020B0503020204020204" pitchFamily="34" charset="-122"/>
+                        <a:ea typeface="微软雅黑" panose="020B0503020204020204" pitchFamily="34" charset="-122"/>
+                        <a:cs typeface="+mn-cs"/>
+                      </a:endParaRPr>
+                    </a:p>
+                  </a:txBody>
+                  <a:tcPr marL="27432" marR="27432" marT="9144" marB="9144">
+                    <a:lnL>
+                      <a:noFill/>
+                    </a:lnL>
+                    <a:lnR>
+                      <a:noFill/>
+                    </a:lnR>
+                    <a:lnT>
+                      <a:noFill/>
+                    </a:lnT>
+                    <a:lnB w="19050" cap="flat" cmpd="sng" algn="ctr">
+                      <a:solidFill>
+                        <a:srgbClr val="0A0A0A"/>
+                      </a:solidFill>
+                      <a:prstDash val="solid"/>
+                      <a:round/>
+                      <a:headEnd type="none" w="med" len="med"/>
+                      <a:tailEnd type="none" w="med" len="med"/>
+                    </a:lnB>
+                    <a:noFill/>
+                  </a:tcPr>
+                </a:tc>
+                <a:extLst>
+                  <a:ext uri="{0D108BD9-81ED-4DB2-BD59-A6C34878D82A}">
+                    <a16:rowId xmlns:a16="http://schemas.microsoft.com/office/drawing/2014/main" val="10000"/>
+                  </a:ext>
+                </a:extLst>
+              </a:tr>
+              <a:tr h="170373">
+                <a:tc>
+                  <a:txBody>
+                    <a:bodyPr/>
+                    <a:lstStyle/>
+                    <a:p>
+                      <a:pPr marL="0" algn="ctr" defTabSz="914400" rtl="0" eaLnBrk="1" latinLnBrk="0" hangingPunct="1"/>
+                      <a:r>
+                        <a:rPr sz="800" b="0" kern="1200" dirty="0">
+                          <a:solidFill>
+                            <a:srgbClr val="0A0A0A"/>
+                          </a:solidFill>
+                          <a:latin typeface="微软雅黑" panose="020B0503020204020204" pitchFamily="34" charset="-122"/>
+                          <a:ea typeface="微软雅黑" panose="020B0503020204020204" pitchFamily="34" charset="-122"/>
+                          <a:cs typeface="+mn-cs"/>
+                        </a:rPr>
+                        <a:t>2026/03/26</a:t>
+                      </a:r>
+                    </a:p>
+                  </a:txBody>
+                  <a:tcPr marL="27432" marR="27432" marT="9144" marB="9144">
+                    <a:lnL>
+                      <a:noFill/>
+                    </a:lnL>
+                    <a:lnR>
+                      <a:noFill/>
+                    </a:lnR>
+                    <a:lnT w="19050" cap="flat" cmpd="sng" algn="ctr">
+                      <a:solidFill>
+                        <a:srgbClr val="0A0A0A"/>
+                      </a:solidFill>
+                      <a:prstDash val="solid"/>
+                      <a:round/>
+                      <a:headEnd type="none" w="med" len="med"/>
+                      <a:tailEnd type="none" w="med" len="med"/>
+                    </a:lnT>
+                    <a:lnB w="9525">
+                      <a:solidFill>
+                        <a:srgbClr val="D6D6D6"/>
+                      </a:solidFill>
+                    </a:lnB>
+                    <a:noFill/>
+                  </a:tcPr>
+                </a:tc>
+                <a:tc>
+                  <a:txBody>
+                    <a:bodyPr/>
+                    <a:lstStyle/>
+                    <a:p>
+                      <a:pPr marL="0" algn="ctr" defTabSz="914400" rtl="0" eaLnBrk="1" latinLnBrk="0" hangingPunct="1"/>
+                      <a:r>
+                        <a:rPr sz="800" b="0" kern="1200" dirty="0">
+                          <a:solidFill>
+                            <a:srgbClr val="0A0A0A"/>
+                          </a:solidFill>
+                          <a:latin typeface="微软雅黑" panose="020B0503020204020204" pitchFamily="34" charset="-122"/>
+                          <a:ea typeface="微软雅黑" panose="020B0503020204020204" pitchFamily="34" charset="-122"/>
+                          <a:cs typeface="+mn-cs"/>
+                        </a:rPr>
+                        <a:t>A$156</a:t>
+                      </a:r>
+                    </a:p>
+                  </a:txBody>
+                  <a:tcPr marL="27432" marR="27432" marT="9144" marB="9144">
+                    <a:lnL>
+                      <a:noFill/>
+                    </a:lnL>
+                    <a:lnR>
+                      <a:noFill/>
+                    </a:lnR>
+                    <a:lnT w="19050" cap="flat" cmpd="sng" algn="ctr">
+                      <a:solidFill>
+                        <a:srgbClr val="0A0A0A"/>
+                      </a:solidFill>
+                      <a:prstDash val="solid"/>
+                      <a:round/>
+                      <a:headEnd type="none" w="med" len="med"/>
+                      <a:tailEnd type="none" w="med" len="med"/>
+                    </a:lnT>
+                    <a:lnB w="9525">
+                      <a:solidFill>
+                        <a:srgbClr val="D6D6D6"/>
+                      </a:solidFill>
+                    </a:lnB>
+                    <a:noFill/>
+                  </a:tcPr>
+                </a:tc>
+                <a:tc>
+                  <a:txBody>
+                    <a:bodyPr/>
+                    <a:lstStyle/>
+                    <a:p>
+                      <a:pPr marL="0" algn="ctr" defTabSz="914400" rtl="0" eaLnBrk="1" latinLnBrk="0" hangingPunct="1"/>
+                      <a:r>
+                        <a:rPr sz="800" b="0" kern="1200" dirty="0">
+                          <a:solidFill>
+                            <a:srgbClr val="0A0A0A"/>
+                          </a:solidFill>
+                          <a:latin typeface="微软雅黑" panose="020B0503020204020204" pitchFamily="34" charset="-122"/>
+                          <a:ea typeface="微软雅黑" panose="020B0503020204020204" pitchFamily="34" charset="-122"/>
+                          <a:cs typeface="+mn-cs"/>
+                        </a:rPr>
+                        <a:t>Debit</a:t>
+                      </a:r>
+                    </a:p>
+                  </a:txBody>
+                  <a:tcPr marL="27432" marR="27432" marT="9144" marB="9144">
+                    <a:lnL>
+                      <a:noFill/>
+                    </a:lnL>
+                    <a:lnR>
+                      <a:noFill/>
+                    </a:lnR>
+                    <a:lnT w="19050" cap="flat" cmpd="sng" algn="ctr">
+                      <a:solidFill>
+                        <a:srgbClr val="0A0A0A"/>
+                      </a:solidFill>
+                      <a:prstDash val="solid"/>
+                      <a:round/>
+                      <a:headEnd type="none" w="med" len="med"/>
+                      <a:tailEnd type="none" w="med" len="med"/>
+                    </a:lnT>
+                    <a:lnB w="9525">
+                      <a:solidFill>
+                        <a:srgbClr val="D6D6D6"/>
+                      </a:solidFill>
+                    </a:lnB>
+                    <a:noFill/>
+                  </a:tcPr>
+                </a:tc>
+                <a:tc>
+                  <a:txBody>
+                    <a:bodyPr/>
+                    <a:lstStyle/>
+                    <a:p>
+                      <a:pPr marL="0" algn="ctr" defTabSz="914400" rtl="0" eaLnBrk="1" latinLnBrk="0" hangingPunct="1"/>
+                      <a:r>
+                        <a:rPr sz="800" b="0" kern="1200" dirty="0">
+                          <a:solidFill>
+                            <a:srgbClr val="0A0A0A"/>
+                          </a:solidFill>
+                          <a:latin typeface="微软雅黑" panose="020B0503020204020204" pitchFamily="34" charset="-122"/>
+                          <a:ea typeface="微软雅黑" panose="020B0503020204020204" pitchFamily="34" charset="-122"/>
+                          <a:cs typeface="+mn-cs"/>
+                        </a:rPr>
+                        <a:t>BPAY FAIR GO FINANCE BILLER 354127 REF 5837201937</a:t>
+                      </a:r>
+                    </a:p>
+                  </a:txBody>
+                  <a:tcPr marL="27432" marR="27432" marT="9144" marB="9144">
+                    <a:lnL>
+                      <a:noFill/>
+                    </a:lnL>
+                    <a:lnR>
+                      <a:noFill/>
+                    </a:lnR>
+                    <a:lnT w="19050" cap="flat" cmpd="sng" algn="ctr">
+                      <a:solidFill>
+                        <a:srgbClr val="0A0A0A"/>
+                      </a:solidFill>
+                      <a:prstDash val="solid"/>
+                      <a:round/>
+                      <a:headEnd type="none" w="med" len="med"/>
+                      <a:tailEnd type="none" w="med" len="med"/>
+                    </a:lnT>
+                    <a:lnB w="9525" cap="flat" cmpd="sng" algn="ctr">
+                      <a:solidFill>
+                        <a:srgbClr val="D6D6D6"/>
+                      </a:solidFill>
+                      <a:prstDash val="solid"/>
+                      <a:round/>
+                      <a:headEnd type="none" w="med" len="med"/>
+                      <a:tailEnd type="none" w="med" len="med"/>
+                    </a:lnB>
+                    <a:noFill/>
+                  </a:tcPr>
+                </a:tc>
+                <a:extLst>
+                  <a:ext uri="{0D108BD9-81ED-4DB2-BD59-A6C34878D82A}">
+                    <a16:rowId xmlns:a16="http://schemas.microsoft.com/office/drawing/2014/main" val="10001"/>
+                  </a:ext>
+                </a:extLst>
+              </a:tr>
+              <a:tr h="170373">
+                <a:tc>
+                  <a:txBody>
+                    <a:bodyPr/>
+                    <a:lstStyle/>
+                    <a:p>
+                      <a:pPr marL="0" algn="ctr" defTabSz="914400" rtl="0" eaLnBrk="1" latinLnBrk="0" hangingPunct="1"/>
+                      <a:r>
+                        <a:rPr sz="800" b="0" kern="1200" dirty="0">
+                          <a:solidFill>
+                            <a:srgbClr val="0A0A0A"/>
+                          </a:solidFill>
+                          <a:latin typeface="微软雅黑" panose="020B0503020204020204" pitchFamily="34" charset="-122"/>
+                          <a:ea typeface="微软雅黑" panose="020B0503020204020204" pitchFamily="34" charset="-122"/>
+                          <a:cs typeface="+mn-cs"/>
+                        </a:rPr>
+                        <a:t>2026/03/28</a:t>
+                      </a:r>
+                    </a:p>
+                  </a:txBody>
+                  <a:tcPr marL="27432" marR="27432" marT="9144" marB="9144">
+                    <a:lnL>
+                      <a:noFill/>
+                    </a:lnL>
+                    <a:lnR>
+                      <a:noFill/>
+                    </a:lnR>
+                    <a:lnT w="9525" cap="flat" cmpd="sng" algn="ctr">
+                      <a:solidFill>
+                        <a:srgbClr val="D6D6D6"/>
+                      </a:solidFill>
+                      <a:prstDash val="solid"/>
+                      <a:round/>
+                      <a:headEnd type="none" w="med" len="med"/>
+                      <a:tailEnd type="none" w="med" len="med"/>
+                    </a:lnT>
+                    <a:lnB w="9525">
+                      <a:solidFill>
+                        <a:srgbClr val="D6D6D6"/>
+                      </a:solidFill>
+                    </a:lnB>
+                    <a:noFill/>
+                  </a:tcPr>
+                </a:tc>
+                <a:tc>
+                  <a:txBody>
+                    <a:bodyPr/>
+                    <a:lstStyle/>
+                    <a:p>
+                      <a:pPr marL="0" algn="ctr" defTabSz="914400" rtl="0" eaLnBrk="1" latinLnBrk="0" hangingPunct="1"/>
+                      <a:r>
+                        <a:rPr sz="800" b="0" kern="1200" dirty="0">
+                          <a:solidFill>
+                            <a:srgbClr val="0A0A0A"/>
+                          </a:solidFill>
+                          <a:latin typeface="微软雅黑" panose="020B0503020204020204" pitchFamily="34" charset="-122"/>
+                          <a:ea typeface="微软雅黑" panose="020B0503020204020204" pitchFamily="34" charset="-122"/>
+                          <a:cs typeface="+mn-cs"/>
+                        </a:rPr>
+                        <a:t>A$12.40</a:t>
+                      </a:r>
+                    </a:p>
+                  </a:txBody>
+                  <a:tcPr marL="27432" marR="27432" marT="9144" marB="9144">
+                    <a:lnL>
+                      <a:noFill/>
+                    </a:lnL>
+                    <a:lnR>
+                      <a:noFill/>
+                    </a:lnR>
+                    <a:lnT w="9525" cap="flat" cmpd="sng" algn="ctr">
+                      <a:solidFill>
+                        <a:srgbClr val="D6D6D6"/>
+                      </a:solidFill>
+                      <a:prstDash val="solid"/>
+                      <a:round/>
+                      <a:headEnd type="none" w="med" len="med"/>
+                      <a:tailEnd type="none" w="med" len="med"/>
+                    </a:lnT>
+                    <a:lnB w="9525">
+                      <a:solidFill>
+                        <a:srgbClr val="D6D6D6"/>
+                      </a:solidFill>
+                    </a:lnB>
+                    <a:noFill/>
+                  </a:tcPr>
+                </a:tc>
+                <a:tc>
+                  <a:txBody>
+                    <a:bodyPr/>
+                    <a:lstStyle/>
+                    <a:p>
+                      <a:pPr marL="0" algn="ctr" defTabSz="914400" rtl="0" eaLnBrk="1" latinLnBrk="0" hangingPunct="1"/>
+                      <a:r>
+                        <a:rPr sz="800" b="0" kern="1200" dirty="0">
+                          <a:solidFill>
+                            <a:srgbClr val="0A0A0A"/>
+                          </a:solidFill>
+                          <a:latin typeface="微软雅黑" panose="020B0503020204020204" pitchFamily="34" charset="-122"/>
+                          <a:ea typeface="微软雅黑" panose="020B0503020204020204" pitchFamily="34" charset="-122"/>
+                          <a:cs typeface="+mn-cs"/>
+                        </a:rPr>
+                        <a:t>Debit</a:t>
+                      </a:r>
+                    </a:p>
+                  </a:txBody>
+                  <a:tcPr marL="27432" marR="27432" marT="9144" marB="9144">
+                    <a:lnL>
+                      <a:noFill/>
+                    </a:lnL>
+                    <a:lnR>
+                      <a:noFill/>
+                    </a:lnR>
+                    <a:lnT w="9525" cap="flat" cmpd="sng" algn="ctr">
+                      <a:solidFill>
+                        <a:srgbClr val="D6D6D6"/>
+                      </a:solidFill>
+                      <a:prstDash val="solid"/>
+                      <a:round/>
+                      <a:headEnd type="none" w="med" len="med"/>
+                      <a:tailEnd type="none" w="med" len="med"/>
+                    </a:lnT>
+                    <a:lnB w="9525">
+                      <a:solidFill>
+                        <a:srgbClr val="D6D6D6"/>
+                      </a:solidFill>
+                    </a:lnB>
+                    <a:noFill/>
+                  </a:tcPr>
+                </a:tc>
+                <a:tc>
+                  <a:txBody>
+                    <a:bodyPr/>
+                    <a:lstStyle/>
+                    <a:p>
+                      <a:pPr marL="0" algn="ctr" defTabSz="914400" rtl="0" eaLnBrk="1" latinLnBrk="0" hangingPunct="1"/>
+                      <a:r>
+                        <a:rPr sz="800" b="0" kern="1200" dirty="0">
+                          <a:solidFill>
+                            <a:srgbClr val="0A0A0A"/>
+                          </a:solidFill>
+                          <a:latin typeface="微软雅黑" panose="020B0503020204020204" pitchFamily="34" charset="-122"/>
+                          <a:ea typeface="微软雅黑" panose="020B0503020204020204" pitchFamily="34" charset="-122"/>
+                          <a:cs typeface="+mn-cs"/>
+                        </a:rPr>
+                        <a:t>MCDONALDS BRISBANE QLD STORE 006123</a:t>
+                      </a:r>
+                    </a:p>
+                  </a:txBody>
+                  <a:tcPr marL="27432" marR="27432" marT="9144" marB="9144">
+                    <a:lnL>
+                      <a:noFill/>
+                    </a:lnL>
+                    <a:lnR>
+                      <a:noFill/>
+                    </a:lnR>
+                    <a:lnT w="9525" cap="flat" cmpd="sng" algn="ctr">
+                      <a:solidFill>
+                        <a:srgbClr val="D6D6D6"/>
+                      </a:solidFill>
+                      <a:prstDash val="solid"/>
+                      <a:round/>
+                      <a:headEnd type="none" w="med" len="med"/>
+                      <a:tailEnd type="none" w="med" len="med"/>
+                    </a:lnT>
+                    <a:lnB w="9525" cap="flat" cmpd="sng" algn="ctr">
+                      <a:solidFill>
+                        <a:srgbClr val="D6D6D6"/>
+                      </a:solidFill>
+                      <a:prstDash val="solid"/>
+                      <a:round/>
+                      <a:headEnd type="none" w="med" len="med"/>
+                      <a:tailEnd type="none" w="med" len="med"/>
+                    </a:lnB>
+                    <a:noFill/>
+                  </a:tcPr>
+                </a:tc>
+                <a:extLst>
+                  <a:ext uri="{0D108BD9-81ED-4DB2-BD59-A6C34878D82A}">
+                    <a16:rowId xmlns:a16="http://schemas.microsoft.com/office/drawing/2014/main" val="10002"/>
+                  </a:ext>
+                </a:extLst>
+              </a:tr>
+              <a:tr h="170373">
+                <a:tc>
+                  <a:txBody>
+                    <a:bodyPr/>
+                    <a:lstStyle/>
+                    <a:p>
+                      <a:pPr marL="0" algn="ctr" defTabSz="914400" rtl="0" eaLnBrk="1" latinLnBrk="0" hangingPunct="1"/>
+                      <a:r>
+                        <a:rPr sz="800" b="0" kern="1200">
+                          <a:solidFill>
+                            <a:srgbClr val="0A0A0A"/>
+                          </a:solidFill>
+                          <a:latin typeface="微软雅黑" panose="020B0503020204020204" pitchFamily="34" charset="-122"/>
+                          <a:ea typeface="微软雅黑" panose="020B0503020204020204" pitchFamily="34" charset="-122"/>
+                          <a:cs typeface="+mn-cs"/>
+                        </a:rPr>
+                        <a:t>2026/04/02</a:t>
+                      </a:r>
+                    </a:p>
+                  </a:txBody>
+                  <a:tcPr marL="27432" marR="27432" marT="9144" marB="9144">
+                    <a:lnL>
+                      <a:noFill/>
+                    </a:lnL>
+                    <a:lnR>
+                      <a:noFill/>
+                    </a:lnR>
+                    <a:lnT w="9525" cap="flat" cmpd="sng" algn="ctr">
+                      <a:solidFill>
+                        <a:srgbClr val="D6D6D6"/>
+                      </a:solidFill>
+                      <a:prstDash val="solid"/>
+                      <a:round/>
+                      <a:headEnd type="none" w="med" len="med"/>
+                      <a:tailEnd type="none" w="med" len="med"/>
+                    </a:lnT>
+                    <a:lnB w="9525">
+                      <a:solidFill>
+                        <a:srgbClr val="D6D6D6"/>
+                      </a:solidFill>
+                    </a:lnB>
+                    <a:noFill/>
+                  </a:tcPr>
+                </a:tc>
+                <a:tc>
+                  <a:txBody>
+                    <a:bodyPr/>
+                    <a:lstStyle/>
+                    <a:p>
+                      <a:pPr marL="0" algn="ctr" defTabSz="914400" rtl="0" eaLnBrk="1" latinLnBrk="0" hangingPunct="1"/>
+                      <a:r>
+                        <a:rPr sz="800" b="0" kern="1200" dirty="0">
+                          <a:solidFill>
+                            <a:srgbClr val="0A0A0A"/>
+                          </a:solidFill>
+                          <a:latin typeface="微软雅黑" panose="020B0503020204020204" pitchFamily="34" charset="-122"/>
+                          <a:ea typeface="微软雅黑" panose="020B0503020204020204" pitchFamily="34" charset="-122"/>
+                          <a:cs typeface="+mn-cs"/>
+                        </a:rPr>
+                        <a:t>A$35.90</a:t>
+                      </a:r>
+                    </a:p>
+                  </a:txBody>
+                  <a:tcPr marL="27432" marR="27432" marT="9144" marB="9144">
+                    <a:lnL>
+                      <a:noFill/>
+                    </a:lnL>
+                    <a:lnR>
+                      <a:noFill/>
+                    </a:lnR>
+                    <a:lnT w="9525" cap="flat" cmpd="sng" algn="ctr">
+                      <a:solidFill>
+                        <a:srgbClr val="D6D6D6"/>
+                      </a:solidFill>
+                      <a:prstDash val="solid"/>
+                      <a:round/>
+                      <a:headEnd type="none" w="med" len="med"/>
+                      <a:tailEnd type="none" w="med" len="med"/>
+                    </a:lnT>
+                    <a:lnB w="9525">
+                      <a:solidFill>
+                        <a:srgbClr val="D6D6D6"/>
+                      </a:solidFill>
+                    </a:lnB>
+                    <a:noFill/>
+                  </a:tcPr>
+                </a:tc>
+                <a:tc>
+                  <a:txBody>
+                    <a:bodyPr/>
+                    <a:lstStyle/>
+                    <a:p>
+                      <a:pPr marL="0" algn="ctr" defTabSz="914400" rtl="0" eaLnBrk="1" latinLnBrk="0" hangingPunct="1"/>
+                      <a:r>
+                        <a:rPr sz="800" b="0" kern="1200" dirty="0">
+                          <a:solidFill>
+                            <a:srgbClr val="0A0A0A"/>
+                          </a:solidFill>
+                          <a:latin typeface="微软雅黑" panose="020B0503020204020204" pitchFamily="34" charset="-122"/>
+                          <a:ea typeface="微软雅黑" panose="020B0503020204020204" pitchFamily="34" charset="-122"/>
+                          <a:cs typeface="+mn-cs"/>
+                        </a:rPr>
+                        <a:t>Debit</a:t>
+                      </a:r>
+                    </a:p>
+                  </a:txBody>
+                  <a:tcPr marL="27432" marR="27432" marT="9144" marB="9144">
+                    <a:lnL>
+                      <a:noFill/>
+                    </a:lnL>
+                    <a:lnR>
+                      <a:noFill/>
+                    </a:lnR>
+                    <a:lnT w="9525" cap="flat" cmpd="sng" algn="ctr">
+                      <a:solidFill>
+                        <a:srgbClr val="D6D6D6"/>
+                      </a:solidFill>
+                      <a:prstDash val="solid"/>
+                      <a:round/>
+                      <a:headEnd type="none" w="med" len="med"/>
+                      <a:tailEnd type="none" w="med" len="med"/>
+                    </a:lnT>
+                    <a:lnB w="9525">
+                      <a:solidFill>
+                        <a:srgbClr val="D6D6D6"/>
+                      </a:solidFill>
+                    </a:lnB>
+                    <a:noFill/>
+                  </a:tcPr>
+                </a:tc>
+                <a:tc>
+                  <a:txBody>
+                    <a:bodyPr/>
+                    <a:lstStyle/>
+                    <a:p>
+                      <a:pPr marL="0" algn="ctr" defTabSz="914400" rtl="0" eaLnBrk="1" latinLnBrk="0" hangingPunct="1"/>
+                      <a:r>
+                        <a:rPr sz="800" b="0" kern="1200" dirty="0">
+                          <a:solidFill>
+                            <a:srgbClr val="0A0A0A"/>
+                          </a:solidFill>
+                          <a:latin typeface="微软雅黑" panose="020B0503020204020204" pitchFamily="34" charset="-122"/>
+                          <a:ea typeface="微软雅黑" panose="020B0503020204020204" pitchFamily="34" charset="-122"/>
+                          <a:cs typeface="+mn-cs"/>
+                        </a:rPr>
+                        <a:t>CHEMIST WAREHOUSE BRISBANE STORE 123</a:t>
+                      </a:r>
+                    </a:p>
+                  </a:txBody>
+                  <a:tcPr marL="27432" marR="27432" marT="9144" marB="9144">
+                    <a:lnL>
+                      <a:noFill/>
+                    </a:lnL>
+                    <a:lnR>
+                      <a:noFill/>
+                    </a:lnR>
+                    <a:lnT w="9525" cap="flat" cmpd="sng" algn="ctr">
+                      <a:solidFill>
+                        <a:srgbClr val="D6D6D6"/>
+                      </a:solidFill>
+                      <a:prstDash val="solid"/>
+                      <a:round/>
+                      <a:headEnd type="none" w="med" len="med"/>
+                      <a:tailEnd type="none" w="med" len="med"/>
+                    </a:lnT>
+                    <a:lnB w="9525" cap="flat" cmpd="sng" algn="ctr">
+                      <a:solidFill>
+                        <a:srgbClr val="D6D6D6"/>
+                      </a:solidFill>
+                      <a:prstDash val="solid"/>
+                      <a:round/>
+                      <a:headEnd type="none" w="med" len="med"/>
+                      <a:tailEnd type="none" w="med" len="med"/>
+                    </a:lnB>
+                    <a:noFill/>
+                  </a:tcPr>
+                </a:tc>
+                <a:extLst>
+                  <a:ext uri="{0D108BD9-81ED-4DB2-BD59-A6C34878D82A}">
+                    <a16:rowId xmlns:a16="http://schemas.microsoft.com/office/drawing/2014/main" val="10003"/>
+                  </a:ext>
+                </a:extLst>
+              </a:tr>
+              <a:tr h="170373">
+                <a:tc>
+                  <a:txBody>
+                    <a:bodyPr/>
+                    <a:lstStyle/>
+                    <a:p>
+                      <a:pPr marL="0" algn="ctr" defTabSz="914400" rtl="0" eaLnBrk="1" latinLnBrk="0" hangingPunct="1"/>
+                      <a:r>
+                        <a:rPr sz="800" b="0" kern="1200">
+                          <a:solidFill>
+                            <a:srgbClr val="0A0A0A"/>
+                          </a:solidFill>
+                          <a:latin typeface="微软雅黑" panose="020B0503020204020204" pitchFamily="34" charset="-122"/>
+                          <a:ea typeface="微软雅黑" panose="020B0503020204020204" pitchFamily="34" charset="-122"/>
+                          <a:cs typeface="+mn-cs"/>
+                        </a:rPr>
+                        <a:t>2026/04/08</a:t>
+                      </a:r>
+                    </a:p>
+                  </a:txBody>
+                  <a:tcPr marL="27432" marR="27432" marT="9144" marB="9144">
+                    <a:lnL>
+                      <a:noFill/>
+                    </a:lnL>
+                    <a:lnR>
+                      <a:noFill/>
+                    </a:lnR>
+                    <a:lnT w="9525" cap="flat" cmpd="sng" algn="ctr">
+                      <a:solidFill>
+                        <a:srgbClr val="D6D6D6"/>
+                      </a:solidFill>
+                      <a:prstDash val="solid"/>
+                      <a:round/>
+                      <a:headEnd type="none" w="med" len="med"/>
+                      <a:tailEnd type="none" w="med" len="med"/>
+                    </a:lnT>
+                    <a:lnB w="9525">
+                      <a:solidFill>
+                        <a:srgbClr val="D6D6D6"/>
+                      </a:solidFill>
+                    </a:lnB>
+                    <a:noFill/>
+                  </a:tcPr>
+                </a:tc>
+                <a:tc>
+                  <a:txBody>
+                    <a:bodyPr/>
+                    <a:lstStyle/>
+                    <a:p>
+                      <a:pPr marL="0" algn="ctr" defTabSz="914400" rtl="0" eaLnBrk="1" latinLnBrk="0" hangingPunct="1"/>
+                      <a:r>
+                        <a:rPr sz="800" b="0" kern="1200" dirty="0">
+                          <a:solidFill>
+                            <a:srgbClr val="0A0A0A"/>
+                          </a:solidFill>
+                          <a:latin typeface="微软雅黑" panose="020B0503020204020204" pitchFamily="34" charset="-122"/>
+                          <a:ea typeface="微软雅黑" panose="020B0503020204020204" pitchFamily="34" charset="-122"/>
+                          <a:cs typeface="+mn-cs"/>
+                        </a:rPr>
+                        <a:t>A$8.99</a:t>
+                      </a:r>
+                    </a:p>
+                  </a:txBody>
+                  <a:tcPr marL="27432" marR="27432" marT="9144" marB="9144">
+                    <a:lnL>
+                      <a:noFill/>
+                    </a:lnL>
+                    <a:lnR>
+                      <a:noFill/>
+                    </a:lnR>
+                    <a:lnT w="9525" cap="flat" cmpd="sng" algn="ctr">
+                      <a:solidFill>
+                        <a:srgbClr val="D6D6D6"/>
+                      </a:solidFill>
+                      <a:prstDash val="solid"/>
+                      <a:round/>
+                      <a:headEnd type="none" w="med" len="med"/>
+                      <a:tailEnd type="none" w="med" len="med"/>
+                    </a:lnT>
+                    <a:lnB w="9525">
+                      <a:solidFill>
+                        <a:srgbClr val="D6D6D6"/>
+                      </a:solidFill>
+                    </a:lnB>
+                    <a:noFill/>
+                  </a:tcPr>
+                </a:tc>
+                <a:tc>
+                  <a:txBody>
+                    <a:bodyPr/>
+                    <a:lstStyle/>
+                    <a:p>
+                      <a:pPr marL="0" algn="ctr" defTabSz="914400" rtl="0" eaLnBrk="1" latinLnBrk="0" hangingPunct="1"/>
+                      <a:r>
+                        <a:rPr sz="800" b="0" kern="1200">
+                          <a:solidFill>
+                            <a:srgbClr val="0A0A0A"/>
+                          </a:solidFill>
+                          <a:latin typeface="微软雅黑" panose="020B0503020204020204" pitchFamily="34" charset="-122"/>
+                          <a:ea typeface="微软雅黑" panose="020B0503020204020204" pitchFamily="34" charset="-122"/>
+                          <a:cs typeface="+mn-cs"/>
+                        </a:rPr>
+                        <a:t>Debit</a:t>
+                      </a:r>
+                    </a:p>
+                  </a:txBody>
+                  <a:tcPr marL="27432" marR="27432" marT="9144" marB="9144">
+                    <a:lnL>
+                      <a:noFill/>
+                    </a:lnL>
+                    <a:lnR>
+                      <a:noFill/>
+                    </a:lnR>
+                    <a:lnT w="9525" cap="flat" cmpd="sng" algn="ctr">
+                      <a:solidFill>
+                        <a:srgbClr val="D6D6D6"/>
+                      </a:solidFill>
+                      <a:prstDash val="solid"/>
+                      <a:round/>
+                      <a:headEnd type="none" w="med" len="med"/>
+                      <a:tailEnd type="none" w="med" len="med"/>
+                    </a:lnT>
+                    <a:lnB w="9525">
+                      <a:solidFill>
+                        <a:srgbClr val="D6D6D6"/>
+                      </a:solidFill>
+                    </a:lnB>
+                    <a:noFill/>
+                  </a:tcPr>
+                </a:tc>
+                <a:tc>
+                  <a:txBody>
+                    <a:bodyPr/>
+                    <a:lstStyle/>
+                    <a:p>
+                      <a:pPr marL="0" algn="ctr" defTabSz="914400" rtl="0" eaLnBrk="1" latinLnBrk="0" hangingPunct="1"/>
+                      <a:r>
+                        <a:rPr sz="800" b="0" kern="1200" dirty="0">
+                          <a:solidFill>
+                            <a:srgbClr val="0A0A0A"/>
+                          </a:solidFill>
+                          <a:latin typeface="微软雅黑" panose="020B0503020204020204" pitchFamily="34" charset="-122"/>
+                          <a:ea typeface="微软雅黑" panose="020B0503020204020204" pitchFamily="34" charset="-122"/>
+                          <a:cs typeface="+mn-cs"/>
+                        </a:rPr>
+                        <a:t>AMZNPRIMEA*4V3KQ AMAZON.COM.AU</a:t>
+                      </a:r>
+                    </a:p>
+                  </a:txBody>
+                  <a:tcPr marL="27432" marR="27432" marT="9144" marB="9144">
+                    <a:lnL>
+                      <a:noFill/>
+                    </a:lnL>
+                    <a:lnR>
+                      <a:noFill/>
+                    </a:lnR>
+                    <a:lnT w="9525" cap="flat" cmpd="sng" algn="ctr">
+                      <a:solidFill>
+                        <a:srgbClr val="D6D6D6"/>
+                      </a:solidFill>
+                      <a:prstDash val="solid"/>
+                      <a:round/>
+                      <a:headEnd type="none" w="med" len="med"/>
+                      <a:tailEnd type="none" w="med" len="med"/>
+                    </a:lnT>
+                    <a:lnB w="9525" cap="flat" cmpd="sng" algn="ctr">
+                      <a:solidFill>
+                        <a:srgbClr val="D6D6D6"/>
+                      </a:solidFill>
+                      <a:prstDash val="solid"/>
+                      <a:round/>
+                      <a:headEnd type="none" w="med" len="med"/>
+                      <a:tailEnd type="none" w="med" len="med"/>
+                    </a:lnB>
+                    <a:noFill/>
+                  </a:tcPr>
+                </a:tc>
+                <a:extLst>
+                  <a:ext uri="{0D108BD9-81ED-4DB2-BD59-A6C34878D82A}">
+                    <a16:rowId xmlns:a16="http://schemas.microsoft.com/office/drawing/2014/main" val="10004"/>
+                  </a:ext>
+                </a:extLst>
+              </a:tr>
+              <a:tr h="170373">
+                <a:tc>
+                  <a:txBody>
+                    <a:bodyPr/>
+                    <a:lstStyle/>
+                    <a:p>
+                      <a:pPr marL="0" algn="ctr" defTabSz="914400" rtl="0" eaLnBrk="1" latinLnBrk="0" hangingPunct="1"/>
+                      <a:r>
+                        <a:rPr sz="800" b="0" kern="1200">
+                          <a:solidFill>
+                            <a:srgbClr val="0A0A0A"/>
+                          </a:solidFill>
+                          <a:latin typeface="微软雅黑" panose="020B0503020204020204" pitchFamily="34" charset="-122"/>
+                          <a:ea typeface="微软雅黑" panose="020B0503020204020204" pitchFamily="34" charset="-122"/>
+                          <a:cs typeface="+mn-cs"/>
+                        </a:rPr>
+                        <a:t>2026/04/10</a:t>
+                      </a:r>
+                    </a:p>
+                  </a:txBody>
+                  <a:tcPr marL="27432" marR="27432" marT="9144" marB="9144">
+                    <a:lnL>
+                      <a:noFill/>
+                    </a:lnL>
+                    <a:lnR>
+                      <a:noFill/>
+                    </a:lnR>
+                    <a:lnT w="9525" cap="flat" cmpd="sng" algn="ctr">
+                      <a:solidFill>
+                        <a:srgbClr val="D6D6D6"/>
+                      </a:solidFill>
+                      <a:prstDash val="solid"/>
+                      <a:round/>
+                      <a:headEnd type="none" w="med" len="med"/>
+                      <a:tailEnd type="none" w="med" len="med"/>
+                    </a:lnT>
+                    <a:lnB w="9525">
+                      <a:solidFill>
+                        <a:srgbClr val="D6D6D6"/>
+                      </a:solidFill>
+                    </a:lnB>
+                    <a:noFill/>
+                  </a:tcPr>
+                </a:tc>
+                <a:tc>
+                  <a:txBody>
+                    <a:bodyPr/>
+                    <a:lstStyle/>
+                    <a:p>
+                      <a:pPr marL="0" algn="ctr" defTabSz="914400" rtl="0" eaLnBrk="1" latinLnBrk="0" hangingPunct="1"/>
+                      <a:r>
+                        <a:rPr sz="800" b="0" kern="1200">
+                          <a:solidFill>
+                            <a:srgbClr val="0A0A0A"/>
+                          </a:solidFill>
+                          <a:latin typeface="微软雅黑" panose="020B0503020204020204" pitchFamily="34" charset="-122"/>
+                          <a:ea typeface="微软雅黑" panose="020B0503020204020204" pitchFamily="34" charset="-122"/>
+                          <a:cs typeface="+mn-cs"/>
+                        </a:rPr>
+                        <a:t>A$3,420.50</a:t>
+                      </a:r>
+                    </a:p>
+                  </a:txBody>
+                  <a:tcPr marL="27432" marR="27432" marT="9144" marB="9144">
+                    <a:lnL>
+                      <a:noFill/>
+                    </a:lnL>
+                    <a:lnR>
+                      <a:noFill/>
+                    </a:lnR>
+                    <a:lnT w="9525" cap="flat" cmpd="sng" algn="ctr">
+                      <a:solidFill>
+                        <a:srgbClr val="D6D6D6"/>
+                      </a:solidFill>
+                      <a:prstDash val="solid"/>
+                      <a:round/>
+                      <a:headEnd type="none" w="med" len="med"/>
+                      <a:tailEnd type="none" w="med" len="med"/>
+                    </a:lnT>
+                    <a:lnB w="9525">
+                      <a:solidFill>
+                        <a:srgbClr val="D6D6D6"/>
+                      </a:solidFill>
+                    </a:lnB>
+                    <a:noFill/>
+                  </a:tcPr>
+                </a:tc>
+                <a:tc>
+                  <a:txBody>
+                    <a:bodyPr/>
+                    <a:lstStyle/>
+                    <a:p>
+                      <a:pPr marL="0" algn="ctr" defTabSz="914400" rtl="0" eaLnBrk="1" latinLnBrk="0" hangingPunct="1"/>
+                      <a:r>
+                        <a:rPr sz="800" b="0" kern="1200">
+                          <a:solidFill>
+                            <a:srgbClr val="0A0A0A"/>
+                          </a:solidFill>
+                          <a:latin typeface="微软雅黑" panose="020B0503020204020204" pitchFamily="34" charset="-122"/>
+                          <a:ea typeface="微软雅黑" panose="020B0503020204020204" pitchFamily="34" charset="-122"/>
+                          <a:cs typeface="+mn-cs"/>
+                        </a:rPr>
+                        <a:t>Credit</a:t>
+                      </a:r>
+                    </a:p>
+                  </a:txBody>
+                  <a:tcPr marL="27432" marR="27432" marT="9144" marB="9144">
+                    <a:lnL>
+                      <a:noFill/>
+                    </a:lnL>
+                    <a:lnR>
+                      <a:noFill/>
+                    </a:lnR>
+                    <a:lnT w="9525" cap="flat" cmpd="sng" algn="ctr">
+                      <a:solidFill>
+                        <a:srgbClr val="D6D6D6"/>
+                      </a:solidFill>
+                      <a:prstDash val="solid"/>
+                      <a:round/>
+                      <a:headEnd type="none" w="med" len="med"/>
+                      <a:tailEnd type="none" w="med" len="med"/>
+                    </a:lnT>
+                    <a:lnB w="9525">
+                      <a:solidFill>
+                        <a:srgbClr val="D6D6D6"/>
+                      </a:solidFill>
+                    </a:lnB>
+                    <a:noFill/>
+                  </a:tcPr>
+                </a:tc>
+                <a:tc>
+                  <a:txBody>
+                    <a:bodyPr/>
+                    <a:lstStyle/>
+                    <a:p>
+                      <a:pPr marL="0" algn="ctr" defTabSz="914400" rtl="0" eaLnBrk="1" latinLnBrk="0" hangingPunct="1"/>
+                      <a:r>
+                        <a:rPr sz="800" b="0" kern="1200" dirty="0">
+                          <a:solidFill>
+                            <a:srgbClr val="0A0A0A"/>
+                          </a:solidFill>
+                          <a:latin typeface="微软雅黑" panose="020B0503020204020204" pitchFamily="34" charset="-122"/>
+                          <a:ea typeface="微软雅黑" panose="020B0503020204020204" pitchFamily="34" charset="-122"/>
+                          <a:cs typeface="+mn-cs"/>
+                        </a:rPr>
+                        <a:t>WAGES ACME PTY LTD FORTNIGHTLY PAY</a:t>
+                      </a:r>
+                    </a:p>
+                  </a:txBody>
+                  <a:tcPr marL="27432" marR="27432" marT="9144" marB="9144">
+                    <a:lnL>
+                      <a:noFill/>
+                    </a:lnL>
+                    <a:lnR>
+                      <a:noFill/>
+                    </a:lnR>
+                    <a:lnT w="9525" cap="flat" cmpd="sng" algn="ctr">
+                      <a:solidFill>
+                        <a:srgbClr val="D6D6D6"/>
+                      </a:solidFill>
+                      <a:prstDash val="solid"/>
+                      <a:round/>
+                      <a:headEnd type="none" w="med" len="med"/>
+                      <a:tailEnd type="none" w="med" len="med"/>
+                    </a:lnT>
+                    <a:lnB w="9525">
+                      <a:solidFill>
+                        <a:srgbClr val="D6D6D6"/>
+                      </a:solidFill>
+                    </a:lnB>
+                    <a:noFill/>
+                  </a:tcPr>
+                </a:tc>
+                <a:extLst>
+                  <a:ext uri="{0D108BD9-81ED-4DB2-BD59-A6C34878D82A}">
+                    <a16:rowId xmlns:a16="http://schemas.microsoft.com/office/drawing/2014/main" val="10005"/>
+                  </a:ext>
+                </a:extLst>
+              </a:tr>
+            </a:tbl>
+          </a:graphicData>
+        </a:graphic>
+      </p:graphicFrame>
+      <p:graphicFrame>
+        <p:nvGraphicFramePr>
+          <p:cNvPr id="16" name="init-table-c">
+            <a:extLst>
+              <a:ext uri="{FF2B5EF4-FFF2-40B4-BE49-F238E27FC236}">
+                <a16:creationId xmlns:a16="http://schemas.microsoft.com/office/drawing/2014/main" id="{3C86CAD7-1100-4D7C-B8CF-F22C4AFE4904}"/>
+              </a:ext>
+            </a:extLst>
+          </p:cNvPr>
+          <p:cNvGraphicFramePr>
+            <a:graphicFrameLocks noGrp="1"/>
+          </p:cNvGraphicFramePr>
+          <p:nvPr>
+            <p:extLst>
+              <p:ext uri="{D42A27DB-BD31-4B8C-83A1-F6EECF244321}">
+                <p14:modId xmlns:p14="http://schemas.microsoft.com/office/powerpoint/2010/main" val="4233041013"/>
+              </p:ext>
+            </p:extLst>
+          </p:nvPr>
+        </p:nvGraphicFramePr>
+        <p:xfrm>
+          <a:off x="568385" y="2839315"/>
+          <a:ext cx="10901631" cy="1022238"/>
+        </p:xfrm>
+        <a:graphic>
+          <a:graphicData uri="http://schemas.openxmlformats.org/drawingml/2006/table">
+            <a:tbl>
+              <a:tblPr/>
+              <a:tblGrid>
+                <a:gridCol w="796947">
+                  <a:extLst>
+                    <a:ext uri="{9D8B030D-6E8A-4147-A177-3AD203B41FA5}">
+                      <a16:colId xmlns:a16="http://schemas.microsoft.com/office/drawing/2014/main" val="20000"/>
+                    </a:ext>
+                  </a:extLst>
+                </a:gridCol>
+                <a:gridCol w="3717051">
+                  <a:extLst>
+                    <a:ext uri="{9D8B030D-6E8A-4147-A177-3AD203B41FA5}">
+                      <a16:colId xmlns:a16="http://schemas.microsoft.com/office/drawing/2014/main" val="20001"/>
+                    </a:ext>
+                  </a:extLst>
+                </a:gridCol>
+                <a:gridCol w="1159622">
+                  <a:extLst>
+                    <a:ext uri="{9D8B030D-6E8A-4147-A177-3AD203B41FA5}">
+                      <a16:colId xmlns:a16="http://schemas.microsoft.com/office/drawing/2014/main" val="2631831465"/>
+                    </a:ext>
+                  </a:extLst>
+                </a:gridCol>
+                <a:gridCol w="1277223">
+                  <a:extLst>
+                    <a:ext uri="{9D8B030D-6E8A-4147-A177-3AD203B41FA5}">
+                      <a16:colId xmlns:a16="http://schemas.microsoft.com/office/drawing/2014/main" val="20002"/>
+                    </a:ext>
+                  </a:extLst>
+                </a:gridCol>
+                <a:gridCol w="923613">
+                  <a:extLst>
+                    <a:ext uri="{9D8B030D-6E8A-4147-A177-3AD203B41FA5}">
+                      <a16:colId xmlns:a16="http://schemas.microsoft.com/office/drawing/2014/main" val="4140160165"/>
+                    </a:ext>
+                  </a:extLst>
+                </a:gridCol>
+                <a:gridCol w="676780">
+                  <a:extLst>
+                    <a:ext uri="{9D8B030D-6E8A-4147-A177-3AD203B41FA5}">
+                      <a16:colId xmlns:a16="http://schemas.microsoft.com/office/drawing/2014/main" val="2534051383"/>
+                    </a:ext>
+                  </a:extLst>
+                </a:gridCol>
+                <a:gridCol w="2350395">
+                  <a:extLst>
+                    <a:ext uri="{9D8B030D-6E8A-4147-A177-3AD203B41FA5}">
+                      <a16:colId xmlns:a16="http://schemas.microsoft.com/office/drawing/2014/main" val="994888910"/>
+                    </a:ext>
+                  </a:extLst>
+                </a:gridCol>
+              </a:tblGrid>
+              <a:tr h="170373">
+                <a:tc>
+                  <a:txBody>
+                    <a:bodyPr/>
+                    <a:lstStyle/>
+                    <a:p>
+                      <a:pPr algn="l"/>
+                      <a:r>
+                        <a:rPr sz="800" b="1">
+                          <a:solidFill>
+                            <a:srgbClr val="0A0A0A"/>
+                          </a:solidFill>
+                          <a:latin typeface="微软雅黑"/>
+                          <a:ea typeface="微软雅黑"/>
+                        </a:rPr>
+                        <a:t>日期</a:t>
+                      </a:r>
+                    </a:p>
+                  </a:txBody>
+                  <a:tcPr marL="27432" marR="27432" marT="9144" marB="9144">
+                    <a:lnL>
+                      <a:noFill/>
+                    </a:lnL>
+                    <a:lnR>
+                      <a:noFill/>
+                    </a:lnR>
+                    <a:lnT>
+                      <a:noFill/>
+                    </a:lnT>
+                    <a:lnB w="19050">
+                      <a:solidFill>
+                        <a:srgbClr val="0A0A0A"/>
+                      </a:solidFill>
+                    </a:lnB>
+                    <a:noFill/>
+                  </a:tcPr>
+                </a:tc>
+                <a:tc>
+                  <a:txBody>
+                    <a:bodyPr/>
+                    <a:lstStyle/>
+                    <a:p>
+                      <a:pPr algn="l"/>
+                      <a:r>
+                        <a:rPr sz="800" b="1" dirty="0" err="1">
+                          <a:solidFill>
+                            <a:srgbClr val="0A0A0A"/>
+                          </a:solidFill>
+                          <a:latin typeface="微软雅黑"/>
+                          <a:ea typeface="微软雅黑"/>
+                        </a:rPr>
+                        <a:t>交易描述</a:t>
+                      </a:r>
+                      <a:endParaRPr sz="800" b="1" dirty="0">
+                        <a:solidFill>
+                          <a:srgbClr val="0A0A0A"/>
+                        </a:solidFill>
+                        <a:latin typeface="微软雅黑"/>
+                        <a:ea typeface="微软雅黑"/>
+                      </a:endParaRPr>
+                    </a:p>
+                  </a:txBody>
+                  <a:tcPr marL="27432" marR="27432" marT="9144" marB="9144">
+                    <a:lnL>
+                      <a:noFill/>
+                    </a:lnL>
+                    <a:lnR>
+                      <a:noFill/>
+                    </a:lnR>
+                    <a:lnT>
+                      <a:noFill/>
+                    </a:lnT>
+                    <a:lnB w="19050">
+                      <a:solidFill>
+                        <a:srgbClr val="0A0A0A"/>
+                      </a:solidFill>
+                    </a:lnB>
+                    <a:noFill/>
+                  </a:tcPr>
+                </a:tc>
+                <a:tc>
+                  <a:txBody>
+                    <a:bodyPr/>
+                    <a:lstStyle/>
+                    <a:p>
+                      <a:pPr algn="l"/>
+                      <a:r>
+                        <a:rPr sz="800" b="1" dirty="0" err="1">
+                          <a:solidFill>
+                            <a:srgbClr val="0A0A0A"/>
+                          </a:solidFill>
+                          <a:latin typeface="微软雅黑"/>
+                          <a:ea typeface="微软雅黑"/>
+                        </a:rPr>
+                        <a:t>交易金额</a:t>
+                      </a:r>
+                      <a:endParaRPr sz="800" b="1" dirty="0">
+                        <a:solidFill>
+                          <a:srgbClr val="0A0A0A"/>
+                        </a:solidFill>
+                        <a:latin typeface="微软雅黑"/>
+                        <a:ea typeface="微软雅黑"/>
+                      </a:endParaRPr>
+                    </a:p>
+                  </a:txBody>
+                  <a:tcPr marL="27432" marR="27432" marT="9144" marB="9144">
+                    <a:lnL>
+                      <a:noFill/>
+                    </a:lnL>
+                    <a:lnR>
+                      <a:noFill/>
+                    </a:lnR>
+                    <a:lnT>
+                      <a:noFill/>
+                    </a:lnT>
+                    <a:lnB w="19050" cap="flat" cmpd="sng" algn="ctr">
+                      <a:solidFill>
+                        <a:srgbClr val="0A0A0A"/>
+                      </a:solidFill>
+                      <a:prstDash val="solid"/>
+                      <a:round/>
+                      <a:headEnd type="none" w="med" len="med"/>
+                      <a:tailEnd type="none" w="med" len="med"/>
+                    </a:lnB>
+                    <a:noFill/>
+                  </a:tcPr>
+                </a:tc>
+                <a:tc>
+                  <a:txBody>
+                    <a:bodyPr/>
+                    <a:lstStyle/>
+                    <a:p>
+                      <a:pPr algn="l"/>
+                      <a:r>
+                        <a:rPr sz="800" b="1" dirty="0" err="1">
+                          <a:solidFill>
+                            <a:srgbClr val="D6A000"/>
+                          </a:solidFill>
+                          <a:latin typeface="微软雅黑"/>
+                          <a:ea typeface="微软雅黑"/>
+                        </a:rPr>
+                        <a:t>标准交易对手</a:t>
+                      </a:r>
+                      <a:endParaRPr sz="800" b="1" dirty="0">
+                        <a:solidFill>
+                          <a:srgbClr val="0A0A0A"/>
+                        </a:solidFill>
+                        <a:latin typeface="微软雅黑"/>
+                        <a:ea typeface="微软雅黑"/>
+                      </a:endParaRPr>
+                    </a:p>
+                  </a:txBody>
+                  <a:tcPr marL="27432" marR="27432" marT="9144" marB="9144">
+                    <a:lnL>
+                      <a:noFill/>
+                    </a:lnL>
+                    <a:lnR>
+                      <a:noFill/>
+                    </a:lnR>
+                    <a:lnT>
+                      <a:noFill/>
+                    </a:lnT>
+                    <a:lnB w="19050">
+                      <a:solidFill>
+                        <a:srgbClr val="0A0A0A"/>
+                      </a:solidFill>
+                    </a:lnB>
+                    <a:noFill/>
+                  </a:tcPr>
+                </a:tc>
+                <a:tc>
+                  <a:txBody>
+                    <a:bodyPr/>
+                    <a:lstStyle/>
+                    <a:p>
+                      <a:pPr algn="l"/>
+                      <a:r>
+                        <a:rPr sz="800" b="1" dirty="0" err="1">
+                          <a:solidFill>
+                            <a:srgbClr val="D6A000"/>
+                          </a:solidFill>
+                          <a:latin typeface="微软雅黑"/>
+                          <a:ea typeface="微软雅黑"/>
+                        </a:rPr>
+                        <a:t>主体类型</a:t>
+                      </a:r>
+                      <a:endParaRPr sz="800" b="1" dirty="0">
+                        <a:solidFill>
+                          <a:srgbClr val="0A0A0A"/>
+                        </a:solidFill>
+                        <a:latin typeface="微软雅黑"/>
+                        <a:ea typeface="微软雅黑"/>
+                      </a:endParaRPr>
+                    </a:p>
+                  </a:txBody>
+                  <a:tcPr marL="27432" marR="27432" marT="9144" marB="9144">
+                    <a:lnL>
+                      <a:noFill/>
+                    </a:lnL>
+                    <a:lnR>
+                      <a:noFill/>
+                    </a:lnR>
+                    <a:lnT>
+                      <a:noFill/>
+                    </a:lnT>
+                    <a:lnB w="19050" cap="flat" cmpd="sng" algn="ctr">
+                      <a:solidFill>
+                        <a:srgbClr val="0A0A0A"/>
+                      </a:solidFill>
+                      <a:prstDash val="solid"/>
+                      <a:round/>
+                      <a:headEnd type="none" w="med" len="med"/>
+                      <a:tailEnd type="none" w="med" len="med"/>
+                    </a:lnB>
+                    <a:noFill/>
+                  </a:tcPr>
+                </a:tc>
+                <a:tc>
+                  <a:txBody>
+                    <a:bodyPr/>
+                    <a:lstStyle/>
+                    <a:p>
+                      <a:pPr algn="l"/>
+                      <a:r>
+                        <a:rPr sz="800" b="1">
+                          <a:solidFill>
+                            <a:srgbClr val="D6A000"/>
+                          </a:solidFill>
+                          <a:latin typeface="微软雅黑"/>
+                          <a:ea typeface="微软雅黑"/>
+                        </a:rPr>
+                        <a:t>分类</a:t>
+                      </a:r>
+                    </a:p>
+                  </a:txBody>
+                  <a:tcPr marL="27432" marR="27432" marT="9144" marB="9144">
+                    <a:lnL>
+                      <a:noFill/>
+                    </a:lnL>
+                    <a:lnR>
+                      <a:noFill/>
+                    </a:lnR>
+                    <a:lnT>
+                      <a:noFill/>
+                    </a:lnT>
+                    <a:lnB w="19050" cap="flat" cmpd="sng" algn="ctr">
+                      <a:solidFill>
+                        <a:srgbClr val="0A0A0A"/>
+                      </a:solidFill>
+                      <a:prstDash val="solid"/>
+                      <a:round/>
+                      <a:headEnd type="none" w="med" len="med"/>
+                      <a:tailEnd type="none" w="med" len="med"/>
+                    </a:lnB>
+                    <a:noFill/>
+                  </a:tcPr>
+                </a:tc>
+                <a:tc>
+                  <a:txBody>
+                    <a:bodyPr/>
+                    <a:lstStyle/>
+                    <a:p>
+                      <a:pPr algn="l"/>
+                      <a:r>
+                        <a:rPr sz="800" b="1">
+                          <a:solidFill>
+                            <a:srgbClr val="D6A000"/>
+                          </a:solidFill>
+                          <a:latin typeface="微软雅黑"/>
+                          <a:ea typeface="微软雅黑"/>
+                        </a:rPr>
+                        <a:t>分类依据</a:t>
+                      </a:r>
+                    </a:p>
+                  </a:txBody>
+                  <a:tcPr marL="27432" marR="27432" marT="9144" marB="9144">
+                    <a:lnL>
+                      <a:noFill/>
+                    </a:lnL>
+                    <a:lnR>
+                      <a:noFill/>
+                    </a:lnR>
+                    <a:lnT>
+                      <a:noFill/>
+                    </a:lnT>
+                    <a:lnB w="19050" cap="flat" cmpd="sng" algn="ctr">
+                      <a:solidFill>
+                        <a:srgbClr val="0A0A0A"/>
+                      </a:solidFill>
+                      <a:prstDash val="solid"/>
+                      <a:round/>
+                      <a:headEnd type="none" w="med" len="med"/>
+                      <a:tailEnd type="none" w="med" len="med"/>
+                    </a:lnB>
+                    <a:noFill/>
+                  </a:tcPr>
+                </a:tc>
+                <a:extLst>
+                  <a:ext uri="{0D108BD9-81ED-4DB2-BD59-A6C34878D82A}">
+                    <a16:rowId xmlns:a16="http://schemas.microsoft.com/office/drawing/2014/main" val="10000"/>
+                  </a:ext>
+                </a:extLst>
+              </a:tr>
+              <a:tr h="170373">
+                <a:tc>
+                  <a:txBody>
+                    <a:bodyPr/>
+                    <a:lstStyle/>
+                    <a:p>
+                      <a:pPr marL="0" algn="l" defTabSz="914400" rtl="0" eaLnBrk="1" latinLnBrk="0" hangingPunct="1"/>
+                      <a:r>
+                        <a:rPr sz="800" b="0" kern="1200" dirty="0">
+                          <a:solidFill>
+                            <a:srgbClr val="0A0A0A"/>
+                          </a:solidFill>
+                          <a:latin typeface="微软雅黑" panose="020B0503020204020204" pitchFamily="34" charset="-122"/>
+                          <a:ea typeface="微软雅黑" panose="020B0503020204020204" pitchFamily="34" charset="-122"/>
+                          <a:cs typeface="+mn-cs"/>
+                        </a:rPr>
+                        <a:t>2026/03/26</a:t>
+                      </a:r>
+                    </a:p>
+                  </a:txBody>
+                  <a:tcPr marL="27432" marR="27432" marT="9144" marB="9144">
+                    <a:lnL>
+                      <a:noFill/>
+                    </a:lnL>
+                    <a:lnR>
+                      <a:noFill/>
+                    </a:lnR>
+                    <a:lnT w="19050" cap="flat" cmpd="sng" algn="ctr">
+                      <a:solidFill>
+                        <a:srgbClr val="0A0A0A"/>
+                      </a:solidFill>
+                      <a:prstDash val="solid"/>
+                      <a:round/>
+                      <a:headEnd type="none" w="med" len="med"/>
+                      <a:tailEnd type="none" w="med" len="med"/>
+                    </a:lnT>
+                    <a:lnB w="9525">
+                      <a:solidFill>
+                        <a:srgbClr val="D6D6D6"/>
+                      </a:solidFill>
+                    </a:lnB>
+                    <a:noFill/>
+                  </a:tcPr>
+                </a:tc>
+                <a:tc>
+                  <a:txBody>
+                    <a:bodyPr/>
+                    <a:lstStyle/>
+                    <a:p>
+                      <a:pPr marL="0" algn="l" defTabSz="914400" rtl="0" eaLnBrk="1" latinLnBrk="0" hangingPunct="1"/>
+                      <a:r>
+                        <a:rPr sz="800" b="0" kern="1200" dirty="0">
+                          <a:solidFill>
+                            <a:srgbClr val="0A0A0A"/>
+                          </a:solidFill>
+                          <a:latin typeface="微软雅黑" panose="020B0503020204020204" pitchFamily="34" charset="-122"/>
+                          <a:ea typeface="微软雅黑" panose="020B0503020204020204" pitchFamily="34" charset="-122"/>
+                          <a:cs typeface="+mn-cs"/>
+                        </a:rPr>
+                        <a:t>BPAY FAIR GO FINANCE BILLER 354127 REF 5837201937</a:t>
+                      </a:r>
+                    </a:p>
+                  </a:txBody>
+                  <a:tcPr marL="27432" marR="27432" marT="9144" marB="9144">
+                    <a:lnL>
+                      <a:noFill/>
+                    </a:lnL>
+                    <a:lnR>
+                      <a:noFill/>
+                    </a:lnR>
+                    <a:lnT w="19050" cap="flat" cmpd="sng" algn="ctr">
+                      <a:solidFill>
+                        <a:srgbClr val="0A0A0A"/>
+                      </a:solidFill>
+                      <a:prstDash val="solid"/>
+                      <a:round/>
+                      <a:headEnd type="none" w="med" len="med"/>
+                      <a:tailEnd type="none" w="med" len="med"/>
+                    </a:lnT>
+                    <a:lnB w="9525">
+                      <a:solidFill>
+                        <a:srgbClr val="D6D6D6"/>
+                      </a:solidFill>
+                    </a:lnB>
+                    <a:noFill/>
+                  </a:tcPr>
+                </a:tc>
+                <a:tc>
+                  <a:txBody>
+                    <a:bodyPr/>
+                    <a:lstStyle/>
+                    <a:p>
+                      <a:pPr marL="0" algn="l" defTabSz="914400" rtl="0" eaLnBrk="1" latinLnBrk="0" hangingPunct="1"/>
+                      <a:r>
+                        <a:rPr sz="800" b="0" kern="1200" dirty="0">
+                          <a:solidFill>
+                            <a:srgbClr val="0A0A0A"/>
+                          </a:solidFill>
+                          <a:latin typeface="微软雅黑" panose="020B0503020204020204" pitchFamily="34" charset="-122"/>
+                          <a:ea typeface="微软雅黑" panose="020B0503020204020204" pitchFamily="34" charset="-122"/>
+                          <a:cs typeface="+mn-cs"/>
+                        </a:rPr>
+                        <a:t>A$156</a:t>
+                      </a:r>
+                    </a:p>
+                  </a:txBody>
+                  <a:tcPr marL="27432" marR="27432" marT="9144" marB="9144">
+                    <a:lnL>
+                      <a:noFill/>
+                    </a:lnL>
+                    <a:lnR>
+                      <a:noFill/>
+                    </a:lnR>
+                    <a:lnT w="19050" cap="flat" cmpd="sng" algn="ctr">
+                      <a:solidFill>
+                        <a:srgbClr val="0A0A0A"/>
+                      </a:solidFill>
+                      <a:prstDash val="solid"/>
+                      <a:round/>
+                      <a:headEnd type="none" w="med" len="med"/>
+                      <a:tailEnd type="none" w="med" len="med"/>
+                    </a:lnT>
+                    <a:lnB w="9525" cap="flat" cmpd="sng" algn="ctr">
+                      <a:solidFill>
+                        <a:srgbClr val="D6D6D6"/>
+                      </a:solidFill>
+                      <a:prstDash val="solid"/>
+                      <a:round/>
+                      <a:headEnd type="none" w="med" len="med"/>
+                      <a:tailEnd type="none" w="med" len="med"/>
+                    </a:lnB>
+                    <a:noFill/>
+                  </a:tcPr>
+                </a:tc>
+                <a:tc>
+                  <a:txBody>
+                    <a:bodyPr/>
+                    <a:lstStyle/>
+                    <a:p>
+                      <a:pPr marL="0" algn="l" defTabSz="914400" rtl="0" eaLnBrk="1" latinLnBrk="0" hangingPunct="1"/>
+                      <a:r>
+                        <a:rPr sz="800" b="0" kern="1200">
+                          <a:solidFill>
+                            <a:srgbClr val="0A0A0A"/>
+                          </a:solidFill>
+                          <a:latin typeface="微软雅黑" panose="020B0503020204020204" pitchFamily="34" charset="-122"/>
+                          <a:ea typeface="微软雅黑" panose="020B0503020204020204" pitchFamily="34" charset="-122"/>
+                          <a:cs typeface="+mn-cs"/>
+                        </a:rPr>
+                        <a:t>Fair Go Finance</a:t>
+                      </a:r>
+                    </a:p>
+                  </a:txBody>
+                  <a:tcPr marL="27432" marR="27432" marT="9144" marB="9144">
+                    <a:lnL>
+                      <a:noFill/>
+                    </a:lnL>
+                    <a:lnR>
+                      <a:noFill/>
+                    </a:lnR>
+                    <a:lnT w="19050" cap="flat" cmpd="sng" algn="ctr">
+                      <a:solidFill>
+                        <a:srgbClr val="0A0A0A"/>
+                      </a:solidFill>
+                      <a:prstDash val="solid"/>
+                      <a:round/>
+                      <a:headEnd type="none" w="med" len="med"/>
+                      <a:tailEnd type="none" w="med" len="med"/>
+                    </a:lnT>
+                    <a:lnB w="9525">
+                      <a:solidFill>
+                        <a:srgbClr val="D6D6D6"/>
+                      </a:solidFill>
+                    </a:lnB>
+                    <a:noFill/>
+                  </a:tcPr>
+                </a:tc>
+                <a:tc>
+                  <a:txBody>
+                    <a:bodyPr/>
+                    <a:lstStyle/>
+                    <a:p>
+                      <a:pPr marL="0" algn="l" defTabSz="914400" rtl="0" eaLnBrk="1" latinLnBrk="0" hangingPunct="1"/>
+                      <a:r>
+                        <a:rPr sz="800" b="0" kern="1200" dirty="0" err="1">
+                          <a:solidFill>
+                            <a:srgbClr val="0A0A0A"/>
+                          </a:solidFill>
+                          <a:latin typeface="微软雅黑" panose="020B0503020204020204" pitchFamily="34" charset="-122"/>
+                          <a:ea typeface="微软雅黑" panose="020B0503020204020204" pitchFamily="34" charset="-122"/>
+                          <a:cs typeface="+mn-cs"/>
+                        </a:rPr>
+                        <a:t>小额信贷机构</a:t>
+                      </a:r>
+                      <a:endParaRPr sz="800" b="0" kern="1200" dirty="0">
+                        <a:solidFill>
+                          <a:srgbClr val="0A0A0A"/>
+                        </a:solidFill>
+                        <a:latin typeface="微软雅黑" panose="020B0503020204020204" pitchFamily="34" charset="-122"/>
+                        <a:ea typeface="微软雅黑" panose="020B0503020204020204" pitchFamily="34" charset="-122"/>
+                        <a:cs typeface="+mn-cs"/>
+                      </a:endParaRPr>
+                    </a:p>
+                  </a:txBody>
+                  <a:tcPr marL="27432" marR="27432" marT="9144" marB="9144">
+                    <a:lnL>
+                      <a:noFill/>
+                    </a:lnL>
+                    <a:lnR>
+                      <a:noFill/>
+                    </a:lnR>
+                    <a:lnT w="19050" cap="flat" cmpd="sng" algn="ctr">
+                      <a:solidFill>
+                        <a:srgbClr val="0A0A0A"/>
+                      </a:solidFill>
+                      <a:prstDash val="solid"/>
+                      <a:round/>
+                      <a:headEnd type="none" w="med" len="med"/>
+                      <a:tailEnd type="none" w="med" len="med"/>
+                    </a:lnT>
+                    <a:lnB w="9525" cap="flat" cmpd="sng" algn="ctr">
+                      <a:solidFill>
+                        <a:srgbClr val="D6D6D6"/>
+                      </a:solidFill>
+                      <a:prstDash val="solid"/>
+                      <a:round/>
+                      <a:headEnd type="none" w="med" len="med"/>
+                      <a:tailEnd type="none" w="med" len="med"/>
+                    </a:lnB>
+                    <a:noFill/>
+                  </a:tcPr>
+                </a:tc>
+                <a:tc>
+                  <a:txBody>
+                    <a:bodyPr/>
+                    <a:lstStyle/>
+                    <a:p>
+                      <a:pPr marL="0" algn="l" defTabSz="914400" rtl="0" eaLnBrk="1" latinLnBrk="0" hangingPunct="1"/>
+                      <a:r>
+                        <a:rPr sz="800" b="0" kern="1200">
+                          <a:solidFill>
+                            <a:srgbClr val="0A0A0A"/>
+                          </a:solidFill>
+                          <a:latin typeface="微软雅黑" panose="020B0503020204020204" pitchFamily="34" charset="-122"/>
+                          <a:ea typeface="微软雅黑" panose="020B0503020204020204" pitchFamily="34" charset="-122"/>
+                          <a:cs typeface="+mn-cs"/>
+                        </a:rPr>
+                        <a:t>贷款及还款</a:t>
+                      </a:r>
+                    </a:p>
+                  </a:txBody>
+                  <a:tcPr marL="27432" marR="27432" marT="9144" marB="9144">
+                    <a:lnL>
+                      <a:noFill/>
+                    </a:lnL>
+                    <a:lnR>
+                      <a:noFill/>
+                    </a:lnR>
+                    <a:lnT w="19050" cap="flat" cmpd="sng" algn="ctr">
+                      <a:solidFill>
+                        <a:srgbClr val="0A0A0A"/>
+                      </a:solidFill>
+                      <a:prstDash val="solid"/>
+                      <a:round/>
+                      <a:headEnd type="none" w="med" len="med"/>
+                      <a:tailEnd type="none" w="med" len="med"/>
+                    </a:lnT>
+                    <a:lnB w="9525" cap="flat" cmpd="sng" algn="ctr">
+                      <a:solidFill>
+                        <a:srgbClr val="D6D6D6"/>
+                      </a:solidFill>
+                      <a:prstDash val="solid"/>
+                      <a:round/>
+                      <a:headEnd type="none" w="med" len="med"/>
+                      <a:tailEnd type="none" w="med" len="med"/>
+                    </a:lnB>
+                    <a:noFill/>
+                  </a:tcPr>
+                </a:tc>
+                <a:tc>
+                  <a:txBody>
+                    <a:bodyPr/>
+                    <a:lstStyle/>
+                    <a:p>
+                      <a:pPr marL="0" algn="l" defTabSz="914400" rtl="0" eaLnBrk="1" latinLnBrk="0" hangingPunct="1"/>
+                      <a:r>
+                        <a:rPr sz="800" b="0" kern="1200">
+                          <a:solidFill>
+                            <a:srgbClr val="0A0A0A"/>
+                          </a:solidFill>
+                          <a:latin typeface="微软雅黑" panose="020B0503020204020204" pitchFamily="34" charset="-122"/>
+                          <a:ea typeface="微软雅黑" panose="020B0503020204020204" pitchFamily="34" charset="-122"/>
+                          <a:cs typeface="+mn-cs"/>
+                        </a:rPr>
+                        <a:t>交易方向、机构名称、产品关键词及历史交易模式</a:t>
+                      </a:r>
+                    </a:p>
+                  </a:txBody>
+                  <a:tcPr marL="27432" marR="27432" marT="9144" marB="9144">
+                    <a:lnL>
+                      <a:noFill/>
+                    </a:lnL>
+                    <a:lnR>
+                      <a:noFill/>
+                    </a:lnR>
+                    <a:lnT w="19050" cap="flat" cmpd="sng" algn="ctr">
+                      <a:solidFill>
+                        <a:srgbClr val="0A0A0A"/>
+                      </a:solidFill>
+                      <a:prstDash val="solid"/>
+                      <a:round/>
+                      <a:headEnd type="none" w="med" len="med"/>
+                      <a:tailEnd type="none" w="med" len="med"/>
+                    </a:lnT>
+                    <a:lnB w="9525" cap="flat" cmpd="sng" algn="ctr">
+                      <a:solidFill>
+                        <a:srgbClr val="D6D6D6"/>
+                      </a:solidFill>
+                      <a:prstDash val="solid"/>
+                      <a:round/>
+                      <a:headEnd type="none" w="med" len="med"/>
+                      <a:tailEnd type="none" w="med" len="med"/>
+                    </a:lnB>
+                    <a:noFill/>
+                  </a:tcPr>
+                </a:tc>
+                <a:extLst>
+                  <a:ext uri="{0D108BD9-81ED-4DB2-BD59-A6C34878D82A}">
+                    <a16:rowId xmlns:a16="http://schemas.microsoft.com/office/drawing/2014/main" val="10001"/>
+                  </a:ext>
+                </a:extLst>
+              </a:tr>
+              <a:tr h="170373">
+                <a:tc>
+                  <a:txBody>
+                    <a:bodyPr/>
+                    <a:lstStyle/>
+                    <a:p>
+                      <a:pPr marL="0" algn="l" defTabSz="914400" rtl="0" eaLnBrk="1" latinLnBrk="0" hangingPunct="1"/>
+                      <a:r>
+                        <a:rPr sz="800" b="0" kern="1200">
+                          <a:solidFill>
+                            <a:srgbClr val="0A0A0A"/>
+                          </a:solidFill>
+                          <a:latin typeface="微软雅黑" panose="020B0503020204020204" pitchFamily="34" charset="-122"/>
+                          <a:ea typeface="微软雅黑" panose="020B0503020204020204" pitchFamily="34" charset="-122"/>
+                          <a:cs typeface="+mn-cs"/>
+                        </a:rPr>
+                        <a:t>2026/03/28</a:t>
+                      </a:r>
+                    </a:p>
+                  </a:txBody>
+                  <a:tcPr marL="27432" marR="27432" marT="9144" marB="9144">
+                    <a:lnL>
+                      <a:noFill/>
+                    </a:lnL>
+                    <a:lnR>
+                      <a:noFill/>
+                    </a:lnR>
+                    <a:lnT w="9525" cap="flat" cmpd="sng" algn="ctr">
+                      <a:solidFill>
+                        <a:srgbClr val="D6D6D6"/>
+                      </a:solidFill>
+                      <a:prstDash val="solid"/>
+                      <a:round/>
+                      <a:headEnd type="none" w="med" len="med"/>
+                      <a:tailEnd type="none" w="med" len="med"/>
+                    </a:lnT>
+                    <a:lnB w="9525">
+                      <a:solidFill>
+                        <a:srgbClr val="D6D6D6"/>
+                      </a:solidFill>
+                    </a:lnB>
+                    <a:noFill/>
+                  </a:tcPr>
+                </a:tc>
+                <a:tc>
+                  <a:txBody>
+                    <a:bodyPr/>
+                    <a:lstStyle/>
+                    <a:p>
+                      <a:pPr marL="0" algn="l" defTabSz="914400" rtl="0" eaLnBrk="1" latinLnBrk="0" hangingPunct="1"/>
+                      <a:r>
+                        <a:rPr sz="800" b="0" kern="1200" dirty="0">
+                          <a:solidFill>
+                            <a:srgbClr val="0A0A0A"/>
+                          </a:solidFill>
+                          <a:latin typeface="微软雅黑" panose="020B0503020204020204" pitchFamily="34" charset="-122"/>
+                          <a:ea typeface="微软雅黑" panose="020B0503020204020204" pitchFamily="34" charset="-122"/>
+                          <a:cs typeface="+mn-cs"/>
+                        </a:rPr>
+                        <a:t>MCDONALDS BRISBANE QLD STORE 006123</a:t>
+                      </a:r>
+                    </a:p>
+                  </a:txBody>
+                  <a:tcPr marL="27432" marR="27432" marT="9144" marB="9144">
+                    <a:lnL>
+                      <a:noFill/>
+                    </a:lnL>
+                    <a:lnR>
+                      <a:noFill/>
+                    </a:lnR>
+                    <a:lnT w="9525" cap="flat" cmpd="sng" algn="ctr">
+                      <a:solidFill>
+                        <a:srgbClr val="D6D6D6"/>
+                      </a:solidFill>
+                      <a:prstDash val="solid"/>
+                      <a:round/>
+                      <a:headEnd type="none" w="med" len="med"/>
+                      <a:tailEnd type="none" w="med" len="med"/>
+                    </a:lnT>
+                    <a:lnB w="9525">
+                      <a:solidFill>
+                        <a:srgbClr val="D6D6D6"/>
+                      </a:solidFill>
+                    </a:lnB>
+                    <a:noFill/>
+                  </a:tcPr>
+                </a:tc>
+                <a:tc>
+                  <a:txBody>
+                    <a:bodyPr/>
+                    <a:lstStyle/>
+                    <a:p>
+                      <a:pPr marL="0" algn="l" defTabSz="914400" rtl="0" eaLnBrk="1" latinLnBrk="0" hangingPunct="1"/>
+                      <a:r>
+                        <a:rPr sz="800" b="0" kern="1200">
+                          <a:solidFill>
+                            <a:srgbClr val="0A0A0A"/>
+                          </a:solidFill>
+                          <a:latin typeface="微软雅黑" panose="020B0503020204020204" pitchFamily="34" charset="-122"/>
+                          <a:ea typeface="微软雅黑" panose="020B0503020204020204" pitchFamily="34" charset="-122"/>
+                          <a:cs typeface="+mn-cs"/>
+                        </a:rPr>
+                        <a:t>A$12.40</a:t>
+                      </a:r>
+                    </a:p>
+                  </a:txBody>
+                  <a:tcPr marL="27432" marR="27432" marT="9144" marB="9144">
+                    <a:lnL>
+                      <a:noFill/>
+                    </a:lnL>
+                    <a:lnR>
+                      <a:noFill/>
+                    </a:lnR>
+                    <a:lnT w="9525" cap="flat" cmpd="sng" algn="ctr">
+                      <a:solidFill>
+                        <a:srgbClr val="D6D6D6"/>
+                      </a:solidFill>
+                      <a:prstDash val="solid"/>
+                      <a:round/>
+                      <a:headEnd type="none" w="med" len="med"/>
+                      <a:tailEnd type="none" w="med" len="med"/>
+                    </a:lnT>
+                    <a:lnB w="9525" cap="flat" cmpd="sng" algn="ctr">
+                      <a:solidFill>
+                        <a:srgbClr val="D6D6D6"/>
+                      </a:solidFill>
+                      <a:prstDash val="solid"/>
+                      <a:round/>
+                      <a:headEnd type="none" w="med" len="med"/>
+                      <a:tailEnd type="none" w="med" len="med"/>
+                    </a:lnB>
+                    <a:noFill/>
+                  </a:tcPr>
+                </a:tc>
+                <a:tc>
+                  <a:txBody>
+                    <a:bodyPr/>
+                    <a:lstStyle/>
+                    <a:p>
+                      <a:pPr marL="0" algn="l" defTabSz="914400" rtl="0" eaLnBrk="1" latinLnBrk="0" hangingPunct="1"/>
+                      <a:r>
+                        <a:rPr sz="800" b="0" kern="1200" dirty="0">
+                          <a:solidFill>
+                            <a:srgbClr val="0A0A0A"/>
+                          </a:solidFill>
+                          <a:latin typeface="微软雅黑" panose="020B0503020204020204" pitchFamily="34" charset="-122"/>
+                          <a:ea typeface="微软雅黑" panose="020B0503020204020204" pitchFamily="34" charset="-122"/>
+                          <a:cs typeface="+mn-cs"/>
+                        </a:rPr>
+                        <a:t>McDonald's</a:t>
+                      </a:r>
+                    </a:p>
+                  </a:txBody>
+                  <a:tcPr marL="27432" marR="27432" marT="9144" marB="9144">
+                    <a:lnL>
+                      <a:noFill/>
+                    </a:lnL>
+                    <a:lnR>
+                      <a:noFill/>
+                    </a:lnR>
+                    <a:lnT w="9525" cap="flat" cmpd="sng" algn="ctr">
+                      <a:solidFill>
+                        <a:srgbClr val="D6D6D6"/>
+                      </a:solidFill>
+                      <a:prstDash val="solid"/>
+                      <a:round/>
+                      <a:headEnd type="none" w="med" len="med"/>
+                      <a:tailEnd type="none" w="med" len="med"/>
+                    </a:lnT>
+                    <a:lnB w="9525">
+                      <a:solidFill>
+                        <a:srgbClr val="D6D6D6"/>
+                      </a:solidFill>
+                    </a:lnB>
+                    <a:noFill/>
+                  </a:tcPr>
+                </a:tc>
+                <a:tc>
+                  <a:txBody>
+                    <a:bodyPr/>
+                    <a:lstStyle/>
+                    <a:p>
+                      <a:pPr marL="0" algn="l" defTabSz="914400" rtl="0" eaLnBrk="1" latinLnBrk="0" hangingPunct="1"/>
+                      <a:r>
+                        <a:rPr sz="800" b="0" kern="1200">
+                          <a:solidFill>
+                            <a:srgbClr val="0A0A0A"/>
+                          </a:solidFill>
+                          <a:latin typeface="微软雅黑" panose="020B0503020204020204" pitchFamily="34" charset="-122"/>
+                          <a:ea typeface="微软雅黑" panose="020B0503020204020204" pitchFamily="34" charset="-122"/>
+                          <a:cs typeface="+mn-cs"/>
+                        </a:rPr>
+                        <a:t>商户企业</a:t>
+                      </a:r>
+                    </a:p>
+                  </a:txBody>
+                  <a:tcPr marL="27432" marR="27432" marT="9144" marB="9144">
+                    <a:lnL>
+                      <a:noFill/>
+                    </a:lnL>
+                    <a:lnR>
+                      <a:noFill/>
+                    </a:lnR>
+                    <a:lnT w="9525" cap="flat" cmpd="sng" algn="ctr">
+                      <a:solidFill>
+                        <a:srgbClr val="D6D6D6"/>
+                      </a:solidFill>
+                      <a:prstDash val="solid"/>
+                      <a:round/>
+                      <a:headEnd type="none" w="med" len="med"/>
+                      <a:tailEnd type="none" w="med" len="med"/>
+                    </a:lnT>
+                    <a:lnB w="9525" cap="flat" cmpd="sng" algn="ctr">
+                      <a:solidFill>
+                        <a:srgbClr val="D6D6D6"/>
+                      </a:solidFill>
+                      <a:prstDash val="solid"/>
+                      <a:round/>
+                      <a:headEnd type="none" w="med" len="med"/>
+                      <a:tailEnd type="none" w="med" len="med"/>
+                    </a:lnB>
+                    <a:noFill/>
+                  </a:tcPr>
+                </a:tc>
+                <a:tc>
+                  <a:txBody>
+                    <a:bodyPr/>
+                    <a:lstStyle/>
+                    <a:p>
+                      <a:pPr marL="0" algn="l" defTabSz="914400" rtl="0" eaLnBrk="1" latinLnBrk="0" hangingPunct="1"/>
+                      <a:r>
+                        <a:rPr sz="800" b="0" kern="1200">
+                          <a:solidFill>
+                            <a:srgbClr val="0A0A0A"/>
+                          </a:solidFill>
+                          <a:latin typeface="微软雅黑" panose="020B0503020204020204" pitchFamily="34" charset="-122"/>
+                          <a:ea typeface="微软雅黑" panose="020B0503020204020204" pitchFamily="34" charset="-122"/>
+                          <a:cs typeface="+mn-cs"/>
+                        </a:rPr>
+                        <a:t>消费</a:t>
+                      </a:r>
+                    </a:p>
+                  </a:txBody>
+                  <a:tcPr marL="27432" marR="27432" marT="9144" marB="9144">
+                    <a:lnL>
+                      <a:noFill/>
+                    </a:lnL>
+                    <a:lnR>
+                      <a:noFill/>
+                    </a:lnR>
+                    <a:lnT w="9525" cap="flat" cmpd="sng" algn="ctr">
+                      <a:solidFill>
+                        <a:srgbClr val="D6D6D6"/>
+                      </a:solidFill>
+                      <a:prstDash val="solid"/>
+                      <a:round/>
+                      <a:headEnd type="none" w="med" len="med"/>
+                      <a:tailEnd type="none" w="med" len="med"/>
+                    </a:lnT>
+                    <a:lnB w="9525" cap="flat" cmpd="sng" algn="ctr">
+                      <a:solidFill>
+                        <a:srgbClr val="D6D6D6"/>
+                      </a:solidFill>
+                      <a:prstDash val="solid"/>
+                      <a:round/>
+                      <a:headEnd type="none" w="med" len="med"/>
+                      <a:tailEnd type="none" w="med" len="med"/>
+                    </a:lnB>
+                    <a:noFill/>
+                  </a:tcPr>
+                </a:tc>
+                <a:tc>
+                  <a:txBody>
+                    <a:bodyPr/>
+                    <a:lstStyle/>
+                    <a:p>
+                      <a:pPr marL="0" algn="l" defTabSz="914400" rtl="0" eaLnBrk="1" latinLnBrk="0" hangingPunct="1"/>
+                      <a:r>
+                        <a:rPr sz="800" b="0" kern="1200">
+                          <a:solidFill>
+                            <a:srgbClr val="0A0A0A"/>
+                          </a:solidFill>
+                          <a:latin typeface="微软雅黑" panose="020B0503020204020204" pitchFamily="34" charset="-122"/>
+                          <a:ea typeface="微软雅黑" panose="020B0503020204020204" pitchFamily="34" charset="-122"/>
+                          <a:cs typeface="+mn-cs"/>
+                        </a:rPr>
+                        <a:t>商户知识库标准名匹配</a:t>
+                      </a:r>
+                    </a:p>
+                  </a:txBody>
+                  <a:tcPr marL="27432" marR="27432" marT="9144" marB="9144">
+                    <a:lnL>
+                      <a:noFill/>
+                    </a:lnL>
+                    <a:lnR>
+                      <a:noFill/>
+                    </a:lnR>
+                    <a:lnT w="9525" cap="flat" cmpd="sng" algn="ctr">
+                      <a:solidFill>
+                        <a:srgbClr val="D6D6D6"/>
+                      </a:solidFill>
+                      <a:prstDash val="solid"/>
+                      <a:round/>
+                      <a:headEnd type="none" w="med" len="med"/>
+                      <a:tailEnd type="none" w="med" len="med"/>
+                    </a:lnT>
+                    <a:lnB w="9525" cap="flat" cmpd="sng" algn="ctr">
+                      <a:solidFill>
+                        <a:srgbClr val="D6D6D6"/>
+                      </a:solidFill>
+                      <a:prstDash val="solid"/>
+                      <a:round/>
+                      <a:headEnd type="none" w="med" len="med"/>
+                      <a:tailEnd type="none" w="med" len="med"/>
+                    </a:lnB>
+                    <a:noFill/>
+                  </a:tcPr>
+                </a:tc>
+                <a:extLst>
+                  <a:ext uri="{0D108BD9-81ED-4DB2-BD59-A6C34878D82A}">
+                    <a16:rowId xmlns:a16="http://schemas.microsoft.com/office/drawing/2014/main" val="10002"/>
+                  </a:ext>
+                </a:extLst>
+              </a:tr>
+              <a:tr h="170373">
+                <a:tc>
+                  <a:txBody>
+                    <a:bodyPr/>
+                    <a:lstStyle/>
+                    <a:p>
+                      <a:pPr marL="0" algn="l" defTabSz="914400" rtl="0" eaLnBrk="1" latinLnBrk="0" hangingPunct="1"/>
+                      <a:r>
+                        <a:rPr sz="800" b="0" kern="1200">
+                          <a:solidFill>
+                            <a:srgbClr val="0A0A0A"/>
+                          </a:solidFill>
+                          <a:latin typeface="微软雅黑" panose="020B0503020204020204" pitchFamily="34" charset="-122"/>
+                          <a:ea typeface="微软雅黑" panose="020B0503020204020204" pitchFamily="34" charset="-122"/>
+                          <a:cs typeface="+mn-cs"/>
+                        </a:rPr>
+                        <a:t>2026/04/02</a:t>
+                      </a:r>
+                    </a:p>
+                  </a:txBody>
+                  <a:tcPr marL="27432" marR="27432" marT="9144" marB="9144">
+                    <a:lnL>
+                      <a:noFill/>
+                    </a:lnL>
+                    <a:lnR>
+                      <a:noFill/>
+                    </a:lnR>
+                    <a:lnT w="9525" cap="flat" cmpd="sng" algn="ctr">
+                      <a:solidFill>
+                        <a:srgbClr val="D6D6D6"/>
+                      </a:solidFill>
+                      <a:prstDash val="solid"/>
+                      <a:round/>
+                      <a:headEnd type="none" w="med" len="med"/>
+                      <a:tailEnd type="none" w="med" len="med"/>
+                    </a:lnT>
+                    <a:lnB w="9525">
+                      <a:solidFill>
+                        <a:srgbClr val="D6D6D6"/>
+                      </a:solidFill>
+                    </a:lnB>
+                    <a:noFill/>
+                  </a:tcPr>
+                </a:tc>
+                <a:tc>
+                  <a:txBody>
+                    <a:bodyPr/>
+                    <a:lstStyle/>
+                    <a:p>
+                      <a:pPr marL="0" algn="l" defTabSz="914400" rtl="0" eaLnBrk="1" latinLnBrk="0" hangingPunct="1"/>
+                      <a:r>
+                        <a:rPr sz="800" b="0" kern="1200" dirty="0">
+                          <a:solidFill>
+                            <a:srgbClr val="0A0A0A"/>
+                          </a:solidFill>
+                          <a:latin typeface="微软雅黑" panose="020B0503020204020204" pitchFamily="34" charset="-122"/>
+                          <a:ea typeface="微软雅黑" panose="020B0503020204020204" pitchFamily="34" charset="-122"/>
+                          <a:cs typeface="+mn-cs"/>
+                        </a:rPr>
+                        <a:t>CHEMIST WAREHOUSE BRISBANE STORE 123</a:t>
+                      </a:r>
+                    </a:p>
+                  </a:txBody>
+                  <a:tcPr marL="27432" marR="27432" marT="9144" marB="9144">
+                    <a:lnL>
+                      <a:noFill/>
+                    </a:lnL>
+                    <a:lnR>
+                      <a:noFill/>
+                    </a:lnR>
+                    <a:lnT w="9525" cap="flat" cmpd="sng" algn="ctr">
+                      <a:solidFill>
+                        <a:srgbClr val="D6D6D6"/>
+                      </a:solidFill>
+                      <a:prstDash val="solid"/>
+                      <a:round/>
+                      <a:headEnd type="none" w="med" len="med"/>
+                      <a:tailEnd type="none" w="med" len="med"/>
+                    </a:lnT>
+                    <a:lnB w="9525">
+                      <a:solidFill>
+                        <a:srgbClr val="D6D6D6"/>
+                      </a:solidFill>
+                    </a:lnB>
+                    <a:noFill/>
+                  </a:tcPr>
+                </a:tc>
+                <a:tc>
+                  <a:txBody>
+                    <a:bodyPr/>
+                    <a:lstStyle/>
+                    <a:p>
+                      <a:pPr marL="0" algn="l" defTabSz="914400" rtl="0" eaLnBrk="1" latinLnBrk="0" hangingPunct="1"/>
+                      <a:r>
+                        <a:rPr sz="800" b="0" kern="1200" dirty="0">
+                          <a:solidFill>
+                            <a:srgbClr val="0A0A0A"/>
+                          </a:solidFill>
+                          <a:latin typeface="微软雅黑" panose="020B0503020204020204" pitchFamily="34" charset="-122"/>
+                          <a:ea typeface="微软雅黑" panose="020B0503020204020204" pitchFamily="34" charset="-122"/>
+                          <a:cs typeface="+mn-cs"/>
+                        </a:rPr>
+                        <a:t>A$35.90</a:t>
+                      </a:r>
+                    </a:p>
+                  </a:txBody>
+                  <a:tcPr marL="27432" marR="27432" marT="9144" marB="9144">
+                    <a:lnL>
+                      <a:noFill/>
+                    </a:lnL>
+                    <a:lnR>
+                      <a:noFill/>
+                    </a:lnR>
+                    <a:lnT w="9525" cap="flat" cmpd="sng" algn="ctr">
+                      <a:solidFill>
+                        <a:srgbClr val="D6D6D6"/>
+                      </a:solidFill>
+                      <a:prstDash val="solid"/>
+                      <a:round/>
+                      <a:headEnd type="none" w="med" len="med"/>
+                      <a:tailEnd type="none" w="med" len="med"/>
+                    </a:lnT>
+                    <a:lnB w="9525" cap="flat" cmpd="sng" algn="ctr">
+                      <a:solidFill>
+                        <a:srgbClr val="D6D6D6"/>
+                      </a:solidFill>
+                      <a:prstDash val="solid"/>
+                      <a:round/>
+                      <a:headEnd type="none" w="med" len="med"/>
+                      <a:tailEnd type="none" w="med" len="med"/>
+                    </a:lnB>
+                    <a:noFill/>
+                  </a:tcPr>
+                </a:tc>
+                <a:tc>
+                  <a:txBody>
+                    <a:bodyPr/>
+                    <a:lstStyle/>
+                    <a:p>
+                      <a:pPr marL="0" algn="l" defTabSz="914400" rtl="0" eaLnBrk="1" latinLnBrk="0" hangingPunct="1"/>
+                      <a:r>
+                        <a:rPr sz="800" b="0" kern="1200">
+                          <a:solidFill>
+                            <a:srgbClr val="0A0A0A"/>
+                          </a:solidFill>
+                          <a:latin typeface="微软雅黑" panose="020B0503020204020204" pitchFamily="34" charset="-122"/>
+                          <a:ea typeface="微软雅黑" panose="020B0503020204020204" pitchFamily="34" charset="-122"/>
+                          <a:cs typeface="+mn-cs"/>
+                        </a:rPr>
+                        <a:t>Chemist Warehouse</a:t>
+                      </a:r>
+                    </a:p>
+                  </a:txBody>
+                  <a:tcPr marL="27432" marR="27432" marT="9144" marB="9144">
+                    <a:lnL>
+                      <a:noFill/>
+                    </a:lnL>
+                    <a:lnR>
+                      <a:noFill/>
+                    </a:lnR>
+                    <a:lnT w="9525" cap="flat" cmpd="sng" algn="ctr">
+                      <a:solidFill>
+                        <a:srgbClr val="D6D6D6"/>
+                      </a:solidFill>
+                      <a:prstDash val="solid"/>
+                      <a:round/>
+                      <a:headEnd type="none" w="med" len="med"/>
+                      <a:tailEnd type="none" w="med" len="med"/>
+                    </a:lnT>
+                    <a:lnB w="9525">
+                      <a:solidFill>
+                        <a:srgbClr val="D6D6D6"/>
+                      </a:solidFill>
+                    </a:lnB>
+                    <a:noFill/>
+                  </a:tcPr>
+                </a:tc>
+                <a:tc>
+                  <a:txBody>
+                    <a:bodyPr/>
+                    <a:lstStyle/>
+                    <a:p>
+                      <a:pPr marL="0" algn="l" defTabSz="914400" rtl="0" eaLnBrk="1" latinLnBrk="0" hangingPunct="1"/>
+                      <a:r>
+                        <a:rPr sz="800" b="0" kern="1200" dirty="0" err="1">
+                          <a:solidFill>
+                            <a:srgbClr val="0A0A0A"/>
+                          </a:solidFill>
+                          <a:latin typeface="微软雅黑" panose="020B0503020204020204" pitchFamily="34" charset="-122"/>
+                          <a:ea typeface="微软雅黑" panose="020B0503020204020204" pitchFamily="34" charset="-122"/>
+                          <a:cs typeface="+mn-cs"/>
+                        </a:rPr>
+                        <a:t>商户企业</a:t>
+                      </a:r>
+                      <a:endParaRPr sz="800" b="0" kern="1200" dirty="0">
+                        <a:solidFill>
+                          <a:srgbClr val="0A0A0A"/>
+                        </a:solidFill>
+                        <a:latin typeface="微软雅黑" panose="020B0503020204020204" pitchFamily="34" charset="-122"/>
+                        <a:ea typeface="微软雅黑" panose="020B0503020204020204" pitchFamily="34" charset="-122"/>
+                        <a:cs typeface="+mn-cs"/>
+                      </a:endParaRPr>
+                    </a:p>
+                  </a:txBody>
+                  <a:tcPr marL="27432" marR="27432" marT="9144" marB="9144">
+                    <a:lnL>
+                      <a:noFill/>
+                    </a:lnL>
+                    <a:lnR>
+                      <a:noFill/>
+                    </a:lnR>
+                    <a:lnT w="9525" cap="flat" cmpd="sng" algn="ctr">
+                      <a:solidFill>
+                        <a:srgbClr val="D6D6D6"/>
+                      </a:solidFill>
+                      <a:prstDash val="solid"/>
+                      <a:round/>
+                      <a:headEnd type="none" w="med" len="med"/>
+                      <a:tailEnd type="none" w="med" len="med"/>
+                    </a:lnT>
+                    <a:lnB w="9525" cap="flat" cmpd="sng" algn="ctr">
+                      <a:solidFill>
+                        <a:srgbClr val="D6D6D6"/>
+                      </a:solidFill>
+                      <a:prstDash val="solid"/>
+                      <a:round/>
+                      <a:headEnd type="none" w="med" len="med"/>
+                      <a:tailEnd type="none" w="med" len="med"/>
+                    </a:lnB>
+                    <a:noFill/>
+                  </a:tcPr>
+                </a:tc>
+                <a:tc>
+                  <a:txBody>
+                    <a:bodyPr/>
+                    <a:lstStyle/>
+                    <a:p>
+                      <a:pPr marL="0" algn="l" defTabSz="914400" rtl="0" eaLnBrk="1" latinLnBrk="0" hangingPunct="1"/>
+                      <a:r>
+                        <a:rPr sz="800" b="0" kern="1200">
+                          <a:solidFill>
+                            <a:srgbClr val="0A0A0A"/>
+                          </a:solidFill>
+                          <a:latin typeface="微软雅黑" panose="020B0503020204020204" pitchFamily="34" charset="-122"/>
+                          <a:ea typeface="微软雅黑" panose="020B0503020204020204" pitchFamily="34" charset="-122"/>
+                          <a:cs typeface="+mn-cs"/>
+                        </a:rPr>
+                        <a:t>消费</a:t>
+                      </a:r>
+                    </a:p>
+                  </a:txBody>
+                  <a:tcPr marL="27432" marR="27432" marT="9144" marB="9144">
+                    <a:lnL>
+                      <a:noFill/>
+                    </a:lnL>
+                    <a:lnR>
+                      <a:noFill/>
+                    </a:lnR>
+                    <a:lnT w="9525" cap="flat" cmpd="sng" algn="ctr">
+                      <a:solidFill>
+                        <a:srgbClr val="D6D6D6"/>
+                      </a:solidFill>
+                      <a:prstDash val="solid"/>
+                      <a:round/>
+                      <a:headEnd type="none" w="med" len="med"/>
+                      <a:tailEnd type="none" w="med" len="med"/>
+                    </a:lnT>
+                    <a:lnB w="9525" cap="flat" cmpd="sng" algn="ctr">
+                      <a:solidFill>
+                        <a:srgbClr val="D6D6D6"/>
+                      </a:solidFill>
+                      <a:prstDash val="solid"/>
+                      <a:round/>
+                      <a:headEnd type="none" w="med" len="med"/>
+                      <a:tailEnd type="none" w="med" len="med"/>
+                    </a:lnB>
+                    <a:noFill/>
+                  </a:tcPr>
+                </a:tc>
+                <a:tc>
+                  <a:txBody>
+                    <a:bodyPr/>
+                    <a:lstStyle/>
+                    <a:p>
+                      <a:pPr marL="0" algn="l" defTabSz="914400" rtl="0" eaLnBrk="1" latinLnBrk="0" hangingPunct="1"/>
+                      <a:r>
+                        <a:rPr sz="800" b="0" kern="1200">
+                          <a:solidFill>
+                            <a:srgbClr val="0A0A0A"/>
+                          </a:solidFill>
+                          <a:latin typeface="微软雅黑" panose="020B0503020204020204" pitchFamily="34" charset="-122"/>
+                          <a:ea typeface="微软雅黑" panose="020B0503020204020204" pitchFamily="34" charset="-122"/>
+                          <a:cs typeface="+mn-cs"/>
+                        </a:rPr>
+                        <a:t>商户知识库标准名匹配</a:t>
+                      </a:r>
+                    </a:p>
+                  </a:txBody>
+                  <a:tcPr marL="27432" marR="27432" marT="9144" marB="9144">
+                    <a:lnL>
+                      <a:noFill/>
+                    </a:lnL>
+                    <a:lnR>
+                      <a:noFill/>
+                    </a:lnR>
+                    <a:lnT w="9525" cap="flat" cmpd="sng" algn="ctr">
+                      <a:solidFill>
+                        <a:srgbClr val="D6D6D6"/>
+                      </a:solidFill>
+                      <a:prstDash val="solid"/>
+                      <a:round/>
+                      <a:headEnd type="none" w="med" len="med"/>
+                      <a:tailEnd type="none" w="med" len="med"/>
+                    </a:lnT>
+                    <a:lnB w="9525" cap="flat" cmpd="sng" algn="ctr">
+                      <a:solidFill>
+                        <a:srgbClr val="D6D6D6"/>
+                      </a:solidFill>
+                      <a:prstDash val="solid"/>
+                      <a:round/>
+                      <a:headEnd type="none" w="med" len="med"/>
+                      <a:tailEnd type="none" w="med" len="med"/>
+                    </a:lnB>
+                    <a:noFill/>
+                  </a:tcPr>
+                </a:tc>
+                <a:extLst>
+                  <a:ext uri="{0D108BD9-81ED-4DB2-BD59-A6C34878D82A}">
+                    <a16:rowId xmlns:a16="http://schemas.microsoft.com/office/drawing/2014/main" val="10003"/>
+                  </a:ext>
+                </a:extLst>
+              </a:tr>
+              <a:tr h="170373">
+                <a:tc>
+                  <a:txBody>
+                    <a:bodyPr/>
+                    <a:lstStyle/>
+                    <a:p>
+                      <a:pPr marL="0" algn="l" defTabSz="914400" rtl="0" eaLnBrk="1" latinLnBrk="0" hangingPunct="1"/>
+                      <a:r>
+                        <a:rPr sz="800" b="0" kern="1200">
+                          <a:solidFill>
+                            <a:srgbClr val="0A0A0A"/>
+                          </a:solidFill>
+                          <a:latin typeface="微软雅黑" panose="020B0503020204020204" pitchFamily="34" charset="-122"/>
+                          <a:ea typeface="微软雅黑" panose="020B0503020204020204" pitchFamily="34" charset="-122"/>
+                          <a:cs typeface="+mn-cs"/>
+                        </a:rPr>
+                        <a:t>2026/04/08</a:t>
+                      </a:r>
+                    </a:p>
+                  </a:txBody>
+                  <a:tcPr marL="27432" marR="27432" marT="9144" marB="9144">
+                    <a:lnL>
+                      <a:noFill/>
+                    </a:lnL>
+                    <a:lnR>
+                      <a:noFill/>
+                    </a:lnR>
+                    <a:lnT w="9525" cap="flat" cmpd="sng" algn="ctr">
+                      <a:solidFill>
+                        <a:srgbClr val="D6D6D6"/>
+                      </a:solidFill>
+                      <a:prstDash val="solid"/>
+                      <a:round/>
+                      <a:headEnd type="none" w="med" len="med"/>
+                      <a:tailEnd type="none" w="med" len="med"/>
+                    </a:lnT>
+                    <a:lnB w="9525">
+                      <a:solidFill>
+                        <a:srgbClr val="D6D6D6"/>
+                      </a:solidFill>
+                    </a:lnB>
+                    <a:noFill/>
+                  </a:tcPr>
+                </a:tc>
+                <a:tc>
+                  <a:txBody>
+                    <a:bodyPr/>
+                    <a:lstStyle/>
+                    <a:p>
+                      <a:pPr marL="0" algn="l" defTabSz="914400" rtl="0" eaLnBrk="1" latinLnBrk="0" hangingPunct="1"/>
+                      <a:r>
+                        <a:rPr sz="800" b="0" kern="1200" dirty="0">
+                          <a:solidFill>
+                            <a:srgbClr val="0A0A0A"/>
+                          </a:solidFill>
+                          <a:latin typeface="微软雅黑" panose="020B0503020204020204" pitchFamily="34" charset="-122"/>
+                          <a:ea typeface="微软雅黑" panose="020B0503020204020204" pitchFamily="34" charset="-122"/>
+                          <a:cs typeface="+mn-cs"/>
+                        </a:rPr>
+                        <a:t>AMZNPRIMEA*4V3KQ AMAZON.COM.AU</a:t>
+                      </a:r>
+                    </a:p>
+                  </a:txBody>
+                  <a:tcPr marL="27432" marR="27432" marT="9144" marB="9144">
+                    <a:lnL>
+                      <a:noFill/>
+                    </a:lnL>
+                    <a:lnR>
+                      <a:noFill/>
+                    </a:lnR>
+                    <a:lnT w="9525" cap="flat" cmpd="sng" algn="ctr">
+                      <a:solidFill>
+                        <a:srgbClr val="D6D6D6"/>
+                      </a:solidFill>
+                      <a:prstDash val="solid"/>
+                      <a:round/>
+                      <a:headEnd type="none" w="med" len="med"/>
+                      <a:tailEnd type="none" w="med" len="med"/>
+                    </a:lnT>
+                    <a:lnB w="9525">
+                      <a:solidFill>
+                        <a:srgbClr val="D6D6D6"/>
+                      </a:solidFill>
+                    </a:lnB>
+                    <a:noFill/>
+                  </a:tcPr>
+                </a:tc>
+                <a:tc>
+                  <a:txBody>
+                    <a:bodyPr/>
+                    <a:lstStyle/>
+                    <a:p>
+                      <a:pPr marL="0" algn="l" defTabSz="914400" rtl="0" eaLnBrk="1" latinLnBrk="0" hangingPunct="1"/>
+                      <a:r>
+                        <a:rPr sz="800" b="0" kern="1200" dirty="0">
+                          <a:solidFill>
+                            <a:srgbClr val="0A0A0A"/>
+                          </a:solidFill>
+                          <a:latin typeface="微软雅黑" panose="020B0503020204020204" pitchFamily="34" charset="-122"/>
+                          <a:ea typeface="微软雅黑" panose="020B0503020204020204" pitchFamily="34" charset="-122"/>
+                          <a:cs typeface="+mn-cs"/>
+                        </a:rPr>
+                        <a:t>A$8.99</a:t>
+                      </a:r>
+                    </a:p>
+                  </a:txBody>
+                  <a:tcPr marL="27432" marR="27432" marT="9144" marB="9144">
+                    <a:lnL>
+                      <a:noFill/>
+                    </a:lnL>
+                    <a:lnR>
+                      <a:noFill/>
+                    </a:lnR>
+                    <a:lnT w="9525" cap="flat" cmpd="sng" algn="ctr">
+                      <a:solidFill>
+                        <a:srgbClr val="D6D6D6"/>
+                      </a:solidFill>
+                      <a:prstDash val="solid"/>
+                      <a:round/>
+                      <a:headEnd type="none" w="med" len="med"/>
+                      <a:tailEnd type="none" w="med" len="med"/>
+                    </a:lnT>
+                    <a:lnB w="9525" cap="flat" cmpd="sng" algn="ctr">
+                      <a:solidFill>
+                        <a:srgbClr val="D6D6D6"/>
+                      </a:solidFill>
+                      <a:prstDash val="solid"/>
+                      <a:round/>
+                      <a:headEnd type="none" w="med" len="med"/>
+                      <a:tailEnd type="none" w="med" len="med"/>
+                    </a:lnB>
+                    <a:noFill/>
+                  </a:tcPr>
+                </a:tc>
+                <a:tc>
+                  <a:txBody>
+                    <a:bodyPr/>
+                    <a:lstStyle/>
+                    <a:p>
+                      <a:pPr marL="0" algn="l" defTabSz="914400" rtl="0" eaLnBrk="1" latinLnBrk="0" hangingPunct="1"/>
+                      <a:r>
+                        <a:rPr sz="800" b="0" kern="1200">
+                          <a:solidFill>
+                            <a:srgbClr val="0A0A0A"/>
+                          </a:solidFill>
+                          <a:latin typeface="微软雅黑" panose="020B0503020204020204" pitchFamily="34" charset="-122"/>
+                          <a:ea typeface="微软雅黑" panose="020B0503020204020204" pitchFamily="34" charset="-122"/>
+                          <a:cs typeface="+mn-cs"/>
+                        </a:rPr>
+                        <a:t>Amazon Prime</a:t>
+                      </a:r>
+                    </a:p>
+                  </a:txBody>
+                  <a:tcPr marL="27432" marR="27432" marT="9144" marB="9144">
+                    <a:lnL>
+                      <a:noFill/>
+                    </a:lnL>
+                    <a:lnR>
+                      <a:noFill/>
+                    </a:lnR>
+                    <a:lnT w="9525" cap="flat" cmpd="sng" algn="ctr">
+                      <a:solidFill>
+                        <a:srgbClr val="D6D6D6"/>
+                      </a:solidFill>
+                      <a:prstDash val="solid"/>
+                      <a:round/>
+                      <a:headEnd type="none" w="med" len="med"/>
+                      <a:tailEnd type="none" w="med" len="med"/>
+                    </a:lnT>
+                    <a:lnB w="9525">
+                      <a:solidFill>
+                        <a:srgbClr val="D6D6D6"/>
+                      </a:solidFill>
+                    </a:lnB>
+                    <a:noFill/>
+                  </a:tcPr>
+                </a:tc>
+                <a:tc>
+                  <a:txBody>
+                    <a:bodyPr/>
+                    <a:lstStyle/>
+                    <a:p>
+                      <a:pPr marL="0" algn="l" defTabSz="914400" rtl="0" eaLnBrk="1" latinLnBrk="0" hangingPunct="1"/>
+                      <a:r>
+                        <a:rPr sz="800" b="0" kern="1200">
+                          <a:solidFill>
+                            <a:srgbClr val="0A0A0A"/>
+                          </a:solidFill>
+                          <a:latin typeface="微软雅黑" panose="020B0503020204020204" pitchFamily="34" charset="-122"/>
+                          <a:ea typeface="微软雅黑" panose="020B0503020204020204" pitchFamily="34" charset="-122"/>
+                          <a:cs typeface="+mn-cs"/>
+                        </a:rPr>
+                        <a:t>商户企业</a:t>
+                      </a:r>
+                    </a:p>
+                  </a:txBody>
+                  <a:tcPr marL="27432" marR="27432" marT="9144" marB="9144">
+                    <a:lnL>
+                      <a:noFill/>
+                    </a:lnL>
+                    <a:lnR>
+                      <a:noFill/>
+                    </a:lnR>
+                    <a:lnT w="9525" cap="flat" cmpd="sng" algn="ctr">
+                      <a:solidFill>
+                        <a:srgbClr val="D6D6D6"/>
+                      </a:solidFill>
+                      <a:prstDash val="solid"/>
+                      <a:round/>
+                      <a:headEnd type="none" w="med" len="med"/>
+                      <a:tailEnd type="none" w="med" len="med"/>
+                    </a:lnT>
+                    <a:lnB w="9525" cap="flat" cmpd="sng" algn="ctr">
+                      <a:solidFill>
+                        <a:srgbClr val="D6D6D6"/>
+                      </a:solidFill>
+                      <a:prstDash val="solid"/>
+                      <a:round/>
+                      <a:headEnd type="none" w="med" len="med"/>
+                      <a:tailEnd type="none" w="med" len="med"/>
+                    </a:lnB>
+                    <a:noFill/>
+                  </a:tcPr>
+                </a:tc>
+                <a:tc>
+                  <a:txBody>
+                    <a:bodyPr/>
+                    <a:lstStyle/>
+                    <a:p>
+                      <a:pPr marL="0" algn="l" defTabSz="914400" rtl="0" eaLnBrk="1" latinLnBrk="0" hangingPunct="1"/>
+                      <a:r>
+                        <a:rPr sz="800" b="0" kern="1200">
+                          <a:solidFill>
+                            <a:srgbClr val="0A0A0A"/>
+                          </a:solidFill>
+                          <a:latin typeface="微软雅黑" panose="020B0503020204020204" pitchFamily="34" charset="-122"/>
+                          <a:ea typeface="微软雅黑" panose="020B0503020204020204" pitchFamily="34" charset="-122"/>
+                          <a:cs typeface="+mn-cs"/>
+                        </a:rPr>
+                        <a:t>订阅</a:t>
+                      </a:r>
+                    </a:p>
+                  </a:txBody>
+                  <a:tcPr marL="27432" marR="27432" marT="9144" marB="9144">
+                    <a:lnL>
+                      <a:noFill/>
+                    </a:lnL>
+                    <a:lnR>
+                      <a:noFill/>
+                    </a:lnR>
+                    <a:lnT w="9525" cap="flat" cmpd="sng" algn="ctr">
+                      <a:solidFill>
+                        <a:srgbClr val="D6D6D6"/>
+                      </a:solidFill>
+                      <a:prstDash val="solid"/>
+                      <a:round/>
+                      <a:headEnd type="none" w="med" len="med"/>
+                      <a:tailEnd type="none" w="med" len="med"/>
+                    </a:lnT>
+                    <a:lnB w="9525" cap="flat" cmpd="sng" algn="ctr">
+                      <a:solidFill>
+                        <a:srgbClr val="D6D6D6"/>
+                      </a:solidFill>
+                      <a:prstDash val="solid"/>
+                      <a:round/>
+                      <a:headEnd type="none" w="med" len="med"/>
+                      <a:tailEnd type="none" w="med" len="med"/>
+                    </a:lnB>
+                    <a:noFill/>
+                  </a:tcPr>
+                </a:tc>
+                <a:tc>
+                  <a:txBody>
+                    <a:bodyPr/>
+                    <a:lstStyle/>
+                    <a:p>
+                      <a:pPr marL="0" algn="l" defTabSz="914400" rtl="0" eaLnBrk="1" latinLnBrk="0" hangingPunct="1"/>
+                      <a:r>
+                        <a:rPr sz="800" b="0" kern="1200">
+                          <a:solidFill>
+                            <a:srgbClr val="0A0A0A"/>
+                          </a:solidFill>
+                          <a:latin typeface="微软雅黑" panose="020B0503020204020204" pitchFamily="34" charset="-122"/>
+                          <a:ea typeface="微软雅黑" panose="020B0503020204020204" pitchFamily="34" charset="-122"/>
+                          <a:cs typeface="+mn-cs"/>
+                        </a:rPr>
+                        <a:t>商户知识库标准名匹配</a:t>
+                      </a:r>
+                    </a:p>
+                  </a:txBody>
+                  <a:tcPr marL="27432" marR="27432" marT="9144" marB="9144">
+                    <a:lnL>
+                      <a:noFill/>
+                    </a:lnL>
+                    <a:lnR>
+                      <a:noFill/>
+                    </a:lnR>
+                    <a:lnT w="9525" cap="flat" cmpd="sng" algn="ctr">
+                      <a:solidFill>
+                        <a:srgbClr val="D6D6D6"/>
+                      </a:solidFill>
+                      <a:prstDash val="solid"/>
+                      <a:round/>
+                      <a:headEnd type="none" w="med" len="med"/>
+                      <a:tailEnd type="none" w="med" len="med"/>
+                    </a:lnT>
+                    <a:lnB w="9525" cap="flat" cmpd="sng" algn="ctr">
+                      <a:solidFill>
+                        <a:srgbClr val="D6D6D6"/>
+                      </a:solidFill>
+                      <a:prstDash val="solid"/>
+                      <a:round/>
+                      <a:headEnd type="none" w="med" len="med"/>
+                      <a:tailEnd type="none" w="med" len="med"/>
+                    </a:lnB>
+                    <a:noFill/>
+                  </a:tcPr>
+                </a:tc>
+                <a:extLst>
+                  <a:ext uri="{0D108BD9-81ED-4DB2-BD59-A6C34878D82A}">
+                    <a16:rowId xmlns:a16="http://schemas.microsoft.com/office/drawing/2014/main" val="10004"/>
+                  </a:ext>
+                </a:extLst>
+              </a:tr>
+              <a:tr h="170373">
+                <a:tc>
+                  <a:txBody>
+                    <a:bodyPr/>
+                    <a:lstStyle/>
+                    <a:p>
+                      <a:pPr marL="0" algn="l" defTabSz="914400" rtl="0" eaLnBrk="1" latinLnBrk="0" hangingPunct="1"/>
+                      <a:r>
+                        <a:rPr sz="800" b="0" kern="1200">
+                          <a:solidFill>
+                            <a:srgbClr val="0A0A0A"/>
+                          </a:solidFill>
+                          <a:latin typeface="微软雅黑" panose="020B0503020204020204" pitchFamily="34" charset="-122"/>
+                          <a:ea typeface="微软雅黑" panose="020B0503020204020204" pitchFamily="34" charset="-122"/>
+                          <a:cs typeface="+mn-cs"/>
+                        </a:rPr>
+                        <a:t>2026/04/10</a:t>
+                      </a:r>
+                    </a:p>
+                  </a:txBody>
+                  <a:tcPr marL="27432" marR="27432" marT="9144" marB="9144">
+                    <a:lnL>
+                      <a:noFill/>
+                    </a:lnL>
+                    <a:lnR>
+                      <a:noFill/>
+                    </a:lnR>
+                    <a:lnT w="9525" cap="flat" cmpd="sng" algn="ctr">
+                      <a:solidFill>
+                        <a:srgbClr val="D6D6D6"/>
+                      </a:solidFill>
+                      <a:prstDash val="solid"/>
+                      <a:round/>
+                      <a:headEnd type="none" w="med" len="med"/>
+                      <a:tailEnd type="none" w="med" len="med"/>
+                    </a:lnT>
+                    <a:lnB w="9525">
+                      <a:solidFill>
+                        <a:srgbClr val="D6D6D6"/>
+                      </a:solidFill>
+                    </a:lnB>
+                    <a:noFill/>
+                  </a:tcPr>
+                </a:tc>
+                <a:tc>
+                  <a:txBody>
+                    <a:bodyPr/>
+                    <a:lstStyle/>
+                    <a:p>
+                      <a:pPr marL="0" algn="l" defTabSz="914400" rtl="0" eaLnBrk="1" latinLnBrk="0" hangingPunct="1"/>
+                      <a:r>
+                        <a:rPr sz="800" b="0" kern="1200" dirty="0">
+                          <a:solidFill>
+                            <a:srgbClr val="0A0A0A"/>
+                          </a:solidFill>
+                          <a:latin typeface="微软雅黑" panose="020B0503020204020204" pitchFamily="34" charset="-122"/>
+                          <a:ea typeface="微软雅黑" panose="020B0503020204020204" pitchFamily="34" charset="-122"/>
+                          <a:cs typeface="+mn-cs"/>
+                        </a:rPr>
+                        <a:t>WAGES ACME PTY LTD FORTNIGHTLY PAY</a:t>
+                      </a:r>
+                    </a:p>
+                  </a:txBody>
+                  <a:tcPr marL="27432" marR="27432" marT="9144" marB="9144">
+                    <a:lnL>
+                      <a:noFill/>
+                    </a:lnL>
+                    <a:lnR>
+                      <a:noFill/>
+                    </a:lnR>
+                    <a:lnT w="9525" cap="flat" cmpd="sng" algn="ctr">
+                      <a:solidFill>
+                        <a:srgbClr val="D6D6D6"/>
+                      </a:solidFill>
+                      <a:prstDash val="solid"/>
+                      <a:round/>
+                      <a:headEnd type="none" w="med" len="med"/>
+                      <a:tailEnd type="none" w="med" len="med"/>
+                    </a:lnT>
+                    <a:lnB w="9525">
+                      <a:solidFill>
+                        <a:srgbClr val="D6D6D6"/>
+                      </a:solidFill>
+                    </a:lnB>
+                    <a:noFill/>
+                  </a:tcPr>
+                </a:tc>
+                <a:tc>
+                  <a:txBody>
+                    <a:bodyPr/>
+                    <a:lstStyle/>
+                    <a:p>
+                      <a:pPr marL="0" algn="l" defTabSz="914400" rtl="0" eaLnBrk="1" latinLnBrk="0" hangingPunct="1"/>
+                      <a:r>
+                        <a:rPr sz="800" b="0" kern="1200" dirty="0">
+                          <a:solidFill>
+                            <a:srgbClr val="0A0A0A"/>
+                          </a:solidFill>
+                          <a:latin typeface="微软雅黑" panose="020B0503020204020204" pitchFamily="34" charset="-122"/>
+                          <a:ea typeface="微软雅黑" panose="020B0503020204020204" pitchFamily="34" charset="-122"/>
+                          <a:cs typeface="+mn-cs"/>
+                        </a:rPr>
+                        <a:t>A$3,420.50</a:t>
+                      </a:r>
+                    </a:p>
+                  </a:txBody>
+                  <a:tcPr marL="27432" marR="27432" marT="9144" marB="9144">
+                    <a:lnL>
+                      <a:noFill/>
+                    </a:lnL>
+                    <a:lnR>
+                      <a:noFill/>
+                    </a:lnR>
+                    <a:lnT w="9525" cap="flat" cmpd="sng" algn="ctr">
+                      <a:solidFill>
+                        <a:srgbClr val="D6D6D6"/>
+                      </a:solidFill>
+                      <a:prstDash val="solid"/>
+                      <a:round/>
+                      <a:headEnd type="none" w="med" len="med"/>
+                      <a:tailEnd type="none" w="med" len="med"/>
+                    </a:lnT>
+                    <a:lnB w="9525">
+                      <a:solidFill>
+                        <a:srgbClr val="D6D6D6"/>
+                      </a:solidFill>
+                    </a:lnB>
+                    <a:noFill/>
+                  </a:tcPr>
+                </a:tc>
+                <a:tc>
+                  <a:txBody>
+                    <a:bodyPr/>
+                    <a:lstStyle/>
+                    <a:p>
+                      <a:pPr marL="0" algn="l" defTabSz="914400" rtl="0" eaLnBrk="1" latinLnBrk="0" hangingPunct="1"/>
+                      <a:r>
+                        <a:rPr sz="800" b="0" kern="1200">
+                          <a:solidFill>
+                            <a:srgbClr val="0A0A0A"/>
+                          </a:solidFill>
+                          <a:latin typeface="微软雅黑" panose="020B0503020204020204" pitchFamily="34" charset="-122"/>
+                          <a:ea typeface="微软雅黑" panose="020B0503020204020204" pitchFamily="34" charset="-122"/>
+                          <a:cs typeface="+mn-cs"/>
+                        </a:rPr>
+                        <a:t>ACME PTY LTD</a:t>
+                      </a:r>
+                    </a:p>
+                  </a:txBody>
+                  <a:tcPr marL="27432" marR="27432" marT="9144" marB="9144">
+                    <a:lnL>
+                      <a:noFill/>
+                    </a:lnL>
+                    <a:lnR>
+                      <a:noFill/>
+                    </a:lnR>
+                    <a:lnT w="9525" cap="flat" cmpd="sng" algn="ctr">
+                      <a:solidFill>
+                        <a:srgbClr val="D6D6D6"/>
+                      </a:solidFill>
+                      <a:prstDash val="solid"/>
+                      <a:round/>
+                      <a:headEnd type="none" w="med" len="med"/>
+                      <a:tailEnd type="none" w="med" len="med"/>
+                    </a:lnT>
+                    <a:lnB w="9525">
+                      <a:solidFill>
+                        <a:srgbClr val="D6D6D6"/>
+                      </a:solidFill>
+                    </a:lnB>
+                    <a:noFill/>
+                  </a:tcPr>
+                </a:tc>
+                <a:tc>
+                  <a:txBody>
+                    <a:bodyPr/>
+                    <a:lstStyle/>
+                    <a:p>
+                      <a:pPr marL="0" algn="l" defTabSz="914400" rtl="0" eaLnBrk="1" latinLnBrk="0" hangingPunct="1"/>
+                      <a:r>
+                        <a:rPr sz="800" b="0" kern="1200">
+                          <a:solidFill>
+                            <a:srgbClr val="0A0A0A"/>
+                          </a:solidFill>
+                          <a:latin typeface="微软雅黑" panose="020B0503020204020204" pitchFamily="34" charset="-122"/>
+                          <a:ea typeface="微软雅黑" panose="020B0503020204020204" pitchFamily="34" charset="-122"/>
+                          <a:cs typeface="+mn-cs"/>
+                        </a:rPr>
+                        <a:t>雇主 / 收入付款方</a:t>
+                      </a:r>
+                    </a:p>
+                  </a:txBody>
+                  <a:tcPr marL="27432" marR="27432" marT="9144" marB="9144">
+                    <a:lnL>
+                      <a:noFill/>
+                    </a:lnL>
+                    <a:lnR>
+                      <a:noFill/>
+                    </a:lnR>
+                    <a:lnT w="9525" cap="flat" cmpd="sng" algn="ctr">
+                      <a:solidFill>
+                        <a:srgbClr val="D6D6D6"/>
+                      </a:solidFill>
+                      <a:prstDash val="solid"/>
+                      <a:round/>
+                      <a:headEnd type="none" w="med" len="med"/>
+                      <a:tailEnd type="none" w="med" len="med"/>
+                    </a:lnT>
+                    <a:lnB w="9525">
+                      <a:solidFill>
+                        <a:srgbClr val="D6D6D6"/>
+                      </a:solidFill>
+                    </a:lnB>
+                    <a:noFill/>
+                  </a:tcPr>
+                </a:tc>
+                <a:tc>
+                  <a:txBody>
+                    <a:bodyPr/>
+                    <a:lstStyle/>
+                    <a:p>
+                      <a:pPr marL="0" algn="l" defTabSz="914400" rtl="0" eaLnBrk="1" latinLnBrk="0" hangingPunct="1"/>
+                      <a:r>
+                        <a:rPr sz="800" b="0" kern="1200">
+                          <a:solidFill>
+                            <a:srgbClr val="0A0A0A"/>
+                          </a:solidFill>
+                          <a:latin typeface="微软雅黑" panose="020B0503020204020204" pitchFamily="34" charset="-122"/>
+                          <a:ea typeface="微软雅黑" panose="020B0503020204020204" pitchFamily="34" charset="-122"/>
+                          <a:cs typeface="+mn-cs"/>
+                        </a:rPr>
+                        <a:t>收入</a:t>
+                      </a:r>
+                    </a:p>
+                  </a:txBody>
+                  <a:tcPr marL="27432" marR="27432" marT="9144" marB="9144">
+                    <a:lnL>
+                      <a:noFill/>
+                    </a:lnL>
+                    <a:lnR>
+                      <a:noFill/>
+                    </a:lnR>
+                    <a:lnT w="9525" cap="flat" cmpd="sng" algn="ctr">
+                      <a:solidFill>
+                        <a:srgbClr val="D6D6D6"/>
+                      </a:solidFill>
+                      <a:prstDash val="solid"/>
+                      <a:round/>
+                      <a:headEnd type="none" w="med" len="med"/>
+                      <a:tailEnd type="none" w="med" len="med"/>
+                    </a:lnT>
+                    <a:lnB w="9525">
+                      <a:solidFill>
+                        <a:srgbClr val="D6D6D6"/>
+                      </a:solidFill>
+                    </a:lnB>
+                    <a:noFill/>
+                  </a:tcPr>
+                </a:tc>
+                <a:tc>
+                  <a:txBody>
+                    <a:bodyPr/>
+                    <a:lstStyle/>
+                    <a:p>
+                      <a:pPr marL="0" algn="l" defTabSz="914400" rtl="0" eaLnBrk="1" latinLnBrk="0" hangingPunct="1"/>
+                      <a:r>
+                        <a:rPr sz="800" b="0" kern="1200" dirty="0" err="1">
+                          <a:solidFill>
+                            <a:srgbClr val="0A0A0A"/>
+                          </a:solidFill>
+                          <a:latin typeface="微软雅黑" panose="020B0503020204020204" pitchFamily="34" charset="-122"/>
+                          <a:ea typeface="微软雅黑" panose="020B0503020204020204" pitchFamily="34" charset="-122"/>
+                          <a:cs typeface="+mn-cs"/>
+                        </a:rPr>
+                        <a:t>工资文本模式</a:t>
+                      </a:r>
+                      <a:r>
+                        <a:rPr sz="800" b="0" kern="1200" dirty="0">
+                          <a:solidFill>
+                            <a:srgbClr val="0A0A0A"/>
+                          </a:solidFill>
+                          <a:latin typeface="微软雅黑" panose="020B0503020204020204" pitchFamily="34" charset="-122"/>
+                          <a:ea typeface="微软雅黑" panose="020B0503020204020204" pitchFamily="34" charset="-122"/>
+                          <a:cs typeface="+mn-cs"/>
+                        </a:rPr>
+                        <a:t> + </a:t>
+                      </a:r>
+                      <a:r>
+                        <a:rPr sz="800" b="0" kern="1200" dirty="0" err="1">
+                          <a:solidFill>
+                            <a:srgbClr val="0A0A0A"/>
+                          </a:solidFill>
+                          <a:latin typeface="微软雅黑" panose="020B0503020204020204" pitchFamily="34" charset="-122"/>
+                          <a:ea typeface="微软雅黑" panose="020B0503020204020204" pitchFamily="34" charset="-122"/>
+                          <a:cs typeface="+mn-cs"/>
+                        </a:rPr>
+                        <a:t>双周周期</a:t>
+                      </a:r>
+                      <a:r>
+                        <a:rPr sz="800" b="0" kern="1200" dirty="0">
+                          <a:solidFill>
+                            <a:srgbClr val="0A0A0A"/>
+                          </a:solidFill>
+                          <a:latin typeface="微软雅黑" panose="020B0503020204020204" pitchFamily="34" charset="-122"/>
+                          <a:ea typeface="微软雅黑" panose="020B0503020204020204" pitchFamily="34" charset="-122"/>
+                          <a:cs typeface="+mn-cs"/>
+                        </a:rPr>
+                        <a:t> + </a:t>
+                      </a:r>
+                      <a:r>
+                        <a:rPr sz="800" b="0" kern="1200" dirty="0" err="1">
+                          <a:solidFill>
+                            <a:srgbClr val="0A0A0A"/>
+                          </a:solidFill>
+                          <a:latin typeface="微软雅黑" panose="020B0503020204020204" pitchFamily="34" charset="-122"/>
+                          <a:ea typeface="微软雅黑" panose="020B0503020204020204" pitchFamily="34" charset="-122"/>
+                          <a:cs typeface="+mn-cs"/>
+                        </a:rPr>
+                        <a:t>稳定金额</a:t>
+                      </a:r>
+                      <a:endParaRPr sz="800" b="0" kern="1200" dirty="0">
+                        <a:solidFill>
+                          <a:srgbClr val="0A0A0A"/>
+                        </a:solidFill>
+                        <a:latin typeface="微软雅黑" panose="020B0503020204020204" pitchFamily="34" charset="-122"/>
+                        <a:ea typeface="微软雅黑" panose="020B0503020204020204" pitchFamily="34" charset="-122"/>
+                        <a:cs typeface="+mn-cs"/>
+                      </a:endParaRPr>
+                    </a:p>
+                  </a:txBody>
+                  <a:tcPr marL="27432" marR="27432" marT="9144" marB="9144">
+                    <a:lnL>
+                      <a:noFill/>
+                    </a:lnL>
+                    <a:lnR>
+                      <a:noFill/>
+                    </a:lnR>
+                    <a:lnT w="9525" cap="flat" cmpd="sng" algn="ctr">
+                      <a:solidFill>
+                        <a:srgbClr val="D6D6D6"/>
+                      </a:solidFill>
+                      <a:prstDash val="solid"/>
+                      <a:round/>
+                      <a:headEnd type="none" w="med" len="med"/>
+                      <a:tailEnd type="none" w="med" len="med"/>
+                    </a:lnT>
+                    <a:lnB w="9525">
+                      <a:solidFill>
+                        <a:srgbClr val="D6D6D6"/>
+                      </a:solidFill>
+                    </a:lnB>
+                    <a:noFill/>
+                  </a:tcPr>
+                </a:tc>
+                <a:extLst>
+                  <a:ext uri="{0D108BD9-81ED-4DB2-BD59-A6C34878D82A}">
+                    <a16:rowId xmlns:a16="http://schemas.microsoft.com/office/drawing/2014/main" val="10005"/>
+                  </a:ext>
+                </a:extLst>
+              </a:tr>
+            </a:tbl>
+          </a:graphicData>
+        </a:graphic>
+      </p:graphicFrame>
+      <p:sp>
+        <p:nvSpPr>
+          <p:cNvPr id="17" name="用户-bg-c"/>
+          <p:cNvSpPr/>
+          <p:nvPr/>
+        </p:nvSpPr>
+        <p:spPr>
+          <a:xfrm>
+            <a:off x="566928" y="4297680"/>
+            <a:ext cx="5376672" cy="1956816"/>
+          </a:xfrm>
+          <a:prstGeom prst="rect">
+            <a:avLst/>
+          </a:prstGeom>
+          <a:solidFill>
+            <a:srgbClr val="FFFFFF"/>
+          </a:solidFill>
+          <a:ln w="9525">
+            <a:solidFill>
+              <a:srgbClr val="B0B0B0"/>
+            </a:solidFill>
+          </a:ln>
+          <a:effectLst/>
+        </p:spPr>
+        <p:style>
+          <a:lnRef idx="1">
+            <a:schemeClr val="accent1"/>
+          </a:lnRef>
+          <a:fillRef idx="3">
+            <a:schemeClr val="accent1"/>
+          </a:fillRef>
+          <a:effectRef idx="2">
+            <a:schemeClr val="accent1"/>
+          </a:effectRef>
+          <a:fontRef idx="minor">
+            <a:schemeClr val="lt1"/>
+          </a:fontRef>
+        </p:style>
+        <p:txBody>
+          <a:bodyPr rtlCol="0" anchor="ctr"/>
+          <a:lstStyle/>
+          <a:p>
+            <a:pPr algn="ctr"/>
+            <a:endParaRPr/>
+          </a:p>
+        </p:txBody>
+      </p:sp>
+      <p:sp>
+        <p:nvSpPr>
+          <p:cNvPr id="18" name="用户-bar-c"/>
+          <p:cNvSpPr/>
+          <p:nvPr/>
+        </p:nvSpPr>
+        <p:spPr>
+          <a:xfrm>
+            <a:off x="566928" y="4297680"/>
+            <a:ext cx="5376672" cy="54864"/>
+          </a:xfrm>
+          <a:prstGeom prst="rect">
+            <a:avLst/>
+          </a:prstGeom>
+          <a:solidFill>
+            <a:srgbClr val="1F4E79"/>
+          </a:solidFill>
+          <a:ln>
+            <a:noFill/>
+          </a:ln>
+          <a:effectLst/>
+        </p:spPr>
+        <p:style>
+          <a:lnRef idx="1">
+            <a:schemeClr val="accent1"/>
+          </a:lnRef>
+          <a:fillRef idx="3">
+            <a:schemeClr val="accent1"/>
+          </a:fillRef>
+          <a:effectRef idx="2">
+            <a:schemeClr val="accent1"/>
+          </a:effectRef>
+          <a:fontRef idx="minor">
+            <a:schemeClr val="lt1"/>
+          </a:fontRef>
+        </p:style>
+        <p:txBody>
+          <a:bodyPr rtlCol="0" anchor="ctr"/>
+          <a:lstStyle/>
+          <a:p>
+            <a:pPr algn="ctr"/>
+            <a:endParaRPr/>
+          </a:p>
+        </p:txBody>
+      </p:sp>
+      <p:sp>
+        <p:nvSpPr>
+          <p:cNvPr id="19" name="用户-title-c"/>
+          <p:cNvSpPr txBox="1"/>
+          <p:nvPr/>
+        </p:nvSpPr>
+        <p:spPr>
+          <a:xfrm>
+            <a:off x="749808" y="4398264"/>
+            <a:ext cx="5010912" cy="201168"/>
+          </a:xfrm>
+          <a:prstGeom prst="rect">
+            <a:avLst/>
+          </a:prstGeom>
+          <a:noFill/>
+        </p:spPr>
+        <p:txBody>
+          <a:bodyPr wrap="square" lIns="0" tIns="0" rIns="0" bIns="0">
+            <a:spAutoFit/>
+          </a:bodyPr>
+          <a:lstStyle/>
+          <a:p>
+            <a:pPr algn="l"/>
+            <a:r>
+              <a:rPr lang="zh-CN" sz="1050" b="1">
+                <a:solidFill>
+                  <a:srgbClr val="0A0A0A"/>
+                </a:solidFill>
+                <a:latin typeface="微软雅黑"/>
+                <a:ea typeface="微软雅黑"/>
+              </a:rPr>
+              <a:t>用户整体负债画像</a:t>
+            </a:r>
+          </a:p>
+        </p:txBody>
+      </p:sp>
+      <p:sp>
+        <p:nvSpPr>
+          <p:cNvPr id="20" name="用户-k1-c"/>
+          <p:cNvSpPr txBox="1"/>
+          <p:nvPr/>
+        </p:nvSpPr>
+        <p:spPr>
+          <a:xfrm>
+            <a:off x="749808" y="4645152"/>
+            <a:ext cx="1645920" cy="548640"/>
+          </a:xfrm>
+          <a:prstGeom prst="rect">
+            <a:avLst/>
+          </a:prstGeom>
+          <a:noFill/>
+        </p:spPr>
+        <p:txBody>
+          <a:bodyPr wrap="square" lIns="0" tIns="0" rIns="0" bIns="0">
+            <a:spAutoFit/>
+          </a:bodyPr>
+          <a:lstStyle/>
+          <a:p>
+            <a:pPr algn="l"/>
+            <a:r>
+              <a:rPr lang="zh-CN" sz="1000" b="1">
+                <a:solidFill>
+                  <a:srgbClr val="1F4E79"/>
+                </a:solidFill>
+                <a:latin typeface="微软雅黑"/>
+                <a:ea typeface="微软雅黑"/>
+              </a:rPr>
+              <a:t>平均月还款金额</a:t>
+            </a:r>
+          </a:p>
+          <a:p>
+            <a:pPr algn="l"/>
+            <a:r>
+              <a:rPr lang="zh-CN" sz="800" b="0">
+                <a:solidFill>
+                  <a:srgbClr val="606060"/>
+                </a:solidFill>
+                <a:latin typeface="微软雅黑"/>
+                <a:ea typeface="微软雅黑"/>
+              </a:rPr>
+              <a:t>A$428</a:t>
+            </a:r>
+          </a:p>
+        </p:txBody>
+      </p:sp>
+      <p:sp>
+        <p:nvSpPr>
+          <p:cNvPr id="21" name="用户-k2-c"/>
+          <p:cNvSpPr txBox="1"/>
+          <p:nvPr/>
+        </p:nvSpPr>
+        <p:spPr>
+          <a:xfrm>
+            <a:off x="2505456" y="4645152"/>
+            <a:ext cx="1645920" cy="548640"/>
+          </a:xfrm>
+          <a:prstGeom prst="rect">
+            <a:avLst/>
+          </a:prstGeom>
+          <a:noFill/>
+        </p:spPr>
+        <p:txBody>
+          <a:bodyPr wrap="square" lIns="0" tIns="0" rIns="0" bIns="0">
+            <a:spAutoFit/>
+          </a:bodyPr>
+          <a:lstStyle/>
+          <a:p>
+            <a:pPr algn="l"/>
+            <a:r>
+              <a:rPr lang="zh-CN" sz="1000" b="1">
+                <a:solidFill>
+                  <a:srgbClr val="1F4E79"/>
+                </a:solidFill>
+                <a:latin typeface="微软雅黑"/>
+                <a:ea typeface="微软雅黑"/>
+              </a:rPr>
+              <a:t>预计待还金额</a:t>
+            </a:r>
+          </a:p>
+          <a:p>
+            <a:pPr algn="l"/>
+            <a:r>
+              <a:rPr lang="zh-CN" sz="800" b="0">
+                <a:solidFill>
+                  <a:srgbClr val="606060"/>
+                </a:solidFill>
+                <a:latin typeface="微软雅黑"/>
+                <a:ea typeface="微软雅黑"/>
+              </a:rPr>
+              <a:t>A$1,016</a:t>
+            </a:r>
+          </a:p>
+        </p:txBody>
+      </p:sp>
+      <p:sp>
+        <p:nvSpPr>
+          <p:cNvPr id="22" name="用户-k3-c"/>
+          <p:cNvSpPr txBox="1"/>
+          <p:nvPr/>
+        </p:nvSpPr>
+        <p:spPr>
+          <a:xfrm>
+            <a:off x="4261104" y="4645152"/>
+            <a:ext cx="1645920" cy="548640"/>
+          </a:xfrm>
+          <a:prstGeom prst="rect">
+            <a:avLst/>
+          </a:prstGeom>
+          <a:noFill/>
+        </p:spPr>
+        <p:txBody>
+          <a:bodyPr wrap="square" lIns="0" tIns="0" rIns="0" bIns="0">
+            <a:spAutoFit/>
+          </a:bodyPr>
+          <a:lstStyle/>
+          <a:p>
+            <a:pPr algn="l"/>
+            <a:r>
+              <a:rPr lang="zh-CN" sz="1000" b="1">
+                <a:solidFill>
+                  <a:srgbClr val="1F4E79"/>
+                </a:solidFill>
+                <a:latin typeface="微软雅黑"/>
+                <a:ea typeface="微软雅黑"/>
+              </a:rPr>
+              <a:t>贷款机构数量</a:t>
+            </a:r>
+          </a:p>
+          <a:p>
+            <a:pPr algn="l"/>
+            <a:r>
+              <a:rPr lang="zh-CN" sz="800" b="0">
+                <a:solidFill>
+                  <a:srgbClr val="606060"/>
+                </a:solidFill>
+                <a:latin typeface="微软雅黑"/>
+                <a:ea typeface="微软雅黑"/>
+              </a:rPr>
+              <a:t>2 家</a:t>
+            </a:r>
+          </a:p>
+        </p:txBody>
+      </p:sp>
+      <p:sp>
+        <p:nvSpPr>
+          <p:cNvPr id="24" name="Fa-bg-c"/>
+          <p:cNvSpPr/>
+          <p:nvPr/>
+        </p:nvSpPr>
+        <p:spPr>
+          <a:xfrm>
+            <a:off x="6217920" y="4297680"/>
+            <a:ext cx="5376672" cy="1956816"/>
+          </a:xfrm>
+          <a:prstGeom prst="rect">
+            <a:avLst/>
+          </a:prstGeom>
+          <a:solidFill>
+            <a:srgbClr val="FFFFFF"/>
+          </a:solidFill>
+          <a:ln w="9525">
+            <a:solidFill>
+              <a:srgbClr val="B0B0B0"/>
+            </a:solidFill>
+          </a:ln>
+          <a:effectLst/>
+        </p:spPr>
+        <p:style>
+          <a:lnRef idx="1">
+            <a:schemeClr val="accent1"/>
+          </a:lnRef>
+          <a:fillRef idx="3">
+            <a:schemeClr val="accent1"/>
+          </a:fillRef>
+          <a:effectRef idx="2">
+            <a:schemeClr val="accent1"/>
+          </a:effectRef>
+          <a:fontRef idx="minor">
+            <a:schemeClr val="lt1"/>
+          </a:fontRef>
+        </p:style>
+        <p:txBody>
+          <a:bodyPr rtlCol="0" anchor="ctr"/>
+          <a:lstStyle/>
+          <a:p>
+            <a:pPr algn="ctr"/>
+            <a:endParaRPr/>
+          </a:p>
+        </p:txBody>
+      </p:sp>
+      <p:sp>
+        <p:nvSpPr>
+          <p:cNvPr id="25" name="Fa-bar-c"/>
+          <p:cNvSpPr/>
+          <p:nvPr/>
+        </p:nvSpPr>
+        <p:spPr>
+          <a:xfrm>
+            <a:off x="6217920" y="4297680"/>
+            <a:ext cx="5376672" cy="54864"/>
+          </a:xfrm>
+          <a:prstGeom prst="rect">
+            <a:avLst/>
+          </a:prstGeom>
+          <a:solidFill>
+            <a:srgbClr val="1F4E79"/>
+          </a:solidFill>
+          <a:ln>
+            <a:noFill/>
+          </a:ln>
+          <a:effectLst/>
+        </p:spPr>
+        <p:style>
+          <a:lnRef idx="1">
+            <a:schemeClr val="accent1"/>
+          </a:lnRef>
+          <a:fillRef idx="3">
+            <a:schemeClr val="accent1"/>
+          </a:fillRef>
+          <a:effectRef idx="2">
+            <a:schemeClr val="accent1"/>
+          </a:effectRef>
+          <a:fontRef idx="minor">
+            <a:schemeClr val="lt1"/>
+          </a:fontRef>
+        </p:style>
+        <p:txBody>
+          <a:bodyPr rtlCol="0" anchor="ctr"/>
+          <a:lstStyle/>
+          <a:p>
+            <a:pPr algn="ctr"/>
+            <a:endParaRPr/>
+          </a:p>
+        </p:txBody>
+      </p:sp>
+      <p:sp>
+        <p:nvSpPr>
+          <p:cNvPr id="26" name="Fa-title-c"/>
+          <p:cNvSpPr txBox="1"/>
+          <p:nvPr/>
+        </p:nvSpPr>
+        <p:spPr>
+          <a:xfrm>
+            <a:off x="6400800" y="4398264"/>
+            <a:ext cx="5010912" cy="201168"/>
+          </a:xfrm>
+          <a:prstGeom prst="rect">
+            <a:avLst/>
+          </a:prstGeom>
+          <a:noFill/>
+        </p:spPr>
+        <p:txBody>
+          <a:bodyPr wrap="square" lIns="0" tIns="0" rIns="0" bIns="0">
+            <a:spAutoFit/>
+          </a:bodyPr>
+          <a:lstStyle/>
+          <a:p>
+            <a:pPr algn="l"/>
+            <a:r>
+              <a:rPr lang="zh-CN" sz="1050" b="1">
+                <a:solidFill>
+                  <a:srgbClr val="0A0A0A"/>
+                </a:solidFill>
+                <a:latin typeface="微软雅黑"/>
+                <a:ea typeface="微软雅黑"/>
+              </a:rPr>
+              <a:t>Fair Go Finance 单笔贷款画像</a:t>
+            </a:r>
+          </a:p>
+        </p:txBody>
+      </p:sp>
+      <p:sp>
+        <p:nvSpPr>
+          <p:cNvPr id="27" name="Fa-k1-c"/>
+          <p:cNvSpPr txBox="1"/>
+          <p:nvPr/>
+        </p:nvSpPr>
+        <p:spPr>
+          <a:xfrm>
+            <a:off x="6400800" y="4645152"/>
+            <a:ext cx="1645920" cy="548640"/>
+          </a:xfrm>
+          <a:prstGeom prst="rect">
+            <a:avLst/>
+          </a:prstGeom>
+          <a:noFill/>
+        </p:spPr>
+        <p:txBody>
+          <a:bodyPr wrap="square" lIns="0" tIns="0" rIns="0" bIns="0">
+            <a:spAutoFit/>
+          </a:bodyPr>
+          <a:lstStyle/>
+          <a:p>
+            <a:pPr algn="l"/>
+            <a:r>
+              <a:rPr lang="zh-CN" sz="1000" b="1">
+                <a:solidFill>
+                  <a:srgbClr val="1F4E79"/>
+                </a:solidFill>
+                <a:latin typeface="微软雅黑"/>
+                <a:ea typeface="微软雅黑"/>
+              </a:rPr>
+              <a:t>借款金额</a:t>
+            </a:r>
+          </a:p>
+          <a:p>
+            <a:pPr algn="l"/>
+            <a:r>
+              <a:rPr lang="zh-CN" sz="800" b="0">
+                <a:solidFill>
+                  <a:srgbClr val="606060"/>
+                </a:solidFill>
+                <a:latin typeface="微软雅黑"/>
+                <a:ea typeface="微软雅黑"/>
+              </a:rPr>
+              <a:t>A$1,500</a:t>
+            </a:r>
+          </a:p>
+        </p:txBody>
+      </p:sp>
+      <p:sp>
+        <p:nvSpPr>
+          <p:cNvPr id="28" name="Fa-k2-c"/>
+          <p:cNvSpPr txBox="1"/>
+          <p:nvPr/>
+        </p:nvSpPr>
+        <p:spPr>
+          <a:xfrm>
+            <a:off x="8156448" y="4645152"/>
+            <a:ext cx="1645920" cy="548640"/>
+          </a:xfrm>
+          <a:prstGeom prst="rect">
+            <a:avLst/>
+          </a:prstGeom>
+          <a:noFill/>
+        </p:spPr>
+        <p:txBody>
+          <a:bodyPr wrap="square" lIns="0" tIns="0" rIns="0" bIns="0">
+            <a:spAutoFit/>
+          </a:bodyPr>
+          <a:lstStyle/>
+          <a:p>
+            <a:pPr algn="l"/>
+            <a:r>
+              <a:rPr lang="zh-CN" sz="1000" b="1">
+                <a:solidFill>
+                  <a:srgbClr val="1F4E79"/>
+                </a:solidFill>
+                <a:latin typeface="微软雅黑"/>
+                <a:ea typeface="微软雅黑"/>
+              </a:rPr>
+              <a:t>月还款金额</a:t>
+            </a:r>
+          </a:p>
+          <a:p>
+            <a:pPr algn="l"/>
+            <a:r>
+              <a:rPr lang="zh-CN" sz="800" b="0">
+                <a:solidFill>
+                  <a:srgbClr val="606060"/>
+                </a:solidFill>
+                <a:latin typeface="微软雅黑"/>
+                <a:ea typeface="微软雅黑"/>
+              </a:rPr>
+              <a:t>约 A$338</a:t>
+            </a:r>
+          </a:p>
+          <a:p>
+            <a:pPr algn="l"/>
+            <a:r>
+              <a:rPr lang="zh-CN" sz="800" b="0">
+                <a:solidFill>
+                  <a:srgbClr val="606060"/>
+                </a:solidFill>
+                <a:latin typeface="微软雅黑"/>
+                <a:ea typeface="微软雅黑"/>
+              </a:rPr>
+              <a:t>A$156 × 26/12</a:t>
+            </a:r>
+          </a:p>
+        </p:txBody>
+      </p:sp>
+      <p:sp>
+        <p:nvSpPr>
+          <p:cNvPr id="29" name="Fa-k3-c"/>
+          <p:cNvSpPr txBox="1"/>
+          <p:nvPr/>
+        </p:nvSpPr>
+        <p:spPr>
+          <a:xfrm>
+            <a:off x="9912096" y="4645152"/>
+            <a:ext cx="1645920" cy="548640"/>
+          </a:xfrm>
+          <a:prstGeom prst="rect">
+            <a:avLst/>
+          </a:prstGeom>
+          <a:noFill/>
+        </p:spPr>
+        <p:txBody>
+          <a:bodyPr wrap="square" lIns="0" tIns="0" rIns="0" bIns="0">
+            <a:spAutoFit/>
+          </a:bodyPr>
+          <a:lstStyle/>
+          <a:p>
+            <a:pPr algn="l"/>
+            <a:r>
+              <a:rPr lang="zh-CN" sz="1000" b="1">
+                <a:solidFill>
+                  <a:srgbClr val="1F4E79"/>
+                </a:solidFill>
+                <a:latin typeface="微软雅黑"/>
+                <a:ea typeface="微软雅黑"/>
+              </a:rPr>
+              <a:t>预计待还金额</a:t>
+            </a:r>
+          </a:p>
+          <a:p>
+            <a:pPr algn="l"/>
+            <a:r>
+              <a:rPr lang="zh-CN" sz="800" b="0">
+                <a:solidFill>
+                  <a:srgbClr val="606060"/>
+                </a:solidFill>
+                <a:latin typeface="微软雅黑"/>
+                <a:ea typeface="微软雅黑"/>
+              </a:rPr>
+              <a:t>A$564</a:t>
+            </a:r>
+          </a:p>
+        </p:txBody>
+      </p:sp>
+      <p:sp>
+        <p:nvSpPr>
+          <p:cNvPr id="31" name="concl-bar-c"/>
+          <p:cNvSpPr/>
+          <p:nvPr/>
+        </p:nvSpPr>
+        <p:spPr>
+          <a:xfrm>
+            <a:off x="566928" y="6327648"/>
+            <a:ext cx="11045952" cy="402336"/>
+          </a:xfrm>
+          <a:prstGeom prst="rect">
+            <a:avLst/>
+          </a:prstGeom>
+          <a:solidFill>
+            <a:srgbClr val="FAF3E0"/>
+          </a:solidFill>
+          <a:ln>
+            <a:noFill/>
+          </a:ln>
+          <a:effectLst/>
+        </p:spPr>
+        <p:style>
+          <a:lnRef idx="1">
+            <a:schemeClr val="accent1"/>
+          </a:lnRef>
+          <a:fillRef idx="3">
+            <a:schemeClr val="accent1"/>
+          </a:fillRef>
+          <a:effectRef idx="2">
+            <a:schemeClr val="accent1"/>
+          </a:effectRef>
+          <a:fontRef idx="minor">
+            <a:schemeClr val="lt1"/>
+          </a:fontRef>
+        </p:style>
+        <p:txBody>
+          <a:bodyPr rtlCol="0" anchor="ctr"/>
+          <a:lstStyle/>
+          <a:p>
+            <a:pPr algn="ctr"/>
+            <a:endParaRPr/>
+          </a:p>
+        </p:txBody>
+      </p:sp>
+      <p:sp>
+        <p:nvSpPr>
+          <p:cNvPr id="32" name="concl-bar-line-c"/>
+          <p:cNvSpPr/>
+          <p:nvPr/>
+        </p:nvSpPr>
+        <p:spPr>
+          <a:xfrm>
+            <a:off x="566928" y="6327648"/>
+            <a:ext cx="64008" cy="402336"/>
+          </a:xfrm>
+          <a:prstGeom prst="rect">
+            <a:avLst/>
+          </a:prstGeom>
+          <a:solidFill>
+            <a:srgbClr val="D6A000"/>
+          </a:solidFill>
+          <a:ln>
+            <a:noFill/>
+          </a:ln>
+          <a:effectLst/>
+        </p:spPr>
+        <p:style>
+          <a:lnRef idx="1">
+            <a:schemeClr val="accent1"/>
+          </a:lnRef>
+          <a:fillRef idx="3">
+            <a:schemeClr val="accent1"/>
+          </a:fillRef>
+          <a:effectRef idx="2">
+            <a:schemeClr val="accent1"/>
+          </a:effectRef>
+          <a:fontRef idx="minor">
+            <a:schemeClr val="lt1"/>
+          </a:fontRef>
+        </p:style>
+        <p:txBody>
+          <a:bodyPr rtlCol="0" anchor="ctr"/>
+          <a:lstStyle/>
+          <a:p>
+            <a:pPr algn="ctr"/>
+            <a:endParaRPr/>
+          </a:p>
+        </p:txBody>
+      </p:sp>
+      <p:sp>
+        <p:nvSpPr>
+          <p:cNvPr id="33" name="concl-text-c"/>
+          <p:cNvSpPr txBox="1"/>
+          <p:nvPr/>
+        </p:nvSpPr>
+        <p:spPr>
+          <a:xfrm>
+            <a:off x="749808" y="6382512"/>
+            <a:ext cx="10698480" cy="292608"/>
+          </a:xfrm>
+          <a:prstGeom prst="rect">
+            <a:avLst/>
+          </a:prstGeom>
+          <a:noFill/>
+        </p:spPr>
+        <p:txBody>
+          <a:bodyPr wrap="square" lIns="0" tIns="0" rIns="0" bIns="0">
+            <a:spAutoFit/>
+          </a:bodyPr>
+          <a:lstStyle/>
+          <a:p>
+            <a:pPr algn="l"/>
+            <a:r>
+              <a:rPr lang="zh-CN" sz="900" b="1">
+                <a:solidFill>
+                  <a:srgbClr val="0A0A0A"/>
+                </a:solidFill>
+                <a:latin typeface="微软雅黑"/>
+                <a:ea typeface="微软雅黑"/>
+              </a:rPr>
+              <a:t>识别贷款 → 计算剩余负债与月还款额（平均月还款金额 A$428）→ 支撑新增还款能力判断</a:t>
+            </a:r>
+          </a:p>
+        </p:txBody>
+      </p:sp>
+      <p:sp>
+        <p:nvSpPr>
+          <p:cNvPr id="34" name="用户-m1-c"/>
+          <p:cNvSpPr txBox="1"/>
+          <p:nvPr/>
+        </p:nvSpPr>
+        <p:spPr>
+          <a:xfrm>
+            <a:off x="749808" y="5248656"/>
+            <a:ext cx="1600200" cy="475488"/>
+          </a:xfrm>
+          <a:prstGeom prst="rect">
+            <a:avLst/>
+          </a:prstGeom>
+          <a:noFill/>
+        </p:spPr>
+        <p:txBody>
+          <a:bodyPr wrap="square" lIns="0" tIns="0" rIns="0" bIns="0">
+            <a:noAutofit/>
+          </a:bodyPr>
+          <a:lstStyle/>
+          <a:p>
+            <a:pPr algn="l">
+              <a:lnSpc>
+                <a:spcPct val="100000"/>
+              </a:lnSpc>
+            </a:pPr>
+            <a:r>
+              <a:rPr lang="zh-CN" sz="1000" b="1">
+                <a:solidFill>
+                  <a:srgbClr val="1F4E79"/>
+                </a:solidFill>
+                <a:latin typeface="微软雅黑"/>
+                <a:ea typeface="微软雅黑"/>
+              </a:rPr>
+              <a:t>90 天借款金额</a:t>
+            </a:r>
+          </a:p>
+          <a:p>
+            <a:pPr algn="l">
+              <a:lnSpc>
+                <a:spcPct val="100000"/>
+              </a:lnSpc>
+            </a:pPr>
+            <a:r>
+              <a:rPr lang="zh-CN" sz="800" b="0">
+                <a:solidFill>
+                  <a:srgbClr val="606060"/>
+                </a:solidFill>
+                <a:latin typeface="微软雅黑"/>
+                <a:ea typeface="微软雅黑"/>
+              </a:rPr>
+              <a:t>A$2,300</a:t>
+            </a:r>
+          </a:p>
+        </p:txBody>
+      </p:sp>
+      <p:sp>
+        <p:nvSpPr>
+          <p:cNvPr id="35" name="用户-m2-c"/>
+          <p:cNvSpPr txBox="1"/>
+          <p:nvPr/>
+        </p:nvSpPr>
+        <p:spPr>
+          <a:xfrm>
+            <a:off x="2450592" y="5248656"/>
+            <a:ext cx="1600200" cy="475488"/>
+          </a:xfrm>
+          <a:prstGeom prst="rect">
+            <a:avLst/>
+          </a:prstGeom>
+          <a:noFill/>
+        </p:spPr>
+        <p:txBody>
+          <a:bodyPr wrap="square" lIns="0" tIns="0" rIns="0" bIns="0">
+            <a:noAutofit/>
+          </a:bodyPr>
+          <a:lstStyle/>
+          <a:p>
+            <a:pPr algn="l">
+              <a:lnSpc>
+                <a:spcPct val="100000"/>
+              </a:lnSpc>
+            </a:pPr>
+            <a:r>
+              <a:rPr lang="zh-CN" sz="1000" b="1">
+                <a:solidFill>
+                  <a:srgbClr val="1F4E79"/>
+                </a:solidFill>
+                <a:latin typeface="微软雅黑"/>
+                <a:ea typeface="微软雅黑"/>
+              </a:rPr>
+              <a:t>90 天还款金额</a:t>
+            </a:r>
+          </a:p>
+          <a:p>
+            <a:pPr algn="l">
+              <a:lnSpc>
+                <a:spcPct val="100000"/>
+              </a:lnSpc>
+            </a:pPr>
+            <a:r>
+              <a:rPr lang="zh-CN" sz="800" b="0">
+                <a:solidFill>
+                  <a:srgbClr val="606060"/>
+                </a:solidFill>
+                <a:latin typeface="微软雅黑"/>
+                <a:ea typeface="微软雅黑"/>
+              </a:rPr>
+              <a:t>A$1,284</a:t>
+            </a:r>
+          </a:p>
+        </p:txBody>
+      </p:sp>
+      <p:sp>
+        <p:nvSpPr>
+          <p:cNvPr id="36" name="用户-m3-c"/>
+          <p:cNvSpPr txBox="1"/>
+          <p:nvPr/>
+        </p:nvSpPr>
+        <p:spPr>
+          <a:xfrm>
+            <a:off x="4151376" y="5248656"/>
+            <a:ext cx="1600200" cy="475488"/>
+          </a:xfrm>
+          <a:prstGeom prst="rect">
+            <a:avLst/>
+          </a:prstGeom>
+          <a:noFill/>
+        </p:spPr>
+        <p:txBody>
+          <a:bodyPr wrap="square" lIns="0" tIns="0" rIns="0" bIns="0">
+            <a:noAutofit/>
+          </a:bodyPr>
+          <a:lstStyle/>
+          <a:p>
+            <a:pPr algn="l">
+              <a:lnSpc>
+                <a:spcPct val="100000"/>
+              </a:lnSpc>
+            </a:pPr>
+            <a:r>
+              <a:rPr lang="zh-CN" sz="1000" b="1">
+                <a:solidFill>
+                  <a:srgbClr val="1F4E79"/>
+                </a:solidFill>
+                <a:latin typeface="微软雅黑"/>
+                <a:ea typeface="微软雅黑"/>
+              </a:rPr>
+              <a:t>还款次数</a:t>
+            </a:r>
+          </a:p>
+          <a:p>
+            <a:pPr algn="l">
+              <a:lnSpc>
+                <a:spcPct val="100000"/>
+              </a:lnSpc>
+            </a:pPr>
+            <a:r>
+              <a:rPr lang="zh-CN" sz="800" b="0">
+                <a:solidFill>
+                  <a:srgbClr val="606060"/>
+                </a:solidFill>
+                <a:latin typeface="微软雅黑"/>
+                <a:ea typeface="微软雅黑"/>
+              </a:rPr>
+              <a:t>9 次</a:t>
+            </a:r>
+          </a:p>
+        </p:txBody>
+      </p:sp>
+      <p:sp>
+        <p:nvSpPr>
+          <p:cNvPr id="37" name="用户-m4-c"/>
+          <p:cNvSpPr txBox="1"/>
+          <p:nvPr/>
+        </p:nvSpPr>
+        <p:spPr>
+          <a:xfrm>
+            <a:off x="749808" y="5779008"/>
+            <a:ext cx="1170432" cy="475488"/>
+          </a:xfrm>
+          <a:prstGeom prst="rect">
+            <a:avLst/>
+          </a:prstGeom>
+          <a:noFill/>
+        </p:spPr>
+        <p:txBody>
+          <a:bodyPr wrap="square" lIns="0" tIns="0" rIns="0" bIns="0">
+            <a:noAutofit/>
+          </a:bodyPr>
+          <a:lstStyle/>
+          <a:p>
+            <a:pPr algn="l">
+              <a:lnSpc>
+                <a:spcPct val="100000"/>
+              </a:lnSpc>
+            </a:pPr>
+            <a:r>
+              <a:rPr lang="zh-CN" sz="1000" b="1">
+                <a:solidFill>
+                  <a:srgbClr val="1F4E79"/>
+                </a:solidFill>
+                <a:latin typeface="微软雅黑"/>
+                <a:ea typeface="微软雅黑"/>
+              </a:rPr>
+              <a:t>SACC 贷款</a:t>
+            </a:r>
+          </a:p>
+          <a:p>
+            <a:pPr algn="l">
+              <a:lnSpc>
+                <a:spcPct val="100000"/>
+              </a:lnSpc>
+            </a:pPr>
+            <a:r>
+              <a:rPr lang="zh-CN" sz="800" b="0">
+                <a:solidFill>
+                  <a:srgbClr val="606060"/>
+                </a:solidFill>
+                <a:latin typeface="微软雅黑"/>
+                <a:ea typeface="微软雅黑"/>
+              </a:rPr>
+              <a:t>True</a:t>
+            </a:r>
+          </a:p>
+        </p:txBody>
+      </p:sp>
+      <p:sp>
+        <p:nvSpPr>
+          <p:cNvPr id="38" name="用户-m5-c"/>
+          <p:cNvSpPr txBox="1"/>
+          <p:nvPr/>
+        </p:nvSpPr>
+        <p:spPr>
+          <a:xfrm>
+            <a:off x="2020824" y="5779008"/>
+            <a:ext cx="1170432" cy="475488"/>
+          </a:xfrm>
+          <a:prstGeom prst="rect">
+            <a:avLst/>
+          </a:prstGeom>
+          <a:noFill/>
+        </p:spPr>
+        <p:txBody>
+          <a:bodyPr wrap="square" lIns="0" tIns="0" rIns="0" bIns="0">
+            <a:noAutofit/>
+          </a:bodyPr>
+          <a:lstStyle/>
+          <a:p>
+            <a:pPr algn="l">
+              <a:lnSpc>
+                <a:spcPct val="100000"/>
+              </a:lnSpc>
+            </a:pPr>
+            <a:r>
+              <a:rPr lang="zh-CN" sz="1000" b="1">
+                <a:solidFill>
+                  <a:srgbClr val="1F4E79"/>
+                </a:solidFill>
+                <a:latin typeface="微软雅黑"/>
+                <a:ea typeface="微软雅黑"/>
+              </a:rPr>
+              <a:t>多头借贷</a:t>
+            </a:r>
+          </a:p>
+          <a:p>
+            <a:pPr algn="l">
+              <a:lnSpc>
+                <a:spcPct val="100000"/>
+              </a:lnSpc>
+            </a:pPr>
+            <a:r>
+              <a:rPr lang="zh-CN" sz="800" b="0">
+                <a:solidFill>
+                  <a:srgbClr val="606060"/>
+                </a:solidFill>
+                <a:latin typeface="微软雅黑"/>
+                <a:ea typeface="微软雅黑"/>
+              </a:rPr>
+              <a:t>True</a:t>
+            </a:r>
+          </a:p>
+        </p:txBody>
+      </p:sp>
+      <p:sp>
+        <p:nvSpPr>
+          <p:cNvPr id="39" name="用户-m6-c"/>
+          <p:cNvSpPr txBox="1"/>
+          <p:nvPr/>
+        </p:nvSpPr>
+        <p:spPr>
+          <a:xfrm>
+            <a:off x="3291839" y="5779008"/>
+            <a:ext cx="1170432" cy="475488"/>
+          </a:xfrm>
+          <a:prstGeom prst="rect">
+            <a:avLst/>
+          </a:prstGeom>
+          <a:noFill/>
+        </p:spPr>
+        <p:txBody>
+          <a:bodyPr wrap="square" lIns="0" tIns="0" rIns="0" bIns="0">
+            <a:noAutofit/>
+          </a:bodyPr>
+          <a:lstStyle/>
+          <a:p>
+            <a:pPr algn="l">
+              <a:lnSpc>
+                <a:spcPct val="100000"/>
+              </a:lnSpc>
+            </a:pPr>
+            <a:r>
+              <a:rPr lang="zh-CN" sz="1000" b="1">
+                <a:solidFill>
+                  <a:srgbClr val="1F4E79"/>
+                </a:solidFill>
+                <a:latin typeface="微软雅黑"/>
+                <a:ea typeface="微软雅黑"/>
+              </a:rPr>
+              <a:t>持续还款</a:t>
+            </a:r>
+          </a:p>
+          <a:p>
+            <a:pPr algn="l">
+              <a:lnSpc>
+                <a:spcPct val="100000"/>
+              </a:lnSpc>
+            </a:pPr>
+            <a:r>
+              <a:rPr lang="zh-CN" sz="800" b="0">
+                <a:solidFill>
+                  <a:srgbClr val="606060"/>
+                </a:solidFill>
+                <a:latin typeface="微软雅黑"/>
+                <a:ea typeface="微软雅黑"/>
+              </a:rPr>
+              <a:t>True</a:t>
+            </a:r>
+          </a:p>
+        </p:txBody>
+      </p:sp>
+      <p:sp>
+        <p:nvSpPr>
+          <p:cNvPr id="40" name="用户-m7-c"/>
+          <p:cNvSpPr txBox="1"/>
+          <p:nvPr/>
+        </p:nvSpPr>
+        <p:spPr>
+          <a:xfrm>
+            <a:off x="4562856" y="5779008"/>
+            <a:ext cx="1170432" cy="475488"/>
+          </a:xfrm>
+          <a:prstGeom prst="rect">
+            <a:avLst/>
+          </a:prstGeom>
+          <a:noFill/>
+        </p:spPr>
+        <p:txBody>
+          <a:bodyPr wrap="square" lIns="0" tIns="0" rIns="0" bIns="0">
+            <a:noAutofit/>
+          </a:bodyPr>
+          <a:lstStyle/>
+          <a:p>
+            <a:pPr algn="l">
+              <a:lnSpc>
+                <a:spcPct val="100000"/>
+              </a:lnSpc>
+            </a:pPr>
+            <a:r>
+              <a:rPr lang="zh-CN" sz="1000" b="1">
+                <a:solidFill>
+                  <a:srgbClr val="1F4E79"/>
+                </a:solidFill>
+                <a:latin typeface="微软雅黑"/>
+                <a:ea typeface="微软雅黑"/>
+              </a:rPr>
+              <a:t>还款中断</a:t>
+            </a:r>
+          </a:p>
+          <a:p>
+            <a:pPr algn="l">
+              <a:lnSpc>
+                <a:spcPct val="100000"/>
+              </a:lnSpc>
+            </a:pPr>
+            <a:r>
+              <a:rPr lang="zh-CN" sz="800" b="0">
+                <a:solidFill>
+                  <a:srgbClr val="606060"/>
+                </a:solidFill>
+                <a:latin typeface="微软雅黑"/>
+                <a:ea typeface="微软雅黑"/>
+              </a:rPr>
+              <a:t>False</a:t>
+            </a:r>
+          </a:p>
+        </p:txBody>
+      </p:sp>
+      <p:sp>
+        <p:nvSpPr>
+          <p:cNvPr id="41" name="Fa-m1-c"/>
+          <p:cNvSpPr txBox="1"/>
+          <p:nvPr/>
+        </p:nvSpPr>
+        <p:spPr>
+          <a:xfrm>
+            <a:off x="6400800" y="5248656"/>
+            <a:ext cx="1600200" cy="475488"/>
+          </a:xfrm>
+          <a:prstGeom prst="rect">
+            <a:avLst/>
+          </a:prstGeom>
+          <a:noFill/>
+        </p:spPr>
+        <p:txBody>
+          <a:bodyPr wrap="square" lIns="0" tIns="0" rIns="0" bIns="0">
+            <a:noAutofit/>
+          </a:bodyPr>
+          <a:lstStyle/>
+          <a:p>
+            <a:pPr algn="l">
+              <a:lnSpc>
+                <a:spcPct val="100000"/>
+              </a:lnSpc>
+            </a:pPr>
+            <a:r>
+              <a:rPr lang="zh-CN" sz="1000" b="1">
+                <a:solidFill>
+                  <a:srgbClr val="1F4E79"/>
+                </a:solidFill>
+                <a:latin typeface="微软雅黑"/>
+                <a:ea typeface="微软雅黑"/>
+              </a:rPr>
+              <a:t>贷款类型</a:t>
+            </a:r>
+          </a:p>
+          <a:p>
+            <a:pPr algn="l">
+              <a:lnSpc>
+                <a:spcPct val="100000"/>
+              </a:lnSpc>
+            </a:pPr>
+            <a:r>
+              <a:rPr lang="zh-CN" sz="800" b="0">
+                <a:solidFill>
+                  <a:srgbClr val="606060"/>
+                </a:solidFill>
+                <a:latin typeface="微软雅黑"/>
+                <a:ea typeface="微软雅黑"/>
+              </a:rPr>
+              <a:t>SACC</a:t>
+            </a:r>
+          </a:p>
+        </p:txBody>
+      </p:sp>
+      <p:sp>
+        <p:nvSpPr>
+          <p:cNvPr id="42" name="Fa-m2-c"/>
+          <p:cNvSpPr txBox="1"/>
+          <p:nvPr/>
+        </p:nvSpPr>
+        <p:spPr>
+          <a:xfrm>
+            <a:off x="8101583" y="5248656"/>
+            <a:ext cx="1600200" cy="475488"/>
+          </a:xfrm>
+          <a:prstGeom prst="rect">
+            <a:avLst/>
+          </a:prstGeom>
+          <a:noFill/>
+        </p:spPr>
+        <p:txBody>
+          <a:bodyPr wrap="square" lIns="0" tIns="0" rIns="0" bIns="0">
+            <a:noAutofit/>
+          </a:bodyPr>
+          <a:lstStyle/>
+          <a:p>
+            <a:pPr algn="l">
+              <a:lnSpc>
+                <a:spcPct val="100000"/>
+              </a:lnSpc>
+            </a:pPr>
+            <a:r>
+              <a:rPr lang="zh-CN" sz="1000" b="1">
+                <a:solidFill>
+                  <a:srgbClr val="1F4E79"/>
+                </a:solidFill>
+                <a:latin typeface="微软雅黑"/>
+                <a:ea typeface="微软雅黑"/>
+              </a:rPr>
+              <a:t>90 天已还金额</a:t>
+            </a:r>
+          </a:p>
+          <a:p>
+            <a:pPr algn="l">
+              <a:lnSpc>
+                <a:spcPct val="100000"/>
+              </a:lnSpc>
+            </a:pPr>
+            <a:r>
+              <a:rPr lang="zh-CN" sz="800" b="0">
+                <a:solidFill>
+                  <a:srgbClr val="606060"/>
+                </a:solidFill>
+                <a:latin typeface="微软雅黑"/>
+                <a:ea typeface="微软雅黑"/>
+              </a:rPr>
+              <a:t>A$936</a:t>
+            </a:r>
+          </a:p>
+        </p:txBody>
+      </p:sp>
+      <p:sp>
+        <p:nvSpPr>
+          <p:cNvPr id="43" name="Fa-m3-c"/>
+          <p:cNvSpPr txBox="1"/>
+          <p:nvPr/>
+        </p:nvSpPr>
+        <p:spPr>
+          <a:xfrm>
+            <a:off x="9802368" y="5248656"/>
+            <a:ext cx="1600200" cy="475488"/>
+          </a:xfrm>
+          <a:prstGeom prst="rect">
+            <a:avLst/>
+          </a:prstGeom>
+          <a:noFill/>
+        </p:spPr>
+        <p:txBody>
+          <a:bodyPr wrap="square" lIns="0" tIns="0" rIns="0" bIns="0">
+            <a:noAutofit/>
+          </a:bodyPr>
+          <a:lstStyle/>
+          <a:p>
+            <a:pPr algn="l">
+              <a:lnSpc>
+                <a:spcPct val="100000"/>
+              </a:lnSpc>
+            </a:pPr>
+            <a:r>
+              <a:rPr lang="zh-CN" sz="1000" b="1">
+                <a:solidFill>
+                  <a:srgbClr val="1F4E79"/>
+                </a:solidFill>
+                <a:latin typeface="微软雅黑"/>
+                <a:ea typeface="微软雅黑"/>
+              </a:rPr>
+              <a:t>还款频率</a:t>
+            </a:r>
+          </a:p>
+          <a:p>
+            <a:pPr algn="l">
+              <a:lnSpc>
+                <a:spcPct val="100000"/>
+              </a:lnSpc>
+            </a:pPr>
+            <a:r>
+              <a:rPr lang="zh-CN" sz="800" b="0">
+                <a:solidFill>
+                  <a:srgbClr val="606060"/>
+                </a:solidFill>
+                <a:latin typeface="微软雅黑"/>
+                <a:ea typeface="微软雅黑"/>
+              </a:rPr>
+              <a:t>每两周 A$156</a:t>
+            </a:r>
+          </a:p>
+        </p:txBody>
+      </p:sp>
+      <p:sp>
+        <p:nvSpPr>
+          <p:cNvPr id="44" name="Fa-m4-c"/>
+          <p:cNvSpPr txBox="1"/>
+          <p:nvPr/>
+        </p:nvSpPr>
+        <p:spPr>
+          <a:xfrm>
+            <a:off x="6400800" y="5779008"/>
+            <a:ext cx="1170432" cy="475488"/>
+          </a:xfrm>
+          <a:prstGeom prst="rect">
+            <a:avLst/>
+          </a:prstGeom>
+          <a:noFill/>
+        </p:spPr>
+        <p:txBody>
+          <a:bodyPr wrap="square" lIns="0" tIns="0" rIns="0" bIns="0">
+            <a:noAutofit/>
+          </a:bodyPr>
+          <a:lstStyle/>
+          <a:p>
+            <a:pPr algn="l">
+              <a:lnSpc>
+                <a:spcPct val="100000"/>
+              </a:lnSpc>
+            </a:pPr>
+            <a:r>
+              <a:rPr lang="zh-CN" sz="1000" b="1">
+                <a:solidFill>
+                  <a:srgbClr val="1F4E79"/>
+                </a:solidFill>
+                <a:latin typeface="微软雅黑"/>
+                <a:ea typeface="微软雅黑"/>
+              </a:rPr>
+              <a:t>90 天还款次数</a:t>
+            </a:r>
+          </a:p>
+          <a:p>
+            <a:pPr algn="l">
+              <a:lnSpc>
+                <a:spcPct val="100000"/>
+              </a:lnSpc>
+            </a:pPr>
+            <a:r>
+              <a:rPr lang="zh-CN" sz="800" b="0">
+                <a:solidFill>
+                  <a:srgbClr val="606060"/>
+                </a:solidFill>
+                <a:latin typeface="微软雅黑"/>
+                <a:ea typeface="微软雅黑"/>
+              </a:rPr>
+              <a:t>6 次</a:t>
+            </a:r>
+          </a:p>
+        </p:txBody>
+      </p:sp>
+      <p:sp>
+        <p:nvSpPr>
+          <p:cNvPr id="45" name="Fa-m5-c"/>
+          <p:cNvSpPr txBox="1"/>
+          <p:nvPr/>
+        </p:nvSpPr>
+        <p:spPr>
+          <a:xfrm>
+            <a:off x="7671816" y="5779008"/>
+            <a:ext cx="1170432" cy="475488"/>
+          </a:xfrm>
+          <a:prstGeom prst="rect">
+            <a:avLst/>
+          </a:prstGeom>
+          <a:noFill/>
+        </p:spPr>
+        <p:txBody>
+          <a:bodyPr wrap="square" lIns="0" tIns="0" rIns="0" bIns="0">
+            <a:noAutofit/>
+          </a:bodyPr>
+          <a:lstStyle/>
+          <a:p>
+            <a:pPr algn="l">
+              <a:lnSpc>
+                <a:spcPct val="100000"/>
+              </a:lnSpc>
+            </a:pPr>
+            <a:r>
+              <a:rPr lang="zh-CN" sz="1000" b="1">
+                <a:solidFill>
+                  <a:srgbClr val="1F4E79"/>
+                </a:solidFill>
+                <a:latin typeface="微软雅黑"/>
+                <a:ea typeface="微软雅黑"/>
+              </a:rPr>
+              <a:t>当前状态</a:t>
+            </a:r>
+          </a:p>
+          <a:p>
+            <a:pPr algn="l">
+              <a:lnSpc>
+                <a:spcPct val="100000"/>
+              </a:lnSpc>
+            </a:pPr>
+            <a:r>
+              <a:rPr lang="zh-CN" sz="800" b="0">
+                <a:solidFill>
+                  <a:srgbClr val="606060"/>
+                </a:solidFill>
+                <a:latin typeface="微软雅黑"/>
+                <a:ea typeface="微软雅黑"/>
+              </a:rPr>
+              <a:t>在贷</a:t>
+            </a:r>
+          </a:p>
+        </p:txBody>
+      </p:sp>
+      <p:sp>
+        <p:nvSpPr>
+          <p:cNvPr id="46" name="Fa-m6-c"/>
+          <p:cNvSpPr txBox="1"/>
+          <p:nvPr/>
+        </p:nvSpPr>
+        <p:spPr>
+          <a:xfrm>
+            <a:off x="8942832" y="5779008"/>
+            <a:ext cx="1170432" cy="475488"/>
+          </a:xfrm>
+          <a:prstGeom prst="rect">
+            <a:avLst/>
+          </a:prstGeom>
+          <a:noFill/>
+        </p:spPr>
+        <p:txBody>
+          <a:bodyPr wrap="square" lIns="0" tIns="0" rIns="0" bIns="0">
+            <a:noAutofit/>
+          </a:bodyPr>
+          <a:lstStyle/>
+          <a:p>
+            <a:pPr algn="l">
+              <a:lnSpc>
+                <a:spcPct val="100000"/>
+              </a:lnSpc>
+            </a:pPr>
+            <a:r>
+              <a:rPr lang="zh-CN" sz="1000" b="1">
+                <a:solidFill>
+                  <a:srgbClr val="1F4E79"/>
+                </a:solidFill>
+                <a:latin typeface="微软雅黑"/>
+                <a:ea typeface="微软雅黑"/>
+              </a:rPr>
+              <a:t>扣款失败</a:t>
+            </a:r>
+          </a:p>
+          <a:p>
+            <a:pPr algn="l">
+              <a:lnSpc>
+                <a:spcPct val="100000"/>
+              </a:lnSpc>
+            </a:pPr>
+            <a:r>
+              <a:rPr lang="zh-CN" sz="800" b="0">
+                <a:solidFill>
+                  <a:srgbClr val="606060"/>
+                </a:solidFill>
+                <a:latin typeface="微软雅黑"/>
+                <a:ea typeface="微软雅黑"/>
+              </a:rPr>
+              <a:t>False</a:t>
+            </a:r>
+          </a:p>
+        </p:txBody>
+      </p:sp>
+      <p:sp>
+        <p:nvSpPr>
+          <p:cNvPr id="47" name="Fa-m7-c"/>
+          <p:cNvSpPr txBox="1"/>
+          <p:nvPr/>
+        </p:nvSpPr>
+        <p:spPr>
+          <a:xfrm>
+            <a:off x="10213848" y="5779008"/>
+            <a:ext cx="1170432" cy="475488"/>
+          </a:xfrm>
+          <a:prstGeom prst="rect">
+            <a:avLst/>
+          </a:prstGeom>
+          <a:noFill/>
+        </p:spPr>
+        <p:txBody>
+          <a:bodyPr wrap="square" lIns="0" tIns="0" rIns="0" bIns="0">
+            <a:noAutofit/>
+          </a:bodyPr>
+          <a:lstStyle/>
+          <a:p>
+            <a:pPr algn="l">
+              <a:lnSpc>
+                <a:spcPct val="100000"/>
+              </a:lnSpc>
+            </a:pPr>
+            <a:r>
+              <a:rPr lang="zh-CN" sz="1000" b="1">
+                <a:solidFill>
+                  <a:srgbClr val="1F4E79"/>
+                </a:solidFill>
+                <a:latin typeface="微软雅黑"/>
+                <a:ea typeface="微软雅黑"/>
+              </a:rPr>
+              <a:t>年化利率（APR）</a:t>
+            </a:r>
+          </a:p>
+          <a:p>
+            <a:pPr algn="l">
+              <a:lnSpc>
+                <a:spcPct val="100000"/>
+              </a:lnSpc>
+            </a:pPr>
+            <a:r>
+              <a:rPr lang="zh-CN" sz="800" b="0">
+                <a:solidFill>
+                  <a:srgbClr val="606060"/>
+                </a:solidFill>
+                <a:latin typeface="微软雅黑"/>
+                <a:ea typeface="微软雅黑"/>
+              </a:rPr>
+              <a:t>42%</a:t>
+            </a:r>
+          </a:p>
+        </p:txBody>
+      </p:sp>
+      <p:sp>
+        <p:nvSpPr>
+          <p:cNvPr id="48" name="s2-bar-c"/>
+          <p:cNvSpPr/>
+          <p:nvPr/>
+        </p:nvSpPr>
+        <p:spPr>
+          <a:xfrm>
+            <a:off x="393192" y="1115568"/>
+            <a:ext cx="76200" cy="228600"/>
+          </a:xfrm>
+          <a:prstGeom prst="rect">
+            <a:avLst/>
+          </a:prstGeom>
+          <a:solidFill>
+            <a:srgbClr val="D6A000"/>
+          </a:solidFill>
+          <a:ln>
+            <a:noFill/>
+          </a:ln>
+          <a:effectLst/>
+        </p:spPr>
+        <p:style>
+          <a:lnRef idx="1">
+            <a:schemeClr val="accent1"/>
+          </a:lnRef>
+          <a:fillRef idx="3">
+            <a:schemeClr val="accent1"/>
+          </a:fillRef>
+          <a:effectRef idx="2">
+            <a:schemeClr val="accent1"/>
+          </a:effectRef>
+          <a:fontRef idx="minor">
+            <a:schemeClr val="lt1"/>
+          </a:fontRef>
+        </p:style>
+        <p:txBody>
+          <a:bodyPr rtlCol="0" anchor="ctr"/>
+          <a:lstStyle/>
+          <a:p>
+            <a:pPr algn="ctr"/>
+          </a:p>
+        </p:txBody>
+      </p:sp>
+      <p:sp>
+        <p:nvSpPr>
+          <p:cNvPr id="49" name="s2-bar-c"/>
+          <p:cNvSpPr/>
+          <p:nvPr/>
+        </p:nvSpPr>
+        <p:spPr>
+          <a:xfrm>
+            <a:off x="393192" y="2523744"/>
+            <a:ext cx="76200" cy="228600"/>
+          </a:xfrm>
+          <a:prstGeom prst="rect">
+            <a:avLst/>
+          </a:prstGeom>
+          <a:solidFill>
+            <a:srgbClr val="D6A000"/>
+          </a:solidFill>
+          <a:ln>
+            <a:noFill/>
+          </a:ln>
+          <a:effectLst/>
+        </p:spPr>
+        <p:style>
+          <a:lnRef idx="1">
+            <a:schemeClr val="accent1"/>
+          </a:lnRef>
+          <a:fillRef idx="3">
+            <a:schemeClr val="accent1"/>
+          </a:fillRef>
+          <a:effectRef idx="2">
+            <a:schemeClr val="accent1"/>
+          </a:effectRef>
+          <a:fontRef idx="minor">
+            <a:schemeClr val="lt1"/>
+          </a:fontRef>
+        </p:style>
+        <p:txBody>
+          <a:bodyPr rtlCol="0" anchor="ctr"/>
+          <a:lstStyle/>
+          <a:p>
+            <a:pPr algn="ctr"/>
+          </a:p>
+        </p:txBody>
+      </p:sp>
+      <p:sp>
+        <p:nvSpPr>
+          <p:cNvPr id="50" name="s2-bar-c"/>
+          <p:cNvSpPr/>
+          <p:nvPr/>
+        </p:nvSpPr>
+        <p:spPr>
+          <a:xfrm>
+            <a:off x="393192" y="3986784"/>
+            <a:ext cx="76200" cy="228600"/>
+          </a:xfrm>
+          <a:prstGeom prst="rect">
+            <a:avLst/>
+          </a:prstGeom>
+          <a:solidFill>
+            <a:srgbClr val="D6A000"/>
+          </a:solidFill>
+          <a:ln>
+            <a:noFill/>
+          </a:ln>
+          <a:effectLst/>
+        </p:spPr>
+        <p:style>
+          <a:lnRef idx="1">
+            <a:schemeClr val="accent1"/>
+          </a:lnRef>
+          <a:fillRef idx="3">
+            <a:schemeClr val="accent1"/>
+          </a:fillRef>
+          <a:effectRef idx="2">
+            <a:schemeClr val="accent1"/>
+          </a:effectRef>
+          <a:fontRef idx="minor">
+            <a:schemeClr val="lt1"/>
+          </a:fontRef>
+        </p:style>
+        <p:txBody>
+          <a:bodyPr rtlCol="0" anchor="ctr"/>
+          <a:lstStyle/>
+          <a:p>
+            <a:pPr algn="ctr"/>
+          </a:p>
+        </p:txBody>
+      </p:sp>
+    </p:spTree>
+  </p:cSld>
+  <p:clrMapOvr>
+    <a:masterClrMapping/>
+  </p:clrMapOvr>
+</p:sld>
+</file>
+
 <file path=ppt/theme/theme1.xml><?xml version="1.0" encoding="utf-8"?>
 <a:theme xmlns:a="http://schemas.openxmlformats.org/drawingml/2006/main" name="Office 主题​​">
   <a:themeElements>

--- a/银行流水分享_V1.9.pptx
+++ b/银行流水分享_V1.9.pptx
@@ -7,6 +7,7 @@
   <p:sldIdLst>
     <p:sldId id="260" r:id="rId2"/>
     <p:sldId id="269" r:id="rId3"/>
+    <p:sldId id="282" r:id="rId16"/>
     <p:sldId id="281" r:id="rId4"/>
     <p:sldId id="280" r:id="rId5"/>
     <p:sldId id="279" r:id="rId6"/>
@@ -9726,7 +9727,7 @@
                 <a:latin typeface="微软雅黑"/>
                 <a:ea typeface="微软雅黑"/>
               </a:rPr>
-              <a:t>持续正常还款</a:t>
+              <a:t>整体持续还款</a:t>
             </a:r>
           </a:p>
         </p:txBody>
@@ -9814,7 +9815,7 @@
                 <a:latin typeface="微软雅黑"/>
                 <a:ea typeface="微软雅黑"/>
               </a:rPr>
-              <a:t>暂无明显违约</a:t>
+              <a:t>存在轻微还款波动</a:t>
             </a:r>
           </a:p>
         </p:txBody>
@@ -10495,234 +10496,6 @@
                 <a:ea typeface="微软雅黑"/>
               </a:rPr>
               <a:t>还款表现</a:t>
-            </a:r>
-          </a:p>
-        </p:txBody>
-      </p:sp>
-      <p:sp>
-        <p:nvSpPr>
-          <p:cNvPr id="73" name="用户-g3-1"/>
-          <p:cNvSpPr txBox="1"/>
-          <p:nvPr/>
-        </p:nvSpPr>
-        <p:spPr>
-          <a:xfrm>
-            <a:off x="722376" y="5614416"/>
-            <a:ext cx="1197864" cy="347472"/>
-          </a:xfrm>
-          <a:prstGeom prst="rect">
-            <a:avLst/>
-          </a:prstGeom>
-          <a:noFill/>
-        </p:spPr>
-        <p:txBody>
-          <a:bodyPr wrap="square" lIns="0" rIns="0" tIns="0" bIns="0">
-            <a:noAutofit/>
-          </a:bodyPr>
-          <a:lstStyle/>
-          <a:p>
-            <a:pPr>
-              <a:lnSpc>
-                <a:spcPct val="100000"/>
-              </a:lnSpc>
-            </a:pPr>
-            <a:r>
-              <a:rPr sz="800" b="0" lang="zh-CN">
-                <a:solidFill>
-                  <a:srgbClr val="1F4E79"/>
-                </a:solidFill>
-                <a:latin typeface="微软雅黑"/>
-                <a:ea typeface="微软雅黑"/>
-              </a:rPr>
-              <a:t>90 天还款金额</a:t>
-            </a:r>
-          </a:p>
-          <a:p>
-            <a:pPr>
-              <a:lnSpc>
-                <a:spcPct val="100000"/>
-              </a:lnSpc>
-            </a:pPr>
-            <a:r>
-              <a:rPr sz="1000" b="0" lang="zh-CN">
-                <a:solidFill>
-                  <a:srgbClr val="3D3C3A"/>
-                </a:solidFill>
-                <a:latin typeface="微软雅黑"/>
-                <a:ea typeface="微软雅黑"/>
-              </a:rPr>
-              <a:t>A$1,284</a:t>
-            </a:r>
-          </a:p>
-        </p:txBody>
-      </p:sp>
-      <p:sp>
-        <p:nvSpPr>
-          <p:cNvPr id="74" name="用户-g3-2"/>
-          <p:cNvSpPr txBox="1"/>
-          <p:nvPr/>
-        </p:nvSpPr>
-        <p:spPr>
-          <a:xfrm>
-            <a:off x="1993392" y="5614416"/>
-            <a:ext cx="1197864" cy="347472"/>
-          </a:xfrm>
-          <a:prstGeom prst="rect">
-            <a:avLst/>
-          </a:prstGeom>
-          <a:noFill/>
-        </p:spPr>
-        <p:txBody>
-          <a:bodyPr wrap="square" lIns="0" rIns="0" tIns="0" bIns="0">
-            <a:noAutofit/>
-          </a:bodyPr>
-          <a:lstStyle/>
-          <a:p>
-            <a:pPr>
-              <a:lnSpc>
-                <a:spcPct val="100000"/>
-              </a:lnSpc>
-            </a:pPr>
-            <a:r>
-              <a:rPr sz="800" b="0" lang="zh-CN">
-                <a:solidFill>
-                  <a:srgbClr val="1F4E79"/>
-                </a:solidFill>
-                <a:latin typeface="微软雅黑"/>
-                <a:ea typeface="微软雅黑"/>
-              </a:rPr>
-              <a:t>违约次数</a:t>
-            </a:r>
-          </a:p>
-          <a:p>
-            <a:pPr>
-              <a:lnSpc>
-                <a:spcPct val="100000"/>
-              </a:lnSpc>
-            </a:pPr>
-            <a:r>
-              <a:rPr sz="1200" b="1" lang="zh-CN">
-                <a:solidFill>
-                  <a:srgbClr val="1F4E79"/>
-                </a:solidFill>
-                <a:latin typeface="微软雅黑"/>
-                <a:ea typeface="微软雅黑"/>
-              </a:rPr>
-              <a:t>0 次</a:t>
-            </a:r>
-          </a:p>
-        </p:txBody>
-      </p:sp>
-      <p:sp>
-        <p:nvSpPr>
-          <p:cNvPr id="75" name="用户-g3-3"/>
-          <p:cNvSpPr txBox="1"/>
-          <p:nvPr/>
-        </p:nvSpPr>
-        <p:spPr>
-          <a:xfrm>
-            <a:off x="3264408" y="5614416"/>
-            <a:ext cx="1197864" cy="347472"/>
-          </a:xfrm>
-          <a:prstGeom prst="rect">
-            <a:avLst/>
-          </a:prstGeom>
-          <a:noFill/>
-        </p:spPr>
-        <p:txBody>
-          <a:bodyPr wrap="square" lIns="0" rIns="0" tIns="0" bIns="0">
-            <a:noAutofit/>
-          </a:bodyPr>
-          <a:lstStyle/>
-          <a:p>
-            <a:pPr>
-              <a:lnSpc>
-                <a:spcPct val="100000"/>
-              </a:lnSpc>
-            </a:pPr>
-            <a:r>
-              <a:rPr sz="800" b="0" lang="zh-CN">
-                <a:solidFill>
-                  <a:srgbClr val="1F4E79"/>
-                </a:solidFill>
-                <a:latin typeface="微软雅黑"/>
-                <a:ea typeface="微软雅黑"/>
-              </a:rPr>
-              <a:t>扣款失败次数</a:t>
-            </a:r>
-          </a:p>
-          <a:p>
-            <a:pPr>
-              <a:lnSpc>
-                <a:spcPct val="100000"/>
-              </a:lnSpc>
-            </a:pPr>
-            <a:r>
-              <a:rPr sz="1000" b="0" lang="zh-CN">
-                <a:solidFill>
-                  <a:srgbClr val="3D3C3A"/>
-                </a:solidFill>
-                <a:latin typeface="微软雅黑"/>
-                <a:ea typeface="微软雅黑"/>
-              </a:rPr>
-              <a:t>0 次</a:t>
-            </a:r>
-          </a:p>
-        </p:txBody>
-      </p:sp>
-      <p:sp>
-        <p:nvSpPr>
-          <p:cNvPr id="76" name="用户-g3-4"/>
-          <p:cNvSpPr txBox="1"/>
-          <p:nvPr/>
-        </p:nvSpPr>
-        <p:spPr>
-          <a:xfrm>
-            <a:off x="4535424" y="5614416"/>
-            <a:ext cx="1197864" cy="347472"/>
-          </a:xfrm>
-          <a:prstGeom prst="rect">
-            <a:avLst/>
-          </a:prstGeom>
-          <a:noFill/>
-        </p:spPr>
-        <p:txBody>
-          <a:bodyPr wrap="square" lIns="0" rIns="0" tIns="0" bIns="0">
-            <a:noAutofit/>
-          </a:bodyPr>
-          <a:lstStyle/>
-          <a:p>
-            <a:pPr>
-              <a:lnSpc>
-                <a:spcPct val="100000"/>
-              </a:lnSpc>
-            </a:pPr>
-            <a:r>
-              <a:rPr sz="800" b="0" lang="zh-CN">
-                <a:solidFill>
-                  <a:srgbClr val="1F4E79"/>
-                </a:solidFill>
-                <a:latin typeface="微软雅黑"/>
-                <a:ea typeface="微软雅黑"/>
-              </a:rPr>
-              <a:t>还款中断</a:t>
-            </a:r>
-          </a:p>
-          <a:p>
-            <a:pPr>
-              <a:lnSpc>
-                <a:spcPct val="100000"/>
-              </a:lnSpc>
-            </a:pPr>
-            <a:r>
-              <a:rPr sz="1000" b="0" lang="zh-CN">
-                <a:solidFill>
-                  <a:srgbClr val="3D3C3A"/>
-                </a:solidFill>
-                <a:latin typeface="微软雅黑"/>
-                <a:ea typeface="微软雅黑"/>
-              </a:rPr>
-              <a:t>无</a:t>
             </a:r>
           </a:p>
         </p:txBody>
@@ -11471,7 +11244,7 @@
         </p:nvSpPr>
         <p:spPr>
           <a:xfrm>
-            <a:off x="6373368" y="5248656"/>
+            <a:off x="6373368" y="5230368"/>
             <a:ext cx="1609344" cy="173736"/>
           </a:xfrm>
           <a:prstGeom prst="rect">
@@ -11531,7 +11304,7 @@
         </p:nvSpPr>
         <p:spPr>
           <a:xfrm>
-            <a:off x="6373368" y="5422392"/>
+            <a:off x="6373368" y="5376672"/>
             <a:ext cx="1609344" cy="173736"/>
           </a:xfrm>
           <a:prstGeom prst="rect">
@@ -11591,7 +11364,7 @@
         </p:nvSpPr>
         <p:spPr>
           <a:xfrm>
-            <a:off x="6373368" y="5596128"/>
+            <a:off x="6373368" y="5522976"/>
             <a:ext cx="1609344" cy="173736"/>
           </a:xfrm>
           <a:prstGeom prst="rect">
@@ -11691,7 +11464,7 @@
         </p:nvSpPr>
         <p:spPr>
           <a:xfrm>
-            <a:off x="8092440" y="5248656"/>
+            <a:off x="8092440" y="5230368"/>
             <a:ext cx="1609344" cy="173736"/>
           </a:xfrm>
           <a:prstGeom prst="rect">
@@ -11718,7 +11491,7 @@
                 <a:latin typeface="微软雅黑"/>
                 <a:ea typeface="微软雅黑"/>
               </a:rPr>
-              <a:t>违约次数</a:t>
+              <a:t>轻微逾期</a:t>
             </a:r>
             <a:r>
               <a:rPr sz="800" b="0" lang="zh-CN">
@@ -11733,12 +11506,12 @@
             <a:r>
               <a:rPr sz="1200" b="1" lang="zh-CN">
                 <a:solidFill>
-                  <a:srgbClr val="1F4E79"/>
-                </a:solidFill>
-                <a:latin typeface="微软雅黑"/>
-                <a:ea typeface="微软雅黑"/>
-              </a:rPr>
-              <a:t>0 次</a:t>
+                  <a:srgbClr val="D6A000"/>
+                </a:solidFill>
+                <a:latin typeface="微软雅黑"/>
+                <a:ea typeface="微软雅黑"/>
+              </a:rPr>
+              <a:t>1 次</a:t>
             </a:r>
           </a:p>
         </p:txBody>
@@ -11751,7 +11524,7 @@
         </p:nvSpPr>
         <p:spPr>
           <a:xfrm>
-            <a:off x="8092440" y="5422392"/>
+            <a:off x="8092440" y="5376672"/>
             <a:ext cx="1609344" cy="173736"/>
           </a:xfrm>
           <a:prstGeom prst="rect">
@@ -11798,7 +11571,7 @@
                 <a:latin typeface="微软雅黑"/>
                 <a:ea typeface="微软雅黑"/>
               </a:rPr>
-              <a:t>无</a:t>
+              <a:t>1 次</a:t>
             </a:r>
           </a:p>
         </p:txBody>
@@ -11811,7 +11584,7 @@
         </p:nvSpPr>
         <p:spPr>
           <a:xfrm>
-            <a:off x="8092440" y="5596128"/>
+            <a:off x="8092440" y="5522976"/>
             <a:ext cx="1609344" cy="173736"/>
           </a:xfrm>
           <a:prstGeom prst="rect">
@@ -11871,7 +11644,7 @@
         </p:nvSpPr>
         <p:spPr>
           <a:xfrm>
-            <a:off x="8092440" y="5769864"/>
+            <a:off x="8092440" y="5669280"/>
             <a:ext cx="1609344" cy="173736"/>
           </a:xfrm>
           <a:prstGeom prst="rect">
@@ -11918,7 +11691,7 @@
                 <a:latin typeface="微软雅黑"/>
                 <a:ea typeface="微软雅黑"/>
               </a:rPr>
-              <a:t>6 期</a:t>
+              <a:t>5 期</a:t>
             </a:r>
           </a:p>
         </p:txBody>
@@ -11971,7 +11744,7 @@
         </p:nvSpPr>
         <p:spPr>
           <a:xfrm>
-            <a:off x="9811512" y="5248656"/>
+            <a:off x="9811512" y="5230368"/>
             <a:ext cx="1609344" cy="173736"/>
           </a:xfrm>
           <a:prstGeom prst="rect">
@@ -12031,7 +11804,7 @@
         </p:nvSpPr>
         <p:spPr>
           <a:xfrm>
-            <a:off x="9811512" y="5422392"/>
+            <a:off x="9811512" y="5376672"/>
             <a:ext cx="1609344" cy="173736"/>
           </a:xfrm>
           <a:prstGeom prst="rect">
@@ -12091,7 +11864,7 @@
         </p:nvSpPr>
         <p:spPr>
           <a:xfrm>
-            <a:off x="9811512" y="5596128"/>
+            <a:off x="9811512" y="5522976"/>
             <a:ext cx="1609344" cy="173736"/>
           </a:xfrm>
           <a:prstGeom prst="rect">
@@ -12139,6 +11912,531 @@
                 <a:ea typeface="微软雅黑"/>
               </a:rPr>
               <a:t>A$564</a:t>
+            </a:r>
+          </a:p>
+        </p:txBody>
+      </p:sp>
+      <p:sp>
+        <p:nvSpPr>
+          <p:cNvPr id="107" name="用户-g3-1"/>
+          <p:cNvSpPr txBox="1"/>
+          <p:nvPr/>
+        </p:nvSpPr>
+        <p:spPr>
+          <a:xfrm>
+            <a:off x="722376" y="5614416"/>
+            <a:ext cx="958291" cy="347472"/>
+          </a:xfrm>
+          <a:prstGeom prst="rect">
+            <a:avLst/>
+          </a:prstGeom>
+          <a:noFill/>
+        </p:spPr>
+        <p:txBody>
+          <a:bodyPr wrap="square" lIns="0" rIns="0" tIns="0" bIns="0">
+            <a:noAutofit/>
+          </a:bodyPr>
+          <a:lstStyle/>
+          <a:p>
+            <a:pPr>
+              <a:lnSpc>
+                <a:spcPct val="100000"/>
+              </a:lnSpc>
+            </a:pPr>
+            <a:r>
+              <a:rPr sz="800" b="0" lang="zh-CN">
+                <a:solidFill>
+                  <a:srgbClr val="1F4E79"/>
+                </a:solidFill>
+                <a:latin typeface="微软雅黑"/>
+                <a:ea typeface="微软雅黑"/>
+              </a:rPr>
+              <a:t>90 天还款金额</a:t>
+            </a:r>
+          </a:p>
+          <a:p>
+            <a:pPr>
+              <a:lnSpc>
+                <a:spcPct val="100000"/>
+              </a:lnSpc>
+            </a:pPr>
+            <a:r>
+              <a:rPr sz="1000" b="0" lang="zh-CN">
+                <a:solidFill>
+                  <a:srgbClr val="3D3C3A"/>
+                </a:solidFill>
+                <a:latin typeface="微软雅黑"/>
+                <a:ea typeface="微软雅黑"/>
+              </a:rPr>
+              <a:t>A$1,284</a:t>
+            </a:r>
+          </a:p>
+        </p:txBody>
+      </p:sp>
+      <p:sp>
+        <p:nvSpPr>
+          <p:cNvPr id="108" name="用户-g3-2"/>
+          <p:cNvSpPr txBox="1"/>
+          <p:nvPr/>
+        </p:nvSpPr>
+        <p:spPr>
+          <a:xfrm>
+            <a:off x="1735531" y="5614416"/>
+            <a:ext cx="958291" cy="347472"/>
+          </a:xfrm>
+          <a:prstGeom prst="rect">
+            <a:avLst/>
+          </a:prstGeom>
+          <a:noFill/>
+        </p:spPr>
+        <p:txBody>
+          <a:bodyPr wrap="square" lIns="0" rIns="0" tIns="0" bIns="0">
+            <a:noAutofit/>
+          </a:bodyPr>
+          <a:lstStyle/>
+          <a:p>
+            <a:pPr>
+              <a:lnSpc>
+                <a:spcPct val="100000"/>
+              </a:lnSpc>
+            </a:pPr>
+            <a:r>
+              <a:rPr sz="800" b="0" lang="zh-CN">
+                <a:solidFill>
+                  <a:srgbClr val="1F4E79"/>
+                </a:solidFill>
+                <a:latin typeface="微软雅黑"/>
+                <a:ea typeface="微软雅黑"/>
+              </a:rPr>
+              <a:t>轻微逾期</a:t>
+            </a:r>
+          </a:p>
+          <a:p>
+            <a:pPr>
+              <a:lnSpc>
+                <a:spcPct val="100000"/>
+              </a:lnSpc>
+            </a:pPr>
+            <a:r>
+              <a:rPr sz="1200" b="1" lang="zh-CN">
+                <a:solidFill>
+                  <a:srgbClr val="D6A000"/>
+                </a:solidFill>
+                <a:latin typeface="微软雅黑"/>
+                <a:ea typeface="微软雅黑"/>
+              </a:rPr>
+              <a:t>1 次</a:t>
+            </a:r>
+          </a:p>
+        </p:txBody>
+      </p:sp>
+      <p:sp>
+        <p:nvSpPr>
+          <p:cNvPr id="109" name="用户-g3-3"/>
+          <p:cNvSpPr txBox="1"/>
+          <p:nvPr/>
+        </p:nvSpPr>
+        <p:spPr>
+          <a:xfrm>
+            <a:off x="2748686" y="5614416"/>
+            <a:ext cx="958291" cy="347472"/>
+          </a:xfrm>
+          <a:prstGeom prst="rect">
+            <a:avLst/>
+          </a:prstGeom>
+          <a:noFill/>
+        </p:spPr>
+        <p:txBody>
+          <a:bodyPr wrap="square" lIns="0" rIns="0" tIns="0" bIns="0">
+            <a:noAutofit/>
+          </a:bodyPr>
+          <a:lstStyle/>
+          <a:p>
+            <a:pPr>
+              <a:lnSpc>
+                <a:spcPct val="100000"/>
+              </a:lnSpc>
+            </a:pPr>
+            <a:r>
+              <a:rPr sz="800" b="0" lang="zh-CN">
+                <a:solidFill>
+                  <a:srgbClr val="1F4E79"/>
+                </a:solidFill>
+                <a:latin typeface="微软雅黑"/>
+                <a:ea typeface="微软雅黑"/>
+              </a:rPr>
+              <a:t>扣款失败次数</a:t>
+            </a:r>
+          </a:p>
+          <a:p>
+            <a:pPr>
+              <a:lnSpc>
+                <a:spcPct val="100000"/>
+              </a:lnSpc>
+            </a:pPr>
+            <a:r>
+              <a:rPr sz="1000" b="0" lang="zh-CN">
+                <a:solidFill>
+                  <a:srgbClr val="3D3C3A"/>
+                </a:solidFill>
+                <a:latin typeface="微软雅黑"/>
+                <a:ea typeface="微软雅黑"/>
+              </a:rPr>
+              <a:t>1 次</a:t>
+            </a:r>
+          </a:p>
+        </p:txBody>
+      </p:sp>
+      <p:sp>
+        <p:nvSpPr>
+          <p:cNvPr id="110" name="用户-g3-4"/>
+          <p:cNvSpPr txBox="1"/>
+          <p:nvPr/>
+        </p:nvSpPr>
+        <p:spPr>
+          <a:xfrm>
+            <a:off x="3761841" y="5614416"/>
+            <a:ext cx="958291" cy="347472"/>
+          </a:xfrm>
+          <a:prstGeom prst="rect">
+            <a:avLst/>
+          </a:prstGeom>
+          <a:noFill/>
+        </p:spPr>
+        <p:txBody>
+          <a:bodyPr wrap="square" lIns="0" rIns="0" tIns="0" bIns="0">
+            <a:noAutofit/>
+          </a:bodyPr>
+          <a:lstStyle/>
+          <a:p>
+            <a:pPr>
+              <a:lnSpc>
+                <a:spcPct val="100000"/>
+              </a:lnSpc>
+            </a:pPr>
+            <a:r>
+              <a:rPr sz="800" b="0" lang="zh-CN">
+                <a:solidFill>
+                  <a:srgbClr val="1F4E79"/>
+                </a:solidFill>
+                <a:latin typeface="微软雅黑"/>
+                <a:ea typeface="微软雅黑"/>
+              </a:rPr>
+              <a:t>还款中断</a:t>
+            </a:r>
+          </a:p>
+          <a:p>
+            <a:pPr>
+              <a:lnSpc>
+                <a:spcPct val="100000"/>
+              </a:lnSpc>
+            </a:pPr>
+            <a:r>
+              <a:rPr sz="1000" b="0" lang="zh-CN">
+                <a:solidFill>
+                  <a:srgbClr val="3D3C3A"/>
+                </a:solidFill>
+                <a:latin typeface="微软雅黑"/>
+                <a:ea typeface="微软雅黑"/>
+              </a:rPr>
+              <a:t>无</a:t>
+            </a:r>
+          </a:p>
+        </p:txBody>
+      </p:sp>
+      <p:sp>
+        <p:nvSpPr>
+          <p:cNvPr id="111" name="用户-g3-5"/>
+          <p:cNvSpPr txBox="1"/>
+          <p:nvPr/>
+        </p:nvSpPr>
+        <p:spPr>
+          <a:xfrm>
+            <a:off x="4774996" y="5614416"/>
+            <a:ext cx="958291" cy="347472"/>
+          </a:xfrm>
+          <a:prstGeom prst="rect">
+            <a:avLst/>
+          </a:prstGeom>
+          <a:noFill/>
+        </p:spPr>
+        <p:txBody>
+          <a:bodyPr wrap="square" lIns="0" rIns="0" tIns="0" bIns="0">
+            <a:noAutofit/>
+          </a:bodyPr>
+          <a:lstStyle/>
+          <a:p>
+            <a:pPr>
+              <a:lnSpc>
+                <a:spcPct val="100000"/>
+              </a:lnSpc>
+            </a:pPr>
+            <a:r>
+              <a:rPr sz="800" b="0" lang="zh-CN">
+                <a:solidFill>
+                  <a:srgbClr val="1F4E79"/>
+                </a:solidFill>
+                <a:latin typeface="微软雅黑"/>
+                <a:ea typeface="微软雅黑"/>
+              </a:rPr>
+              <a:t>近 90 天新增借款</a:t>
+            </a:r>
+          </a:p>
+          <a:p>
+            <a:pPr>
+              <a:lnSpc>
+                <a:spcPct val="100000"/>
+              </a:lnSpc>
+            </a:pPr>
+            <a:r>
+              <a:rPr sz="1000" b="0" lang="zh-CN">
+                <a:solidFill>
+                  <a:srgbClr val="3D3C3A"/>
+                </a:solidFill>
+                <a:latin typeface="微软雅黑"/>
+                <a:ea typeface="微软雅黑"/>
+              </a:rPr>
+              <a:t>1 笔</a:t>
+            </a:r>
+          </a:p>
+        </p:txBody>
+      </p:sp>
+      <p:sp>
+        <p:nvSpPr>
+          <p:cNvPr id="112" name="Fa-g1-4"/>
+          <p:cNvSpPr txBox="1"/>
+          <p:nvPr/>
+        </p:nvSpPr>
+        <p:spPr>
+          <a:xfrm>
+            <a:off x="6373368" y="5669280"/>
+            <a:ext cx="1609344" cy="146304"/>
+          </a:xfrm>
+          <a:prstGeom prst="rect">
+            <a:avLst/>
+          </a:prstGeom>
+          <a:noFill/>
+        </p:spPr>
+        <p:txBody>
+          <a:bodyPr wrap="square" lIns="0" rIns="0" tIns="0" bIns="0">
+            <a:noAutofit/>
+          </a:bodyPr>
+          <a:lstStyle/>
+          <a:p>
+            <a:pPr>
+              <a:lnSpc>
+                <a:spcPct val="100000"/>
+              </a:lnSpc>
+            </a:pPr>
+            <a:r>
+              <a:rPr sz="800" b="0" lang="zh-CN">
+                <a:solidFill>
+                  <a:srgbClr val="1F4E79"/>
+                </a:solidFill>
+                <a:latin typeface="微软雅黑"/>
+                <a:ea typeface="微软雅黑"/>
+              </a:rPr>
+              <a:t>预计剩余</a:t>
+            </a:r>
+            <a:r>
+              <a:rPr sz="800" b="0" lang="zh-CN">
+                <a:solidFill>
+                  <a:srgbClr val="1F4E79"/>
+                </a:solidFill>
+                <a:latin typeface="微软雅黑"/>
+                <a:ea typeface="微软雅黑"/>
+              </a:rPr>
+              <a:t> </a:t>
+            </a:r>
+            <a:r>
+              <a:rPr sz="900" b="0" lang="zh-CN">
+                <a:solidFill>
+                  <a:srgbClr val="3D3C3A"/>
+                </a:solidFill>
+                <a:latin typeface="微软雅黑"/>
+                <a:ea typeface="微软雅黑"/>
+              </a:rPr>
+              <a:t>4 期</a:t>
+            </a:r>
+          </a:p>
+        </p:txBody>
+      </p:sp>
+      <p:sp>
+        <p:nvSpPr>
+          <p:cNvPr id="113" name="Fa-g2-5"/>
+          <p:cNvSpPr txBox="1"/>
+          <p:nvPr/>
+        </p:nvSpPr>
+        <p:spPr>
+          <a:xfrm>
+            <a:off x="8092440" y="5815584"/>
+            <a:ext cx="1609344" cy="146304"/>
+          </a:xfrm>
+          <a:prstGeom prst="rect">
+            <a:avLst/>
+          </a:prstGeom>
+          <a:noFill/>
+        </p:spPr>
+        <p:txBody>
+          <a:bodyPr wrap="square" lIns="0" rIns="0" tIns="0" bIns="0">
+            <a:noAutofit/>
+          </a:bodyPr>
+          <a:lstStyle/>
+          <a:p>
+            <a:pPr>
+              <a:lnSpc>
+                <a:spcPct val="100000"/>
+              </a:lnSpc>
+            </a:pPr>
+            <a:r>
+              <a:rPr sz="800" b="0" lang="zh-CN">
+                <a:solidFill>
+                  <a:srgbClr val="1F4E79"/>
+                </a:solidFill>
+                <a:latin typeface="微软雅黑"/>
+                <a:ea typeface="微软雅黑"/>
+              </a:rPr>
+              <a:t>最长逾期</a:t>
+            </a:r>
+            <a:r>
+              <a:rPr sz="800" b="0" lang="zh-CN">
+                <a:solidFill>
+                  <a:srgbClr val="1F4E79"/>
+                </a:solidFill>
+                <a:latin typeface="微软雅黑"/>
+                <a:ea typeface="微软雅黑"/>
+              </a:rPr>
+              <a:t> </a:t>
+            </a:r>
+            <a:r>
+              <a:rPr sz="1200" b="1" lang="zh-CN">
+                <a:solidFill>
+                  <a:srgbClr val="D6A000"/>
+                </a:solidFill>
+                <a:latin typeface="微软雅黑"/>
+                <a:ea typeface="微软雅黑"/>
+              </a:rPr>
+              <a:t>3 天</a:t>
+            </a:r>
+          </a:p>
+        </p:txBody>
+      </p:sp>
+      <p:sp>
+        <p:nvSpPr>
+          <p:cNvPr id="114" name="Fa-g3-4"/>
+          <p:cNvSpPr txBox="1"/>
+          <p:nvPr/>
+        </p:nvSpPr>
+        <p:spPr>
+          <a:xfrm>
+            <a:off x="9811512" y="5669280"/>
+            <a:ext cx="1609344" cy="146304"/>
+          </a:xfrm>
+          <a:prstGeom prst="rect">
+            <a:avLst/>
+          </a:prstGeom>
+          <a:noFill/>
+        </p:spPr>
+        <p:txBody>
+          <a:bodyPr wrap="square" lIns="0" rIns="0" tIns="0" bIns="0">
+            <a:noAutofit/>
+          </a:bodyPr>
+          <a:lstStyle/>
+          <a:p>
+            <a:pPr>
+              <a:lnSpc>
+                <a:spcPct val="100000"/>
+              </a:lnSpc>
+            </a:pPr>
+            <a:r>
+              <a:rPr sz="800" b="0" lang="zh-CN">
+                <a:solidFill>
+                  <a:srgbClr val="1F4E79"/>
+                </a:solidFill>
+                <a:latin typeface="微软雅黑"/>
+                <a:ea typeface="微软雅黑"/>
+              </a:rPr>
+              <a:t>预计总还款</a:t>
+            </a:r>
+            <a:r>
+              <a:rPr sz="800" b="0" lang="zh-CN">
+                <a:solidFill>
+                  <a:srgbClr val="1F4E79"/>
+                </a:solidFill>
+                <a:latin typeface="微软雅黑"/>
+                <a:ea typeface="微软雅黑"/>
+              </a:rPr>
+              <a:t> </a:t>
+            </a:r>
+            <a:r>
+              <a:rPr sz="900" b="0" lang="zh-CN">
+                <a:solidFill>
+                  <a:srgbClr val="3D3C3A"/>
+                </a:solidFill>
+                <a:latin typeface="微软雅黑"/>
+                <a:ea typeface="微软雅黑"/>
+              </a:rPr>
+              <a:t>A$1,872</a:t>
+            </a:r>
+          </a:p>
+        </p:txBody>
+      </p:sp>
+      <p:sp>
+        <p:nvSpPr>
+          <p:cNvPr id="115" name="Fa-g3-5"/>
+          <p:cNvSpPr txBox="1"/>
+          <p:nvPr/>
+        </p:nvSpPr>
+        <p:spPr>
+          <a:xfrm>
+            <a:off x="9811512" y="5815584"/>
+            <a:ext cx="1609344" cy="146304"/>
+          </a:xfrm>
+          <a:prstGeom prst="rect">
+            <a:avLst/>
+          </a:prstGeom>
+          <a:noFill/>
+        </p:spPr>
+        <p:txBody>
+          <a:bodyPr wrap="square" lIns="0" rIns="0" tIns="0" bIns="0">
+            <a:noAutofit/>
+          </a:bodyPr>
+          <a:lstStyle/>
+          <a:p>
+            <a:pPr>
+              <a:lnSpc>
+                <a:spcPct val="100000"/>
+              </a:lnSpc>
+            </a:pPr>
+            <a:r>
+              <a:rPr sz="800" b="0" lang="zh-CN">
+                <a:solidFill>
+                  <a:srgbClr val="1F4E79"/>
+                </a:solidFill>
+                <a:latin typeface="微软雅黑"/>
+                <a:ea typeface="微软雅黑"/>
+              </a:rPr>
+              <a:t>融资成本</a:t>
+            </a:r>
+            <a:r>
+              <a:rPr sz="800" b="0" lang="zh-CN">
+                <a:solidFill>
+                  <a:srgbClr val="1F4E79"/>
+                </a:solidFill>
+                <a:latin typeface="微软雅黑"/>
+                <a:ea typeface="微软雅黑"/>
+              </a:rPr>
+              <a:t> </a:t>
+            </a:r>
+            <a:r>
+              <a:rPr sz="900" b="0" lang="zh-CN">
+                <a:solidFill>
+                  <a:srgbClr val="3D3C3A"/>
+                </a:solidFill>
+                <a:latin typeface="微软雅黑"/>
+                <a:ea typeface="微软雅黑"/>
+              </a:rPr>
+              <a:t>A$372</a:t>
             </a:r>
           </a:p>
         </p:txBody>
@@ -28243,6 +28541,6178 @@
         <p14:creationId xmlns:p14="http://schemas.microsoft.com/office/powerpoint/2010/main" val="1875240657"/>
       </p:ext>
     </p:extLst>
+  </p:cSld>
+  <p:clrMapOvr>
+    <a:masterClrMapping/>
+  </p:clrMapOvr>
+</p:sld>
+</file>
+
+<file path=ppt/slides/slide6.xml><?xml version="1.0" encoding="utf-8"?>
+<p:sld xmlns:a="http://schemas.openxmlformats.org/drawingml/2006/main" xmlns:p="http://schemas.openxmlformats.org/presentationml/2006/main" xmlns:r="http://schemas.openxmlformats.org/officeDocument/2006/relationships">
+  <p:cSld>
+    <p:spTree>
+      <p:nvGrpSpPr>
+        <p:cNvPr id="1" name=""/>
+        <p:cNvGrpSpPr/>
+        <p:nvPr/>
+      </p:nvGrpSpPr>
+      <p:grpSpPr/>
+      <p:sp>
+        <p:nvSpPr>
+          <p:cNvPr id="100002" name="title-c">
+            <a:extLst>
+              <a:ext uri="{FF2B5EF4-FFF2-40B4-BE49-F238E27FC236}">
+                <a16:creationId xmlns:a16="http://schemas.microsoft.com/office/drawing/2014/main" id="{8355AB41-3856-43D4-91F4-2CF8E6943019}"/>
+              </a:ext>
+            </a:extLst>
+          </p:cNvPr>
+          <p:cNvSpPr txBox="1"/>
+          <p:nvPr/>
+        </p:nvSpPr>
+        <p:spPr>
+          <a:xfrm>
+            <a:off x="603504" y="210312"/>
+            <a:ext cx="8887968" cy="356616"/>
+          </a:xfrm>
+          <a:prstGeom prst="rect">
+            <a:avLst/>
+          </a:prstGeom>
+          <a:noFill/>
+          <a:ln>
+            <a:noFill/>
+          </a:ln>
+        </p:spPr>
+        <p:txBody>
+          <a:bodyPr wrap="none" lIns="0" tIns="0" rIns="0" bIns="0" rtlCol="0" anchor="ctr"/>
+          <a:lstStyle/>
+          <a:p>
+            <a:r>
+              <a:rPr lang="zh-CN">
+                <a:latin typeface="微软雅黑"/>
+                <a:ea typeface="微软雅黑"/>
+              </a:rPr>
+              <a:t>副本 2.0：用户负债画像 + Fair Go Finance 单笔贷款画像</a:t>
+            </a:r>
+          </a:p>
+        </p:txBody>
+      </p:sp>
+      <p:sp>
+        <p:nvSpPr>
+          <p:cNvPr id="100003" name="文本框 2-c">
+            <a:extLst>
+              <a:ext uri="{FF2B5EF4-FFF2-40B4-BE49-F238E27FC236}">
+                <a16:creationId xmlns:a16="http://schemas.microsoft.com/office/drawing/2014/main" id="{63E6C3C0-EF83-43D9-A24C-47B1A5AB43C9}"/>
+              </a:ext>
+            </a:extLst>
+          </p:cNvPr>
+          <p:cNvSpPr txBox="1"/>
+          <p:nvPr/>
+        </p:nvSpPr>
+        <p:spPr>
+          <a:xfrm>
+            <a:off x="512064" y="585216"/>
+            <a:ext cx="10899648" cy="438912"/>
+          </a:xfrm>
+          <a:prstGeom prst="rect">
+            <a:avLst/>
+          </a:prstGeom>
+          <a:noFill/>
+        </p:spPr>
+        <p:txBody>
+          <a:bodyPr wrap="square">
+            <a:spAutoFit/>
+          </a:bodyPr>
+          <a:lstStyle/>
+          <a:p>
+            <a:pPr marL="0" marR="0" lvl="0" indent="0" algn="l" defTabSz="914400" rtl="0" eaLnBrk="1" fontAlgn="auto" latinLnBrk="0" hangingPunct="1">
+              <a:lnSpc>
+                <a:spcPct val="140000"/>
+              </a:lnSpc>
+              <a:spcBef>
+                <a:spcPts val="0"/>
+              </a:spcBef>
+              <a:spcAft>
+                <a:spcPts val="0"/>
+              </a:spcAft>
+              <a:buClrTx/>
+              <a:buSzTx/>
+              <a:buFontTx/>
+              <a:buNone/>
+              <a:tabLst/>
+              <a:defRPr>
+                <a:latin typeface="微软雅黑"/>
+                <a:ea typeface="微软雅黑"/>
+              </a:defRPr>
+            </a:pPr>
+            <a:r>
+              <a:rPr lang="zh-CN" sz="1800" b="0">
+                <a:solidFill>
+                  <a:srgbClr val="606060"/>
+                </a:solidFill>
+                <a:latin typeface="微软雅黑"/>
+                <a:ea typeface="微软雅黑"/>
+              </a:rPr>
+              <a:t>原始流水 → 单笔交易识别 → 用户/贷款汇总，将分散交易转化为可直接用于信审的财务画像</a:t>
+            </a:r>
+            <a:endParaRPr kumimoji="0" lang="en-US" altLang="zh-CN" sz="1800" b="0" i="0" u="none" strike="noStrike" kern="1200" cap="none" spc="0" normalizeH="0" baseline="0" noProof="1">
+              <a:ln>
+                <a:noFill/>
+              </a:ln>
+              <a:solidFill>
+                <a:prstClr val="black"/>
+              </a:solidFill>
+              <a:effectLst/>
+              <a:uLnTx/>
+              <a:uFillTx/>
+              <a:latin typeface="微软雅黑" panose="020B0503020204020204" pitchFamily="34" charset="-122"/>
+              <a:ea typeface="微软雅黑" panose="020B0503020204020204" pitchFamily="34" charset="-122"/>
+              <a:cs typeface="+mn-cs"/>
+            </a:endParaRPr>
+          </a:p>
+        </p:txBody>
+      </p:sp>
+      <p:sp>
+        <p:nvSpPr>
+          <p:cNvPr id="100010" name="s2-title-c">
+            <a:extLst>
+              <a:ext uri="{FF2B5EF4-FFF2-40B4-BE49-F238E27FC236}">
+                <a16:creationId xmlns:a16="http://schemas.microsoft.com/office/drawing/2014/main" id="{C74CD74D-A21D-4088-B06A-64E758567EE9}"/>
+              </a:ext>
+            </a:extLst>
+          </p:cNvPr>
+          <p:cNvSpPr txBox="1"/>
+          <p:nvPr/>
+        </p:nvSpPr>
+        <p:spPr>
+          <a:xfrm>
+            <a:off x="512064" y="1216152"/>
+            <a:ext cx="5943600" cy="228600"/>
+          </a:xfrm>
+          <a:prstGeom prst="rect">
+            <a:avLst/>
+          </a:prstGeom>
+          <a:noFill/>
+          <a:ln>
+            <a:noFill/>
+          </a:ln>
+        </p:spPr>
+        <p:txBody>
+          <a:bodyPr wrap="none" lIns="0" tIns="0" rIns="0" bIns="0" rtlCol="0" anchor="ctr"/>
+          <a:lstStyle/>
+          <a:p>
+            <a:pPr marL="0" marR="0" lvl="0" indent="0" algn="l" defTabSz="914400" rtl="0" eaLnBrk="1" fontAlgn="auto" latinLnBrk="0" hangingPunct="1">
+              <a:lnSpc>
+                <a:spcPct val="125000"/>
+              </a:lnSpc>
+              <a:spcBef>
+                <a:spcPts val="0"/>
+              </a:spcBef>
+              <a:spcAft>
+                <a:spcPts val="0"/>
+              </a:spcAft>
+              <a:buClrTx/>
+              <a:buSzTx/>
+              <a:buFontTx/>
+              <a:buNone/>
+              <a:tabLst/>
+              <a:defRPr>
+                <a:latin typeface="微软雅黑"/>
+                <a:ea typeface="微软雅黑"/>
+              </a:defRPr>
+            </a:pPr>
+            <a:r>
+              <a:rPr kumimoji="0" lang="en-US" altLang="zh-CN" sz="1200" b="1" i="0" u="none" strike="noStrike" kern="1200" cap="none" spc="0" normalizeH="0" baseline="0" noProof="0" dirty="0">
+                <a:ln>
+                  <a:noFill/>
+                </a:ln>
+                <a:solidFill>
+                  <a:srgbClr val="0A0A0A"/>
+                </a:solidFill>
+                <a:effectLst/>
+                <a:uLnTx/>
+                <a:uFillTx/>
+                <a:latin typeface="微软雅黑"/>
+                <a:ea typeface="微软雅黑"/>
+                <a:cs typeface="+mn-cs"/>
+              </a:rPr>
+              <a:t>1. </a:t>
+            </a:r>
+            <a:r>
+              <a:rPr kumimoji="0" lang="zh-CN" altLang="en-US" sz="1200" b="1" i="0" u="none" strike="noStrike" kern="1200" cap="none" spc="0" normalizeH="0" baseline="0" noProof="0" dirty="0">
+                <a:ln>
+                  <a:noFill/>
+                </a:ln>
+                <a:solidFill>
+                  <a:srgbClr val="0A0A0A"/>
+                </a:solidFill>
+                <a:effectLst/>
+                <a:uLnTx/>
+                <a:uFillTx/>
+                <a:latin typeface="微软雅黑"/>
+                <a:ea typeface="微软雅黑"/>
+                <a:cs typeface="+mn-cs"/>
+              </a:rPr>
+              <a:t>交易明细维度：理解每一笔交易（输出示例）</a:t>
+            </a:r>
+            <a:endParaRPr kumimoji="0" lang="en-US" sz="1200" b="1" i="0" u="none" strike="noStrike" kern="1200" cap="none" spc="0" normalizeH="0" baseline="0" noProof="1">
+              <a:ln>
+                <a:noFill/>
+              </a:ln>
+              <a:solidFill>
+                <a:srgbClr val="0A0A0A"/>
+              </a:solidFill>
+              <a:effectLst/>
+              <a:uLnTx/>
+              <a:uFillTx/>
+              <a:latin typeface="微软雅黑"/>
+              <a:ea typeface="微软雅黑"/>
+              <a:cs typeface="+mn-cs"/>
+            </a:endParaRPr>
+          </a:p>
+        </p:txBody>
+      </p:sp>
+      <p:sp>
+        <p:nvSpPr>
+          <p:cNvPr id="100013" name="s3-title-c">
+            <a:extLst>
+              <a:ext uri="{FF2B5EF4-FFF2-40B4-BE49-F238E27FC236}">
+                <a16:creationId xmlns:a16="http://schemas.microsoft.com/office/drawing/2014/main" id="{B2B5F18D-2962-46FD-9E6E-562ACD32D72F}"/>
+              </a:ext>
+            </a:extLst>
+          </p:cNvPr>
+          <p:cNvSpPr txBox="1"/>
+          <p:nvPr/>
+        </p:nvSpPr>
+        <p:spPr>
+          <a:xfrm>
+            <a:off x="539495" y="3154578"/>
+            <a:ext cx="5943600" cy="228600"/>
+          </a:xfrm>
+          <a:prstGeom prst="rect">
+            <a:avLst/>
+          </a:prstGeom>
+          <a:noFill/>
+          <a:ln>
+            <a:noFill/>
+          </a:ln>
+        </p:spPr>
+        <p:txBody>
+          <a:bodyPr wrap="none" lIns="0" tIns="0" rIns="0" bIns="0" rtlCol="0" anchor="ctr"/>
+          <a:lstStyle/>
+          <a:p>
+            <a:pPr marL="0" marR="0" lvl="0" indent="0" algn="l" defTabSz="914400" rtl="0" eaLnBrk="1" fontAlgn="auto" latinLnBrk="0" hangingPunct="1">
+              <a:lnSpc>
+                <a:spcPct val="125000"/>
+              </a:lnSpc>
+              <a:spcBef>
+                <a:spcPts val="0"/>
+              </a:spcBef>
+              <a:spcAft>
+                <a:spcPts val="0"/>
+              </a:spcAft>
+              <a:buClrTx/>
+              <a:buSzTx/>
+              <a:buFontTx/>
+              <a:buNone/>
+              <a:tabLst/>
+              <a:defRPr>
+                <a:latin typeface="微软雅黑"/>
+                <a:ea typeface="微软雅黑"/>
+              </a:defRPr>
+            </a:pPr>
+            <a:r>
+              <a:rPr kumimoji="0" lang="en-US" altLang="zh-CN" sz="1200" b="1" i="0" u="none" strike="noStrike" kern="1200" cap="none" spc="0" normalizeH="0" baseline="0" noProof="0" dirty="0">
+                <a:ln>
+                  <a:noFill/>
+                </a:ln>
+                <a:solidFill>
+                  <a:srgbClr val="0A0A0A"/>
+                </a:solidFill>
+                <a:effectLst/>
+                <a:uLnTx/>
+                <a:uFillTx/>
+                <a:latin typeface="微软雅黑"/>
+                <a:ea typeface="微软雅黑"/>
+                <a:cs typeface="+mn-cs"/>
+              </a:rPr>
+              <a:t>2. </a:t>
+            </a:r>
+            <a:r>
+              <a:rPr kumimoji="0" lang="zh-CN" altLang="en-US" sz="1200" b="1" i="0" u="none" strike="noStrike" kern="1200" cap="none" spc="0" normalizeH="0" baseline="0" noProof="0" dirty="0">
+                <a:ln>
+                  <a:noFill/>
+                </a:ln>
+                <a:solidFill>
+                  <a:srgbClr val="0A0A0A"/>
+                </a:solidFill>
+                <a:effectLst/>
+                <a:uLnTx/>
+                <a:uFillTx/>
+                <a:latin typeface="微软雅黑"/>
+                <a:ea typeface="微软雅黑"/>
+                <a:cs typeface="+mn-cs"/>
+              </a:rPr>
+              <a:t>用户汇总维度：形成完整负债画像（输出示例）</a:t>
+            </a:r>
+            <a:endParaRPr kumimoji="0" lang="en-US" sz="1200" b="1" i="0" u="none" strike="noStrike" kern="1200" cap="none" spc="0" normalizeH="0" baseline="0" noProof="1">
+              <a:ln>
+                <a:noFill/>
+              </a:ln>
+              <a:solidFill>
+                <a:srgbClr val="0A0A0A"/>
+              </a:solidFill>
+              <a:effectLst/>
+              <a:uLnTx/>
+              <a:uFillTx/>
+              <a:latin typeface="微软雅黑"/>
+              <a:ea typeface="微软雅黑"/>
+              <a:cs typeface="+mn-cs"/>
+            </a:endParaRPr>
+          </a:p>
+        </p:txBody>
+      </p:sp>
+      <p:graphicFrame>
+        <p:nvGraphicFramePr>
+          <p:cNvPr id="100016" name="init-table-c">
+            <a:extLst>
+              <a:ext uri="{FF2B5EF4-FFF2-40B4-BE49-F238E27FC236}">
+                <a16:creationId xmlns:a16="http://schemas.microsoft.com/office/drawing/2014/main" id="{3C86CAD7-1100-4D7C-B8CF-F22C4AFE4904}"/>
+              </a:ext>
+            </a:extLst>
+          </p:cNvPr>
+          <p:cNvGraphicFramePr>
+            <a:graphicFrameLocks noGrp="1"/>
+          </p:cNvGraphicFramePr>
+          <p:nvPr>
+            <p:extLst>
+              <p:ext uri="{D42A27DB-BD31-4B8C-83A1-F6EECF244321}">
+                <p14:modId xmlns:p14="http://schemas.microsoft.com/office/powerpoint/2010/main" val="654561995"/>
+              </p:ext>
+            </p:extLst>
+          </p:nvPr>
+        </p:nvGraphicFramePr>
+        <p:xfrm>
+          <a:off x="512064" y="1690949"/>
+          <a:ext cx="10901631" cy="1205748"/>
+        </p:xfrm>
+        <a:graphic>
+          <a:graphicData uri="http://schemas.openxmlformats.org/drawingml/2006/table">
+            <a:tbl>
+              <a:tblPr/>
+              <a:tblGrid>
+                <a:gridCol w="720325">
+                  <a:extLst>
+                    <a:ext uri="{9D8B030D-6E8A-4147-A177-3AD203B41FA5}">
+                      <a16:colId xmlns:a16="http://schemas.microsoft.com/office/drawing/2014/main" val="20000"/>
+                    </a:ext>
+                  </a:extLst>
+                </a:gridCol>
+                <a:gridCol w="3359677">
+                  <a:extLst>
+                    <a:ext uri="{9D8B030D-6E8A-4147-A177-3AD203B41FA5}">
+                      <a16:colId xmlns:a16="http://schemas.microsoft.com/office/drawing/2014/main" val="20001"/>
+                    </a:ext>
+                  </a:extLst>
+                </a:gridCol>
+                <a:gridCol w="1048131">
+                  <a:extLst>
+                    <a:ext uri="{9D8B030D-6E8A-4147-A177-3AD203B41FA5}">
+                      <a16:colId xmlns:a16="http://schemas.microsoft.com/office/drawing/2014/main" val="3194826296"/>
+                    </a:ext>
+                  </a:extLst>
+                </a:gridCol>
+                <a:gridCol w="1048131">
+                  <a:extLst>
+                    <a:ext uri="{9D8B030D-6E8A-4147-A177-3AD203B41FA5}">
+                      <a16:colId xmlns:a16="http://schemas.microsoft.com/office/drawing/2014/main" val="2631831465"/>
+                    </a:ext>
+                  </a:extLst>
+                </a:gridCol>
+                <a:gridCol w="1154425">
+                  <a:extLst>
+                    <a:ext uri="{9D8B030D-6E8A-4147-A177-3AD203B41FA5}">
+                      <a16:colId xmlns:a16="http://schemas.microsoft.com/office/drawing/2014/main" val="20002"/>
+                    </a:ext>
+                  </a:extLst>
+                </a:gridCol>
+                <a:gridCol w="834813">
+                  <a:extLst>
+                    <a:ext uri="{9D8B030D-6E8A-4147-A177-3AD203B41FA5}">
+                      <a16:colId xmlns:a16="http://schemas.microsoft.com/office/drawing/2014/main" val="4140160165"/>
+                    </a:ext>
+                  </a:extLst>
+                </a:gridCol>
+                <a:gridCol w="611711">
+                  <a:extLst>
+                    <a:ext uri="{9D8B030D-6E8A-4147-A177-3AD203B41FA5}">
+                      <a16:colId xmlns:a16="http://schemas.microsoft.com/office/drawing/2014/main" val="2534051383"/>
+                    </a:ext>
+                  </a:extLst>
+                </a:gridCol>
+                <a:gridCol w="2124418">
+                  <a:extLst>
+                    <a:ext uri="{9D8B030D-6E8A-4147-A177-3AD203B41FA5}">
+                      <a16:colId xmlns:a16="http://schemas.microsoft.com/office/drawing/2014/main" val="994888910"/>
+                    </a:ext>
+                  </a:extLst>
+                </a:gridCol>
+              </a:tblGrid>
+              <a:tr h="170373">
+                <a:tc>
+                  <a:txBody>
+                    <a:bodyPr/>
+                    <a:lstStyle/>
+                    <a:p>
+                      <a:pPr algn="l"/>
+                      <a:r>
+                        <a:rPr sz="800" b="1">
+                          <a:solidFill>
+                            <a:srgbClr val="0A0A0A"/>
+                          </a:solidFill>
+                          <a:latin typeface="微软雅黑"/>
+                          <a:ea typeface="微软雅黑"/>
+                        </a:rPr>
+                        <a:t>日期</a:t>
+                      </a:r>
+                    </a:p>
+                  </a:txBody>
+                  <a:tcPr marL="27432" marR="27432" marT="9144" marB="9144">
+                    <a:lnL>
+                      <a:noFill/>
+                    </a:lnL>
+                    <a:lnR>
+                      <a:noFill/>
+                    </a:lnR>
+                    <a:lnT>
+                      <a:noFill/>
+                    </a:lnT>
+                    <a:lnB w="19050">
+                      <a:solidFill>
+                        <a:srgbClr val="0A0A0A"/>
+                      </a:solidFill>
+                    </a:lnB>
+                    <a:noFill/>
+                  </a:tcPr>
+                </a:tc>
+                <a:tc>
+                  <a:txBody>
+                    <a:bodyPr/>
+                    <a:lstStyle/>
+                    <a:p>
+                      <a:pPr algn="l"/>
+                      <a:r>
+                        <a:rPr sz="800" b="1" dirty="0" err="1">
+                          <a:solidFill>
+                            <a:srgbClr val="0A0A0A"/>
+                          </a:solidFill>
+                          <a:latin typeface="微软雅黑"/>
+                          <a:ea typeface="微软雅黑"/>
+                        </a:rPr>
+                        <a:t>交易描述</a:t>
+                      </a:r>
+                      <a:endParaRPr sz="800" b="1" dirty="0">
+                        <a:solidFill>
+                          <a:srgbClr val="0A0A0A"/>
+                        </a:solidFill>
+                        <a:latin typeface="微软雅黑"/>
+                        <a:ea typeface="微软雅黑"/>
+                      </a:endParaRPr>
+                    </a:p>
+                  </a:txBody>
+                  <a:tcPr marL="27432" marR="27432" marT="9144" marB="9144">
+                    <a:lnL>
+                      <a:noFill/>
+                    </a:lnL>
+                    <a:lnR>
+                      <a:noFill/>
+                    </a:lnR>
+                    <a:lnT>
+                      <a:noFill/>
+                    </a:lnT>
+                    <a:lnB w="19050">
+                      <a:solidFill>
+                        <a:srgbClr val="0A0A0A"/>
+                      </a:solidFill>
+                    </a:lnB>
+                    <a:noFill/>
+                  </a:tcPr>
+                </a:tc>
+                <a:tc>
+                  <a:txBody>
+                    <a:bodyPr/>
+                    <a:lstStyle/>
+                    <a:p>
+                      <a:pPr marL="0" algn="ctr" defTabSz="914400" rtl="0" eaLnBrk="1" latinLnBrk="0" hangingPunct="1"/>
+                      <a:r>
+                        <a:rPr sz="800" b="1" kern="1200" dirty="0" err="1">
+                          <a:solidFill>
+                            <a:srgbClr val="0A0A0A"/>
+                          </a:solidFill>
+                          <a:latin typeface="微软雅黑" panose="020B0503020204020204" pitchFamily="34" charset="-122"/>
+                          <a:ea typeface="微软雅黑" panose="020B0503020204020204" pitchFamily="34" charset="-122"/>
+                          <a:cs typeface="+mn-cs"/>
+                        </a:rPr>
+                        <a:t>方向</a:t>
+                      </a:r>
+                      <a:endParaRPr sz="800" b="1" kern="1200" dirty="0">
+                        <a:solidFill>
+                          <a:srgbClr val="0A0A0A"/>
+                        </a:solidFill>
+                        <a:latin typeface="微软雅黑" panose="020B0503020204020204" pitchFamily="34" charset="-122"/>
+                        <a:ea typeface="微软雅黑" panose="020B0503020204020204" pitchFamily="34" charset="-122"/>
+                        <a:cs typeface="+mn-cs"/>
+                      </a:endParaRPr>
+                    </a:p>
+                  </a:txBody>
+                  <a:tcPr marL="27432" marR="27432" marT="9144" marB="9144">
+                    <a:lnL>
+                      <a:noFill/>
+                    </a:lnL>
+                    <a:lnR>
+                      <a:noFill/>
+                    </a:lnR>
+                    <a:lnT>
+                      <a:noFill/>
+                    </a:lnT>
+                    <a:lnB w="19050" cap="flat" cmpd="sng" algn="ctr">
+                      <a:solidFill>
+                        <a:srgbClr val="0A0A0A"/>
+                      </a:solidFill>
+                      <a:prstDash val="solid"/>
+                      <a:round/>
+                      <a:headEnd type="none" w="med" len="med"/>
+                      <a:tailEnd type="none" w="med" len="med"/>
+                    </a:lnB>
+                    <a:noFill/>
+                  </a:tcPr>
+                </a:tc>
+                <a:tc>
+                  <a:txBody>
+                    <a:bodyPr/>
+                    <a:lstStyle/>
+                    <a:p>
+                      <a:pPr algn="l"/>
+                      <a:r>
+                        <a:rPr sz="800" b="1" dirty="0" err="1">
+                          <a:solidFill>
+                            <a:srgbClr val="0A0A0A"/>
+                          </a:solidFill>
+                          <a:latin typeface="微软雅黑"/>
+                          <a:ea typeface="微软雅黑"/>
+                        </a:rPr>
+                        <a:t>交易金额</a:t>
+                      </a:r>
+                      <a:endParaRPr sz="800" b="1" dirty="0">
+                        <a:solidFill>
+                          <a:srgbClr val="0A0A0A"/>
+                        </a:solidFill>
+                        <a:latin typeface="微软雅黑"/>
+                        <a:ea typeface="微软雅黑"/>
+                      </a:endParaRPr>
+                    </a:p>
+                  </a:txBody>
+                  <a:tcPr marL="27432" marR="27432" marT="9144" marB="9144">
+                    <a:lnL>
+                      <a:noFill/>
+                    </a:lnL>
+                    <a:lnR>
+                      <a:noFill/>
+                    </a:lnR>
+                    <a:lnT>
+                      <a:noFill/>
+                    </a:lnT>
+                    <a:lnB w="19050" cap="flat" cmpd="sng" algn="ctr">
+                      <a:solidFill>
+                        <a:srgbClr val="0A0A0A"/>
+                      </a:solidFill>
+                      <a:prstDash val="solid"/>
+                      <a:round/>
+                      <a:headEnd type="none" w="med" len="med"/>
+                      <a:tailEnd type="none" w="med" len="med"/>
+                    </a:lnB>
+                    <a:noFill/>
+                  </a:tcPr>
+                </a:tc>
+                <a:tc>
+                  <a:txBody>
+                    <a:bodyPr/>
+                    <a:lstStyle/>
+                    <a:p>
+                      <a:pPr algn="l"/>
+                      <a:r>
+                        <a:rPr sz="800" b="1" dirty="0" err="1">
+                          <a:solidFill>
+                            <a:srgbClr val="D6A000"/>
+                          </a:solidFill>
+                          <a:latin typeface="微软雅黑"/>
+                          <a:ea typeface="微软雅黑"/>
+                        </a:rPr>
+                        <a:t>标准交易对手</a:t>
+                      </a:r>
+                      <a:endParaRPr sz="800" b="1" dirty="0">
+                        <a:solidFill>
+                          <a:srgbClr val="0A0A0A"/>
+                        </a:solidFill>
+                        <a:latin typeface="微软雅黑"/>
+                        <a:ea typeface="微软雅黑"/>
+                      </a:endParaRPr>
+                    </a:p>
+                  </a:txBody>
+                  <a:tcPr marL="27432" marR="27432" marT="9144" marB="9144">
+                    <a:lnL>
+                      <a:noFill/>
+                    </a:lnL>
+                    <a:lnR>
+                      <a:noFill/>
+                    </a:lnR>
+                    <a:lnT>
+                      <a:noFill/>
+                    </a:lnT>
+                    <a:lnB w="19050">
+                      <a:solidFill>
+                        <a:srgbClr val="0A0A0A"/>
+                      </a:solidFill>
+                    </a:lnB>
+                    <a:noFill/>
+                  </a:tcPr>
+                </a:tc>
+                <a:tc>
+                  <a:txBody>
+                    <a:bodyPr/>
+                    <a:lstStyle/>
+                    <a:p>
+                      <a:pPr algn="l"/>
+                      <a:r>
+                        <a:rPr sz="800" b="1" dirty="0" err="1">
+                          <a:solidFill>
+                            <a:srgbClr val="D6A000"/>
+                          </a:solidFill>
+                          <a:latin typeface="微软雅黑"/>
+                          <a:ea typeface="微软雅黑"/>
+                        </a:rPr>
+                        <a:t>主体类型</a:t>
+                      </a:r>
+                      <a:endParaRPr sz="800" b="1" dirty="0">
+                        <a:solidFill>
+                          <a:srgbClr val="0A0A0A"/>
+                        </a:solidFill>
+                        <a:latin typeface="微软雅黑"/>
+                        <a:ea typeface="微软雅黑"/>
+                      </a:endParaRPr>
+                    </a:p>
+                  </a:txBody>
+                  <a:tcPr marL="27432" marR="27432" marT="9144" marB="9144">
+                    <a:lnL>
+                      <a:noFill/>
+                    </a:lnL>
+                    <a:lnR>
+                      <a:noFill/>
+                    </a:lnR>
+                    <a:lnT>
+                      <a:noFill/>
+                    </a:lnT>
+                    <a:lnB w="19050" cap="flat" cmpd="sng" algn="ctr">
+                      <a:solidFill>
+                        <a:srgbClr val="0A0A0A"/>
+                      </a:solidFill>
+                      <a:prstDash val="solid"/>
+                      <a:round/>
+                      <a:headEnd type="none" w="med" len="med"/>
+                      <a:tailEnd type="none" w="med" len="med"/>
+                    </a:lnB>
+                    <a:noFill/>
+                  </a:tcPr>
+                </a:tc>
+                <a:tc>
+                  <a:txBody>
+                    <a:bodyPr/>
+                    <a:lstStyle/>
+                    <a:p>
+                      <a:pPr algn="l"/>
+                      <a:r>
+                        <a:rPr sz="800" b="1">
+                          <a:solidFill>
+                            <a:srgbClr val="D6A000"/>
+                          </a:solidFill>
+                          <a:latin typeface="微软雅黑"/>
+                          <a:ea typeface="微软雅黑"/>
+                        </a:rPr>
+                        <a:t>分类</a:t>
+                      </a:r>
+                    </a:p>
+                  </a:txBody>
+                  <a:tcPr marL="27432" marR="27432" marT="9144" marB="9144">
+                    <a:lnL>
+                      <a:noFill/>
+                    </a:lnL>
+                    <a:lnR>
+                      <a:noFill/>
+                    </a:lnR>
+                    <a:lnT>
+                      <a:noFill/>
+                    </a:lnT>
+                    <a:lnB w="19050" cap="flat" cmpd="sng" algn="ctr">
+                      <a:solidFill>
+                        <a:srgbClr val="0A0A0A"/>
+                      </a:solidFill>
+                      <a:prstDash val="solid"/>
+                      <a:round/>
+                      <a:headEnd type="none" w="med" len="med"/>
+                      <a:tailEnd type="none" w="med" len="med"/>
+                    </a:lnB>
+                    <a:noFill/>
+                  </a:tcPr>
+                </a:tc>
+                <a:tc>
+                  <a:txBody>
+                    <a:bodyPr/>
+                    <a:lstStyle/>
+                    <a:p>
+                      <a:pPr algn="l"/>
+                      <a:r>
+                        <a:rPr sz="800" b="1">
+                          <a:solidFill>
+                            <a:srgbClr val="D6A000"/>
+                          </a:solidFill>
+                          <a:latin typeface="微软雅黑"/>
+                          <a:ea typeface="微软雅黑"/>
+                        </a:rPr>
+                        <a:t>分类依据</a:t>
+                      </a:r>
+                    </a:p>
+                  </a:txBody>
+                  <a:tcPr marL="27432" marR="27432" marT="9144" marB="9144">
+                    <a:lnL>
+                      <a:noFill/>
+                    </a:lnL>
+                    <a:lnR>
+                      <a:noFill/>
+                    </a:lnR>
+                    <a:lnT>
+                      <a:noFill/>
+                    </a:lnT>
+                    <a:lnB w="19050" cap="flat" cmpd="sng" algn="ctr">
+                      <a:solidFill>
+                        <a:srgbClr val="0A0A0A"/>
+                      </a:solidFill>
+                      <a:prstDash val="solid"/>
+                      <a:round/>
+                      <a:headEnd type="none" w="med" len="med"/>
+                      <a:tailEnd type="none" w="med" len="med"/>
+                    </a:lnB>
+                    <a:noFill/>
+                  </a:tcPr>
+                </a:tc>
+                <a:extLst>
+                  <a:ext uri="{0D108BD9-81ED-4DB2-BD59-A6C34878D82A}">
+                    <a16:rowId xmlns:a16="http://schemas.microsoft.com/office/drawing/2014/main" val="10000"/>
+                  </a:ext>
+                </a:extLst>
+              </a:tr>
+              <a:tr h="170373">
+                <a:tc>
+                  <a:txBody>
+                    <a:bodyPr/>
+                    <a:lstStyle/>
+                    <a:p>
+                      <a:pPr marL="0" algn="l" defTabSz="914400" rtl="0" eaLnBrk="1" latinLnBrk="0" hangingPunct="1"/>
+                      <a:r>
+                        <a:rPr sz="800" b="0" kern="1200" dirty="0">
+                          <a:solidFill>
+                            <a:srgbClr val="0A0A0A"/>
+                          </a:solidFill>
+                          <a:latin typeface="微软雅黑" panose="020B0503020204020204" pitchFamily="34" charset="-122"/>
+                          <a:ea typeface="微软雅黑" panose="020B0503020204020204" pitchFamily="34" charset="-122"/>
+                          <a:cs typeface="+mn-cs"/>
+                        </a:rPr>
+                        <a:t>2026/03/26</a:t>
+                      </a:r>
+                    </a:p>
+                  </a:txBody>
+                  <a:tcPr marL="27432" marR="27432" marT="9144" marB="9144">
+                    <a:lnL>
+                      <a:noFill/>
+                    </a:lnL>
+                    <a:lnR>
+                      <a:noFill/>
+                    </a:lnR>
+                    <a:lnT w="19050" cap="flat" cmpd="sng" algn="ctr">
+                      <a:solidFill>
+                        <a:srgbClr val="0A0A0A"/>
+                      </a:solidFill>
+                      <a:prstDash val="solid"/>
+                      <a:round/>
+                      <a:headEnd type="none" w="med" len="med"/>
+                      <a:tailEnd type="none" w="med" len="med"/>
+                    </a:lnT>
+                    <a:lnB w="9525">
+                      <a:solidFill>
+                        <a:srgbClr val="D6D6D6"/>
+                      </a:solidFill>
+                    </a:lnB>
+                    <a:noFill/>
+                  </a:tcPr>
+                </a:tc>
+                <a:tc>
+                  <a:txBody>
+                    <a:bodyPr/>
+                    <a:lstStyle/>
+                    <a:p>
+                      <a:pPr marL="0" algn="l" defTabSz="914400" rtl="0" eaLnBrk="1" latinLnBrk="0" hangingPunct="1"/>
+                      <a:r>
+                        <a:rPr sz="800" b="0" kern="1200" dirty="0">
+                          <a:solidFill>
+                            <a:srgbClr val="0A0A0A"/>
+                          </a:solidFill>
+                          <a:latin typeface="微软雅黑" panose="020B0503020204020204" pitchFamily="34" charset="-122"/>
+                          <a:ea typeface="微软雅黑" panose="020B0503020204020204" pitchFamily="34" charset="-122"/>
+                          <a:cs typeface="+mn-cs"/>
+                        </a:rPr>
+                        <a:t>BPAY FAIR GO FINANCE BILLER 354127 REF 5837201937</a:t>
+                      </a:r>
+                    </a:p>
+                  </a:txBody>
+                  <a:tcPr marL="27432" marR="27432" marT="9144" marB="9144">
+                    <a:lnL>
+                      <a:noFill/>
+                    </a:lnL>
+                    <a:lnR>
+                      <a:noFill/>
+                    </a:lnR>
+                    <a:lnT w="19050" cap="flat" cmpd="sng" algn="ctr">
+                      <a:solidFill>
+                        <a:srgbClr val="0A0A0A"/>
+                      </a:solidFill>
+                      <a:prstDash val="solid"/>
+                      <a:round/>
+                      <a:headEnd type="none" w="med" len="med"/>
+                      <a:tailEnd type="none" w="med" len="med"/>
+                    </a:lnT>
+                    <a:lnB w="9525">
+                      <a:solidFill>
+                        <a:srgbClr val="D6D6D6"/>
+                      </a:solidFill>
+                    </a:lnB>
+                    <a:noFill/>
+                  </a:tcPr>
+                </a:tc>
+                <a:tc>
+                  <a:txBody>
+                    <a:bodyPr/>
+                    <a:lstStyle/>
+                    <a:p>
+                      <a:pPr marL="0" algn="ctr" defTabSz="914400" rtl="0" eaLnBrk="1" latinLnBrk="0" hangingPunct="1"/>
+                      <a:r>
+                        <a:rPr sz="800" b="0" kern="1200" dirty="0">
+                          <a:solidFill>
+                            <a:srgbClr val="0A0A0A"/>
+                          </a:solidFill>
+                          <a:latin typeface="微软雅黑" panose="020B0503020204020204" pitchFamily="34" charset="-122"/>
+                          <a:ea typeface="微软雅黑" panose="020B0503020204020204" pitchFamily="34" charset="-122"/>
+                          <a:cs typeface="+mn-cs"/>
+                        </a:rPr>
+                        <a:t>Debit</a:t>
+                      </a:r>
+                    </a:p>
+                  </a:txBody>
+                  <a:tcPr marL="27432" marR="27432" marT="9144" marB="9144">
+                    <a:lnL>
+                      <a:noFill/>
+                    </a:lnL>
+                    <a:lnR>
+                      <a:noFill/>
+                    </a:lnR>
+                    <a:lnT w="19050" cap="flat" cmpd="sng" algn="ctr">
+                      <a:solidFill>
+                        <a:srgbClr val="0A0A0A"/>
+                      </a:solidFill>
+                      <a:prstDash val="solid"/>
+                      <a:round/>
+                      <a:headEnd type="none" w="med" len="med"/>
+                      <a:tailEnd type="none" w="med" len="med"/>
+                    </a:lnT>
+                    <a:lnB w="9525" cap="flat" cmpd="sng" algn="ctr">
+                      <a:solidFill>
+                        <a:srgbClr val="D6D6D6"/>
+                      </a:solidFill>
+                      <a:prstDash val="solid"/>
+                      <a:round/>
+                      <a:headEnd type="none" w="med" len="med"/>
+                      <a:tailEnd type="none" w="med" len="med"/>
+                    </a:lnB>
+                    <a:noFill/>
+                  </a:tcPr>
+                </a:tc>
+                <a:tc>
+                  <a:txBody>
+                    <a:bodyPr/>
+                    <a:lstStyle/>
+                    <a:p>
+                      <a:pPr marL="0" algn="l" defTabSz="914400" rtl="0" eaLnBrk="1" latinLnBrk="0" hangingPunct="1"/>
+                      <a:r>
+                        <a:rPr sz="800" b="0" kern="1200" dirty="0">
+                          <a:solidFill>
+                            <a:srgbClr val="0A0A0A"/>
+                          </a:solidFill>
+                          <a:latin typeface="微软雅黑" panose="020B0503020204020204" pitchFamily="34" charset="-122"/>
+                          <a:ea typeface="微软雅黑" panose="020B0503020204020204" pitchFamily="34" charset="-122"/>
+                          <a:cs typeface="+mn-cs"/>
+                        </a:rPr>
+                        <a:t>A$156</a:t>
+                      </a:r>
+                    </a:p>
+                  </a:txBody>
+                  <a:tcPr marL="27432" marR="27432" marT="9144" marB="9144">
+                    <a:lnL>
+                      <a:noFill/>
+                    </a:lnL>
+                    <a:lnR>
+                      <a:noFill/>
+                    </a:lnR>
+                    <a:lnT w="19050" cap="flat" cmpd="sng" algn="ctr">
+                      <a:solidFill>
+                        <a:srgbClr val="0A0A0A"/>
+                      </a:solidFill>
+                      <a:prstDash val="solid"/>
+                      <a:round/>
+                      <a:headEnd type="none" w="med" len="med"/>
+                      <a:tailEnd type="none" w="med" len="med"/>
+                    </a:lnT>
+                    <a:lnB w="9525" cap="flat" cmpd="sng" algn="ctr">
+                      <a:solidFill>
+                        <a:srgbClr val="D6D6D6"/>
+                      </a:solidFill>
+                      <a:prstDash val="solid"/>
+                      <a:round/>
+                      <a:headEnd type="none" w="med" len="med"/>
+                      <a:tailEnd type="none" w="med" len="med"/>
+                    </a:lnB>
+                    <a:noFill/>
+                  </a:tcPr>
+                </a:tc>
+                <a:tc>
+                  <a:txBody>
+                    <a:bodyPr/>
+                    <a:lstStyle/>
+                    <a:p>
+                      <a:pPr marL="0" algn="l" defTabSz="914400" rtl="0" eaLnBrk="1" latinLnBrk="0" hangingPunct="1"/>
+                      <a:r>
+                        <a:rPr sz="800" b="0" kern="1200">
+                          <a:solidFill>
+                            <a:srgbClr val="0A0A0A"/>
+                          </a:solidFill>
+                          <a:latin typeface="微软雅黑" panose="020B0503020204020204" pitchFamily="34" charset="-122"/>
+                          <a:ea typeface="微软雅黑" panose="020B0503020204020204" pitchFamily="34" charset="-122"/>
+                          <a:cs typeface="+mn-cs"/>
+                        </a:rPr>
+                        <a:t>Fair Go Finance</a:t>
+                      </a:r>
+                    </a:p>
+                  </a:txBody>
+                  <a:tcPr marL="27432" marR="27432" marT="9144" marB="9144">
+                    <a:lnL>
+                      <a:noFill/>
+                    </a:lnL>
+                    <a:lnR>
+                      <a:noFill/>
+                    </a:lnR>
+                    <a:lnT w="19050" cap="flat" cmpd="sng" algn="ctr">
+                      <a:solidFill>
+                        <a:srgbClr val="0A0A0A"/>
+                      </a:solidFill>
+                      <a:prstDash val="solid"/>
+                      <a:round/>
+                      <a:headEnd type="none" w="med" len="med"/>
+                      <a:tailEnd type="none" w="med" len="med"/>
+                    </a:lnT>
+                    <a:lnB w="9525">
+                      <a:solidFill>
+                        <a:srgbClr val="D6D6D6"/>
+                      </a:solidFill>
+                    </a:lnB>
+                    <a:noFill/>
+                  </a:tcPr>
+                </a:tc>
+                <a:tc>
+                  <a:txBody>
+                    <a:bodyPr/>
+                    <a:lstStyle/>
+                    <a:p>
+                      <a:pPr marL="0" algn="l" defTabSz="914400" rtl="0" eaLnBrk="1" latinLnBrk="0" hangingPunct="1"/>
+                      <a:r>
+                        <a:rPr sz="800" b="0" kern="1200" dirty="0" err="1">
+                          <a:solidFill>
+                            <a:srgbClr val="0A0A0A"/>
+                          </a:solidFill>
+                          <a:latin typeface="微软雅黑" panose="020B0503020204020204" pitchFamily="34" charset="-122"/>
+                          <a:ea typeface="微软雅黑" panose="020B0503020204020204" pitchFamily="34" charset="-122"/>
+                          <a:cs typeface="+mn-cs"/>
+                        </a:rPr>
+                        <a:t>小额信贷机构</a:t>
+                      </a:r>
+                      <a:endParaRPr sz="800" b="0" kern="1200" dirty="0">
+                        <a:solidFill>
+                          <a:srgbClr val="0A0A0A"/>
+                        </a:solidFill>
+                        <a:latin typeface="微软雅黑" panose="020B0503020204020204" pitchFamily="34" charset="-122"/>
+                        <a:ea typeface="微软雅黑" panose="020B0503020204020204" pitchFamily="34" charset="-122"/>
+                        <a:cs typeface="+mn-cs"/>
+                      </a:endParaRPr>
+                    </a:p>
+                  </a:txBody>
+                  <a:tcPr marL="27432" marR="27432" marT="9144" marB="9144">
+                    <a:lnL>
+                      <a:noFill/>
+                    </a:lnL>
+                    <a:lnR>
+                      <a:noFill/>
+                    </a:lnR>
+                    <a:lnT w="19050" cap="flat" cmpd="sng" algn="ctr">
+                      <a:solidFill>
+                        <a:srgbClr val="0A0A0A"/>
+                      </a:solidFill>
+                      <a:prstDash val="solid"/>
+                      <a:round/>
+                      <a:headEnd type="none" w="med" len="med"/>
+                      <a:tailEnd type="none" w="med" len="med"/>
+                    </a:lnT>
+                    <a:lnB w="9525" cap="flat" cmpd="sng" algn="ctr">
+                      <a:solidFill>
+                        <a:srgbClr val="D6D6D6"/>
+                      </a:solidFill>
+                      <a:prstDash val="solid"/>
+                      <a:round/>
+                      <a:headEnd type="none" w="med" len="med"/>
+                      <a:tailEnd type="none" w="med" len="med"/>
+                    </a:lnB>
+                    <a:noFill/>
+                  </a:tcPr>
+                </a:tc>
+                <a:tc>
+                  <a:txBody>
+                    <a:bodyPr/>
+                    <a:lstStyle/>
+                    <a:p>
+                      <a:pPr marL="0" algn="l" defTabSz="914400" rtl="0" eaLnBrk="1" latinLnBrk="0" hangingPunct="1"/>
+                      <a:r>
+                        <a:rPr sz="800" b="0" kern="1200">
+                          <a:solidFill>
+                            <a:srgbClr val="0A0A0A"/>
+                          </a:solidFill>
+                          <a:latin typeface="微软雅黑" panose="020B0503020204020204" pitchFamily="34" charset="-122"/>
+                          <a:ea typeface="微软雅黑" panose="020B0503020204020204" pitchFamily="34" charset="-122"/>
+                          <a:cs typeface="+mn-cs"/>
+                        </a:rPr>
+                        <a:t>贷款及还款</a:t>
+                      </a:r>
+                    </a:p>
+                  </a:txBody>
+                  <a:tcPr marL="27432" marR="27432" marT="9144" marB="9144">
+                    <a:lnL>
+                      <a:noFill/>
+                    </a:lnL>
+                    <a:lnR>
+                      <a:noFill/>
+                    </a:lnR>
+                    <a:lnT w="19050" cap="flat" cmpd="sng" algn="ctr">
+                      <a:solidFill>
+                        <a:srgbClr val="0A0A0A"/>
+                      </a:solidFill>
+                      <a:prstDash val="solid"/>
+                      <a:round/>
+                      <a:headEnd type="none" w="med" len="med"/>
+                      <a:tailEnd type="none" w="med" len="med"/>
+                    </a:lnT>
+                    <a:lnB w="9525" cap="flat" cmpd="sng" algn="ctr">
+                      <a:solidFill>
+                        <a:srgbClr val="D6D6D6"/>
+                      </a:solidFill>
+                      <a:prstDash val="solid"/>
+                      <a:round/>
+                      <a:headEnd type="none" w="med" len="med"/>
+                      <a:tailEnd type="none" w="med" len="med"/>
+                    </a:lnB>
+                    <a:noFill/>
+                  </a:tcPr>
+                </a:tc>
+                <a:tc>
+                  <a:txBody>
+                    <a:bodyPr/>
+                    <a:lstStyle/>
+                    <a:p>
+                      <a:pPr marL="0" algn="l" defTabSz="914400" rtl="0" eaLnBrk="1" latinLnBrk="0" hangingPunct="1"/>
+                      <a:r>
+                        <a:rPr sz="800" b="0" kern="1200">
+                          <a:solidFill>
+                            <a:srgbClr val="0A0A0A"/>
+                          </a:solidFill>
+                          <a:latin typeface="微软雅黑" panose="020B0503020204020204" pitchFamily="34" charset="-122"/>
+                          <a:ea typeface="微软雅黑" panose="020B0503020204020204" pitchFamily="34" charset="-122"/>
+                          <a:cs typeface="+mn-cs"/>
+                        </a:rPr>
+                        <a:t>交易方向、机构名称、产品关键词及历史交易模式</a:t>
+                      </a:r>
+                    </a:p>
+                  </a:txBody>
+                  <a:tcPr marL="27432" marR="27432" marT="9144" marB="9144">
+                    <a:lnL>
+                      <a:noFill/>
+                    </a:lnL>
+                    <a:lnR>
+                      <a:noFill/>
+                    </a:lnR>
+                    <a:lnT w="19050" cap="flat" cmpd="sng" algn="ctr">
+                      <a:solidFill>
+                        <a:srgbClr val="0A0A0A"/>
+                      </a:solidFill>
+                      <a:prstDash val="solid"/>
+                      <a:round/>
+                      <a:headEnd type="none" w="med" len="med"/>
+                      <a:tailEnd type="none" w="med" len="med"/>
+                    </a:lnT>
+                    <a:lnB w="9525" cap="flat" cmpd="sng" algn="ctr">
+                      <a:solidFill>
+                        <a:srgbClr val="D6D6D6"/>
+                      </a:solidFill>
+                      <a:prstDash val="solid"/>
+                      <a:round/>
+                      <a:headEnd type="none" w="med" len="med"/>
+                      <a:tailEnd type="none" w="med" len="med"/>
+                    </a:lnB>
+                    <a:noFill/>
+                  </a:tcPr>
+                </a:tc>
+                <a:extLst>
+                  <a:ext uri="{0D108BD9-81ED-4DB2-BD59-A6C34878D82A}">
+                    <a16:rowId xmlns:a16="http://schemas.microsoft.com/office/drawing/2014/main" val="10001"/>
+                  </a:ext>
+                </a:extLst>
+              </a:tr>
+              <a:tr h="170373">
+                <a:tc>
+                  <a:txBody>
+                    <a:bodyPr/>
+                    <a:lstStyle/>
+                    <a:p>
+                      <a:pPr marL="0" algn="l" defTabSz="914400" rtl="0" eaLnBrk="1" latinLnBrk="0" hangingPunct="1"/>
+                      <a:r>
+                        <a:rPr sz="800" b="0" kern="1200">
+                          <a:solidFill>
+                            <a:srgbClr val="0A0A0A"/>
+                          </a:solidFill>
+                          <a:latin typeface="微软雅黑" panose="020B0503020204020204" pitchFamily="34" charset="-122"/>
+                          <a:ea typeface="微软雅黑" panose="020B0503020204020204" pitchFamily="34" charset="-122"/>
+                          <a:cs typeface="+mn-cs"/>
+                        </a:rPr>
+                        <a:t>2026/03/28</a:t>
+                      </a:r>
+                    </a:p>
+                  </a:txBody>
+                  <a:tcPr marL="27432" marR="27432" marT="9144" marB="9144">
+                    <a:lnL>
+                      <a:noFill/>
+                    </a:lnL>
+                    <a:lnR>
+                      <a:noFill/>
+                    </a:lnR>
+                    <a:lnT w="9525" cap="flat" cmpd="sng" algn="ctr">
+                      <a:solidFill>
+                        <a:srgbClr val="D6D6D6"/>
+                      </a:solidFill>
+                      <a:prstDash val="solid"/>
+                      <a:round/>
+                      <a:headEnd type="none" w="med" len="med"/>
+                      <a:tailEnd type="none" w="med" len="med"/>
+                    </a:lnT>
+                    <a:lnB w="9525">
+                      <a:solidFill>
+                        <a:srgbClr val="D6D6D6"/>
+                      </a:solidFill>
+                    </a:lnB>
+                    <a:noFill/>
+                  </a:tcPr>
+                </a:tc>
+                <a:tc>
+                  <a:txBody>
+                    <a:bodyPr/>
+                    <a:lstStyle/>
+                    <a:p>
+                      <a:pPr marL="0" algn="l" defTabSz="914400" rtl="0" eaLnBrk="1" latinLnBrk="0" hangingPunct="1"/>
+                      <a:r>
+                        <a:rPr sz="800" b="0" kern="1200" dirty="0">
+                          <a:solidFill>
+                            <a:srgbClr val="0A0A0A"/>
+                          </a:solidFill>
+                          <a:latin typeface="微软雅黑" panose="020B0503020204020204" pitchFamily="34" charset="-122"/>
+                          <a:ea typeface="微软雅黑" panose="020B0503020204020204" pitchFamily="34" charset="-122"/>
+                          <a:cs typeface="+mn-cs"/>
+                        </a:rPr>
+                        <a:t>MCDONALDS BRISBANE QLD STORE 006123</a:t>
+                      </a:r>
+                    </a:p>
+                  </a:txBody>
+                  <a:tcPr marL="27432" marR="27432" marT="9144" marB="9144">
+                    <a:lnL>
+                      <a:noFill/>
+                    </a:lnL>
+                    <a:lnR>
+                      <a:noFill/>
+                    </a:lnR>
+                    <a:lnT w="9525" cap="flat" cmpd="sng" algn="ctr">
+                      <a:solidFill>
+                        <a:srgbClr val="D6D6D6"/>
+                      </a:solidFill>
+                      <a:prstDash val="solid"/>
+                      <a:round/>
+                      <a:headEnd type="none" w="med" len="med"/>
+                      <a:tailEnd type="none" w="med" len="med"/>
+                    </a:lnT>
+                    <a:lnB w="9525">
+                      <a:solidFill>
+                        <a:srgbClr val="D6D6D6"/>
+                      </a:solidFill>
+                    </a:lnB>
+                    <a:noFill/>
+                  </a:tcPr>
+                </a:tc>
+                <a:tc>
+                  <a:txBody>
+                    <a:bodyPr/>
+                    <a:lstStyle/>
+                    <a:p>
+                      <a:pPr marL="0" algn="ctr" defTabSz="914400" rtl="0" eaLnBrk="1" latinLnBrk="0" hangingPunct="1"/>
+                      <a:r>
+                        <a:rPr sz="800" b="0" kern="1200" dirty="0">
+                          <a:solidFill>
+                            <a:srgbClr val="0A0A0A"/>
+                          </a:solidFill>
+                          <a:latin typeface="微软雅黑" panose="020B0503020204020204" pitchFamily="34" charset="-122"/>
+                          <a:ea typeface="微软雅黑" panose="020B0503020204020204" pitchFamily="34" charset="-122"/>
+                          <a:cs typeface="+mn-cs"/>
+                        </a:rPr>
+                        <a:t>Debit</a:t>
+                      </a:r>
+                    </a:p>
+                  </a:txBody>
+                  <a:tcPr marL="27432" marR="27432" marT="9144" marB="9144">
+                    <a:lnL>
+                      <a:noFill/>
+                    </a:lnL>
+                    <a:lnR>
+                      <a:noFill/>
+                    </a:lnR>
+                    <a:lnT w="9525" cap="flat" cmpd="sng" algn="ctr">
+                      <a:solidFill>
+                        <a:srgbClr val="D6D6D6"/>
+                      </a:solidFill>
+                      <a:prstDash val="solid"/>
+                      <a:round/>
+                      <a:headEnd type="none" w="med" len="med"/>
+                      <a:tailEnd type="none" w="med" len="med"/>
+                    </a:lnT>
+                    <a:lnB w="9525" cap="flat" cmpd="sng" algn="ctr">
+                      <a:solidFill>
+                        <a:srgbClr val="D6D6D6"/>
+                      </a:solidFill>
+                      <a:prstDash val="solid"/>
+                      <a:round/>
+                      <a:headEnd type="none" w="med" len="med"/>
+                      <a:tailEnd type="none" w="med" len="med"/>
+                    </a:lnB>
+                    <a:noFill/>
+                  </a:tcPr>
+                </a:tc>
+                <a:tc>
+                  <a:txBody>
+                    <a:bodyPr/>
+                    <a:lstStyle/>
+                    <a:p>
+                      <a:pPr marL="0" algn="l" defTabSz="914400" rtl="0" eaLnBrk="1" latinLnBrk="0" hangingPunct="1"/>
+                      <a:r>
+                        <a:rPr sz="800" b="0" kern="1200" dirty="0">
+                          <a:solidFill>
+                            <a:srgbClr val="0A0A0A"/>
+                          </a:solidFill>
+                          <a:latin typeface="微软雅黑" panose="020B0503020204020204" pitchFamily="34" charset="-122"/>
+                          <a:ea typeface="微软雅黑" panose="020B0503020204020204" pitchFamily="34" charset="-122"/>
+                          <a:cs typeface="+mn-cs"/>
+                        </a:rPr>
+                        <a:t>A$12.40</a:t>
+                      </a:r>
+                    </a:p>
+                  </a:txBody>
+                  <a:tcPr marL="27432" marR="27432" marT="9144" marB="9144">
+                    <a:lnL>
+                      <a:noFill/>
+                    </a:lnL>
+                    <a:lnR>
+                      <a:noFill/>
+                    </a:lnR>
+                    <a:lnT w="9525" cap="flat" cmpd="sng" algn="ctr">
+                      <a:solidFill>
+                        <a:srgbClr val="D6D6D6"/>
+                      </a:solidFill>
+                      <a:prstDash val="solid"/>
+                      <a:round/>
+                      <a:headEnd type="none" w="med" len="med"/>
+                      <a:tailEnd type="none" w="med" len="med"/>
+                    </a:lnT>
+                    <a:lnB w="9525" cap="flat" cmpd="sng" algn="ctr">
+                      <a:solidFill>
+                        <a:srgbClr val="D6D6D6"/>
+                      </a:solidFill>
+                      <a:prstDash val="solid"/>
+                      <a:round/>
+                      <a:headEnd type="none" w="med" len="med"/>
+                      <a:tailEnd type="none" w="med" len="med"/>
+                    </a:lnB>
+                    <a:noFill/>
+                  </a:tcPr>
+                </a:tc>
+                <a:tc>
+                  <a:txBody>
+                    <a:bodyPr/>
+                    <a:lstStyle/>
+                    <a:p>
+                      <a:pPr marL="0" algn="l" defTabSz="914400" rtl="0" eaLnBrk="1" latinLnBrk="0" hangingPunct="1"/>
+                      <a:r>
+                        <a:rPr sz="800" b="0" kern="1200" dirty="0">
+                          <a:solidFill>
+                            <a:srgbClr val="0A0A0A"/>
+                          </a:solidFill>
+                          <a:latin typeface="微软雅黑" panose="020B0503020204020204" pitchFamily="34" charset="-122"/>
+                          <a:ea typeface="微软雅黑" panose="020B0503020204020204" pitchFamily="34" charset="-122"/>
+                          <a:cs typeface="+mn-cs"/>
+                        </a:rPr>
+                        <a:t>McDonald's</a:t>
+                      </a:r>
+                    </a:p>
+                  </a:txBody>
+                  <a:tcPr marL="27432" marR="27432" marT="9144" marB="9144">
+                    <a:lnL>
+                      <a:noFill/>
+                    </a:lnL>
+                    <a:lnR>
+                      <a:noFill/>
+                    </a:lnR>
+                    <a:lnT w="9525" cap="flat" cmpd="sng" algn="ctr">
+                      <a:solidFill>
+                        <a:srgbClr val="D6D6D6"/>
+                      </a:solidFill>
+                      <a:prstDash val="solid"/>
+                      <a:round/>
+                      <a:headEnd type="none" w="med" len="med"/>
+                      <a:tailEnd type="none" w="med" len="med"/>
+                    </a:lnT>
+                    <a:lnB w="9525">
+                      <a:solidFill>
+                        <a:srgbClr val="D6D6D6"/>
+                      </a:solidFill>
+                    </a:lnB>
+                    <a:noFill/>
+                  </a:tcPr>
+                </a:tc>
+                <a:tc>
+                  <a:txBody>
+                    <a:bodyPr/>
+                    <a:lstStyle/>
+                    <a:p>
+                      <a:pPr marL="0" algn="l" defTabSz="914400" rtl="0" eaLnBrk="1" latinLnBrk="0" hangingPunct="1"/>
+                      <a:r>
+                        <a:rPr sz="800" b="0" kern="1200" dirty="0" err="1">
+                          <a:solidFill>
+                            <a:srgbClr val="0A0A0A"/>
+                          </a:solidFill>
+                          <a:latin typeface="微软雅黑" panose="020B0503020204020204" pitchFamily="34" charset="-122"/>
+                          <a:ea typeface="微软雅黑" panose="020B0503020204020204" pitchFamily="34" charset="-122"/>
+                          <a:cs typeface="+mn-cs"/>
+                        </a:rPr>
+                        <a:t>商户企业</a:t>
+                      </a:r>
+                      <a:endParaRPr sz="800" b="0" kern="1200" dirty="0">
+                        <a:solidFill>
+                          <a:srgbClr val="0A0A0A"/>
+                        </a:solidFill>
+                        <a:latin typeface="微软雅黑" panose="020B0503020204020204" pitchFamily="34" charset="-122"/>
+                        <a:ea typeface="微软雅黑" panose="020B0503020204020204" pitchFamily="34" charset="-122"/>
+                        <a:cs typeface="+mn-cs"/>
+                      </a:endParaRPr>
+                    </a:p>
+                  </a:txBody>
+                  <a:tcPr marL="27432" marR="27432" marT="9144" marB="9144">
+                    <a:lnL>
+                      <a:noFill/>
+                    </a:lnL>
+                    <a:lnR>
+                      <a:noFill/>
+                    </a:lnR>
+                    <a:lnT w="9525" cap="flat" cmpd="sng" algn="ctr">
+                      <a:solidFill>
+                        <a:srgbClr val="D6D6D6"/>
+                      </a:solidFill>
+                      <a:prstDash val="solid"/>
+                      <a:round/>
+                      <a:headEnd type="none" w="med" len="med"/>
+                      <a:tailEnd type="none" w="med" len="med"/>
+                    </a:lnT>
+                    <a:lnB w="9525" cap="flat" cmpd="sng" algn="ctr">
+                      <a:solidFill>
+                        <a:srgbClr val="D6D6D6"/>
+                      </a:solidFill>
+                      <a:prstDash val="solid"/>
+                      <a:round/>
+                      <a:headEnd type="none" w="med" len="med"/>
+                      <a:tailEnd type="none" w="med" len="med"/>
+                    </a:lnB>
+                    <a:noFill/>
+                  </a:tcPr>
+                </a:tc>
+                <a:tc>
+                  <a:txBody>
+                    <a:bodyPr/>
+                    <a:lstStyle/>
+                    <a:p>
+                      <a:pPr marL="0" algn="l" defTabSz="914400" rtl="0" eaLnBrk="1" latinLnBrk="0" hangingPunct="1"/>
+                      <a:r>
+                        <a:rPr sz="800" b="0" kern="1200">
+                          <a:solidFill>
+                            <a:srgbClr val="0A0A0A"/>
+                          </a:solidFill>
+                          <a:latin typeface="微软雅黑" panose="020B0503020204020204" pitchFamily="34" charset="-122"/>
+                          <a:ea typeface="微软雅黑" panose="020B0503020204020204" pitchFamily="34" charset="-122"/>
+                          <a:cs typeface="+mn-cs"/>
+                        </a:rPr>
+                        <a:t>消费</a:t>
+                      </a:r>
+                    </a:p>
+                  </a:txBody>
+                  <a:tcPr marL="27432" marR="27432" marT="9144" marB="9144">
+                    <a:lnL>
+                      <a:noFill/>
+                    </a:lnL>
+                    <a:lnR>
+                      <a:noFill/>
+                    </a:lnR>
+                    <a:lnT w="9525" cap="flat" cmpd="sng" algn="ctr">
+                      <a:solidFill>
+                        <a:srgbClr val="D6D6D6"/>
+                      </a:solidFill>
+                      <a:prstDash val="solid"/>
+                      <a:round/>
+                      <a:headEnd type="none" w="med" len="med"/>
+                      <a:tailEnd type="none" w="med" len="med"/>
+                    </a:lnT>
+                    <a:lnB w="9525" cap="flat" cmpd="sng" algn="ctr">
+                      <a:solidFill>
+                        <a:srgbClr val="D6D6D6"/>
+                      </a:solidFill>
+                      <a:prstDash val="solid"/>
+                      <a:round/>
+                      <a:headEnd type="none" w="med" len="med"/>
+                      <a:tailEnd type="none" w="med" len="med"/>
+                    </a:lnB>
+                    <a:noFill/>
+                  </a:tcPr>
+                </a:tc>
+                <a:tc>
+                  <a:txBody>
+                    <a:bodyPr/>
+                    <a:lstStyle/>
+                    <a:p>
+                      <a:pPr marL="0" algn="l" defTabSz="914400" rtl="0" eaLnBrk="1" latinLnBrk="0" hangingPunct="1"/>
+                      <a:r>
+                        <a:rPr sz="800" b="0" kern="1200">
+                          <a:solidFill>
+                            <a:srgbClr val="0A0A0A"/>
+                          </a:solidFill>
+                          <a:latin typeface="微软雅黑" panose="020B0503020204020204" pitchFamily="34" charset="-122"/>
+                          <a:ea typeface="微软雅黑" panose="020B0503020204020204" pitchFamily="34" charset="-122"/>
+                          <a:cs typeface="+mn-cs"/>
+                        </a:rPr>
+                        <a:t>商户知识库标准名匹配</a:t>
+                      </a:r>
+                    </a:p>
+                  </a:txBody>
+                  <a:tcPr marL="27432" marR="27432" marT="9144" marB="9144">
+                    <a:lnL>
+                      <a:noFill/>
+                    </a:lnL>
+                    <a:lnR>
+                      <a:noFill/>
+                    </a:lnR>
+                    <a:lnT w="9525" cap="flat" cmpd="sng" algn="ctr">
+                      <a:solidFill>
+                        <a:srgbClr val="D6D6D6"/>
+                      </a:solidFill>
+                      <a:prstDash val="solid"/>
+                      <a:round/>
+                      <a:headEnd type="none" w="med" len="med"/>
+                      <a:tailEnd type="none" w="med" len="med"/>
+                    </a:lnT>
+                    <a:lnB w="9525" cap="flat" cmpd="sng" algn="ctr">
+                      <a:solidFill>
+                        <a:srgbClr val="D6D6D6"/>
+                      </a:solidFill>
+                      <a:prstDash val="solid"/>
+                      <a:round/>
+                      <a:headEnd type="none" w="med" len="med"/>
+                      <a:tailEnd type="none" w="med" len="med"/>
+                    </a:lnB>
+                    <a:noFill/>
+                  </a:tcPr>
+                </a:tc>
+                <a:extLst>
+                  <a:ext uri="{0D108BD9-81ED-4DB2-BD59-A6C34878D82A}">
+                    <a16:rowId xmlns:a16="http://schemas.microsoft.com/office/drawing/2014/main" val="10002"/>
+                  </a:ext>
+                </a:extLst>
+              </a:tr>
+              <a:tr h="170373">
+                <a:tc>
+                  <a:txBody>
+                    <a:bodyPr/>
+                    <a:lstStyle/>
+                    <a:p>
+                      <a:pPr marL="0" algn="l" defTabSz="914400" rtl="0" eaLnBrk="1" latinLnBrk="0" hangingPunct="1"/>
+                      <a:r>
+                        <a:rPr sz="800" b="0" kern="1200">
+                          <a:solidFill>
+                            <a:srgbClr val="0A0A0A"/>
+                          </a:solidFill>
+                          <a:latin typeface="微软雅黑" panose="020B0503020204020204" pitchFamily="34" charset="-122"/>
+                          <a:ea typeface="微软雅黑" panose="020B0503020204020204" pitchFamily="34" charset="-122"/>
+                          <a:cs typeface="+mn-cs"/>
+                        </a:rPr>
+                        <a:t>2026/04/02</a:t>
+                      </a:r>
+                    </a:p>
+                  </a:txBody>
+                  <a:tcPr marL="27432" marR="27432" marT="9144" marB="9144">
+                    <a:lnL>
+                      <a:noFill/>
+                    </a:lnL>
+                    <a:lnR>
+                      <a:noFill/>
+                    </a:lnR>
+                    <a:lnT w="9525" cap="flat" cmpd="sng" algn="ctr">
+                      <a:solidFill>
+                        <a:srgbClr val="D6D6D6"/>
+                      </a:solidFill>
+                      <a:prstDash val="solid"/>
+                      <a:round/>
+                      <a:headEnd type="none" w="med" len="med"/>
+                      <a:tailEnd type="none" w="med" len="med"/>
+                    </a:lnT>
+                    <a:lnB w="9525">
+                      <a:solidFill>
+                        <a:srgbClr val="D6D6D6"/>
+                      </a:solidFill>
+                    </a:lnB>
+                    <a:noFill/>
+                  </a:tcPr>
+                </a:tc>
+                <a:tc>
+                  <a:txBody>
+                    <a:bodyPr/>
+                    <a:lstStyle/>
+                    <a:p>
+                      <a:pPr marL="0" algn="l" defTabSz="914400" rtl="0" eaLnBrk="1" latinLnBrk="0" hangingPunct="1"/>
+                      <a:r>
+                        <a:rPr sz="800" b="0" kern="1200" dirty="0">
+                          <a:solidFill>
+                            <a:srgbClr val="0A0A0A"/>
+                          </a:solidFill>
+                          <a:latin typeface="微软雅黑" panose="020B0503020204020204" pitchFamily="34" charset="-122"/>
+                          <a:ea typeface="微软雅黑" panose="020B0503020204020204" pitchFamily="34" charset="-122"/>
+                          <a:cs typeface="+mn-cs"/>
+                        </a:rPr>
+                        <a:t>CHEMIST WAREHOUSE BRISBANE STORE 123</a:t>
+                      </a:r>
+                    </a:p>
+                  </a:txBody>
+                  <a:tcPr marL="27432" marR="27432" marT="9144" marB="9144">
+                    <a:lnL>
+                      <a:noFill/>
+                    </a:lnL>
+                    <a:lnR>
+                      <a:noFill/>
+                    </a:lnR>
+                    <a:lnT w="9525" cap="flat" cmpd="sng" algn="ctr">
+                      <a:solidFill>
+                        <a:srgbClr val="D6D6D6"/>
+                      </a:solidFill>
+                      <a:prstDash val="solid"/>
+                      <a:round/>
+                      <a:headEnd type="none" w="med" len="med"/>
+                      <a:tailEnd type="none" w="med" len="med"/>
+                    </a:lnT>
+                    <a:lnB w="9525">
+                      <a:solidFill>
+                        <a:srgbClr val="D6D6D6"/>
+                      </a:solidFill>
+                    </a:lnB>
+                    <a:noFill/>
+                  </a:tcPr>
+                </a:tc>
+                <a:tc>
+                  <a:txBody>
+                    <a:bodyPr/>
+                    <a:lstStyle/>
+                    <a:p>
+                      <a:pPr marL="0" algn="ctr" defTabSz="914400" rtl="0" eaLnBrk="1" latinLnBrk="0" hangingPunct="1"/>
+                      <a:r>
+                        <a:rPr sz="800" b="0" kern="1200" dirty="0">
+                          <a:solidFill>
+                            <a:srgbClr val="0A0A0A"/>
+                          </a:solidFill>
+                          <a:latin typeface="微软雅黑" panose="020B0503020204020204" pitchFamily="34" charset="-122"/>
+                          <a:ea typeface="微软雅黑" panose="020B0503020204020204" pitchFamily="34" charset="-122"/>
+                          <a:cs typeface="+mn-cs"/>
+                        </a:rPr>
+                        <a:t>Debit</a:t>
+                      </a:r>
+                    </a:p>
+                  </a:txBody>
+                  <a:tcPr marL="27432" marR="27432" marT="9144" marB="9144">
+                    <a:lnL>
+                      <a:noFill/>
+                    </a:lnL>
+                    <a:lnR>
+                      <a:noFill/>
+                    </a:lnR>
+                    <a:lnT w="9525" cap="flat" cmpd="sng" algn="ctr">
+                      <a:solidFill>
+                        <a:srgbClr val="D6D6D6"/>
+                      </a:solidFill>
+                      <a:prstDash val="solid"/>
+                      <a:round/>
+                      <a:headEnd type="none" w="med" len="med"/>
+                      <a:tailEnd type="none" w="med" len="med"/>
+                    </a:lnT>
+                    <a:lnB w="9525" cap="flat" cmpd="sng" algn="ctr">
+                      <a:solidFill>
+                        <a:srgbClr val="D6D6D6"/>
+                      </a:solidFill>
+                      <a:prstDash val="solid"/>
+                      <a:round/>
+                      <a:headEnd type="none" w="med" len="med"/>
+                      <a:tailEnd type="none" w="med" len="med"/>
+                    </a:lnB>
+                    <a:noFill/>
+                  </a:tcPr>
+                </a:tc>
+                <a:tc>
+                  <a:txBody>
+                    <a:bodyPr/>
+                    <a:lstStyle/>
+                    <a:p>
+                      <a:pPr marL="0" algn="l" defTabSz="914400" rtl="0" eaLnBrk="1" latinLnBrk="0" hangingPunct="1"/>
+                      <a:r>
+                        <a:rPr sz="800" b="0" kern="1200" dirty="0">
+                          <a:solidFill>
+                            <a:srgbClr val="0A0A0A"/>
+                          </a:solidFill>
+                          <a:latin typeface="微软雅黑" panose="020B0503020204020204" pitchFamily="34" charset="-122"/>
+                          <a:ea typeface="微软雅黑" panose="020B0503020204020204" pitchFamily="34" charset="-122"/>
+                          <a:cs typeface="+mn-cs"/>
+                        </a:rPr>
+                        <a:t>A$35.90</a:t>
+                      </a:r>
+                    </a:p>
+                  </a:txBody>
+                  <a:tcPr marL="27432" marR="27432" marT="9144" marB="9144">
+                    <a:lnL>
+                      <a:noFill/>
+                    </a:lnL>
+                    <a:lnR>
+                      <a:noFill/>
+                    </a:lnR>
+                    <a:lnT w="9525" cap="flat" cmpd="sng" algn="ctr">
+                      <a:solidFill>
+                        <a:srgbClr val="D6D6D6"/>
+                      </a:solidFill>
+                      <a:prstDash val="solid"/>
+                      <a:round/>
+                      <a:headEnd type="none" w="med" len="med"/>
+                      <a:tailEnd type="none" w="med" len="med"/>
+                    </a:lnT>
+                    <a:lnB w="9525" cap="flat" cmpd="sng" algn="ctr">
+                      <a:solidFill>
+                        <a:srgbClr val="D6D6D6"/>
+                      </a:solidFill>
+                      <a:prstDash val="solid"/>
+                      <a:round/>
+                      <a:headEnd type="none" w="med" len="med"/>
+                      <a:tailEnd type="none" w="med" len="med"/>
+                    </a:lnB>
+                    <a:noFill/>
+                  </a:tcPr>
+                </a:tc>
+                <a:tc>
+                  <a:txBody>
+                    <a:bodyPr/>
+                    <a:lstStyle/>
+                    <a:p>
+                      <a:pPr marL="0" algn="l" defTabSz="914400" rtl="0" eaLnBrk="1" latinLnBrk="0" hangingPunct="1"/>
+                      <a:r>
+                        <a:rPr sz="800" b="0" kern="1200">
+                          <a:solidFill>
+                            <a:srgbClr val="0A0A0A"/>
+                          </a:solidFill>
+                          <a:latin typeface="微软雅黑" panose="020B0503020204020204" pitchFamily="34" charset="-122"/>
+                          <a:ea typeface="微软雅黑" panose="020B0503020204020204" pitchFamily="34" charset="-122"/>
+                          <a:cs typeface="+mn-cs"/>
+                        </a:rPr>
+                        <a:t>Chemist Warehouse</a:t>
+                      </a:r>
+                    </a:p>
+                  </a:txBody>
+                  <a:tcPr marL="27432" marR="27432" marT="9144" marB="9144">
+                    <a:lnL>
+                      <a:noFill/>
+                    </a:lnL>
+                    <a:lnR>
+                      <a:noFill/>
+                    </a:lnR>
+                    <a:lnT w="9525" cap="flat" cmpd="sng" algn="ctr">
+                      <a:solidFill>
+                        <a:srgbClr val="D6D6D6"/>
+                      </a:solidFill>
+                      <a:prstDash val="solid"/>
+                      <a:round/>
+                      <a:headEnd type="none" w="med" len="med"/>
+                      <a:tailEnd type="none" w="med" len="med"/>
+                    </a:lnT>
+                    <a:lnB w="9525">
+                      <a:solidFill>
+                        <a:srgbClr val="D6D6D6"/>
+                      </a:solidFill>
+                    </a:lnB>
+                    <a:noFill/>
+                  </a:tcPr>
+                </a:tc>
+                <a:tc>
+                  <a:txBody>
+                    <a:bodyPr/>
+                    <a:lstStyle/>
+                    <a:p>
+                      <a:pPr marL="0" algn="l" defTabSz="914400" rtl="0" eaLnBrk="1" latinLnBrk="0" hangingPunct="1"/>
+                      <a:r>
+                        <a:rPr sz="800" b="0" kern="1200" dirty="0" err="1">
+                          <a:solidFill>
+                            <a:srgbClr val="0A0A0A"/>
+                          </a:solidFill>
+                          <a:latin typeface="微软雅黑" panose="020B0503020204020204" pitchFamily="34" charset="-122"/>
+                          <a:ea typeface="微软雅黑" panose="020B0503020204020204" pitchFamily="34" charset="-122"/>
+                          <a:cs typeface="+mn-cs"/>
+                        </a:rPr>
+                        <a:t>商户企业</a:t>
+                      </a:r>
+                      <a:endParaRPr sz="800" b="0" kern="1200" dirty="0">
+                        <a:solidFill>
+                          <a:srgbClr val="0A0A0A"/>
+                        </a:solidFill>
+                        <a:latin typeface="微软雅黑" panose="020B0503020204020204" pitchFamily="34" charset="-122"/>
+                        <a:ea typeface="微软雅黑" panose="020B0503020204020204" pitchFamily="34" charset="-122"/>
+                        <a:cs typeface="+mn-cs"/>
+                      </a:endParaRPr>
+                    </a:p>
+                  </a:txBody>
+                  <a:tcPr marL="27432" marR="27432" marT="9144" marB="9144">
+                    <a:lnL>
+                      <a:noFill/>
+                    </a:lnL>
+                    <a:lnR>
+                      <a:noFill/>
+                    </a:lnR>
+                    <a:lnT w="9525" cap="flat" cmpd="sng" algn="ctr">
+                      <a:solidFill>
+                        <a:srgbClr val="D6D6D6"/>
+                      </a:solidFill>
+                      <a:prstDash val="solid"/>
+                      <a:round/>
+                      <a:headEnd type="none" w="med" len="med"/>
+                      <a:tailEnd type="none" w="med" len="med"/>
+                    </a:lnT>
+                    <a:lnB w="9525" cap="flat" cmpd="sng" algn="ctr">
+                      <a:solidFill>
+                        <a:srgbClr val="D6D6D6"/>
+                      </a:solidFill>
+                      <a:prstDash val="solid"/>
+                      <a:round/>
+                      <a:headEnd type="none" w="med" len="med"/>
+                      <a:tailEnd type="none" w="med" len="med"/>
+                    </a:lnB>
+                    <a:noFill/>
+                  </a:tcPr>
+                </a:tc>
+                <a:tc>
+                  <a:txBody>
+                    <a:bodyPr/>
+                    <a:lstStyle/>
+                    <a:p>
+                      <a:pPr marL="0" algn="l" defTabSz="914400" rtl="0" eaLnBrk="1" latinLnBrk="0" hangingPunct="1"/>
+                      <a:r>
+                        <a:rPr sz="800" b="0" kern="1200">
+                          <a:solidFill>
+                            <a:srgbClr val="0A0A0A"/>
+                          </a:solidFill>
+                          <a:latin typeface="微软雅黑" panose="020B0503020204020204" pitchFamily="34" charset="-122"/>
+                          <a:ea typeface="微软雅黑" panose="020B0503020204020204" pitchFamily="34" charset="-122"/>
+                          <a:cs typeface="+mn-cs"/>
+                        </a:rPr>
+                        <a:t>消费</a:t>
+                      </a:r>
+                    </a:p>
+                  </a:txBody>
+                  <a:tcPr marL="27432" marR="27432" marT="9144" marB="9144">
+                    <a:lnL>
+                      <a:noFill/>
+                    </a:lnL>
+                    <a:lnR>
+                      <a:noFill/>
+                    </a:lnR>
+                    <a:lnT w="9525" cap="flat" cmpd="sng" algn="ctr">
+                      <a:solidFill>
+                        <a:srgbClr val="D6D6D6"/>
+                      </a:solidFill>
+                      <a:prstDash val="solid"/>
+                      <a:round/>
+                      <a:headEnd type="none" w="med" len="med"/>
+                      <a:tailEnd type="none" w="med" len="med"/>
+                    </a:lnT>
+                    <a:lnB w="9525" cap="flat" cmpd="sng" algn="ctr">
+                      <a:solidFill>
+                        <a:srgbClr val="D6D6D6"/>
+                      </a:solidFill>
+                      <a:prstDash val="solid"/>
+                      <a:round/>
+                      <a:headEnd type="none" w="med" len="med"/>
+                      <a:tailEnd type="none" w="med" len="med"/>
+                    </a:lnB>
+                    <a:noFill/>
+                  </a:tcPr>
+                </a:tc>
+                <a:tc>
+                  <a:txBody>
+                    <a:bodyPr/>
+                    <a:lstStyle/>
+                    <a:p>
+                      <a:pPr marL="0" algn="l" defTabSz="914400" rtl="0" eaLnBrk="1" latinLnBrk="0" hangingPunct="1"/>
+                      <a:r>
+                        <a:rPr sz="800" b="0" kern="1200">
+                          <a:solidFill>
+                            <a:srgbClr val="0A0A0A"/>
+                          </a:solidFill>
+                          <a:latin typeface="微软雅黑" panose="020B0503020204020204" pitchFamily="34" charset="-122"/>
+                          <a:ea typeface="微软雅黑" panose="020B0503020204020204" pitchFamily="34" charset="-122"/>
+                          <a:cs typeface="+mn-cs"/>
+                        </a:rPr>
+                        <a:t>商户知识库标准名匹配</a:t>
+                      </a:r>
+                    </a:p>
+                  </a:txBody>
+                  <a:tcPr marL="27432" marR="27432" marT="9144" marB="9144">
+                    <a:lnL>
+                      <a:noFill/>
+                    </a:lnL>
+                    <a:lnR>
+                      <a:noFill/>
+                    </a:lnR>
+                    <a:lnT w="9525" cap="flat" cmpd="sng" algn="ctr">
+                      <a:solidFill>
+                        <a:srgbClr val="D6D6D6"/>
+                      </a:solidFill>
+                      <a:prstDash val="solid"/>
+                      <a:round/>
+                      <a:headEnd type="none" w="med" len="med"/>
+                      <a:tailEnd type="none" w="med" len="med"/>
+                    </a:lnT>
+                    <a:lnB w="9525" cap="flat" cmpd="sng" algn="ctr">
+                      <a:solidFill>
+                        <a:srgbClr val="D6D6D6"/>
+                      </a:solidFill>
+                      <a:prstDash val="solid"/>
+                      <a:round/>
+                      <a:headEnd type="none" w="med" len="med"/>
+                      <a:tailEnd type="none" w="med" len="med"/>
+                    </a:lnB>
+                    <a:noFill/>
+                  </a:tcPr>
+                </a:tc>
+                <a:extLst>
+                  <a:ext uri="{0D108BD9-81ED-4DB2-BD59-A6C34878D82A}">
+                    <a16:rowId xmlns:a16="http://schemas.microsoft.com/office/drawing/2014/main" val="10003"/>
+                  </a:ext>
+                </a:extLst>
+              </a:tr>
+              <a:tr h="170373">
+                <a:tc>
+                  <a:txBody>
+                    <a:bodyPr/>
+                    <a:lstStyle/>
+                    <a:p>
+                      <a:pPr marL="0" algn="l" defTabSz="914400" rtl="0" eaLnBrk="1" latinLnBrk="0" hangingPunct="1"/>
+                      <a:r>
+                        <a:rPr sz="800" b="0" kern="1200">
+                          <a:solidFill>
+                            <a:srgbClr val="0A0A0A"/>
+                          </a:solidFill>
+                          <a:latin typeface="微软雅黑" panose="020B0503020204020204" pitchFamily="34" charset="-122"/>
+                          <a:ea typeface="微软雅黑" panose="020B0503020204020204" pitchFamily="34" charset="-122"/>
+                          <a:cs typeface="+mn-cs"/>
+                        </a:rPr>
+                        <a:t>2026/04/08</a:t>
+                      </a:r>
+                    </a:p>
+                  </a:txBody>
+                  <a:tcPr marL="27432" marR="27432" marT="9144" marB="9144">
+                    <a:lnL>
+                      <a:noFill/>
+                    </a:lnL>
+                    <a:lnR>
+                      <a:noFill/>
+                    </a:lnR>
+                    <a:lnT w="9525" cap="flat" cmpd="sng" algn="ctr">
+                      <a:solidFill>
+                        <a:srgbClr val="D6D6D6"/>
+                      </a:solidFill>
+                      <a:prstDash val="solid"/>
+                      <a:round/>
+                      <a:headEnd type="none" w="med" len="med"/>
+                      <a:tailEnd type="none" w="med" len="med"/>
+                    </a:lnT>
+                    <a:lnB w="9525">
+                      <a:solidFill>
+                        <a:srgbClr val="D6D6D6"/>
+                      </a:solidFill>
+                    </a:lnB>
+                    <a:noFill/>
+                  </a:tcPr>
+                </a:tc>
+                <a:tc>
+                  <a:txBody>
+                    <a:bodyPr/>
+                    <a:lstStyle/>
+                    <a:p>
+                      <a:pPr marL="0" algn="l" defTabSz="914400" rtl="0" eaLnBrk="1" latinLnBrk="0" hangingPunct="1"/>
+                      <a:r>
+                        <a:rPr sz="800" b="0" kern="1200" dirty="0">
+                          <a:solidFill>
+                            <a:srgbClr val="0A0A0A"/>
+                          </a:solidFill>
+                          <a:latin typeface="微软雅黑" panose="020B0503020204020204" pitchFamily="34" charset="-122"/>
+                          <a:ea typeface="微软雅黑" panose="020B0503020204020204" pitchFamily="34" charset="-122"/>
+                          <a:cs typeface="+mn-cs"/>
+                        </a:rPr>
+                        <a:t>AMZNPRIMEA*4V3KQ AMAZON.COM.AU</a:t>
+                      </a:r>
+                    </a:p>
+                  </a:txBody>
+                  <a:tcPr marL="27432" marR="27432" marT="9144" marB="9144">
+                    <a:lnL>
+                      <a:noFill/>
+                    </a:lnL>
+                    <a:lnR>
+                      <a:noFill/>
+                    </a:lnR>
+                    <a:lnT w="9525" cap="flat" cmpd="sng" algn="ctr">
+                      <a:solidFill>
+                        <a:srgbClr val="D6D6D6"/>
+                      </a:solidFill>
+                      <a:prstDash val="solid"/>
+                      <a:round/>
+                      <a:headEnd type="none" w="med" len="med"/>
+                      <a:tailEnd type="none" w="med" len="med"/>
+                    </a:lnT>
+                    <a:lnB w="9525">
+                      <a:solidFill>
+                        <a:srgbClr val="D6D6D6"/>
+                      </a:solidFill>
+                    </a:lnB>
+                    <a:noFill/>
+                  </a:tcPr>
+                </a:tc>
+                <a:tc>
+                  <a:txBody>
+                    <a:bodyPr/>
+                    <a:lstStyle/>
+                    <a:p>
+                      <a:pPr marL="0" algn="ctr" defTabSz="914400" rtl="0" eaLnBrk="1" latinLnBrk="0" hangingPunct="1"/>
+                      <a:r>
+                        <a:rPr sz="800" b="0" kern="1200" dirty="0">
+                          <a:solidFill>
+                            <a:srgbClr val="0A0A0A"/>
+                          </a:solidFill>
+                          <a:latin typeface="微软雅黑" panose="020B0503020204020204" pitchFamily="34" charset="-122"/>
+                          <a:ea typeface="微软雅黑" panose="020B0503020204020204" pitchFamily="34" charset="-122"/>
+                          <a:cs typeface="+mn-cs"/>
+                        </a:rPr>
+                        <a:t>Debit</a:t>
+                      </a:r>
+                    </a:p>
+                  </a:txBody>
+                  <a:tcPr marL="27432" marR="27432" marT="9144" marB="9144">
+                    <a:lnL>
+                      <a:noFill/>
+                    </a:lnL>
+                    <a:lnR>
+                      <a:noFill/>
+                    </a:lnR>
+                    <a:lnT w="9525" cap="flat" cmpd="sng" algn="ctr">
+                      <a:solidFill>
+                        <a:srgbClr val="D6D6D6"/>
+                      </a:solidFill>
+                      <a:prstDash val="solid"/>
+                      <a:round/>
+                      <a:headEnd type="none" w="med" len="med"/>
+                      <a:tailEnd type="none" w="med" len="med"/>
+                    </a:lnT>
+                    <a:lnB w="9525" cap="flat" cmpd="sng" algn="ctr">
+                      <a:solidFill>
+                        <a:srgbClr val="D6D6D6"/>
+                      </a:solidFill>
+                      <a:prstDash val="solid"/>
+                      <a:round/>
+                      <a:headEnd type="none" w="med" len="med"/>
+                      <a:tailEnd type="none" w="med" len="med"/>
+                    </a:lnB>
+                    <a:noFill/>
+                  </a:tcPr>
+                </a:tc>
+                <a:tc>
+                  <a:txBody>
+                    <a:bodyPr/>
+                    <a:lstStyle/>
+                    <a:p>
+                      <a:pPr marL="0" algn="l" defTabSz="914400" rtl="0" eaLnBrk="1" latinLnBrk="0" hangingPunct="1"/>
+                      <a:r>
+                        <a:rPr sz="800" b="0" kern="1200" dirty="0">
+                          <a:solidFill>
+                            <a:srgbClr val="0A0A0A"/>
+                          </a:solidFill>
+                          <a:latin typeface="微软雅黑" panose="020B0503020204020204" pitchFamily="34" charset="-122"/>
+                          <a:ea typeface="微软雅黑" panose="020B0503020204020204" pitchFamily="34" charset="-122"/>
+                          <a:cs typeface="+mn-cs"/>
+                        </a:rPr>
+                        <a:t>A$8.99</a:t>
+                      </a:r>
+                    </a:p>
+                  </a:txBody>
+                  <a:tcPr marL="27432" marR="27432" marT="9144" marB="9144">
+                    <a:lnL>
+                      <a:noFill/>
+                    </a:lnL>
+                    <a:lnR>
+                      <a:noFill/>
+                    </a:lnR>
+                    <a:lnT w="9525" cap="flat" cmpd="sng" algn="ctr">
+                      <a:solidFill>
+                        <a:srgbClr val="D6D6D6"/>
+                      </a:solidFill>
+                      <a:prstDash val="solid"/>
+                      <a:round/>
+                      <a:headEnd type="none" w="med" len="med"/>
+                      <a:tailEnd type="none" w="med" len="med"/>
+                    </a:lnT>
+                    <a:lnB w="9525" cap="flat" cmpd="sng" algn="ctr">
+                      <a:solidFill>
+                        <a:srgbClr val="D6D6D6"/>
+                      </a:solidFill>
+                      <a:prstDash val="solid"/>
+                      <a:round/>
+                      <a:headEnd type="none" w="med" len="med"/>
+                      <a:tailEnd type="none" w="med" len="med"/>
+                    </a:lnB>
+                    <a:noFill/>
+                  </a:tcPr>
+                </a:tc>
+                <a:tc>
+                  <a:txBody>
+                    <a:bodyPr/>
+                    <a:lstStyle/>
+                    <a:p>
+                      <a:pPr marL="0" algn="l" defTabSz="914400" rtl="0" eaLnBrk="1" latinLnBrk="0" hangingPunct="1"/>
+                      <a:r>
+                        <a:rPr sz="800" b="0" kern="1200">
+                          <a:solidFill>
+                            <a:srgbClr val="0A0A0A"/>
+                          </a:solidFill>
+                          <a:latin typeface="微软雅黑" panose="020B0503020204020204" pitchFamily="34" charset="-122"/>
+                          <a:ea typeface="微软雅黑" panose="020B0503020204020204" pitchFamily="34" charset="-122"/>
+                          <a:cs typeface="+mn-cs"/>
+                        </a:rPr>
+                        <a:t>Amazon Prime</a:t>
+                      </a:r>
+                    </a:p>
+                  </a:txBody>
+                  <a:tcPr marL="27432" marR="27432" marT="9144" marB="9144">
+                    <a:lnL>
+                      <a:noFill/>
+                    </a:lnL>
+                    <a:lnR>
+                      <a:noFill/>
+                    </a:lnR>
+                    <a:lnT w="9525" cap="flat" cmpd="sng" algn="ctr">
+                      <a:solidFill>
+                        <a:srgbClr val="D6D6D6"/>
+                      </a:solidFill>
+                      <a:prstDash val="solid"/>
+                      <a:round/>
+                      <a:headEnd type="none" w="med" len="med"/>
+                      <a:tailEnd type="none" w="med" len="med"/>
+                    </a:lnT>
+                    <a:lnB w="9525">
+                      <a:solidFill>
+                        <a:srgbClr val="D6D6D6"/>
+                      </a:solidFill>
+                    </a:lnB>
+                    <a:noFill/>
+                  </a:tcPr>
+                </a:tc>
+                <a:tc>
+                  <a:txBody>
+                    <a:bodyPr/>
+                    <a:lstStyle/>
+                    <a:p>
+                      <a:pPr marL="0" algn="l" defTabSz="914400" rtl="0" eaLnBrk="1" latinLnBrk="0" hangingPunct="1"/>
+                      <a:r>
+                        <a:rPr sz="800" b="0" kern="1200" dirty="0" err="1">
+                          <a:solidFill>
+                            <a:srgbClr val="0A0A0A"/>
+                          </a:solidFill>
+                          <a:latin typeface="微软雅黑" panose="020B0503020204020204" pitchFamily="34" charset="-122"/>
+                          <a:ea typeface="微软雅黑" panose="020B0503020204020204" pitchFamily="34" charset="-122"/>
+                          <a:cs typeface="+mn-cs"/>
+                        </a:rPr>
+                        <a:t>商户企业</a:t>
+                      </a:r>
+                      <a:endParaRPr sz="800" b="0" kern="1200" dirty="0">
+                        <a:solidFill>
+                          <a:srgbClr val="0A0A0A"/>
+                        </a:solidFill>
+                        <a:latin typeface="微软雅黑" panose="020B0503020204020204" pitchFamily="34" charset="-122"/>
+                        <a:ea typeface="微软雅黑" panose="020B0503020204020204" pitchFamily="34" charset="-122"/>
+                        <a:cs typeface="+mn-cs"/>
+                      </a:endParaRPr>
+                    </a:p>
+                  </a:txBody>
+                  <a:tcPr marL="27432" marR="27432" marT="9144" marB="9144">
+                    <a:lnL>
+                      <a:noFill/>
+                    </a:lnL>
+                    <a:lnR>
+                      <a:noFill/>
+                    </a:lnR>
+                    <a:lnT w="9525" cap="flat" cmpd="sng" algn="ctr">
+                      <a:solidFill>
+                        <a:srgbClr val="D6D6D6"/>
+                      </a:solidFill>
+                      <a:prstDash val="solid"/>
+                      <a:round/>
+                      <a:headEnd type="none" w="med" len="med"/>
+                      <a:tailEnd type="none" w="med" len="med"/>
+                    </a:lnT>
+                    <a:lnB w="9525" cap="flat" cmpd="sng" algn="ctr">
+                      <a:solidFill>
+                        <a:srgbClr val="D6D6D6"/>
+                      </a:solidFill>
+                      <a:prstDash val="solid"/>
+                      <a:round/>
+                      <a:headEnd type="none" w="med" len="med"/>
+                      <a:tailEnd type="none" w="med" len="med"/>
+                    </a:lnB>
+                    <a:noFill/>
+                  </a:tcPr>
+                </a:tc>
+                <a:tc>
+                  <a:txBody>
+                    <a:bodyPr/>
+                    <a:lstStyle/>
+                    <a:p>
+                      <a:pPr marL="0" algn="l" defTabSz="914400" rtl="0" eaLnBrk="1" latinLnBrk="0" hangingPunct="1"/>
+                      <a:r>
+                        <a:rPr sz="800" b="0" kern="1200">
+                          <a:solidFill>
+                            <a:srgbClr val="0A0A0A"/>
+                          </a:solidFill>
+                          <a:latin typeface="微软雅黑" panose="020B0503020204020204" pitchFamily="34" charset="-122"/>
+                          <a:ea typeface="微软雅黑" panose="020B0503020204020204" pitchFamily="34" charset="-122"/>
+                          <a:cs typeface="+mn-cs"/>
+                        </a:rPr>
+                        <a:t>订阅</a:t>
+                      </a:r>
+                    </a:p>
+                  </a:txBody>
+                  <a:tcPr marL="27432" marR="27432" marT="9144" marB="9144">
+                    <a:lnL>
+                      <a:noFill/>
+                    </a:lnL>
+                    <a:lnR>
+                      <a:noFill/>
+                    </a:lnR>
+                    <a:lnT w="9525" cap="flat" cmpd="sng" algn="ctr">
+                      <a:solidFill>
+                        <a:srgbClr val="D6D6D6"/>
+                      </a:solidFill>
+                      <a:prstDash val="solid"/>
+                      <a:round/>
+                      <a:headEnd type="none" w="med" len="med"/>
+                      <a:tailEnd type="none" w="med" len="med"/>
+                    </a:lnT>
+                    <a:lnB w="9525" cap="flat" cmpd="sng" algn="ctr">
+                      <a:solidFill>
+                        <a:srgbClr val="D6D6D6"/>
+                      </a:solidFill>
+                      <a:prstDash val="solid"/>
+                      <a:round/>
+                      <a:headEnd type="none" w="med" len="med"/>
+                      <a:tailEnd type="none" w="med" len="med"/>
+                    </a:lnB>
+                    <a:noFill/>
+                  </a:tcPr>
+                </a:tc>
+                <a:tc>
+                  <a:txBody>
+                    <a:bodyPr/>
+                    <a:lstStyle/>
+                    <a:p>
+                      <a:pPr marL="0" algn="l" defTabSz="914400" rtl="0" eaLnBrk="1" latinLnBrk="0" hangingPunct="1"/>
+                      <a:r>
+                        <a:rPr sz="800" b="0" kern="1200">
+                          <a:solidFill>
+                            <a:srgbClr val="0A0A0A"/>
+                          </a:solidFill>
+                          <a:latin typeface="微软雅黑" panose="020B0503020204020204" pitchFamily="34" charset="-122"/>
+                          <a:ea typeface="微软雅黑" panose="020B0503020204020204" pitchFamily="34" charset="-122"/>
+                          <a:cs typeface="+mn-cs"/>
+                        </a:rPr>
+                        <a:t>商户知识库标准名匹配</a:t>
+                      </a:r>
+                    </a:p>
+                  </a:txBody>
+                  <a:tcPr marL="27432" marR="27432" marT="9144" marB="9144">
+                    <a:lnL>
+                      <a:noFill/>
+                    </a:lnL>
+                    <a:lnR>
+                      <a:noFill/>
+                    </a:lnR>
+                    <a:lnT w="9525" cap="flat" cmpd="sng" algn="ctr">
+                      <a:solidFill>
+                        <a:srgbClr val="D6D6D6"/>
+                      </a:solidFill>
+                      <a:prstDash val="solid"/>
+                      <a:round/>
+                      <a:headEnd type="none" w="med" len="med"/>
+                      <a:tailEnd type="none" w="med" len="med"/>
+                    </a:lnT>
+                    <a:lnB w="9525" cap="flat" cmpd="sng" algn="ctr">
+                      <a:solidFill>
+                        <a:srgbClr val="D6D6D6"/>
+                      </a:solidFill>
+                      <a:prstDash val="solid"/>
+                      <a:round/>
+                      <a:headEnd type="none" w="med" len="med"/>
+                      <a:tailEnd type="none" w="med" len="med"/>
+                    </a:lnB>
+                    <a:noFill/>
+                  </a:tcPr>
+                </a:tc>
+                <a:extLst>
+                  <a:ext uri="{0D108BD9-81ED-4DB2-BD59-A6C34878D82A}">
+                    <a16:rowId xmlns:a16="http://schemas.microsoft.com/office/drawing/2014/main" val="10004"/>
+                  </a:ext>
+                </a:extLst>
+              </a:tr>
+              <a:tr h="170373">
+                <a:tc>
+                  <a:txBody>
+                    <a:bodyPr/>
+                    <a:lstStyle/>
+                    <a:p>
+                      <a:pPr marL="0" algn="l" defTabSz="914400" rtl="0" eaLnBrk="1" latinLnBrk="0" hangingPunct="1"/>
+                      <a:r>
+                        <a:rPr sz="800" b="0" kern="1200">
+                          <a:solidFill>
+                            <a:srgbClr val="0A0A0A"/>
+                          </a:solidFill>
+                          <a:latin typeface="微软雅黑" panose="020B0503020204020204" pitchFamily="34" charset="-122"/>
+                          <a:ea typeface="微软雅黑" panose="020B0503020204020204" pitchFamily="34" charset="-122"/>
+                          <a:cs typeface="+mn-cs"/>
+                        </a:rPr>
+                        <a:t>2026/04/10</a:t>
+                      </a:r>
+                    </a:p>
+                  </a:txBody>
+                  <a:tcPr marL="27432" marR="27432" marT="9144" marB="9144">
+                    <a:lnL>
+                      <a:noFill/>
+                    </a:lnL>
+                    <a:lnR>
+                      <a:noFill/>
+                    </a:lnR>
+                    <a:lnT w="9525" cap="flat" cmpd="sng" algn="ctr">
+                      <a:solidFill>
+                        <a:srgbClr val="D6D6D6"/>
+                      </a:solidFill>
+                      <a:prstDash val="solid"/>
+                      <a:round/>
+                      <a:headEnd type="none" w="med" len="med"/>
+                      <a:tailEnd type="none" w="med" len="med"/>
+                    </a:lnT>
+                    <a:lnB w="9525">
+                      <a:solidFill>
+                        <a:srgbClr val="D6D6D6"/>
+                      </a:solidFill>
+                    </a:lnB>
+                    <a:noFill/>
+                  </a:tcPr>
+                </a:tc>
+                <a:tc>
+                  <a:txBody>
+                    <a:bodyPr/>
+                    <a:lstStyle/>
+                    <a:p>
+                      <a:pPr marL="0" algn="l" defTabSz="914400" rtl="0" eaLnBrk="1" latinLnBrk="0" hangingPunct="1"/>
+                      <a:r>
+                        <a:rPr sz="800" b="0" kern="1200" dirty="0">
+                          <a:solidFill>
+                            <a:srgbClr val="0A0A0A"/>
+                          </a:solidFill>
+                          <a:latin typeface="微软雅黑" panose="020B0503020204020204" pitchFamily="34" charset="-122"/>
+                          <a:ea typeface="微软雅黑" panose="020B0503020204020204" pitchFamily="34" charset="-122"/>
+                          <a:cs typeface="+mn-cs"/>
+                        </a:rPr>
+                        <a:t>WAGES ACME PTY LTD FORTNIGHTLY PAY</a:t>
+                      </a:r>
+                    </a:p>
+                  </a:txBody>
+                  <a:tcPr marL="27432" marR="27432" marT="9144" marB="9144">
+                    <a:lnL>
+                      <a:noFill/>
+                    </a:lnL>
+                    <a:lnR>
+                      <a:noFill/>
+                    </a:lnR>
+                    <a:lnT w="9525" cap="flat" cmpd="sng" algn="ctr">
+                      <a:solidFill>
+                        <a:srgbClr val="D6D6D6"/>
+                      </a:solidFill>
+                      <a:prstDash val="solid"/>
+                      <a:round/>
+                      <a:headEnd type="none" w="med" len="med"/>
+                      <a:tailEnd type="none" w="med" len="med"/>
+                    </a:lnT>
+                    <a:lnB w="9525">
+                      <a:solidFill>
+                        <a:srgbClr val="D6D6D6"/>
+                      </a:solidFill>
+                    </a:lnB>
+                    <a:noFill/>
+                  </a:tcPr>
+                </a:tc>
+                <a:tc>
+                  <a:txBody>
+                    <a:bodyPr/>
+                    <a:lstStyle/>
+                    <a:p>
+                      <a:pPr marL="0" algn="ctr" defTabSz="914400" rtl="0" eaLnBrk="1" latinLnBrk="0" hangingPunct="1"/>
+                      <a:r>
+                        <a:rPr sz="800" b="0" kern="1200" dirty="0">
+                          <a:solidFill>
+                            <a:srgbClr val="0A0A0A"/>
+                          </a:solidFill>
+                          <a:latin typeface="微软雅黑" panose="020B0503020204020204" pitchFamily="34" charset="-122"/>
+                          <a:ea typeface="微软雅黑" panose="020B0503020204020204" pitchFamily="34" charset="-122"/>
+                          <a:cs typeface="+mn-cs"/>
+                        </a:rPr>
+                        <a:t>Credit</a:t>
+                      </a:r>
+                    </a:p>
+                  </a:txBody>
+                  <a:tcPr marL="27432" marR="27432" marT="9144" marB="9144">
+                    <a:lnL>
+                      <a:noFill/>
+                    </a:lnL>
+                    <a:lnR>
+                      <a:noFill/>
+                    </a:lnR>
+                    <a:lnT w="9525" cap="flat" cmpd="sng" algn="ctr">
+                      <a:solidFill>
+                        <a:srgbClr val="D6D6D6"/>
+                      </a:solidFill>
+                      <a:prstDash val="solid"/>
+                      <a:round/>
+                      <a:headEnd type="none" w="med" len="med"/>
+                      <a:tailEnd type="none" w="med" len="med"/>
+                    </a:lnT>
+                    <a:lnB w="9525">
+                      <a:solidFill>
+                        <a:srgbClr val="D6D6D6"/>
+                      </a:solidFill>
+                    </a:lnB>
+                    <a:noFill/>
+                  </a:tcPr>
+                </a:tc>
+                <a:tc>
+                  <a:txBody>
+                    <a:bodyPr/>
+                    <a:lstStyle/>
+                    <a:p>
+                      <a:pPr marL="0" algn="l" defTabSz="914400" rtl="0" eaLnBrk="1" latinLnBrk="0" hangingPunct="1"/>
+                      <a:r>
+                        <a:rPr sz="800" b="0" kern="1200" dirty="0">
+                          <a:solidFill>
+                            <a:srgbClr val="0A0A0A"/>
+                          </a:solidFill>
+                          <a:latin typeface="微软雅黑" panose="020B0503020204020204" pitchFamily="34" charset="-122"/>
+                          <a:ea typeface="微软雅黑" panose="020B0503020204020204" pitchFamily="34" charset="-122"/>
+                          <a:cs typeface="+mn-cs"/>
+                        </a:rPr>
+                        <a:t>A$3,420.50</a:t>
+                      </a:r>
+                    </a:p>
+                  </a:txBody>
+                  <a:tcPr marL="27432" marR="27432" marT="9144" marB="9144">
+                    <a:lnL>
+                      <a:noFill/>
+                    </a:lnL>
+                    <a:lnR>
+                      <a:noFill/>
+                    </a:lnR>
+                    <a:lnT w="9525" cap="flat" cmpd="sng" algn="ctr">
+                      <a:solidFill>
+                        <a:srgbClr val="D6D6D6"/>
+                      </a:solidFill>
+                      <a:prstDash val="solid"/>
+                      <a:round/>
+                      <a:headEnd type="none" w="med" len="med"/>
+                      <a:tailEnd type="none" w="med" len="med"/>
+                    </a:lnT>
+                    <a:lnB w="9525">
+                      <a:solidFill>
+                        <a:srgbClr val="D6D6D6"/>
+                      </a:solidFill>
+                    </a:lnB>
+                    <a:noFill/>
+                  </a:tcPr>
+                </a:tc>
+                <a:tc>
+                  <a:txBody>
+                    <a:bodyPr/>
+                    <a:lstStyle/>
+                    <a:p>
+                      <a:pPr marL="0" algn="l" defTabSz="914400" rtl="0" eaLnBrk="1" latinLnBrk="0" hangingPunct="1"/>
+                      <a:r>
+                        <a:rPr sz="800" b="0" kern="1200">
+                          <a:solidFill>
+                            <a:srgbClr val="0A0A0A"/>
+                          </a:solidFill>
+                          <a:latin typeface="微软雅黑" panose="020B0503020204020204" pitchFamily="34" charset="-122"/>
+                          <a:ea typeface="微软雅黑" panose="020B0503020204020204" pitchFamily="34" charset="-122"/>
+                          <a:cs typeface="+mn-cs"/>
+                        </a:rPr>
+                        <a:t>ACME PTY LTD</a:t>
+                      </a:r>
+                    </a:p>
+                  </a:txBody>
+                  <a:tcPr marL="27432" marR="27432" marT="9144" marB="9144">
+                    <a:lnL>
+                      <a:noFill/>
+                    </a:lnL>
+                    <a:lnR>
+                      <a:noFill/>
+                    </a:lnR>
+                    <a:lnT w="9525" cap="flat" cmpd="sng" algn="ctr">
+                      <a:solidFill>
+                        <a:srgbClr val="D6D6D6"/>
+                      </a:solidFill>
+                      <a:prstDash val="solid"/>
+                      <a:round/>
+                      <a:headEnd type="none" w="med" len="med"/>
+                      <a:tailEnd type="none" w="med" len="med"/>
+                    </a:lnT>
+                    <a:lnB w="9525">
+                      <a:solidFill>
+                        <a:srgbClr val="D6D6D6"/>
+                      </a:solidFill>
+                    </a:lnB>
+                    <a:noFill/>
+                  </a:tcPr>
+                </a:tc>
+                <a:tc>
+                  <a:txBody>
+                    <a:bodyPr/>
+                    <a:lstStyle/>
+                    <a:p>
+                      <a:pPr marL="0" algn="l" defTabSz="914400" rtl="0" eaLnBrk="1" latinLnBrk="0" hangingPunct="1"/>
+                      <a:r>
+                        <a:rPr sz="800" b="0" kern="1200" dirty="0" err="1">
+                          <a:solidFill>
+                            <a:srgbClr val="0A0A0A"/>
+                          </a:solidFill>
+                          <a:latin typeface="微软雅黑" panose="020B0503020204020204" pitchFamily="34" charset="-122"/>
+                          <a:ea typeface="微软雅黑" panose="020B0503020204020204" pitchFamily="34" charset="-122"/>
+                          <a:cs typeface="+mn-cs"/>
+                        </a:rPr>
+                        <a:t>雇主</a:t>
+                      </a:r>
+                      <a:r>
+                        <a:rPr sz="800" b="0" kern="1200" dirty="0">
+                          <a:solidFill>
+                            <a:srgbClr val="0A0A0A"/>
+                          </a:solidFill>
+                          <a:latin typeface="微软雅黑" panose="020B0503020204020204" pitchFamily="34" charset="-122"/>
+                          <a:ea typeface="微软雅黑" panose="020B0503020204020204" pitchFamily="34" charset="-122"/>
+                          <a:cs typeface="+mn-cs"/>
+                        </a:rPr>
+                        <a:t> / </a:t>
+                      </a:r>
+                      <a:r>
+                        <a:rPr sz="800" b="0" kern="1200" dirty="0" err="1">
+                          <a:solidFill>
+                            <a:srgbClr val="0A0A0A"/>
+                          </a:solidFill>
+                          <a:latin typeface="微软雅黑" panose="020B0503020204020204" pitchFamily="34" charset="-122"/>
+                          <a:ea typeface="微软雅黑" panose="020B0503020204020204" pitchFamily="34" charset="-122"/>
+                          <a:cs typeface="+mn-cs"/>
+                        </a:rPr>
+                        <a:t>收入付款方</a:t>
+                      </a:r>
+                      <a:endParaRPr sz="800" b="0" kern="1200" dirty="0">
+                        <a:solidFill>
+                          <a:srgbClr val="0A0A0A"/>
+                        </a:solidFill>
+                        <a:latin typeface="微软雅黑" panose="020B0503020204020204" pitchFamily="34" charset="-122"/>
+                        <a:ea typeface="微软雅黑" panose="020B0503020204020204" pitchFamily="34" charset="-122"/>
+                        <a:cs typeface="+mn-cs"/>
+                      </a:endParaRPr>
+                    </a:p>
+                  </a:txBody>
+                  <a:tcPr marL="27432" marR="27432" marT="9144" marB="9144">
+                    <a:lnL>
+                      <a:noFill/>
+                    </a:lnL>
+                    <a:lnR>
+                      <a:noFill/>
+                    </a:lnR>
+                    <a:lnT w="9525" cap="flat" cmpd="sng" algn="ctr">
+                      <a:solidFill>
+                        <a:srgbClr val="D6D6D6"/>
+                      </a:solidFill>
+                      <a:prstDash val="solid"/>
+                      <a:round/>
+                      <a:headEnd type="none" w="med" len="med"/>
+                      <a:tailEnd type="none" w="med" len="med"/>
+                    </a:lnT>
+                    <a:lnB w="9525">
+                      <a:solidFill>
+                        <a:srgbClr val="D6D6D6"/>
+                      </a:solidFill>
+                    </a:lnB>
+                    <a:noFill/>
+                  </a:tcPr>
+                </a:tc>
+                <a:tc>
+                  <a:txBody>
+                    <a:bodyPr/>
+                    <a:lstStyle/>
+                    <a:p>
+                      <a:pPr marL="0" algn="l" defTabSz="914400" rtl="0" eaLnBrk="1" latinLnBrk="0" hangingPunct="1"/>
+                      <a:r>
+                        <a:rPr sz="800" b="0" kern="1200">
+                          <a:solidFill>
+                            <a:srgbClr val="0A0A0A"/>
+                          </a:solidFill>
+                          <a:latin typeface="微软雅黑" panose="020B0503020204020204" pitchFamily="34" charset="-122"/>
+                          <a:ea typeface="微软雅黑" panose="020B0503020204020204" pitchFamily="34" charset="-122"/>
+                          <a:cs typeface="+mn-cs"/>
+                        </a:rPr>
+                        <a:t>收入</a:t>
+                      </a:r>
+                    </a:p>
+                  </a:txBody>
+                  <a:tcPr marL="27432" marR="27432" marT="9144" marB="9144">
+                    <a:lnL>
+                      <a:noFill/>
+                    </a:lnL>
+                    <a:lnR>
+                      <a:noFill/>
+                    </a:lnR>
+                    <a:lnT w="9525" cap="flat" cmpd="sng" algn="ctr">
+                      <a:solidFill>
+                        <a:srgbClr val="D6D6D6"/>
+                      </a:solidFill>
+                      <a:prstDash val="solid"/>
+                      <a:round/>
+                      <a:headEnd type="none" w="med" len="med"/>
+                      <a:tailEnd type="none" w="med" len="med"/>
+                    </a:lnT>
+                    <a:lnB w="9525">
+                      <a:solidFill>
+                        <a:srgbClr val="D6D6D6"/>
+                      </a:solidFill>
+                    </a:lnB>
+                    <a:noFill/>
+                  </a:tcPr>
+                </a:tc>
+                <a:tc>
+                  <a:txBody>
+                    <a:bodyPr/>
+                    <a:lstStyle/>
+                    <a:p>
+                      <a:pPr marL="0" algn="l" defTabSz="914400" rtl="0" eaLnBrk="1" latinLnBrk="0" hangingPunct="1"/>
+                      <a:r>
+                        <a:rPr sz="800" b="0" kern="1200" dirty="0" err="1">
+                          <a:solidFill>
+                            <a:srgbClr val="0A0A0A"/>
+                          </a:solidFill>
+                          <a:latin typeface="微软雅黑" panose="020B0503020204020204" pitchFamily="34" charset="-122"/>
+                          <a:ea typeface="微软雅黑" panose="020B0503020204020204" pitchFamily="34" charset="-122"/>
+                          <a:cs typeface="+mn-cs"/>
+                        </a:rPr>
+                        <a:t>工资文本模式</a:t>
+                      </a:r>
+                      <a:r>
+                        <a:rPr sz="800" b="0" kern="1200" dirty="0">
+                          <a:solidFill>
+                            <a:srgbClr val="0A0A0A"/>
+                          </a:solidFill>
+                          <a:latin typeface="微软雅黑" panose="020B0503020204020204" pitchFamily="34" charset="-122"/>
+                          <a:ea typeface="微软雅黑" panose="020B0503020204020204" pitchFamily="34" charset="-122"/>
+                          <a:cs typeface="+mn-cs"/>
+                        </a:rPr>
+                        <a:t> + </a:t>
+                      </a:r>
+                      <a:r>
+                        <a:rPr sz="800" b="0" kern="1200" dirty="0" err="1">
+                          <a:solidFill>
+                            <a:srgbClr val="0A0A0A"/>
+                          </a:solidFill>
+                          <a:latin typeface="微软雅黑" panose="020B0503020204020204" pitchFamily="34" charset="-122"/>
+                          <a:ea typeface="微软雅黑" panose="020B0503020204020204" pitchFamily="34" charset="-122"/>
+                          <a:cs typeface="+mn-cs"/>
+                        </a:rPr>
+                        <a:t>双周周期</a:t>
+                      </a:r>
+                      <a:r>
+                        <a:rPr sz="800" b="0" kern="1200" dirty="0">
+                          <a:solidFill>
+                            <a:srgbClr val="0A0A0A"/>
+                          </a:solidFill>
+                          <a:latin typeface="微软雅黑" panose="020B0503020204020204" pitchFamily="34" charset="-122"/>
+                          <a:ea typeface="微软雅黑" panose="020B0503020204020204" pitchFamily="34" charset="-122"/>
+                          <a:cs typeface="+mn-cs"/>
+                        </a:rPr>
+                        <a:t> + </a:t>
+                      </a:r>
+                      <a:r>
+                        <a:rPr sz="800" b="0" kern="1200" dirty="0" err="1">
+                          <a:solidFill>
+                            <a:srgbClr val="0A0A0A"/>
+                          </a:solidFill>
+                          <a:latin typeface="微软雅黑" panose="020B0503020204020204" pitchFamily="34" charset="-122"/>
+                          <a:ea typeface="微软雅黑" panose="020B0503020204020204" pitchFamily="34" charset="-122"/>
+                          <a:cs typeface="+mn-cs"/>
+                        </a:rPr>
+                        <a:t>稳定金额</a:t>
+                      </a:r>
+                      <a:endParaRPr sz="800" b="0" kern="1200" dirty="0">
+                        <a:solidFill>
+                          <a:srgbClr val="0A0A0A"/>
+                        </a:solidFill>
+                        <a:latin typeface="微软雅黑" panose="020B0503020204020204" pitchFamily="34" charset="-122"/>
+                        <a:ea typeface="微软雅黑" panose="020B0503020204020204" pitchFamily="34" charset="-122"/>
+                        <a:cs typeface="+mn-cs"/>
+                      </a:endParaRPr>
+                    </a:p>
+                  </a:txBody>
+                  <a:tcPr marL="27432" marR="27432" marT="9144" marB="9144">
+                    <a:lnL>
+                      <a:noFill/>
+                    </a:lnL>
+                    <a:lnR>
+                      <a:noFill/>
+                    </a:lnR>
+                    <a:lnT w="9525" cap="flat" cmpd="sng" algn="ctr">
+                      <a:solidFill>
+                        <a:srgbClr val="D6D6D6"/>
+                      </a:solidFill>
+                      <a:prstDash val="solid"/>
+                      <a:round/>
+                      <a:headEnd type="none" w="med" len="med"/>
+                      <a:tailEnd type="none" w="med" len="med"/>
+                    </a:lnT>
+                    <a:lnB w="9525">
+                      <a:solidFill>
+                        <a:srgbClr val="D6D6D6"/>
+                      </a:solidFill>
+                    </a:lnB>
+                    <a:noFill/>
+                  </a:tcPr>
+                </a:tc>
+                <a:extLst>
+                  <a:ext uri="{0D108BD9-81ED-4DB2-BD59-A6C34878D82A}">
+                    <a16:rowId xmlns:a16="http://schemas.microsoft.com/office/drawing/2014/main" val="10005"/>
+                  </a:ext>
+                </a:extLst>
+              </a:tr>
+            </a:tbl>
+          </a:graphicData>
+        </a:graphic>
+      </p:graphicFrame>
+      <p:sp>
+        <p:nvSpPr>
+          <p:cNvPr id="100017" name="用户-bg-c"/>
+          <p:cNvSpPr/>
+          <p:nvPr/>
+        </p:nvSpPr>
+        <p:spPr>
+          <a:xfrm>
+            <a:off x="538038" y="3462934"/>
+            <a:ext cx="5376672" cy="2542032"/>
+          </a:xfrm>
+          <a:prstGeom prst="rect">
+            <a:avLst/>
+          </a:prstGeom>
+          <a:solidFill>
+            <a:srgbClr val="FFFFFF"/>
+          </a:solidFill>
+          <a:ln w="9525">
+            <a:solidFill>
+              <a:srgbClr val="B0B0B0"/>
+            </a:solidFill>
+          </a:ln>
+          <a:effectLst/>
+        </p:spPr>
+        <p:style>
+          <a:lnRef idx="1">
+            <a:schemeClr val="accent1"/>
+          </a:lnRef>
+          <a:fillRef idx="3">
+            <a:schemeClr val="accent1"/>
+          </a:fillRef>
+          <a:effectRef idx="2">
+            <a:schemeClr val="accent1"/>
+          </a:effectRef>
+          <a:fontRef idx="minor">
+            <a:schemeClr val="lt1"/>
+          </a:fontRef>
+        </p:style>
+        <p:txBody>
+          <a:bodyPr rtlCol="0" anchor="ctr"/>
+          <a:lstStyle/>
+          <a:p>
+            <a:pPr algn="ctr"/>
+            <a:endParaRPr/>
+          </a:p>
+        </p:txBody>
+      </p:sp>
+      <p:sp>
+        <p:nvSpPr>
+          <p:cNvPr id="100018" name="用户-bar-c"/>
+          <p:cNvSpPr/>
+          <p:nvPr/>
+        </p:nvSpPr>
+        <p:spPr>
+          <a:xfrm>
+            <a:off x="538038" y="3462934"/>
+            <a:ext cx="5376672" cy="54864"/>
+          </a:xfrm>
+          <a:prstGeom prst="rect">
+            <a:avLst/>
+          </a:prstGeom>
+          <a:solidFill>
+            <a:srgbClr val="1F4E79"/>
+          </a:solidFill>
+          <a:ln>
+            <a:noFill/>
+          </a:ln>
+          <a:effectLst/>
+        </p:spPr>
+        <p:style>
+          <a:lnRef idx="1">
+            <a:schemeClr val="accent1"/>
+          </a:lnRef>
+          <a:fillRef idx="3">
+            <a:schemeClr val="accent1"/>
+          </a:fillRef>
+          <a:effectRef idx="2">
+            <a:schemeClr val="accent1"/>
+          </a:effectRef>
+          <a:fontRef idx="minor">
+            <a:schemeClr val="lt1"/>
+          </a:fontRef>
+        </p:style>
+        <p:txBody>
+          <a:bodyPr rtlCol="0" anchor="ctr"/>
+          <a:lstStyle/>
+          <a:p>
+            <a:pPr algn="ctr"/>
+            <a:endParaRPr/>
+          </a:p>
+        </p:txBody>
+      </p:sp>
+      <p:sp>
+        <p:nvSpPr>
+          <p:cNvPr id="100019" name="用户-title-c"/>
+          <p:cNvSpPr txBox="1"/>
+          <p:nvPr/>
+        </p:nvSpPr>
+        <p:spPr>
+          <a:xfrm>
+            <a:off x="720918" y="3563518"/>
+            <a:ext cx="5010912" cy="201168"/>
+          </a:xfrm>
+          <a:prstGeom prst="rect">
+            <a:avLst/>
+          </a:prstGeom>
+          <a:noFill/>
+        </p:spPr>
+        <p:txBody>
+          <a:bodyPr wrap="square" lIns="0" tIns="0" rIns="0" bIns="0">
+            <a:spAutoFit/>
+          </a:bodyPr>
+          <a:lstStyle/>
+          <a:p>
+            <a:pPr algn="l"/>
+            <a:r>
+              <a:rPr lang="zh-CN" sz="1050" b="1">
+                <a:solidFill>
+                  <a:srgbClr val="0A0A0A"/>
+                </a:solidFill>
+                <a:latin typeface="微软雅黑"/>
+                <a:ea typeface="微软雅黑"/>
+              </a:rPr>
+              <a:t>用户整体负债画像</a:t>
+            </a:r>
+          </a:p>
+        </p:txBody>
+      </p:sp>
+      <p:sp>
+        <p:nvSpPr>
+          <p:cNvPr id="100024" name="Fa-bg-c"/>
+          <p:cNvSpPr/>
+          <p:nvPr/>
+        </p:nvSpPr>
+        <p:spPr>
+          <a:xfrm>
+            <a:off x="6189030" y="3462934"/>
+            <a:ext cx="5376672" cy="2542032"/>
+          </a:xfrm>
+          <a:prstGeom prst="rect">
+            <a:avLst/>
+          </a:prstGeom>
+          <a:solidFill>
+            <a:srgbClr val="FFFFFF"/>
+          </a:solidFill>
+          <a:ln w="9525">
+            <a:solidFill>
+              <a:srgbClr val="B0B0B0"/>
+            </a:solidFill>
+          </a:ln>
+          <a:effectLst/>
+        </p:spPr>
+        <p:style>
+          <a:lnRef idx="1">
+            <a:schemeClr val="accent1"/>
+          </a:lnRef>
+          <a:fillRef idx="3">
+            <a:schemeClr val="accent1"/>
+          </a:fillRef>
+          <a:effectRef idx="2">
+            <a:schemeClr val="accent1"/>
+          </a:effectRef>
+          <a:fontRef idx="minor">
+            <a:schemeClr val="lt1"/>
+          </a:fontRef>
+        </p:style>
+        <p:txBody>
+          <a:bodyPr rtlCol="0" anchor="ctr"/>
+          <a:lstStyle/>
+          <a:p>
+            <a:pPr algn="ctr"/>
+            <a:endParaRPr/>
+          </a:p>
+        </p:txBody>
+      </p:sp>
+      <p:sp>
+        <p:nvSpPr>
+          <p:cNvPr id="100025" name="Fa-bar-c"/>
+          <p:cNvSpPr/>
+          <p:nvPr/>
+        </p:nvSpPr>
+        <p:spPr>
+          <a:xfrm>
+            <a:off x="6189030" y="3462934"/>
+            <a:ext cx="5376672" cy="54864"/>
+          </a:xfrm>
+          <a:prstGeom prst="rect">
+            <a:avLst/>
+          </a:prstGeom>
+          <a:solidFill>
+            <a:srgbClr val="1F4E79"/>
+          </a:solidFill>
+          <a:ln>
+            <a:noFill/>
+          </a:ln>
+          <a:effectLst/>
+        </p:spPr>
+        <p:style>
+          <a:lnRef idx="1">
+            <a:schemeClr val="accent1"/>
+          </a:lnRef>
+          <a:fillRef idx="3">
+            <a:schemeClr val="accent1"/>
+          </a:fillRef>
+          <a:effectRef idx="2">
+            <a:schemeClr val="accent1"/>
+          </a:effectRef>
+          <a:fontRef idx="minor">
+            <a:schemeClr val="lt1"/>
+          </a:fontRef>
+        </p:style>
+        <p:txBody>
+          <a:bodyPr rtlCol="0" anchor="ctr"/>
+          <a:lstStyle/>
+          <a:p>
+            <a:pPr algn="ctr"/>
+            <a:endParaRPr/>
+          </a:p>
+        </p:txBody>
+      </p:sp>
+      <p:sp>
+        <p:nvSpPr>
+          <p:cNvPr id="100026" name="Fa-title-c"/>
+          <p:cNvSpPr txBox="1"/>
+          <p:nvPr/>
+        </p:nvSpPr>
+        <p:spPr>
+          <a:xfrm>
+            <a:off x="6371910" y="3563518"/>
+            <a:ext cx="5010912" cy="201168"/>
+          </a:xfrm>
+          <a:prstGeom prst="rect">
+            <a:avLst/>
+          </a:prstGeom>
+          <a:noFill/>
+        </p:spPr>
+        <p:txBody>
+          <a:bodyPr wrap="square" lIns="0" tIns="0" rIns="0" bIns="0">
+            <a:spAutoFit/>
+          </a:bodyPr>
+          <a:lstStyle/>
+          <a:p>
+            <a:pPr algn="l"/>
+            <a:r>
+              <a:rPr lang="zh-CN" sz="1050" b="1">
+                <a:solidFill>
+                  <a:srgbClr val="0A0A0A"/>
+                </a:solidFill>
+                <a:latin typeface="微软雅黑"/>
+                <a:ea typeface="微软雅黑"/>
+              </a:rPr>
+              <a:t>Fair Go Finance 单笔贷款画像</a:t>
+            </a:r>
+          </a:p>
+        </p:txBody>
+      </p:sp>
+      <p:sp>
+        <p:nvSpPr>
+          <p:cNvPr id="100031" name="concl-bar-c"/>
+          <p:cNvSpPr/>
+          <p:nvPr/>
+        </p:nvSpPr>
+        <p:spPr>
+          <a:xfrm>
+            <a:off x="538038" y="6126480"/>
+            <a:ext cx="11045952" cy="402336"/>
+          </a:xfrm>
+          <a:prstGeom prst="rect">
+            <a:avLst/>
+          </a:prstGeom>
+          <a:solidFill>
+            <a:srgbClr val="FAF3E0"/>
+          </a:solidFill>
+          <a:ln>
+            <a:noFill/>
+          </a:ln>
+          <a:effectLst/>
+        </p:spPr>
+        <p:style>
+          <a:lnRef idx="1">
+            <a:schemeClr val="accent1"/>
+          </a:lnRef>
+          <a:fillRef idx="3">
+            <a:schemeClr val="accent1"/>
+          </a:fillRef>
+          <a:effectRef idx="2">
+            <a:schemeClr val="accent1"/>
+          </a:effectRef>
+          <a:fontRef idx="minor">
+            <a:schemeClr val="lt1"/>
+          </a:fontRef>
+        </p:style>
+        <p:txBody>
+          <a:bodyPr rtlCol="0" anchor="ctr"/>
+          <a:lstStyle/>
+          <a:p>
+            <a:pPr algn="ctr"/>
+            <a:endParaRPr/>
+          </a:p>
+        </p:txBody>
+      </p:sp>
+      <p:sp>
+        <p:nvSpPr>
+          <p:cNvPr id="100032" name="concl-bar-line-c"/>
+          <p:cNvSpPr/>
+          <p:nvPr/>
+        </p:nvSpPr>
+        <p:spPr>
+          <a:xfrm>
+            <a:off x="538038" y="6126480"/>
+            <a:ext cx="64008" cy="402336"/>
+          </a:xfrm>
+          <a:prstGeom prst="rect">
+            <a:avLst/>
+          </a:prstGeom>
+          <a:solidFill>
+            <a:srgbClr val="D6A000"/>
+          </a:solidFill>
+          <a:ln>
+            <a:noFill/>
+          </a:ln>
+          <a:effectLst/>
+        </p:spPr>
+        <p:style>
+          <a:lnRef idx="1">
+            <a:schemeClr val="accent1"/>
+          </a:lnRef>
+          <a:fillRef idx="3">
+            <a:schemeClr val="accent1"/>
+          </a:fillRef>
+          <a:effectRef idx="2">
+            <a:schemeClr val="accent1"/>
+          </a:effectRef>
+          <a:fontRef idx="minor">
+            <a:schemeClr val="lt1"/>
+          </a:fontRef>
+        </p:style>
+        <p:txBody>
+          <a:bodyPr rtlCol="0" anchor="ctr"/>
+          <a:lstStyle/>
+          <a:p>
+            <a:pPr algn="ctr"/>
+            <a:endParaRPr/>
+          </a:p>
+        </p:txBody>
+      </p:sp>
+      <p:sp>
+        <p:nvSpPr>
+          <p:cNvPr id="100033" name="concl-text-c"/>
+          <p:cNvSpPr txBox="1"/>
+          <p:nvPr/>
+        </p:nvSpPr>
+        <p:spPr>
+          <a:xfrm>
+            <a:off x="720918" y="6181344"/>
+            <a:ext cx="10698480" cy="292608"/>
+          </a:xfrm>
+          <a:prstGeom prst="rect">
+            <a:avLst/>
+          </a:prstGeom>
+          <a:noFill/>
+        </p:spPr>
+        <p:txBody>
+          <a:bodyPr wrap="square" lIns="0" tIns="0" rIns="0" bIns="0">
+            <a:spAutoFit/>
+          </a:bodyPr>
+          <a:lstStyle/>
+          <a:p>
+            <a:pPr>
+              <a:lnSpc>
+                <a:spcPct val="100000"/>
+              </a:lnSpc>
+            </a:pPr>
+            <a:r>
+              <a:rPr sz="900" b="1" lang="zh-CN">
+                <a:solidFill>
+                  <a:srgbClr val="0A0A0A"/>
+                </a:solidFill>
+                <a:latin typeface="微软雅黑"/>
+                <a:ea typeface="微软雅黑"/>
+              </a:rPr>
+              <a:t>负债金额 + 借贷行为 + 还款表现 + 产品定价，共同还原客户真实偿债压力与信用行为。</a:t>
+            </a:r>
+          </a:p>
+        </p:txBody>
+      </p:sp>
+      <p:sp>
+        <p:nvSpPr>
+          <p:cNvPr id="100049" name="s2-bar-c"/>
+          <p:cNvSpPr/>
+          <p:nvPr/>
+        </p:nvSpPr>
+        <p:spPr>
+          <a:xfrm>
+            <a:off x="336870" y="1216640"/>
+            <a:ext cx="76200" cy="228600"/>
+          </a:xfrm>
+          <a:prstGeom prst="rect">
+            <a:avLst/>
+          </a:prstGeom>
+          <a:solidFill>
+            <a:srgbClr val="D6A000"/>
+          </a:solidFill>
+          <a:ln>
+            <a:noFill/>
+          </a:ln>
+          <a:effectLst/>
+        </p:spPr>
+        <p:style>
+          <a:lnRef idx="1">
+            <a:schemeClr val="accent1"/>
+          </a:lnRef>
+          <a:fillRef idx="3">
+            <a:schemeClr val="accent1"/>
+          </a:fillRef>
+          <a:effectRef idx="2">
+            <a:schemeClr val="accent1"/>
+          </a:effectRef>
+          <a:fontRef idx="minor">
+            <a:schemeClr val="lt1"/>
+          </a:fontRef>
+        </p:style>
+        <p:txBody>
+          <a:bodyPr rtlCol="0" anchor="ctr"/>
+          <a:lstStyle/>
+          <a:p>
+            <a:pPr algn="ctr"/>
+            <a:endParaRPr/>
+          </a:p>
+        </p:txBody>
+      </p:sp>
+      <p:sp>
+        <p:nvSpPr>
+          <p:cNvPr id="100050" name="s2-bar-c"/>
+          <p:cNvSpPr/>
+          <p:nvPr/>
+        </p:nvSpPr>
+        <p:spPr>
+          <a:xfrm>
+            <a:off x="364302" y="3152038"/>
+            <a:ext cx="76200" cy="228600"/>
+          </a:xfrm>
+          <a:prstGeom prst="rect">
+            <a:avLst/>
+          </a:prstGeom>
+          <a:solidFill>
+            <a:srgbClr val="D6A000"/>
+          </a:solidFill>
+          <a:ln>
+            <a:noFill/>
+          </a:ln>
+          <a:effectLst/>
+        </p:spPr>
+        <p:style>
+          <a:lnRef idx="1">
+            <a:schemeClr val="accent1"/>
+          </a:lnRef>
+          <a:fillRef idx="3">
+            <a:schemeClr val="accent1"/>
+          </a:fillRef>
+          <a:effectRef idx="2">
+            <a:schemeClr val="accent1"/>
+          </a:effectRef>
+          <a:fontRef idx="minor">
+            <a:schemeClr val="lt1"/>
+          </a:fontRef>
+        </p:style>
+        <p:txBody>
+          <a:bodyPr rtlCol="0" anchor="ctr"/>
+          <a:lstStyle/>
+          <a:p>
+            <a:pPr algn="ctr"/>
+            <a:endParaRPr/>
+          </a:p>
+        </p:txBody>
+      </p:sp>
+      <p:sp>
+        <p:nvSpPr>
+          <p:cNvPr id="100051" name="用户-tag1-c"/>
+          <p:cNvSpPr/>
+          <p:nvPr/>
+        </p:nvSpPr>
+        <p:spPr>
+          <a:xfrm>
+            <a:off x="722376" y="3840480"/>
+            <a:ext cx="1197864" cy="256032"/>
+          </a:xfrm>
+          <a:prstGeom prst="roundRect">
+            <a:avLst>
+              <a:gd name="adj" fmla="val 10000"/>
+            </a:avLst>
+          </a:prstGeom>
+          <a:solidFill>
+            <a:srgbClr val="FAF3E0"/>
+          </a:solidFill>
+          <a:ln w="12700">
+            <a:solidFill>
+              <a:srgbClr val="D6A000"/>
+            </a:solidFill>
+          </a:ln>
+          <a:effectLst/>
+        </p:spPr>
+        <p:style>
+          <a:lnRef idx="1">
+            <a:schemeClr val="accent1"/>
+          </a:lnRef>
+          <a:fillRef idx="3">
+            <a:schemeClr val="accent1"/>
+          </a:fillRef>
+          <a:effectRef idx="2">
+            <a:schemeClr val="accent1"/>
+          </a:effectRef>
+          <a:fontRef idx="minor">
+            <a:schemeClr val="lt1"/>
+          </a:fontRef>
+        </p:style>
+        <p:txBody>
+          <a:bodyPr rtlCol="0" anchor="ctr"/>
+          <a:lstStyle/>
+          <a:p>
+            <a:pPr algn="ctr"/>
+          </a:p>
+        </p:txBody>
+      </p:sp>
+      <p:sp>
+        <p:nvSpPr>
+          <p:cNvPr id="100052" name="用户-tag1-t-c"/>
+          <p:cNvSpPr txBox="1"/>
+          <p:nvPr/>
+        </p:nvSpPr>
+        <p:spPr>
+          <a:xfrm>
+            <a:off x="722376" y="3895344"/>
+            <a:ext cx="1197864" cy="164592"/>
+          </a:xfrm>
+          <a:prstGeom prst="rect">
+            <a:avLst/>
+          </a:prstGeom>
+          <a:noFill/>
+        </p:spPr>
+        <p:txBody>
+          <a:bodyPr wrap="square" lIns="0" rIns="0" tIns="0" bIns="0">
+            <a:noAutofit/>
+          </a:bodyPr>
+          <a:lstStyle/>
+          <a:p>
+            <a:pPr algn="ctr">
+              <a:lnSpc>
+                <a:spcPct val="100000"/>
+              </a:lnSpc>
+            </a:pPr>
+            <a:r>
+              <a:rPr sz="900" b="1" lang="zh-CN">
+                <a:solidFill>
+                  <a:srgbClr val="1F4E79"/>
+                </a:solidFill>
+                <a:latin typeface="微软雅黑"/>
+                <a:ea typeface="微软雅黑"/>
+              </a:rPr>
+              <a:t>多头借贷</a:t>
+            </a:r>
+          </a:p>
+        </p:txBody>
+      </p:sp>
+      <p:sp>
+        <p:nvSpPr>
+          <p:cNvPr id="100053" name="用户-tag2-c"/>
+          <p:cNvSpPr/>
+          <p:nvPr/>
+        </p:nvSpPr>
+        <p:spPr>
+          <a:xfrm>
+            <a:off x="1993392" y="3840480"/>
+            <a:ext cx="1197864" cy="256032"/>
+          </a:xfrm>
+          <a:prstGeom prst="roundRect">
+            <a:avLst>
+              <a:gd name="adj" fmla="val 10000"/>
+            </a:avLst>
+          </a:prstGeom>
+          <a:solidFill>
+            <a:srgbClr val="FAF3E0"/>
+          </a:solidFill>
+          <a:ln w="12700">
+            <a:solidFill>
+              <a:srgbClr val="D6A000"/>
+            </a:solidFill>
+          </a:ln>
+          <a:effectLst/>
+        </p:spPr>
+        <p:style>
+          <a:lnRef idx="1">
+            <a:schemeClr val="accent1"/>
+          </a:lnRef>
+          <a:fillRef idx="3">
+            <a:schemeClr val="accent1"/>
+          </a:fillRef>
+          <a:effectRef idx="2">
+            <a:schemeClr val="accent1"/>
+          </a:effectRef>
+          <a:fontRef idx="minor">
+            <a:schemeClr val="lt1"/>
+          </a:fontRef>
+        </p:style>
+        <p:txBody>
+          <a:bodyPr rtlCol="0" anchor="ctr"/>
+          <a:lstStyle/>
+          <a:p>
+            <a:pPr algn="ctr"/>
+          </a:p>
+        </p:txBody>
+      </p:sp>
+      <p:sp>
+        <p:nvSpPr>
+          <p:cNvPr id="100054" name="用户-tag2-t-c"/>
+          <p:cNvSpPr txBox="1"/>
+          <p:nvPr/>
+        </p:nvSpPr>
+        <p:spPr>
+          <a:xfrm>
+            <a:off x="1993392" y="3895344"/>
+            <a:ext cx="1197864" cy="164592"/>
+          </a:xfrm>
+          <a:prstGeom prst="rect">
+            <a:avLst/>
+          </a:prstGeom>
+          <a:noFill/>
+        </p:spPr>
+        <p:txBody>
+          <a:bodyPr wrap="square" lIns="0" rIns="0" tIns="0" bIns="0">
+            <a:noAutofit/>
+          </a:bodyPr>
+          <a:lstStyle/>
+          <a:p>
+            <a:pPr algn="ctr">
+              <a:lnSpc>
+                <a:spcPct val="100000"/>
+              </a:lnSpc>
+            </a:pPr>
+            <a:r>
+              <a:rPr sz="900" b="1" lang="zh-CN">
+                <a:solidFill>
+                  <a:srgbClr val="1F4E79"/>
+                </a:solidFill>
+                <a:latin typeface="微软雅黑"/>
+                <a:ea typeface="微软雅黑"/>
+              </a:rPr>
+              <a:t>近期借贷活跃</a:t>
+            </a:r>
+          </a:p>
+        </p:txBody>
+      </p:sp>
+      <p:sp>
+        <p:nvSpPr>
+          <p:cNvPr id="100055" name="用户-tag3-c"/>
+          <p:cNvSpPr/>
+          <p:nvPr/>
+        </p:nvSpPr>
+        <p:spPr>
+          <a:xfrm>
+            <a:off x="3264408" y="3840480"/>
+            <a:ext cx="1197864" cy="256032"/>
+          </a:xfrm>
+          <a:prstGeom prst="roundRect">
+            <a:avLst>
+              <a:gd name="adj" fmla="val 10000"/>
+            </a:avLst>
+          </a:prstGeom>
+          <a:solidFill>
+            <a:srgbClr val="FAF3E0"/>
+          </a:solidFill>
+          <a:ln w="12700">
+            <a:solidFill>
+              <a:srgbClr val="D6A000"/>
+            </a:solidFill>
+          </a:ln>
+          <a:effectLst/>
+        </p:spPr>
+        <p:style>
+          <a:lnRef idx="1">
+            <a:schemeClr val="accent1"/>
+          </a:lnRef>
+          <a:fillRef idx="3">
+            <a:schemeClr val="accent1"/>
+          </a:fillRef>
+          <a:effectRef idx="2">
+            <a:schemeClr val="accent1"/>
+          </a:effectRef>
+          <a:fontRef idx="minor">
+            <a:schemeClr val="lt1"/>
+          </a:fontRef>
+        </p:style>
+        <p:txBody>
+          <a:bodyPr rtlCol="0" anchor="ctr"/>
+          <a:lstStyle/>
+          <a:p>
+            <a:pPr algn="ctr"/>
+          </a:p>
+        </p:txBody>
+      </p:sp>
+      <p:sp>
+        <p:nvSpPr>
+          <p:cNvPr id="100056" name="用户-tag3-t-c"/>
+          <p:cNvSpPr txBox="1"/>
+          <p:nvPr/>
+        </p:nvSpPr>
+        <p:spPr>
+          <a:xfrm>
+            <a:off x="3264408" y="3895344"/>
+            <a:ext cx="1197864" cy="164592"/>
+          </a:xfrm>
+          <a:prstGeom prst="rect">
+            <a:avLst/>
+          </a:prstGeom>
+          <a:noFill/>
+        </p:spPr>
+        <p:txBody>
+          <a:bodyPr wrap="square" lIns="0" rIns="0" tIns="0" bIns="0">
+            <a:noAutofit/>
+          </a:bodyPr>
+          <a:lstStyle/>
+          <a:p>
+            <a:pPr algn="ctr">
+              <a:lnSpc>
+                <a:spcPct val="100000"/>
+              </a:lnSpc>
+            </a:pPr>
+            <a:r>
+              <a:rPr sz="900" b="1" lang="zh-CN">
+                <a:solidFill>
+                  <a:srgbClr val="1F4E79"/>
+                </a:solidFill>
+                <a:latin typeface="微软雅黑"/>
+                <a:ea typeface="微软雅黑"/>
+              </a:rPr>
+              <a:t>整体持续还款</a:t>
+            </a:r>
+          </a:p>
+        </p:txBody>
+      </p:sp>
+      <p:sp>
+        <p:nvSpPr>
+          <p:cNvPr id="100057" name="用户-tag4-c"/>
+          <p:cNvSpPr/>
+          <p:nvPr/>
+        </p:nvSpPr>
+        <p:spPr>
+          <a:xfrm>
+            <a:off x="4535424" y="3840480"/>
+            <a:ext cx="1197864" cy="256032"/>
+          </a:xfrm>
+          <a:prstGeom prst="roundRect">
+            <a:avLst>
+              <a:gd name="adj" fmla="val 10000"/>
+            </a:avLst>
+          </a:prstGeom>
+          <a:solidFill>
+            <a:srgbClr val="FAF3E0"/>
+          </a:solidFill>
+          <a:ln w="12700">
+            <a:solidFill>
+              <a:srgbClr val="D6A000"/>
+            </a:solidFill>
+          </a:ln>
+          <a:effectLst/>
+        </p:spPr>
+        <p:style>
+          <a:lnRef idx="1">
+            <a:schemeClr val="accent1"/>
+          </a:lnRef>
+          <a:fillRef idx="3">
+            <a:schemeClr val="accent1"/>
+          </a:fillRef>
+          <a:effectRef idx="2">
+            <a:schemeClr val="accent1"/>
+          </a:effectRef>
+          <a:fontRef idx="minor">
+            <a:schemeClr val="lt1"/>
+          </a:fontRef>
+        </p:style>
+        <p:txBody>
+          <a:bodyPr rtlCol="0" anchor="ctr"/>
+          <a:lstStyle/>
+          <a:p>
+            <a:pPr algn="ctr"/>
+          </a:p>
+        </p:txBody>
+      </p:sp>
+      <p:sp>
+        <p:nvSpPr>
+          <p:cNvPr id="100058" name="用户-tag4-t-c"/>
+          <p:cNvSpPr txBox="1"/>
+          <p:nvPr/>
+        </p:nvSpPr>
+        <p:spPr>
+          <a:xfrm>
+            <a:off x="4535424" y="3895344"/>
+            <a:ext cx="1197864" cy="164592"/>
+          </a:xfrm>
+          <a:prstGeom prst="rect">
+            <a:avLst/>
+          </a:prstGeom>
+          <a:noFill/>
+        </p:spPr>
+        <p:txBody>
+          <a:bodyPr wrap="square" lIns="0" rIns="0" tIns="0" bIns="0">
+            <a:noAutofit/>
+          </a:bodyPr>
+          <a:lstStyle/>
+          <a:p>
+            <a:pPr algn="ctr">
+              <a:lnSpc>
+                <a:spcPct val="100000"/>
+              </a:lnSpc>
+            </a:pPr>
+            <a:r>
+              <a:rPr sz="900" b="1" lang="zh-CN">
+                <a:solidFill>
+                  <a:srgbClr val="1F4E79"/>
+                </a:solidFill>
+                <a:latin typeface="微软雅黑"/>
+                <a:ea typeface="微软雅黑"/>
+              </a:rPr>
+              <a:t>存在轻微还款波动</a:t>
+            </a:r>
+          </a:p>
+        </p:txBody>
+      </p:sp>
+      <p:sp>
+        <p:nvSpPr>
+          <p:cNvPr id="100059" name="用户-g1-bar-c"/>
+          <p:cNvSpPr/>
+          <p:nvPr/>
+        </p:nvSpPr>
+        <p:spPr>
+          <a:xfrm>
+            <a:off x="566928" y="4201668"/>
+            <a:ext cx="45720" cy="128016"/>
+          </a:xfrm>
+          <a:prstGeom prst="rect">
+            <a:avLst/>
+          </a:prstGeom>
+          <a:solidFill>
+            <a:srgbClr val="D6A000"/>
+          </a:solidFill>
+          <a:ln>
+            <a:noFill/>
+          </a:ln>
+          <a:effectLst/>
+        </p:spPr>
+        <p:style>
+          <a:lnRef idx="1">
+            <a:schemeClr val="accent1"/>
+          </a:lnRef>
+          <a:fillRef idx="3">
+            <a:schemeClr val="accent1"/>
+          </a:fillRef>
+          <a:effectRef idx="2">
+            <a:schemeClr val="accent1"/>
+          </a:effectRef>
+          <a:fontRef idx="minor">
+            <a:schemeClr val="lt1"/>
+          </a:fontRef>
+        </p:style>
+        <p:txBody>
+          <a:bodyPr rtlCol="0" anchor="ctr"/>
+          <a:lstStyle/>
+          <a:p>
+            <a:pPr algn="ctr"/>
+          </a:p>
+        </p:txBody>
+      </p:sp>
+      <p:sp>
+        <p:nvSpPr>
+          <p:cNvPr id="100060" name="用户-g1-t-c"/>
+          <p:cNvSpPr txBox="1"/>
+          <p:nvPr/>
+        </p:nvSpPr>
+        <p:spPr>
+          <a:xfrm>
+            <a:off x="658368" y="4187952"/>
+            <a:ext cx="1828800" cy="146304"/>
+          </a:xfrm>
+          <a:prstGeom prst="rect">
+            <a:avLst/>
+          </a:prstGeom>
+          <a:noFill/>
+        </p:spPr>
+        <p:txBody>
+          <a:bodyPr wrap="square" lIns="0" rIns="0" tIns="0" bIns="0">
+            <a:noAutofit/>
+          </a:bodyPr>
+          <a:lstStyle/>
+          <a:p>
+            <a:pPr>
+              <a:lnSpc>
+                <a:spcPct val="100000"/>
+              </a:lnSpc>
+            </a:pPr>
+            <a:r>
+              <a:rPr sz="1000" b="1" lang="zh-CN">
+                <a:solidFill>
+                  <a:srgbClr val="1F4E79"/>
+                </a:solidFill>
+                <a:latin typeface="微软雅黑"/>
+                <a:ea typeface="微软雅黑"/>
+              </a:rPr>
+              <a:t>负债压力</a:t>
+            </a:r>
+          </a:p>
+        </p:txBody>
+      </p:sp>
+      <p:sp>
+        <p:nvSpPr>
+          <p:cNvPr id="100061" name="用户-g1-1-c"/>
+          <p:cNvSpPr txBox="1"/>
+          <p:nvPr/>
+        </p:nvSpPr>
+        <p:spPr>
+          <a:xfrm>
+            <a:off x="722376" y="4370832"/>
+            <a:ext cx="1197864" cy="347472"/>
+          </a:xfrm>
+          <a:prstGeom prst="rect">
+            <a:avLst/>
+          </a:prstGeom>
+          <a:noFill/>
+        </p:spPr>
+        <p:txBody>
+          <a:bodyPr wrap="square" lIns="0" rIns="0" tIns="0" bIns="0">
+            <a:noAutofit/>
+          </a:bodyPr>
+          <a:lstStyle/>
+          <a:p>
+            <a:pPr>
+              <a:lnSpc>
+                <a:spcPct val="100000"/>
+              </a:lnSpc>
+            </a:pPr>
+            <a:r>
+              <a:rPr sz="800" b="0" lang="zh-CN">
+                <a:solidFill>
+                  <a:srgbClr val="1F4E79"/>
+                </a:solidFill>
+                <a:latin typeface="微软雅黑"/>
+                <a:ea typeface="微软雅黑"/>
+              </a:rPr>
+              <a:t>平均月还款金额</a:t>
+            </a:r>
+          </a:p>
+          <a:p>
+            <a:pPr>
+              <a:lnSpc>
+                <a:spcPct val="100000"/>
+              </a:lnSpc>
+            </a:pPr>
+            <a:r>
+              <a:rPr sz="1200" b="1" lang="zh-CN">
+                <a:solidFill>
+                  <a:srgbClr val="1F4E79"/>
+                </a:solidFill>
+                <a:latin typeface="微软雅黑"/>
+                <a:ea typeface="微软雅黑"/>
+              </a:rPr>
+              <a:t>A$428</a:t>
+            </a:r>
+          </a:p>
+        </p:txBody>
+      </p:sp>
+      <p:sp>
+        <p:nvSpPr>
+          <p:cNvPr id="100062" name="用户-g1-2-c"/>
+          <p:cNvSpPr txBox="1"/>
+          <p:nvPr/>
+        </p:nvSpPr>
+        <p:spPr>
+          <a:xfrm>
+            <a:off x="1993392" y="4370832"/>
+            <a:ext cx="1197864" cy="347472"/>
+          </a:xfrm>
+          <a:prstGeom prst="rect">
+            <a:avLst/>
+          </a:prstGeom>
+          <a:noFill/>
+        </p:spPr>
+        <p:txBody>
+          <a:bodyPr wrap="square" lIns="0" rIns="0" tIns="0" bIns="0">
+            <a:noAutofit/>
+          </a:bodyPr>
+          <a:lstStyle/>
+          <a:p>
+            <a:pPr>
+              <a:lnSpc>
+                <a:spcPct val="100000"/>
+              </a:lnSpc>
+            </a:pPr>
+            <a:r>
+              <a:rPr sz="800" b="0" lang="zh-CN">
+                <a:solidFill>
+                  <a:srgbClr val="1F4E79"/>
+                </a:solidFill>
+                <a:latin typeface="微软雅黑"/>
+                <a:ea typeface="微软雅黑"/>
+              </a:rPr>
+              <a:t>预计待还金额</a:t>
+            </a:r>
+          </a:p>
+          <a:p>
+            <a:pPr>
+              <a:lnSpc>
+                <a:spcPct val="100000"/>
+              </a:lnSpc>
+            </a:pPr>
+            <a:r>
+              <a:rPr sz="1200" b="1" lang="zh-CN">
+                <a:solidFill>
+                  <a:srgbClr val="1F4E79"/>
+                </a:solidFill>
+                <a:latin typeface="微软雅黑"/>
+                <a:ea typeface="微软雅黑"/>
+              </a:rPr>
+              <a:t>A$1,016</a:t>
+            </a:r>
+          </a:p>
+        </p:txBody>
+      </p:sp>
+      <p:sp>
+        <p:nvSpPr>
+          <p:cNvPr id="100063" name="用户-g1-3-c"/>
+          <p:cNvSpPr txBox="1"/>
+          <p:nvPr/>
+        </p:nvSpPr>
+        <p:spPr>
+          <a:xfrm>
+            <a:off x="3264408" y="4370832"/>
+            <a:ext cx="1197864" cy="347472"/>
+          </a:xfrm>
+          <a:prstGeom prst="rect">
+            <a:avLst/>
+          </a:prstGeom>
+          <a:noFill/>
+        </p:spPr>
+        <p:txBody>
+          <a:bodyPr wrap="square" lIns="0" rIns="0" tIns="0" bIns="0">
+            <a:noAutofit/>
+          </a:bodyPr>
+          <a:lstStyle/>
+          <a:p>
+            <a:pPr>
+              <a:lnSpc>
+                <a:spcPct val="100000"/>
+              </a:lnSpc>
+            </a:pPr>
+            <a:r>
+              <a:rPr sz="800" b="0" lang="zh-CN">
+                <a:solidFill>
+                  <a:srgbClr val="1F4E79"/>
+                </a:solidFill>
+                <a:latin typeface="微软雅黑"/>
+                <a:ea typeface="微软雅黑"/>
+              </a:rPr>
+              <a:t>贷款机构数量</a:t>
+            </a:r>
+          </a:p>
+          <a:p>
+            <a:pPr>
+              <a:lnSpc>
+                <a:spcPct val="100000"/>
+              </a:lnSpc>
+            </a:pPr>
+            <a:r>
+              <a:rPr sz="1200" b="1" lang="zh-CN">
+                <a:solidFill>
+                  <a:srgbClr val="1F4E79"/>
+                </a:solidFill>
+                <a:latin typeface="微软雅黑"/>
+                <a:ea typeface="微软雅黑"/>
+              </a:rPr>
+              <a:t>2 家</a:t>
+            </a:r>
+          </a:p>
+        </p:txBody>
+      </p:sp>
+      <p:sp>
+        <p:nvSpPr>
+          <p:cNvPr id="100064" name="用户-g1-4-c"/>
+          <p:cNvSpPr txBox="1"/>
+          <p:nvPr/>
+        </p:nvSpPr>
+        <p:spPr>
+          <a:xfrm>
+            <a:off x="4535424" y="4370832"/>
+            <a:ext cx="1197864" cy="347472"/>
+          </a:xfrm>
+          <a:prstGeom prst="rect">
+            <a:avLst/>
+          </a:prstGeom>
+          <a:noFill/>
+        </p:spPr>
+        <p:txBody>
+          <a:bodyPr wrap="square" lIns="0" rIns="0" tIns="0" bIns="0">
+            <a:noAutofit/>
+          </a:bodyPr>
+          <a:lstStyle/>
+          <a:p>
+            <a:pPr>
+              <a:lnSpc>
+                <a:spcPct val="100000"/>
+              </a:lnSpc>
+            </a:pPr>
+            <a:r>
+              <a:rPr sz="800" b="0" lang="zh-CN">
+                <a:solidFill>
+                  <a:srgbClr val="1F4E79"/>
+                </a:solidFill>
+                <a:latin typeface="微软雅黑"/>
+                <a:ea typeface="微软雅黑"/>
+              </a:rPr>
+              <a:t>90 天借款金额</a:t>
+            </a:r>
+          </a:p>
+          <a:p>
+            <a:pPr>
+              <a:lnSpc>
+                <a:spcPct val="100000"/>
+              </a:lnSpc>
+            </a:pPr>
+            <a:r>
+              <a:rPr sz="1200" b="1" lang="zh-CN">
+                <a:solidFill>
+                  <a:srgbClr val="1F4E79"/>
+                </a:solidFill>
+                <a:latin typeface="微软雅黑"/>
+                <a:ea typeface="微软雅黑"/>
+              </a:rPr>
+              <a:t>A$2,300</a:t>
+            </a:r>
+          </a:p>
+        </p:txBody>
+      </p:sp>
+      <p:sp>
+        <p:nvSpPr>
+          <p:cNvPr id="100065" name="用户-g2-bar-c"/>
+          <p:cNvSpPr/>
+          <p:nvPr/>
+        </p:nvSpPr>
+        <p:spPr>
+          <a:xfrm>
+            <a:off x="566928" y="4823459"/>
+            <a:ext cx="45720" cy="128016"/>
+          </a:xfrm>
+          <a:prstGeom prst="rect">
+            <a:avLst/>
+          </a:prstGeom>
+          <a:solidFill>
+            <a:srgbClr val="D6A000"/>
+          </a:solidFill>
+          <a:ln>
+            <a:noFill/>
+          </a:ln>
+          <a:effectLst/>
+        </p:spPr>
+        <p:style>
+          <a:lnRef idx="1">
+            <a:schemeClr val="accent1"/>
+          </a:lnRef>
+          <a:fillRef idx="3">
+            <a:schemeClr val="accent1"/>
+          </a:fillRef>
+          <a:effectRef idx="2">
+            <a:schemeClr val="accent1"/>
+          </a:effectRef>
+          <a:fontRef idx="minor">
+            <a:schemeClr val="lt1"/>
+          </a:fontRef>
+        </p:style>
+        <p:txBody>
+          <a:bodyPr rtlCol="0" anchor="ctr"/>
+          <a:lstStyle/>
+          <a:p>
+            <a:pPr algn="ctr"/>
+          </a:p>
+        </p:txBody>
+      </p:sp>
+      <p:sp>
+        <p:nvSpPr>
+          <p:cNvPr id="100066" name="用户-g2-t-c"/>
+          <p:cNvSpPr txBox="1"/>
+          <p:nvPr/>
+        </p:nvSpPr>
+        <p:spPr>
+          <a:xfrm>
+            <a:off x="658368" y="4809744"/>
+            <a:ext cx="1828800" cy="146304"/>
+          </a:xfrm>
+          <a:prstGeom prst="rect">
+            <a:avLst/>
+          </a:prstGeom>
+          <a:noFill/>
+        </p:spPr>
+        <p:txBody>
+          <a:bodyPr wrap="square" lIns="0" rIns="0" tIns="0" bIns="0">
+            <a:noAutofit/>
+          </a:bodyPr>
+          <a:lstStyle/>
+          <a:p>
+            <a:pPr>
+              <a:lnSpc>
+                <a:spcPct val="100000"/>
+              </a:lnSpc>
+            </a:pPr>
+            <a:r>
+              <a:rPr sz="1000" b="1" lang="zh-CN">
+                <a:solidFill>
+                  <a:srgbClr val="1F4E79"/>
+                </a:solidFill>
+                <a:latin typeface="微软雅黑"/>
+                <a:ea typeface="微软雅黑"/>
+              </a:rPr>
+              <a:t>借贷特征</a:t>
+            </a:r>
+          </a:p>
+        </p:txBody>
+      </p:sp>
+      <p:sp>
+        <p:nvSpPr>
+          <p:cNvPr id="100067" name="用户-g2-1-c"/>
+          <p:cNvSpPr txBox="1"/>
+          <p:nvPr/>
+        </p:nvSpPr>
+        <p:spPr>
+          <a:xfrm>
+            <a:off x="722376" y="5029200"/>
+            <a:ext cx="1197864" cy="274320"/>
+          </a:xfrm>
+          <a:prstGeom prst="rect">
+            <a:avLst/>
+          </a:prstGeom>
+          <a:noFill/>
+        </p:spPr>
+        <p:txBody>
+          <a:bodyPr wrap="square" lIns="0" rIns="0" tIns="0" bIns="0">
+            <a:noAutofit/>
+          </a:bodyPr>
+          <a:lstStyle/>
+          <a:p>
+            <a:pPr>
+              <a:lnSpc>
+                <a:spcPct val="100000"/>
+              </a:lnSpc>
+            </a:pPr>
+            <a:r>
+              <a:rPr sz="1000" b="1" lang="zh-CN">
+                <a:solidFill>
+                  <a:srgbClr val="D6A000"/>
+                </a:solidFill>
+                <a:latin typeface="微软雅黑"/>
+                <a:ea typeface="微软雅黑"/>
+              </a:rPr>
+              <a:t>✓</a:t>
+            </a:r>
+            <a:r>
+              <a:rPr sz="900" b="1" lang="zh-CN">
+                <a:solidFill>
+                  <a:srgbClr val="1F4E79"/>
+                </a:solidFill>
+                <a:latin typeface="微软雅黑"/>
+                <a:ea typeface="微软雅黑"/>
+              </a:rPr>
+              <a:t> 多头借贷</a:t>
+            </a:r>
+          </a:p>
+        </p:txBody>
+      </p:sp>
+      <p:sp>
+        <p:nvSpPr>
+          <p:cNvPr id="100068" name="用户-g2-2-c"/>
+          <p:cNvSpPr txBox="1"/>
+          <p:nvPr/>
+        </p:nvSpPr>
+        <p:spPr>
+          <a:xfrm>
+            <a:off x="1993392" y="5029200"/>
+            <a:ext cx="1197864" cy="274320"/>
+          </a:xfrm>
+          <a:prstGeom prst="rect">
+            <a:avLst/>
+          </a:prstGeom>
+          <a:noFill/>
+        </p:spPr>
+        <p:txBody>
+          <a:bodyPr wrap="square" lIns="0" rIns="0" tIns="0" bIns="0">
+            <a:noAutofit/>
+          </a:bodyPr>
+          <a:lstStyle/>
+          <a:p>
+            <a:pPr>
+              <a:lnSpc>
+                <a:spcPct val="100000"/>
+              </a:lnSpc>
+            </a:pPr>
+            <a:r>
+              <a:rPr sz="1000" b="1" lang="zh-CN">
+                <a:solidFill>
+                  <a:srgbClr val="D6A000"/>
+                </a:solidFill>
+                <a:latin typeface="微软雅黑"/>
+                <a:ea typeface="微软雅黑"/>
+              </a:rPr>
+              <a:t>✓</a:t>
+            </a:r>
+            <a:r>
+              <a:rPr sz="900" b="1" lang="zh-CN">
+                <a:solidFill>
+                  <a:srgbClr val="1F4E79"/>
+                </a:solidFill>
+                <a:latin typeface="微软雅黑"/>
+                <a:ea typeface="微软雅黑"/>
+              </a:rPr>
+              <a:t> 持续还款</a:t>
+            </a:r>
+          </a:p>
+        </p:txBody>
+      </p:sp>
+      <p:sp>
+        <p:nvSpPr>
+          <p:cNvPr id="100069" name="用户-g2-3-c"/>
+          <p:cNvSpPr txBox="1"/>
+          <p:nvPr/>
+        </p:nvSpPr>
+        <p:spPr>
+          <a:xfrm>
+            <a:off x="3264408" y="5029200"/>
+            <a:ext cx="1197864" cy="274320"/>
+          </a:xfrm>
+          <a:prstGeom prst="rect">
+            <a:avLst/>
+          </a:prstGeom>
+          <a:noFill/>
+        </p:spPr>
+        <p:txBody>
+          <a:bodyPr wrap="square" lIns="0" rIns="0" tIns="0" bIns="0">
+            <a:noAutofit/>
+          </a:bodyPr>
+          <a:lstStyle/>
+          <a:p>
+            <a:pPr>
+              <a:lnSpc>
+                <a:spcPct val="100000"/>
+              </a:lnSpc>
+            </a:pPr>
+            <a:r>
+              <a:rPr sz="1000" b="1" lang="zh-CN">
+                <a:solidFill>
+                  <a:srgbClr val="D6A000"/>
+                </a:solidFill>
+                <a:latin typeface="微软雅黑"/>
+                <a:ea typeface="微软雅黑"/>
+              </a:rPr>
+              <a:t>✓</a:t>
+            </a:r>
+            <a:r>
+              <a:rPr sz="900" b="1" lang="zh-CN">
+                <a:solidFill>
+                  <a:srgbClr val="1F4E79"/>
+                </a:solidFill>
+                <a:latin typeface="微软雅黑"/>
+                <a:ea typeface="微软雅黑"/>
+              </a:rPr>
+              <a:t> SACC 贷款</a:t>
+            </a:r>
+          </a:p>
+        </p:txBody>
+      </p:sp>
+      <p:sp>
+        <p:nvSpPr>
+          <p:cNvPr id="100070" name="用户-g2-4-c"/>
+          <p:cNvSpPr txBox="1"/>
+          <p:nvPr/>
+        </p:nvSpPr>
+        <p:spPr>
+          <a:xfrm>
+            <a:off x="4535424" y="5029200"/>
+            <a:ext cx="1197864" cy="274320"/>
+          </a:xfrm>
+          <a:prstGeom prst="rect">
+            <a:avLst/>
+          </a:prstGeom>
+          <a:noFill/>
+        </p:spPr>
+        <p:txBody>
+          <a:bodyPr wrap="square" lIns="0" rIns="0" tIns="0" bIns="0">
+            <a:noAutofit/>
+          </a:bodyPr>
+          <a:lstStyle/>
+          <a:p>
+            <a:pPr>
+              <a:lnSpc>
+                <a:spcPct val="100000"/>
+              </a:lnSpc>
+            </a:pPr>
+            <a:r>
+              <a:rPr sz="1000" b="1" lang="zh-CN">
+                <a:solidFill>
+                  <a:srgbClr val="D6A000"/>
+                </a:solidFill>
+                <a:latin typeface="微软雅黑"/>
+                <a:ea typeface="微软雅黑"/>
+              </a:rPr>
+              <a:t>✓</a:t>
+            </a:r>
+            <a:r>
+              <a:rPr sz="900" b="1" lang="zh-CN">
+                <a:solidFill>
+                  <a:srgbClr val="1F4E79"/>
+                </a:solidFill>
+                <a:latin typeface="微软雅黑"/>
+                <a:ea typeface="微软雅黑"/>
+              </a:rPr>
+              <a:t> 90 天还款 9 次</a:t>
+            </a:r>
+          </a:p>
+        </p:txBody>
+      </p:sp>
+      <p:sp>
+        <p:nvSpPr>
+          <p:cNvPr id="100071" name="用户-g3-bar-c"/>
+          <p:cNvSpPr/>
+          <p:nvPr/>
+        </p:nvSpPr>
+        <p:spPr>
+          <a:xfrm>
+            <a:off x="566928" y="5445252"/>
+            <a:ext cx="45720" cy="128016"/>
+          </a:xfrm>
+          <a:prstGeom prst="rect">
+            <a:avLst/>
+          </a:prstGeom>
+          <a:solidFill>
+            <a:srgbClr val="D6A000"/>
+          </a:solidFill>
+          <a:ln>
+            <a:noFill/>
+          </a:ln>
+          <a:effectLst/>
+        </p:spPr>
+        <p:style>
+          <a:lnRef idx="1">
+            <a:schemeClr val="accent1"/>
+          </a:lnRef>
+          <a:fillRef idx="3">
+            <a:schemeClr val="accent1"/>
+          </a:fillRef>
+          <a:effectRef idx="2">
+            <a:schemeClr val="accent1"/>
+          </a:effectRef>
+          <a:fontRef idx="minor">
+            <a:schemeClr val="lt1"/>
+          </a:fontRef>
+        </p:style>
+        <p:txBody>
+          <a:bodyPr rtlCol="0" anchor="ctr"/>
+          <a:lstStyle/>
+          <a:p>
+            <a:pPr algn="ctr"/>
+          </a:p>
+        </p:txBody>
+      </p:sp>
+      <p:sp>
+        <p:nvSpPr>
+          <p:cNvPr id="100072" name="用户-g3-t-c"/>
+          <p:cNvSpPr txBox="1"/>
+          <p:nvPr/>
+        </p:nvSpPr>
+        <p:spPr>
+          <a:xfrm>
+            <a:off x="658368" y="5431536"/>
+            <a:ext cx="1828800" cy="146304"/>
+          </a:xfrm>
+          <a:prstGeom prst="rect">
+            <a:avLst/>
+          </a:prstGeom>
+          <a:noFill/>
+        </p:spPr>
+        <p:txBody>
+          <a:bodyPr wrap="square" lIns="0" rIns="0" tIns="0" bIns="0">
+            <a:noAutofit/>
+          </a:bodyPr>
+          <a:lstStyle/>
+          <a:p>
+            <a:pPr>
+              <a:lnSpc>
+                <a:spcPct val="100000"/>
+              </a:lnSpc>
+            </a:pPr>
+            <a:r>
+              <a:rPr sz="1000" b="1" lang="zh-CN">
+                <a:solidFill>
+                  <a:srgbClr val="1F4E79"/>
+                </a:solidFill>
+                <a:latin typeface="微软雅黑"/>
+                <a:ea typeface="微软雅黑"/>
+              </a:rPr>
+              <a:t>还款表现</a:t>
+            </a:r>
+          </a:p>
+        </p:txBody>
+      </p:sp>
+      <p:sp>
+        <p:nvSpPr>
+          <p:cNvPr id="100077" name="Fa-head-c"/>
+          <p:cNvSpPr/>
+          <p:nvPr/>
+        </p:nvSpPr>
+        <p:spPr>
+          <a:xfrm>
+            <a:off x="6373368" y="3840480"/>
+            <a:ext cx="5010912" cy="237744"/>
+          </a:xfrm>
+          <a:prstGeom prst="roundRect">
+            <a:avLst>
+              <a:gd name="adj" fmla="val 10000"/>
+            </a:avLst>
+          </a:prstGeom>
+          <a:solidFill>
+            <a:srgbClr val="FAF3E0"/>
+          </a:solidFill>
+          <a:ln w="12700">
+            <a:solidFill>
+              <a:srgbClr val="D6A000"/>
+            </a:solidFill>
+          </a:ln>
+          <a:effectLst/>
+        </p:spPr>
+        <p:style>
+          <a:lnRef idx="1">
+            <a:schemeClr val="accent1"/>
+          </a:lnRef>
+          <a:fillRef idx="3">
+            <a:schemeClr val="accent1"/>
+          </a:fillRef>
+          <a:effectRef idx="2">
+            <a:schemeClr val="accent1"/>
+          </a:effectRef>
+          <a:fontRef idx="minor">
+            <a:schemeClr val="lt1"/>
+          </a:fontRef>
+        </p:style>
+        <p:txBody>
+          <a:bodyPr rtlCol="0" anchor="ctr"/>
+          <a:lstStyle/>
+          <a:p>
+            <a:pPr algn="ctr"/>
+          </a:p>
+        </p:txBody>
+      </p:sp>
+      <p:sp>
+        <p:nvSpPr>
+          <p:cNvPr id="100078" name="Fa-h1-c"/>
+          <p:cNvSpPr txBox="1"/>
+          <p:nvPr/>
+        </p:nvSpPr>
+        <p:spPr>
+          <a:xfrm>
+            <a:off x="6464807" y="3867912"/>
+            <a:ext cx="1417320" cy="182880"/>
+          </a:xfrm>
+          <a:prstGeom prst="rect">
+            <a:avLst/>
+          </a:prstGeom>
+          <a:noFill/>
+        </p:spPr>
+        <p:txBody>
+          <a:bodyPr wrap="square" lIns="0" rIns="0" tIns="0" bIns="0">
+            <a:noAutofit/>
+          </a:bodyPr>
+          <a:lstStyle/>
+          <a:p>
+            <a:pPr>
+              <a:lnSpc>
+                <a:spcPct val="100000"/>
+              </a:lnSpc>
+            </a:pPr>
+            <a:r>
+              <a:rPr sz="1000" b="1" lang="zh-CN">
+                <a:solidFill>
+                  <a:srgbClr val="1F4E79"/>
+                </a:solidFill>
+                <a:latin typeface="微软雅黑"/>
+                <a:ea typeface="微软雅黑"/>
+              </a:rPr>
+              <a:t>Fair Go Finance</a:t>
+            </a:r>
+          </a:p>
+        </p:txBody>
+      </p:sp>
+      <p:sp>
+        <p:nvSpPr>
+          <p:cNvPr id="100079" name="Fa-h2-c"/>
+          <p:cNvSpPr txBox="1"/>
+          <p:nvPr/>
+        </p:nvSpPr>
+        <p:spPr>
+          <a:xfrm>
+            <a:off x="7973567" y="3886200"/>
+            <a:ext cx="640080" cy="164592"/>
+          </a:xfrm>
+          <a:prstGeom prst="rect">
+            <a:avLst/>
+          </a:prstGeom>
+          <a:noFill/>
+        </p:spPr>
+        <p:txBody>
+          <a:bodyPr wrap="square" lIns="0" rIns="0" tIns="0" bIns="0">
+            <a:noAutofit/>
+          </a:bodyPr>
+          <a:lstStyle/>
+          <a:p>
+            <a:pPr>
+              <a:lnSpc>
+                <a:spcPct val="100000"/>
+              </a:lnSpc>
+            </a:pPr>
+            <a:r>
+              <a:rPr sz="900" b="0" lang="zh-CN">
+                <a:solidFill>
+                  <a:srgbClr val="3D3C3A"/>
+                </a:solidFill>
+                <a:latin typeface="微软雅黑"/>
+                <a:ea typeface="微软雅黑"/>
+              </a:rPr>
+              <a:t>SACC</a:t>
+            </a:r>
+          </a:p>
+        </p:txBody>
+      </p:sp>
+      <p:sp>
+        <p:nvSpPr>
+          <p:cNvPr id="100080" name="Fa-h3-c"/>
+          <p:cNvSpPr txBox="1"/>
+          <p:nvPr/>
+        </p:nvSpPr>
+        <p:spPr>
+          <a:xfrm>
+            <a:off x="8750808" y="3886200"/>
+            <a:ext cx="548640" cy="164592"/>
+          </a:xfrm>
+          <a:prstGeom prst="rect">
+            <a:avLst/>
+          </a:prstGeom>
+          <a:noFill/>
+        </p:spPr>
+        <p:txBody>
+          <a:bodyPr wrap="square" lIns="0" rIns="0" tIns="0" bIns="0">
+            <a:noAutofit/>
+          </a:bodyPr>
+          <a:lstStyle/>
+          <a:p>
+            <a:pPr>
+              <a:lnSpc>
+                <a:spcPct val="100000"/>
+              </a:lnSpc>
+            </a:pPr>
+            <a:r>
+              <a:rPr sz="900" b="0" lang="zh-CN">
+                <a:solidFill>
+                  <a:srgbClr val="3D3C3A"/>
+                </a:solidFill>
+                <a:latin typeface="微软雅黑"/>
+                <a:ea typeface="微软雅黑"/>
+              </a:rPr>
+              <a:t>在贷</a:t>
+            </a:r>
+          </a:p>
+        </p:txBody>
+      </p:sp>
+      <p:sp>
+        <p:nvSpPr>
+          <p:cNvPr id="100081" name="Fa-h4-c"/>
+          <p:cNvSpPr txBox="1"/>
+          <p:nvPr/>
+        </p:nvSpPr>
+        <p:spPr>
+          <a:xfrm>
+            <a:off x="9619488" y="3867912"/>
+            <a:ext cx="1463040" cy="182880"/>
+          </a:xfrm>
+          <a:prstGeom prst="rect">
+            <a:avLst/>
+          </a:prstGeom>
+          <a:noFill/>
+        </p:spPr>
+        <p:txBody>
+          <a:bodyPr wrap="square" lIns="0" rIns="0" tIns="0" bIns="0">
+            <a:noAutofit/>
+          </a:bodyPr>
+          <a:lstStyle/>
+          <a:p>
+            <a:pPr algn="r">
+              <a:lnSpc>
+                <a:spcPct val="100000"/>
+              </a:lnSpc>
+            </a:pPr>
+            <a:r>
+              <a:rPr sz="1100" b="1" lang="zh-CN">
+                <a:solidFill>
+                  <a:srgbClr val="D6A000"/>
+                </a:solidFill>
+                <a:latin typeface="微软雅黑"/>
+                <a:ea typeface="微软雅黑"/>
+              </a:rPr>
+              <a:t>APR 42%</a:t>
+            </a:r>
+          </a:p>
+        </p:txBody>
+      </p:sp>
+      <p:sp>
+        <p:nvSpPr>
+          <p:cNvPr id="100082" name="Fa-life1-lab-c"/>
+          <p:cNvSpPr txBox="1"/>
+          <p:nvPr/>
+        </p:nvSpPr>
+        <p:spPr>
+          <a:xfrm>
+            <a:off x="6373368" y="4206240"/>
+            <a:ext cx="1463040" cy="146304"/>
+          </a:xfrm>
+          <a:prstGeom prst="rect">
+            <a:avLst/>
+          </a:prstGeom>
+          <a:noFill/>
+        </p:spPr>
+        <p:txBody>
+          <a:bodyPr wrap="square" lIns="0" rIns="0" tIns="0" bIns="0">
+            <a:noAutofit/>
+          </a:bodyPr>
+          <a:lstStyle/>
+          <a:p>
+            <a:pPr>
+              <a:lnSpc>
+                <a:spcPct val="100000"/>
+              </a:lnSpc>
+            </a:pPr>
+            <a:r>
+              <a:rPr sz="800" b="0" lang="zh-CN">
+                <a:solidFill>
+                  <a:srgbClr val="606060"/>
+                </a:solidFill>
+                <a:latin typeface="微软雅黑"/>
+                <a:ea typeface="微软雅黑"/>
+              </a:rPr>
+              <a:t>借款</a:t>
+            </a:r>
+          </a:p>
+        </p:txBody>
+      </p:sp>
+      <p:sp>
+        <p:nvSpPr>
+          <p:cNvPr id="100083" name="Fa-life1-c"/>
+          <p:cNvSpPr txBox="1"/>
+          <p:nvPr/>
+        </p:nvSpPr>
+        <p:spPr>
+          <a:xfrm>
+            <a:off x="6373368" y="4352544"/>
+            <a:ext cx="1463040" cy="219456"/>
+          </a:xfrm>
+          <a:prstGeom prst="rect">
+            <a:avLst/>
+          </a:prstGeom>
+          <a:noFill/>
+        </p:spPr>
+        <p:txBody>
+          <a:bodyPr wrap="square" lIns="0" rIns="0" tIns="0" bIns="0">
+            <a:noAutofit/>
+          </a:bodyPr>
+          <a:lstStyle/>
+          <a:p>
+            <a:pPr>
+              <a:lnSpc>
+                <a:spcPct val="100000"/>
+              </a:lnSpc>
+            </a:pPr>
+            <a:r>
+              <a:rPr sz="1400" b="1" lang="zh-CN">
+                <a:solidFill>
+                  <a:srgbClr val="1F4E79"/>
+                </a:solidFill>
+                <a:latin typeface="微软雅黑"/>
+                <a:ea typeface="微软雅黑"/>
+              </a:rPr>
+              <a:t>A$1,500</a:t>
+            </a:r>
+          </a:p>
+        </p:txBody>
+      </p:sp>
+      <p:sp>
+        <p:nvSpPr>
+          <p:cNvPr id="100084" name="Fa-life2-lab-c"/>
+          <p:cNvSpPr txBox="1"/>
+          <p:nvPr/>
+        </p:nvSpPr>
+        <p:spPr>
+          <a:xfrm>
+            <a:off x="8046720" y="4206240"/>
+            <a:ext cx="1463040" cy="146304"/>
+          </a:xfrm>
+          <a:prstGeom prst="rect">
+            <a:avLst/>
+          </a:prstGeom>
+          <a:noFill/>
+        </p:spPr>
+        <p:txBody>
+          <a:bodyPr wrap="square" lIns="0" rIns="0" tIns="0" bIns="0">
+            <a:noAutofit/>
+          </a:bodyPr>
+          <a:lstStyle/>
+          <a:p>
+            <a:pPr>
+              <a:lnSpc>
+                <a:spcPct val="100000"/>
+              </a:lnSpc>
+            </a:pPr>
+            <a:r>
+              <a:rPr sz="800" b="0" lang="zh-CN">
+                <a:solidFill>
+                  <a:srgbClr val="606060"/>
+                </a:solidFill>
+                <a:latin typeface="微软雅黑"/>
+                <a:ea typeface="微软雅黑"/>
+              </a:rPr>
+              <a:t>已还</a:t>
+            </a:r>
+          </a:p>
+        </p:txBody>
+      </p:sp>
+      <p:sp>
+        <p:nvSpPr>
+          <p:cNvPr id="100085" name="Fa-life2-c"/>
+          <p:cNvSpPr txBox="1"/>
+          <p:nvPr/>
+        </p:nvSpPr>
+        <p:spPr>
+          <a:xfrm>
+            <a:off x="8046720" y="4352544"/>
+            <a:ext cx="1463040" cy="219456"/>
+          </a:xfrm>
+          <a:prstGeom prst="rect">
+            <a:avLst/>
+          </a:prstGeom>
+          <a:noFill/>
+        </p:spPr>
+        <p:txBody>
+          <a:bodyPr wrap="square" lIns="0" rIns="0" tIns="0" bIns="0">
+            <a:noAutofit/>
+          </a:bodyPr>
+          <a:lstStyle/>
+          <a:p>
+            <a:pPr>
+              <a:lnSpc>
+                <a:spcPct val="100000"/>
+              </a:lnSpc>
+            </a:pPr>
+            <a:r>
+              <a:rPr sz="1400" b="1" lang="zh-CN">
+                <a:solidFill>
+                  <a:srgbClr val="1F4E79"/>
+                </a:solidFill>
+                <a:latin typeface="微软雅黑"/>
+                <a:ea typeface="微软雅黑"/>
+              </a:rPr>
+              <a:t>A$936</a:t>
+            </a:r>
+          </a:p>
+        </p:txBody>
+      </p:sp>
+      <p:sp>
+        <p:nvSpPr>
+          <p:cNvPr id="100086" name="Fa-life3-lab-c"/>
+          <p:cNvSpPr txBox="1"/>
+          <p:nvPr/>
+        </p:nvSpPr>
+        <p:spPr>
+          <a:xfrm>
+            <a:off x="9720072" y="4206240"/>
+            <a:ext cx="1463040" cy="146304"/>
+          </a:xfrm>
+          <a:prstGeom prst="rect">
+            <a:avLst/>
+          </a:prstGeom>
+          <a:noFill/>
+        </p:spPr>
+        <p:txBody>
+          <a:bodyPr wrap="square" lIns="0" rIns="0" tIns="0" bIns="0">
+            <a:noAutofit/>
+          </a:bodyPr>
+          <a:lstStyle/>
+          <a:p>
+            <a:pPr>
+              <a:lnSpc>
+                <a:spcPct val="100000"/>
+              </a:lnSpc>
+            </a:pPr>
+            <a:r>
+              <a:rPr sz="800" b="0" lang="zh-CN">
+                <a:solidFill>
+                  <a:srgbClr val="606060"/>
+                </a:solidFill>
+                <a:latin typeface="微软雅黑"/>
+                <a:ea typeface="微软雅黑"/>
+              </a:rPr>
+              <a:t>待还</a:t>
+            </a:r>
+          </a:p>
+        </p:txBody>
+      </p:sp>
+      <p:sp>
+        <p:nvSpPr>
+          <p:cNvPr id="100087" name="Fa-life3-c"/>
+          <p:cNvSpPr txBox="1"/>
+          <p:nvPr/>
+        </p:nvSpPr>
+        <p:spPr>
+          <a:xfrm>
+            <a:off x="9720072" y="4352544"/>
+            <a:ext cx="1463040" cy="219456"/>
+          </a:xfrm>
+          <a:prstGeom prst="rect">
+            <a:avLst/>
+          </a:prstGeom>
+          <a:noFill/>
+        </p:spPr>
+        <p:txBody>
+          <a:bodyPr wrap="square" lIns="0" rIns="0" tIns="0" bIns="0">
+            <a:noAutofit/>
+          </a:bodyPr>
+          <a:lstStyle/>
+          <a:p>
+            <a:pPr>
+              <a:lnSpc>
+                <a:spcPct val="100000"/>
+              </a:lnSpc>
+            </a:pPr>
+            <a:r>
+              <a:rPr sz="1400" b="1" lang="zh-CN">
+                <a:solidFill>
+                  <a:srgbClr val="1F4E79"/>
+                </a:solidFill>
+                <a:latin typeface="微软雅黑"/>
+                <a:ea typeface="微软雅黑"/>
+              </a:rPr>
+              <a:t>A$564</a:t>
+            </a:r>
+          </a:p>
+        </p:txBody>
+      </p:sp>
+      <p:sp>
+        <p:nvSpPr>
+          <p:cNvPr id="100088" name="Fa-arr1-c"/>
+          <p:cNvSpPr txBox="1"/>
+          <p:nvPr/>
+        </p:nvSpPr>
+        <p:spPr>
+          <a:xfrm>
+            <a:off x="7836408" y="4315968"/>
+            <a:ext cx="182880" cy="182880"/>
+          </a:xfrm>
+          <a:prstGeom prst="rect">
+            <a:avLst/>
+          </a:prstGeom>
+          <a:noFill/>
+        </p:spPr>
+        <p:txBody>
+          <a:bodyPr wrap="square" lIns="0" rIns="0" tIns="0" bIns="0">
+            <a:noAutofit/>
+          </a:bodyPr>
+          <a:lstStyle/>
+          <a:p>
+            <a:pPr>
+              <a:lnSpc>
+                <a:spcPct val="100000"/>
+              </a:lnSpc>
+            </a:pPr>
+            <a:r>
+              <a:rPr sz="1200" b="1" lang="zh-CN">
+                <a:solidFill>
+                  <a:srgbClr val="606060"/>
+                </a:solidFill>
+                <a:latin typeface="微软雅黑"/>
+                <a:ea typeface="微软雅黑"/>
+              </a:rPr>
+              <a:t>→</a:t>
+            </a:r>
+          </a:p>
+        </p:txBody>
+      </p:sp>
+      <p:sp>
+        <p:nvSpPr>
+          <p:cNvPr id="100089" name="Fa-arr2-c"/>
+          <p:cNvSpPr txBox="1"/>
+          <p:nvPr/>
+        </p:nvSpPr>
+        <p:spPr>
+          <a:xfrm>
+            <a:off x="9509760" y="4315968"/>
+            <a:ext cx="182880" cy="182880"/>
+          </a:xfrm>
+          <a:prstGeom prst="rect">
+            <a:avLst/>
+          </a:prstGeom>
+          <a:noFill/>
+        </p:spPr>
+        <p:txBody>
+          <a:bodyPr wrap="square" lIns="0" rIns="0" tIns="0" bIns="0">
+            <a:noAutofit/>
+          </a:bodyPr>
+          <a:lstStyle/>
+          <a:p>
+            <a:pPr>
+              <a:lnSpc>
+                <a:spcPct val="100000"/>
+              </a:lnSpc>
+            </a:pPr>
+            <a:r>
+              <a:rPr sz="1200" b="1" lang="zh-CN">
+                <a:solidFill>
+                  <a:srgbClr val="606060"/>
+                </a:solidFill>
+                <a:latin typeface="微软雅黑"/>
+                <a:ea typeface="微软雅黑"/>
+              </a:rPr>
+              <a:t>→</a:t>
+            </a:r>
+          </a:p>
+        </p:txBody>
+      </p:sp>
+      <p:sp>
+        <p:nvSpPr>
+          <p:cNvPr id="100090" name="Fa-prog-lab-c"/>
+          <p:cNvSpPr txBox="1"/>
+          <p:nvPr/>
+        </p:nvSpPr>
+        <p:spPr>
+          <a:xfrm>
+            <a:off x="6373368" y="4663440"/>
+            <a:ext cx="914400" cy="164592"/>
+          </a:xfrm>
+          <a:prstGeom prst="rect">
+            <a:avLst/>
+          </a:prstGeom>
+          <a:noFill/>
+        </p:spPr>
+        <p:txBody>
+          <a:bodyPr wrap="square" lIns="0" rIns="0" tIns="0" bIns="0">
+            <a:noAutofit/>
+          </a:bodyPr>
+          <a:lstStyle/>
+          <a:p>
+            <a:pPr>
+              <a:lnSpc>
+                <a:spcPct val="100000"/>
+              </a:lnSpc>
+            </a:pPr>
+            <a:r>
+              <a:rPr sz="800" b="0" lang="zh-CN">
+                <a:solidFill>
+                  <a:srgbClr val="606060"/>
+                </a:solidFill>
+                <a:latin typeface="微软雅黑"/>
+                <a:ea typeface="微软雅黑"/>
+              </a:rPr>
+              <a:t>还款进度</a:t>
+            </a:r>
+          </a:p>
+        </p:txBody>
+      </p:sp>
+      <p:sp>
+        <p:nvSpPr>
+          <p:cNvPr id="100091" name="Fa-prog-pct-c"/>
+          <p:cNvSpPr txBox="1"/>
+          <p:nvPr/>
+        </p:nvSpPr>
+        <p:spPr>
+          <a:xfrm>
+            <a:off x="10808208" y="4645152"/>
+            <a:ext cx="576072" cy="182880"/>
+          </a:xfrm>
+          <a:prstGeom prst="rect">
+            <a:avLst/>
+          </a:prstGeom>
+          <a:noFill/>
+        </p:spPr>
+        <p:txBody>
+          <a:bodyPr wrap="square" lIns="0" rIns="0" tIns="0" bIns="0">
+            <a:noAutofit/>
+          </a:bodyPr>
+          <a:lstStyle/>
+          <a:p>
+            <a:pPr algn="r">
+              <a:lnSpc>
+                <a:spcPct val="100000"/>
+              </a:lnSpc>
+            </a:pPr>
+            <a:r>
+              <a:rPr sz="1200" b="1" lang="zh-CN">
+                <a:solidFill>
+                  <a:srgbClr val="D6A000"/>
+                </a:solidFill>
+                <a:latin typeface="微软雅黑"/>
+                <a:ea typeface="微软雅黑"/>
+              </a:rPr>
+              <a:t>62%</a:t>
+            </a:r>
+          </a:p>
+        </p:txBody>
+      </p:sp>
+      <p:sp>
+        <p:nvSpPr>
+          <p:cNvPr id="100092" name="Fa-prog-bar-c"/>
+          <p:cNvSpPr/>
+          <p:nvPr/>
+        </p:nvSpPr>
+        <p:spPr>
+          <a:xfrm>
+            <a:off x="6373368" y="4846320"/>
+            <a:ext cx="5010912" cy="128016"/>
+          </a:xfrm>
+          <a:prstGeom prst="rect">
+            <a:avLst/>
+          </a:prstGeom>
+          <a:solidFill>
+            <a:srgbClr val="E0E0E0"/>
+          </a:solidFill>
+          <a:ln>
+            <a:noFill/>
+          </a:ln>
+          <a:effectLst/>
+        </p:spPr>
+        <p:style>
+          <a:lnRef idx="1">
+            <a:schemeClr val="accent1"/>
+          </a:lnRef>
+          <a:fillRef idx="3">
+            <a:schemeClr val="accent1"/>
+          </a:fillRef>
+          <a:effectRef idx="2">
+            <a:schemeClr val="accent1"/>
+          </a:effectRef>
+          <a:fontRef idx="minor">
+            <a:schemeClr val="lt1"/>
+          </a:fontRef>
+        </p:style>
+        <p:txBody>
+          <a:bodyPr rtlCol="0" anchor="ctr"/>
+          <a:lstStyle/>
+          <a:p>
+            <a:pPr algn="ctr"/>
+          </a:p>
+        </p:txBody>
+      </p:sp>
+      <p:sp>
+        <p:nvSpPr>
+          <p:cNvPr id="100093" name="Fa-prog-fill-c"/>
+          <p:cNvSpPr/>
+          <p:nvPr/>
+        </p:nvSpPr>
+        <p:spPr>
+          <a:xfrm>
+            <a:off x="6373368" y="4846320"/>
+            <a:ext cx="3126809" cy="128016"/>
+          </a:xfrm>
+          <a:prstGeom prst="rect">
+            <a:avLst/>
+          </a:prstGeom>
+          <a:solidFill>
+            <a:srgbClr val="D6A000"/>
+          </a:solidFill>
+          <a:ln>
+            <a:noFill/>
+          </a:ln>
+          <a:effectLst/>
+        </p:spPr>
+        <p:style>
+          <a:lnRef idx="1">
+            <a:schemeClr val="accent1"/>
+          </a:lnRef>
+          <a:fillRef idx="3">
+            <a:schemeClr val="accent1"/>
+          </a:fillRef>
+          <a:effectRef idx="2">
+            <a:schemeClr val="accent1"/>
+          </a:effectRef>
+          <a:fontRef idx="minor">
+            <a:schemeClr val="lt1"/>
+          </a:fontRef>
+        </p:style>
+        <p:txBody>
+          <a:bodyPr rtlCol="0" anchor="ctr"/>
+          <a:lstStyle/>
+          <a:p>
+            <a:pPr algn="ctr"/>
+          </a:p>
+        </p:txBody>
+      </p:sp>
+      <p:sp>
+        <p:nvSpPr>
+          <p:cNvPr id="100094" name="Fa-g1-t-c"/>
+          <p:cNvSpPr txBox="1"/>
+          <p:nvPr/>
+        </p:nvSpPr>
+        <p:spPr>
+          <a:xfrm>
+            <a:off x="6373368" y="5084064"/>
+            <a:ext cx="1609344" cy="146304"/>
+          </a:xfrm>
+          <a:prstGeom prst="rect">
+            <a:avLst/>
+          </a:prstGeom>
+          <a:noFill/>
+        </p:spPr>
+        <p:txBody>
+          <a:bodyPr wrap="square" lIns="0" rIns="0" tIns="0" bIns="0">
+            <a:noAutofit/>
+          </a:bodyPr>
+          <a:lstStyle/>
+          <a:p>
+            <a:pPr>
+              <a:lnSpc>
+                <a:spcPct val="100000"/>
+              </a:lnSpc>
+            </a:pPr>
+            <a:r>
+              <a:rPr sz="1000" b="1" lang="zh-CN">
+                <a:solidFill>
+                  <a:srgbClr val="1F4E79"/>
+                </a:solidFill>
+                <a:latin typeface="微软雅黑"/>
+                <a:ea typeface="微软雅黑"/>
+              </a:rPr>
+              <a:t>还款计划</a:t>
+            </a:r>
+          </a:p>
+        </p:txBody>
+      </p:sp>
+      <p:sp>
+        <p:nvSpPr>
+          <p:cNvPr id="100095" name="Fa-g1-1-c"/>
+          <p:cNvSpPr txBox="1"/>
+          <p:nvPr/>
+        </p:nvSpPr>
+        <p:spPr>
+          <a:xfrm>
+            <a:off x="6373368" y="5230368"/>
+            <a:ext cx="1609344" cy="173736"/>
+          </a:xfrm>
+          <a:prstGeom prst="rect">
+            <a:avLst/>
+          </a:prstGeom>
+          <a:noFill/>
+        </p:spPr>
+        <p:txBody>
+          <a:bodyPr wrap="square" lIns="0" rIns="0" tIns="0" bIns="0">
+            <a:noAutofit/>
+          </a:bodyPr>
+          <a:lstStyle/>
+          <a:p>
+            <a:pPr>
+              <a:lnSpc>
+                <a:spcPct val="100000"/>
+              </a:lnSpc>
+            </a:pPr>
+            <a:r>
+              <a:rPr sz="800" b="0" lang="zh-CN">
+                <a:solidFill>
+                  <a:srgbClr val="1F4E79"/>
+                </a:solidFill>
+                <a:latin typeface="微软雅黑"/>
+                <a:ea typeface="微软雅黑"/>
+              </a:rPr>
+              <a:t>月还款</a:t>
+            </a:r>
+            <a:r>
+              <a:rPr sz="800" b="0" lang="zh-CN">
+                <a:solidFill>
+                  <a:srgbClr val="1F4E79"/>
+                </a:solidFill>
+                <a:latin typeface="微软雅黑"/>
+                <a:ea typeface="微软雅黑"/>
+              </a:rPr>
+              <a:t> </a:t>
+            </a:r>
+            <a:r>
+              <a:rPr sz="900" b="0" lang="zh-CN">
+                <a:solidFill>
+                  <a:srgbClr val="3D3C3A"/>
+                </a:solidFill>
+                <a:latin typeface="微软雅黑"/>
+                <a:ea typeface="微软雅黑"/>
+              </a:rPr>
+              <a:t>约 A$338</a:t>
+            </a:r>
+          </a:p>
+        </p:txBody>
+      </p:sp>
+      <p:sp>
+        <p:nvSpPr>
+          <p:cNvPr id="100096" name="Fa-g1-2-c"/>
+          <p:cNvSpPr txBox="1"/>
+          <p:nvPr/>
+        </p:nvSpPr>
+        <p:spPr>
+          <a:xfrm>
+            <a:off x="6373368" y="5376672"/>
+            <a:ext cx="1609344" cy="173736"/>
+          </a:xfrm>
+          <a:prstGeom prst="rect">
+            <a:avLst/>
+          </a:prstGeom>
+          <a:noFill/>
+        </p:spPr>
+        <p:txBody>
+          <a:bodyPr wrap="square" lIns="0" rIns="0" tIns="0" bIns="0">
+            <a:noAutofit/>
+          </a:bodyPr>
+          <a:lstStyle/>
+          <a:p>
+            <a:pPr>
+              <a:lnSpc>
+                <a:spcPct val="100000"/>
+              </a:lnSpc>
+            </a:pPr>
+            <a:r>
+              <a:rPr sz="800" b="0" lang="zh-CN">
+                <a:solidFill>
+                  <a:srgbClr val="1F4E79"/>
+                </a:solidFill>
+                <a:latin typeface="微软雅黑"/>
+                <a:ea typeface="微软雅黑"/>
+              </a:rPr>
+              <a:t>每两周</a:t>
+            </a:r>
+            <a:r>
+              <a:rPr sz="800" b="0" lang="zh-CN">
+                <a:solidFill>
+                  <a:srgbClr val="1F4E79"/>
+                </a:solidFill>
+                <a:latin typeface="微软雅黑"/>
+                <a:ea typeface="微软雅黑"/>
+              </a:rPr>
+              <a:t> </a:t>
+            </a:r>
+            <a:r>
+              <a:rPr sz="900" b="0" lang="zh-CN">
+                <a:solidFill>
+                  <a:srgbClr val="3D3C3A"/>
+                </a:solidFill>
+                <a:latin typeface="微软雅黑"/>
+                <a:ea typeface="微软雅黑"/>
+              </a:rPr>
+              <a:t>A$156</a:t>
+            </a:r>
+          </a:p>
+        </p:txBody>
+      </p:sp>
+      <p:sp>
+        <p:nvSpPr>
+          <p:cNvPr id="100097" name="Fa-g1-3-c"/>
+          <p:cNvSpPr txBox="1"/>
+          <p:nvPr/>
+        </p:nvSpPr>
+        <p:spPr>
+          <a:xfrm>
+            <a:off x="6373368" y="5522976"/>
+            <a:ext cx="1609344" cy="173736"/>
+          </a:xfrm>
+          <a:prstGeom prst="rect">
+            <a:avLst/>
+          </a:prstGeom>
+          <a:noFill/>
+        </p:spPr>
+        <p:txBody>
+          <a:bodyPr wrap="square" lIns="0" rIns="0" tIns="0" bIns="0">
+            <a:noAutofit/>
+          </a:bodyPr>
+          <a:lstStyle/>
+          <a:p>
+            <a:pPr>
+              <a:lnSpc>
+                <a:spcPct val="100000"/>
+              </a:lnSpc>
+            </a:pPr>
+            <a:r>
+              <a:rPr sz="800" b="0" lang="zh-CN">
+                <a:solidFill>
+                  <a:srgbClr val="1F4E79"/>
+                </a:solidFill>
+                <a:latin typeface="微软雅黑"/>
+                <a:ea typeface="微软雅黑"/>
+              </a:rPr>
+              <a:t>90 天还款</a:t>
+            </a:r>
+            <a:r>
+              <a:rPr sz="800" b="0" lang="zh-CN">
+                <a:solidFill>
+                  <a:srgbClr val="1F4E79"/>
+                </a:solidFill>
+                <a:latin typeface="微软雅黑"/>
+                <a:ea typeface="微软雅黑"/>
+              </a:rPr>
+              <a:t> </a:t>
+            </a:r>
+            <a:r>
+              <a:rPr sz="900" b="0" lang="zh-CN">
+                <a:solidFill>
+                  <a:srgbClr val="3D3C3A"/>
+                </a:solidFill>
+                <a:latin typeface="微软雅黑"/>
+                <a:ea typeface="微软雅黑"/>
+              </a:rPr>
+              <a:t>6 次</a:t>
+            </a:r>
+          </a:p>
+        </p:txBody>
+      </p:sp>
+      <p:sp>
+        <p:nvSpPr>
+          <p:cNvPr id="100098" name="Fa-g2-t-c"/>
+          <p:cNvSpPr txBox="1"/>
+          <p:nvPr/>
+        </p:nvSpPr>
+        <p:spPr>
+          <a:xfrm>
+            <a:off x="8092440" y="5084064"/>
+            <a:ext cx="1609344" cy="146304"/>
+          </a:xfrm>
+          <a:prstGeom prst="rect">
+            <a:avLst/>
+          </a:prstGeom>
+          <a:noFill/>
+        </p:spPr>
+        <p:txBody>
+          <a:bodyPr wrap="square" lIns="0" rIns="0" tIns="0" bIns="0">
+            <a:noAutofit/>
+          </a:bodyPr>
+          <a:lstStyle/>
+          <a:p>
+            <a:pPr>
+              <a:lnSpc>
+                <a:spcPct val="100000"/>
+              </a:lnSpc>
+            </a:pPr>
+            <a:r>
+              <a:rPr sz="1000" b="1" lang="zh-CN">
+                <a:solidFill>
+                  <a:srgbClr val="1F4E79"/>
+                </a:solidFill>
+                <a:latin typeface="微软雅黑"/>
+                <a:ea typeface="微软雅黑"/>
+              </a:rPr>
+              <a:t>风险表现</a:t>
+            </a:r>
+          </a:p>
+        </p:txBody>
+      </p:sp>
+      <p:sp>
+        <p:nvSpPr>
+          <p:cNvPr id="100099" name="Fa-g2-1-c"/>
+          <p:cNvSpPr txBox="1"/>
+          <p:nvPr/>
+        </p:nvSpPr>
+        <p:spPr>
+          <a:xfrm>
+            <a:off x="8092440" y="5230368"/>
+            <a:ext cx="1609344" cy="173736"/>
+          </a:xfrm>
+          <a:prstGeom prst="rect">
+            <a:avLst/>
+          </a:prstGeom>
+          <a:noFill/>
+        </p:spPr>
+        <p:txBody>
+          <a:bodyPr wrap="square" lIns="0" rIns="0" tIns="0" bIns="0">
+            <a:noAutofit/>
+          </a:bodyPr>
+          <a:lstStyle/>
+          <a:p>
+            <a:pPr>
+              <a:lnSpc>
+                <a:spcPct val="100000"/>
+              </a:lnSpc>
+            </a:pPr>
+            <a:r>
+              <a:rPr sz="800" b="0" lang="zh-CN">
+                <a:solidFill>
+                  <a:srgbClr val="1F4E79"/>
+                </a:solidFill>
+                <a:latin typeface="微软雅黑"/>
+                <a:ea typeface="微软雅黑"/>
+              </a:rPr>
+              <a:t>轻微逾期</a:t>
+            </a:r>
+            <a:r>
+              <a:rPr sz="800" b="0" lang="zh-CN">
+                <a:solidFill>
+                  <a:srgbClr val="1F4E79"/>
+                </a:solidFill>
+                <a:latin typeface="微软雅黑"/>
+                <a:ea typeface="微软雅黑"/>
+              </a:rPr>
+              <a:t> </a:t>
+            </a:r>
+            <a:r>
+              <a:rPr sz="1200" b="1" lang="zh-CN">
+                <a:solidFill>
+                  <a:srgbClr val="D6A000"/>
+                </a:solidFill>
+                <a:latin typeface="微软雅黑"/>
+                <a:ea typeface="微软雅黑"/>
+              </a:rPr>
+              <a:t>1 次</a:t>
+            </a:r>
+          </a:p>
+        </p:txBody>
+      </p:sp>
+      <p:sp>
+        <p:nvSpPr>
+          <p:cNvPr id="100100" name="Fa-g2-2-c"/>
+          <p:cNvSpPr txBox="1"/>
+          <p:nvPr/>
+        </p:nvSpPr>
+        <p:spPr>
+          <a:xfrm>
+            <a:off x="8092440" y="5376672"/>
+            <a:ext cx="1609344" cy="173736"/>
+          </a:xfrm>
+          <a:prstGeom prst="rect">
+            <a:avLst/>
+          </a:prstGeom>
+          <a:noFill/>
+        </p:spPr>
+        <p:txBody>
+          <a:bodyPr wrap="square" lIns="0" rIns="0" tIns="0" bIns="0">
+            <a:noAutofit/>
+          </a:bodyPr>
+          <a:lstStyle/>
+          <a:p>
+            <a:pPr>
+              <a:lnSpc>
+                <a:spcPct val="100000"/>
+              </a:lnSpc>
+            </a:pPr>
+            <a:r>
+              <a:rPr sz="800" b="0" lang="zh-CN">
+                <a:solidFill>
+                  <a:srgbClr val="1F4E79"/>
+                </a:solidFill>
+                <a:latin typeface="微软雅黑"/>
+                <a:ea typeface="微软雅黑"/>
+              </a:rPr>
+              <a:t>扣款失败</a:t>
+            </a:r>
+            <a:r>
+              <a:rPr sz="800" b="0" lang="zh-CN">
+                <a:solidFill>
+                  <a:srgbClr val="1F4E79"/>
+                </a:solidFill>
+                <a:latin typeface="微软雅黑"/>
+                <a:ea typeface="微软雅黑"/>
+              </a:rPr>
+              <a:t> </a:t>
+            </a:r>
+            <a:r>
+              <a:rPr sz="900" b="0" lang="zh-CN">
+                <a:solidFill>
+                  <a:srgbClr val="3D3C3A"/>
+                </a:solidFill>
+                <a:latin typeface="微软雅黑"/>
+                <a:ea typeface="微软雅黑"/>
+              </a:rPr>
+              <a:t>1 次</a:t>
+            </a:r>
+          </a:p>
+        </p:txBody>
+      </p:sp>
+      <p:sp>
+        <p:nvSpPr>
+          <p:cNvPr id="100101" name="Fa-g2-3-c"/>
+          <p:cNvSpPr txBox="1"/>
+          <p:nvPr/>
+        </p:nvSpPr>
+        <p:spPr>
+          <a:xfrm>
+            <a:off x="8092440" y="5522976"/>
+            <a:ext cx="1609344" cy="173736"/>
+          </a:xfrm>
+          <a:prstGeom prst="rect">
+            <a:avLst/>
+          </a:prstGeom>
+          <a:noFill/>
+        </p:spPr>
+        <p:txBody>
+          <a:bodyPr wrap="square" lIns="0" rIns="0" tIns="0" bIns="0">
+            <a:noAutofit/>
+          </a:bodyPr>
+          <a:lstStyle/>
+          <a:p>
+            <a:pPr>
+              <a:lnSpc>
+                <a:spcPct val="100000"/>
+              </a:lnSpc>
+            </a:pPr>
+            <a:r>
+              <a:rPr sz="800" b="0" lang="zh-CN">
+                <a:solidFill>
+                  <a:srgbClr val="1F4E79"/>
+                </a:solidFill>
+                <a:latin typeface="微软雅黑"/>
+                <a:ea typeface="微软雅黑"/>
+              </a:rPr>
+              <a:t>还款中断</a:t>
+            </a:r>
+            <a:r>
+              <a:rPr sz="800" b="0" lang="zh-CN">
+                <a:solidFill>
+                  <a:srgbClr val="1F4E79"/>
+                </a:solidFill>
+                <a:latin typeface="微软雅黑"/>
+                <a:ea typeface="微软雅黑"/>
+              </a:rPr>
+              <a:t> </a:t>
+            </a:r>
+            <a:r>
+              <a:rPr sz="900" b="0" lang="zh-CN">
+                <a:solidFill>
+                  <a:srgbClr val="3D3C3A"/>
+                </a:solidFill>
+                <a:latin typeface="微软雅黑"/>
+                <a:ea typeface="微软雅黑"/>
+              </a:rPr>
+              <a:t>无</a:t>
+            </a:r>
+          </a:p>
+        </p:txBody>
+      </p:sp>
+      <p:sp>
+        <p:nvSpPr>
+          <p:cNvPr id="100102" name="Fa-g2-4-c"/>
+          <p:cNvSpPr txBox="1"/>
+          <p:nvPr/>
+        </p:nvSpPr>
+        <p:spPr>
+          <a:xfrm>
+            <a:off x="8092440" y="5669280"/>
+            <a:ext cx="1609344" cy="173736"/>
+          </a:xfrm>
+          <a:prstGeom prst="rect">
+            <a:avLst/>
+          </a:prstGeom>
+          <a:noFill/>
+        </p:spPr>
+        <p:txBody>
+          <a:bodyPr wrap="square" lIns="0" rIns="0" tIns="0" bIns="0">
+            <a:noAutofit/>
+          </a:bodyPr>
+          <a:lstStyle/>
+          <a:p>
+            <a:pPr>
+              <a:lnSpc>
+                <a:spcPct val="100000"/>
+              </a:lnSpc>
+            </a:pPr>
+            <a:r>
+              <a:rPr sz="800" b="0" lang="zh-CN">
+                <a:solidFill>
+                  <a:srgbClr val="1F4E79"/>
+                </a:solidFill>
+                <a:latin typeface="微软雅黑"/>
+                <a:ea typeface="微软雅黑"/>
+              </a:rPr>
+              <a:t>连续正常还款</a:t>
+            </a:r>
+            <a:r>
+              <a:rPr sz="800" b="0" lang="zh-CN">
+                <a:solidFill>
+                  <a:srgbClr val="1F4E79"/>
+                </a:solidFill>
+                <a:latin typeface="微软雅黑"/>
+                <a:ea typeface="微软雅黑"/>
+              </a:rPr>
+              <a:t> </a:t>
+            </a:r>
+            <a:r>
+              <a:rPr sz="900" b="0" lang="zh-CN">
+                <a:solidFill>
+                  <a:srgbClr val="3D3C3A"/>
+                </a:solidFill>
+                <a:latin typeface="微软雅黑"/>
+                <a:ea typeface="微软雅黑"/>
+              </a:rPr>
+              <a:t>5 期</a:t>
+            </a:r>
+          </a:p>
+        </p:txBody>
+      </p:sp>
+      <p:sp>
+        <p:nvSpPr>
+          <p:cNvPr id="100103" name="Fa-g3-t-c"/>
+          <p:cNvSpPr txBox="1"/>
+          <p:nvPr/>
+        </p:nvSpPr>
+        <p:spPr>
+          <a:xfrm>
+            <a:off x="9811512" y="5084064"/>
+            <a:ext cx="1609344" cy="146304"/>
+          </a:xfrm>
+          <a:prstGeom prst="rect">
+            <a:avLst/>
+          </a:prstGeom>
+          <a:noFill/>
+        </p:spPr>
+        <p:txBody>
+          <a:bodyPr wrap="square" lIns="0" rIns="0" tIns="0" bIns="0">
+            <a:noAutofit/>
+          </a:bodyPr>
+          <a:lstStyle/>
+          <a:p>
+            <a:pPr>
+              <a:lnSpc>
+                <a:spcPct val="100000"/>
+              </a:lnSpc>
+            </a:pPr>
+            <a:r>
+              <a:rPr sz="1000" b="1" lang="zh-CN">
+                <a:solidFill>
+                  <a:srgbClr val="1F4E79"/>
+                </a:solidFill>
+                <a:latin typeface="微软雅黑"/>
+                <a:ea typeface="微软雅黑"/>
+              </a:rPr>
+              <a:t>产品与定价</a:t>
+            </a:r>
+          </a:p>
+        </p:txBody>
+      </p:sp>
+      <p:sp>
+        <p:nvSpPr>
+          <p:cNvPr id="100104" name="Fa-g3-1-c"/>
+          <p:cNvSpPr txBox="1"/>
+          <p:nvPr/>
+        </p:nvSpPr>
+        <p:spPr>
+          <a:xfrm>
+            <a:off x="9811512" y="5230368"/>
+            <a:ext cx="1609344" cy="173736"/>
+          </a:xfrm>
+          <a:prstGeom prst="rect">
+            <a:avLst/>
+          </a:prstGeom>
+          <a:noFill/>
+        </p:spPr>
+        <p:txBody>
+          <a:bodyPr wrap="square" lIns="0" rIns="0" tIns="0" bIns="0">
+            <a:noAutofit/>
+          </a:bodyPr>
+          <a:lstStyle/>
+          <a:p>
+            <a:pPr>
+              <a:lnSpc>
+                <a:spcPct val="100000"/>
+              </a:lnSpc>
+            </a:pPr>
+            <a:r>
+              <a:rPr sz="800" b="0" lang="zh-CN">
+                <a:solidFill>
+                  <a:srgbClr val="1F4E79"/>
+                </a:solidFill>
+                <a:latin typeface="微软雅黑"/>
+                <a:ea typeface="微软雅黑"/>
+              </a:rPr>
+              <a:t>贷款类型</a:t>
+            </a:r>
+            <a:r>
+              <a:rPr sz="800" b="0" lang="zh-CN">
+                <a:solidFill>
+                  <a:srgbClr val="1F4E79"/>
+                </a:solidFill>
+                <a:latin typeface="微软雅黑"/>
+                <a:ea typeface="微软雅黑"/>
+              </a:rPr>
+              <a:t> </a:t>
+            </a:r>
+            <a:r>
+              <a:rPr sz="900" b="0" lang="zh-CN">
+                <a:solidFill>
+                  <a:srgbClr val="3D3C3A"/>
+                </a:solidFill>
+                <a:latin typeface="微软雅黑"/>
+                <a:ea typeface="微软雅黑"/>
+              </a:rPr>
+              <a:t>SACC</a:t>
+            </a:r>
+          </a:p>
+        </p:txBody>
+      </p:sp>
+      <p:sp>
+        <p:nvSpPr>
+          <p:cNvPr id="100105" name="Fa-g3-2-c"/>
+          <p:cNvSpPr txBox="1"/>
+          <p:nvPr/>
+        </p:nvSpPr>
+        <p:spPr>
+          <a:xfrm>
+            <a:off x="9811512" y="5376672"/>
+            <a:ext cx="1609344" cy="173736"/>
+          </a:xfrm>
+          <a:prstGeom prst="rect">
+            <a:avLst/>
+          </a:prstGeom>
+          <a:noFill/>
+        </p:spPr>
+        <p:txBody>
+          <a:bodyPr wrap="square" lIns="0" rIns="0" tIns="0" bIns="0">
+            <a:noAutofit/>
+          </a:bodyPr>
+          <a:lstStyle/>
+          <a:p>
+            <a:pPr>
+              <a:lnSpc>
+                <a:spcPct val="100000"/>
+              </a:lnSpc>
+            </a:pPr>
+            <a:r>
+              <a:rPr sz="800" b="0" lang="zh-CN">
+                <a:solidFill>
+                  <a:srgbClr val="1F4E79"/>
+                </a:solidFill>
+                <a:latin typeface="微软雅黑"/>
+                <a:ea typeface="微软雅黑"/>
+              </a:rPr>
+              <a:t>APR</a:t>
+            </a:r>
+            <a:r>
+              <a:rPr sz="800" b="0" lang="zh-CN">
+                <a:solidFill>
+                  <a:srgbClr val="1F4E79"/>
+                </a:solidFill>
+                <a:latin typeface="微软雅黑"/>
+                <a:ea typeface="微软雅黑"/>
+              </a:rPr>
+              <a:t> </a:t>
+            </a:r>
+            <a:r>
+              <a:rPr sz="1200" b="1" lang="zh-CN">
+                <a:solidFill>
+                  <a:srgbClr val="1F4E79"/>
+                </a:solidFill>
+                <a:latin typeface="微软雅黑"/>
+                <a:ea typeface="微软雅黑"/>
+              </a:rPr>
+              <a:t>42%</a:t>
+            </a:r>
+          </a:p>
+        </p:txBody>
+      </p:sp>
+      <p:sp>
+        <p:nvSpPr>
+          <p:cNvPr id="100106" name="Fa-g3-3-c"/>
+          <p:cNvSpPr txBox="1"/>
+          <p:nvPr/>
+        </p:nvSpPr>
+        <p:spPr>
+          <a:xfrm>
+            <a:off x="9811512" y="5522976"/>
+            <a:ext cx="1609344" cy="173736"/>
+          </a:xfrm>
+          <a:prstGeom prst="rect">
+            <a:avLst/>
+          </a:prstGeom>
+          <a:noFill/>
+        </p:spPr>
+        <p:txBody>
+          <a:bodyPr wrap="square" lIns="0" rIns="0" tIns="0" bIns="0">
+            <a:noAutofit/>
+          </a:bodyPr>
+          <a:lstStyle/>
+          <a:p>
+            <a:pPr>
+              <a:lnSpc>
+                <a:spcPct val="100000"/>
+              </a:lnSpc>
+            </a:pPr>
+            <a:r>
+              <a:rPr sz="800" b="0" lang="zh-CN">
+                <a:solidFill>
+                  <a:srgbClr val="1F4E79"/>
+                </a:solidFill>
+                <a:latin typeface="微软雅黑"/>
+                <a:ea typeface="微软雅黑"/>
+              </a:rPr>
+              <a:t>当前余额</a:t>
+            </a:r>
+            <a:r>
+              <a:rPr sz="800" b="0" lang="zh-CN">
+                <a:solidFill>
+                  <a:srgbClr val="1F4E79"/>
+                </a:solidFill>
+                <a:latin typeface="微软雅黑"/>
+                <a:ea typeface="微软雅黑"/>
+              </a:rPr>
+              <a:t> </a:t>
+            </a:r>
+            <a:r>
+              <a:rPr sz="900" b="0" lang="zh-CN">
+                <a:solidFill>
+                  <a:srgbClr val="3D3C3A"/>
+                </a:solidFill>
+                <a:latin typeface="微软雅黑"/>
+                <a:ea typeface="微软雅黑"/>
+              </a:rPr>
+              <a:t>A$564</a:t>
+            </a:r>
+          </a:p>
+        </p:txBody>
+      </p:sp>
+      <p:sp>
+        <p:nvSpPr>
+          <p:cNvPr id="100107" name="用户-g3-1-c"/>
+          <p:cNvSpPr txBox="1"/>
+          <p:nvPr/>
+        </p:nvSpPr>
+        <p:spPr>
+          <a:xfrm>
+            <a:off x="722376" y="5614416"/>
+            <a:ext cx="958291" cy="347472"/>
+          </a:xfrm>
+          <a:prstGeom prst="rect">
+            <a:avLst/>
+          </a:prstGeom>
+          <a:noFill/>
+        </p:spPr>
+        <p:txBody>
+          <a:bodyPr wrap="square" lIns="0" rIns="0" tIns="0" bIns="0">
+            <a:noAutofit/>
+          </a:bodyPr>
+          <a:lstStyle/>
+          <a:p>
+            <a:pPr>
+              <a:lnSpc>
+                <a:spcPct val="100000"/>
+              </a:lnSpc>
+            </a:pPr>
+            <a:r>
+              <a:rPr sz="800" b="0" lang="zh-CN">
+                <a:solidFill>
+                  <a:srgbClr val="1F4E79"/>
+                </a:solidFill>
+                <a:latin typeface="微软雅黑"/>
+                <a:ea typeface="微软雅黑"/>
+              </a:rPr>
+              <a:t>90 天还款金额</a:t>
+            </a:r>
+          </a:p>
+          <a:p>
+            <a:pPr>
+              <a:lnSpc>
+                <a:spcPct val="100000"/>
+              </a:lnSpc>
+            </a:pPr>
+            <a:r>
+              <a:rPr sz="1000" b="0" lang="zh-CN">
+                <a:solidFill>
+                  <a:srgbClr val="3D3C3A"/>
+                </a:solidFill>
+                <a:latin typeface="微软雅黑"/>
+                <a:ea typeface="微软雅黑"/>
+              </a:rPr>
+              <a:t>A$1,284</a:t>
+            </a:r>
+          </a:p>
+        </p:txBody>
+      </p:sp>
+      <p:sp>
+        <p:nvSpPr>
+          <p:cNvPr id="100108" name="用户-g3-2-c"/>
+          <p:cNvSpPr txBox="1"/>
+          <p:nvPr/>
+        </p:nvSpPr>
+        <p:spPr>
+          <a:xfrm>
+            <a:off x="1735531" y="5614416"/>
+            <a:ext cx="958291" cy="347472"/>
+          </a:xfrm>
+          <a:prstGeom prst="rect">
+            <a:avLst/>
+          </a:prstGeom>
+          <a:noFill/>
+        </p:spPr>
+        <p:txBody>
+          <a:bodyPr wrap="square" lIns="0" rIns="0" tIns="0" bIns="0">
+            <a:noAutofit/>
+          </a:bodyPr>
+          <a:lstStyle/>
+          <a:p>
+            <a:pPr>
+              <a:lnSpc>
+                <a:spcPct val="100000"/>
+              </a:lnSpc>
+            </a:pPr>
+            <a:r>
+              <a:rPr sz="800" b="0" lang="zh-CN">
+                <a:solidFill>
+                  <a:srgbClr val="1F4E79"/>
+                </a:solidFill>
+                <a:latin typeface="微软雅黑"/>
+                <a:ea typeface="微软雅黑"/>
+              </a:rPr>
+              <a:t>轻微逾期</a:t>
+            </a:r>
+          </a:p>
+          <a:p>
+            <a:pPr>
+              <a:lnSpc>
+                <a:spcPct val="100000"/>
+              </a:lnSpc>
+            </a:pPr>
+            <a:r>
+              <a:rPr sz="1200" b="1" lang="zh-CN">
+                <a:solidFill>
+                  <a:srgbClr val="D6A000"/>
+                </a:solidFill>
+                <a:latin typeface="微软雅黑"/>
+                <a:ea typeface="微软雅黑"/>
+              </a:rPr>
+              <a:t>1 次</a:t>
+            </a:r>
+          </a:p>
+        </p:txBody>
+      </p:sp>
+      <p:sp>
+        <p:nvSpPr>
+          <p:cNvPr id="100109" name="用户-g3-3-c"/>
+          <p:cNvSpPr txBox="1"/>
+          <p:nvPr/>
+        </p:nvSpPr>
+        <p:spPr>
+          <a:xfrm>
+            <a:off x="2748686" y="5614416"/>
+            <a:ext cx="958291" cy="347472"/>
+          </a:xfrm>
+          <a:prstGeom prst="rect">
+            <a:avLst/>
+          </a:prstGeom>
+          <a:noFill/>
+        </p:spPr>
+        <p:txBody>
+          <a:bodyPr wrap="square" lIns="0" rIns="0" tIns="0" bIns="0">
+            <a:noAutofit/>
+          </a:bodyPr>
+          <a:lstStyle/>
+          <a:p>
+            <a:pPr>
+              <a:lnSpc>
+                <a:spcPct val="100000"/>
+              </a:lnSpc>
+            </a:pPr>
+            <a:r>
+              <a:rPr sz="800" b="0" lang="zh-CN">
+                <a:solidFill>
+                  <a:srgbClr val="1F4E79"/>
+                </a:solidFill>
+                <a:latin typeface="微软雅黑"/>
+                <a:ea typeface="微软雅黑"/>
+              </a:rPr>
+              <a:t>扣款失败次数</a:t>
+            </a:r>
+          </a:p>
+          <a:p>
+            <a:pPr>
+              <a:lnSpc>
+                <a:spcPct val="100000"/>
+              </a:lnSpc>
+            </a:pPr>
+            <a:r>
+              <a:rPr sz="1000" b="0" lang="zh-CN">
+                <a:solidFill>
+                  <a:srgbClr val="3D3C3A"/>
+                </a:solidFill>
+                <a:latin typeface="微软雅黑"/>
+                <a:ea typeface="微软雅黑"/>
+              </a:rPr>
+              <a:t>1 次</a:t>
+            </a:r>
+          </a:p>
+        </p:txBody>
+      </p:sp>
+      <p:sp>
+        <p:nvSpPr>
+          <p:cNvPr id="100110" name="用户-g3-4-c"/>
+          <p:cNvSpPr txBox="1"/>
+          <p:nvPr/>
+        </p:nvSpPr>
+        <p:spPr>
+          <a:xfrm>
+            <a:off x="3761841" y="5614416"/>
+            <a:ext cx="958291" cy="347472"/>
+          </a:xfrm>
+          <a:prstGeom prst="rect">
+            <a:avLst/>
+          </a:prstGeom>
+          <a:noFill/>
+        </p:spPr>
+        <p:txBody>
+          <a:bodyPr wrap="square" lIns="0" rIns="0" tIns="0" bIns="0">
+            <a:noAutofit/>
+          </a:bodyPr>
+          <a:lstStyle/>
+          <a:p>
+            <a:pPr>
+              <a:lnSpc>
+                <a:spcPct val="100000"/>
+              </a:lnSpc>
+            </a:pPr>
+            <a:r>
+              <a:rPr sz="800" b="0" lang="zh-CN">
+                <a:solidFill>
+                  <a:srgbClr val="1F4E79"/>
+                </a:solidFill>
+                <a:latin typeface="微软雅黑"/>
+                <a:ea typeface="微软雅黑"/>
+              </a:rPr>
+              <a:t>还款中断</a:t>
+            </a:r>
+          </a:p>
+          <a:p>
+            <a:pPr>
+              <a:lnSpc>
+                <a:spcPct val="100000"/>
+              </a:lnSpc>
+            </a:pPr>
+            <a:r>
+              <a:rPr sz="1000" b="0" lang="zh-CN">
+                <a:solidFill>
+                  <a:srgbClr val="3D3C3A"/>
+                </a:solidFill>
+                <a:latin typeface="微软雅黑"/>
+                <a:ea typeface="微软雅黑"/>
+              </a:rPr>
+              <a:t>无</a:t>
+            </a:r>
+          </a:p>
+        </p:txBody>
+      </p:sp>
+      <p:sp>
+        <p:nvSpPr>
+          <p:cNvPr id="100111" name="用户-g3-5-c"/>
+          <p:cNvSpPr txBox="1"/>
+          <p:nvPr/>
+        </p:nvSpPr>
+        <p:spPr>
+          <a:xfrm>
+            <a:off x="4774996" y="5614416"/>
+            <a:ext cx="958291" cy="347472"/>
+          </a:xfrm>
+          <a:prstGeom prst="rect">
+            <a:avLst/>
+          </a:prstGeom>
+          <a:noFill/>
+        </p:spPr>
+        <p:txBody>
+          <a:bodyPr wrap="square" lIns="0" rIns="0" tIns="0" bIns="0">
+            <a:noAutofit/>
+          </a:bodyPr>
+          <a:lstStyle/>
+          <a:p>
+            <a:pPr>
+              <a:lnSpc>
+                <a:spcPct val="100000"/>
+              </a:lnSpc>
+            </a:pPr>
+            <a:r>
+              <a:rPr sz="800" b="0" lang="zh-CN">
+                <a:solidFill>
+                  <a:srgbClr val="1F4E79"/>
+                </a:solidFill>
+                <a:latin typeface="微软雅黑"/>
+                <a:ea typeface="微软雅黑"/>
+              </a:rPr>
+              <a:t>近 90 天新增借款</a:t>
+            </a:r>
+          </a:p>
+          <a:p>
+            <a:pPr>
+              <a:lnSpc>
+                <a:spcPct val="100000"/>
+              </a:lnSpc>
+            </a:pPr>
+            <a:r>
+              <a:rPr sz="1000" b="0" lang="zh-CN">
+                <a:solidFill>
+                  <a:srgbClr val="3D3C3A"/>
+                </a:solidFill>
+                <a:latin typeface="微软雅黑"/>
+                <a:ea typeface="微软雅黑"/>
+              </a:rPr>
+              <a:t>1 笔</a:t>
+            </a:r>
+          </a:p>
+        </p:txBody>
+      </p:sp>
+      <p:sp>
+        <p:nvSpPr>
+          <p:cNvPr id="100112" name="Fa-g1-4-c"/>
+          <p:cNvSpPr txBox="1"/>
+          <p:nvPr/>
+        </p:nvSpPr>
+        <p:spPr>
+          <a:xfrm>
+            <a:off x="6373368" y="5669280"/>
+            <a:ext cx="1609344" cy="146304"/>
+          </a:xfrm>
+          <a:prstGeom prst="rect">
+            <a:avLst/>
+          </a:prstGeom>
+          <a:noFill/>
+        </p:spPr>
+        <p:txBody>
+          <a:bodyPr wrap="square" lIns="0" rIns="0" tIns="0" bIns="0">
+            <a:noAutofit/>
+          </a:bodyPr>
+          <a:lstStyle/>
+          <a:p>
+            <a:pPr>
+              <a:lnSpc>
+                <a:spcPct val="100000"/>
+              </a:lnSpc>
+            </a:pPr>
+            <a:r>
+              <a:rPr sz="800" b="0" lang="zh-CN">
+                <a:solidFill>
+                  <a:srgbClr val="1F4E79"/>
+                </a:solidFill>
+                <a:latin typeface="微软雅黑"/>
+                <a:ea typeface="微软雅黑"/>
+              </a:rPr>
+              <a:t>预计剩余</a:t>
+            </a:r>
+            <a:r>
+              <a:rPr sz="800" b="0" lang="zh-CN">
+                <a:solidFill>
+                  <a:srgbClr val="1F4E79"/>
+                </a:solidFill>
+                <a:latin typeface="微软雅黑"/>
+                <a:ea typeface="微软雅黑"/>
+              </a:rPr>
+              <a:t> </a:t>
+            </a:r>
+            <a:r>
+              <a:rPr sz="900" b="0" lang="zh-CN">
+                <a:solidFill>
+                  <a:srgbClr val="3D3C3A"/>
+                </a:solidFill>
+                <a:latin typeface="微软雅黑"/>
+                <a:ea typeface="微软雅黑"/>
+              </a:rPr>
+              <a:t>4 期</a:t>
+            </a:r>
+          </a:p>
+        </p:txBody>
+      </p:sp>
+      <p:sp>
+        <p:nvSpPr>
+          <p:cNvPr id="100113" name="Fa-g2-5-c"/>
+          <p:cNvSpPr txBox="1"/>
+          <p:nvPr/>
+        </p:nvSpPr>
+        <p:spPr>
+          <a:xfrm>
+            <a:off x="8092440" y="5815584"/>
+            <a:ext cx="1609344" cy="146304"/>
+          </a:xfrm>
+          <a:prstGeom prst="rect">
+            <a:avLst/>
+          </a:prstGeom>
+          <a:noFill/>
+        </p:spPr>
+        <p:txBody>
+          <a:bodyPr wrap="square" lIns="0" rIns="0" tIns="0" bIns="0">
+            <a:noAutofit/>
+          </a:bodyPr>
+          <a:lstStyle/>
+          <a:p>
+            <a:pPr>
+              <a:lnSpc>
+                <a:spcPct val="100000"/>
+              </a:lnSpc>
+            </a:pPr>
+            <a:r>
+              <a:rPr sz="800" b="0" lang="zh-CN">
+                <a:solidFill>
+                  <a:srgbClr val="1F4E79"/>
+                </a:solidFill>
+                <a:latin typeface="微软雅黑"/>
+                <a:ea typeface="微软雅黑"/>
+              </a:rPr>
+              <a:t>最长逾期</a:t>
+            </a:r>
+            <a:r>
+              <a:rPr sz="800" b="0" lang="zh-CN">
+                <a:solidFill>
+                  <a:srgbClr val="1F4E79"/>
+                </a:solidFill>
+                <a:latin typeface="微软雅黑"/>
+                <a:ea typeface="微软雅黑"/>
+              </a:rPr>
+              <a:t> </a:t>
+            </a:r>
+            <a:r>
+              <a:rPr sz="1200" b="1" lang="zh-CN">
+                <a:solidFill>
+                  <a:srgbClr val="D6A000"/>
+                </a:solidFill>
+                <a:latin typeface="微软雅黑"/>
+                <a:ea typeface="微软雅黑"/>
+              </a:rPr>
+              <a:t>3 天</a:t>
+            </a:r>
+          </a:p>
+        </p:txBody>
+      </p:sp>
+      <p:sp>
+        <p:nvSpPr>
+          <p:cNvPr id="100114" name="Fa-g3-4-c"/>
+          <p:cNvSpPr txBox="1"/>
+          <p:nvPr/>
+        </p:nvSpPr>
+        <p:spPr>
+          <a:xfrm>
+            <a:off x="9811512" y="5669280"/>
+            <a:ext cx="1609344" cy="146304"/>
+          </a:xfrm>
+          <a:prstGeom prst="rect">
+            <a:avLst/>
+          </a:prstGeom>
+          <a:noFill/>
+        </p:spPr>
+        <p:txBody>
+          <a:bodyPr wrap="square" lIns="0" rIns="0" tIns="0" bIns="0">
+            <a:noAutofit/>
+          </a:bodyPr>
+          <a:lstStyle/>
+          <a:p>
+            <a:pPr>
+              <a:lnSpc>
+                <a:spcPct val="100000"/>
+              </a:lnSpc>
+            </a:pPr>
+            <a:r>
+              <a:rPr sz="800" b="0" lang="zh-CN">
+                <a:solidFill>
+                  <a:srgbClr val="1F4E79"/>
+                </a:solidFill>
+                <a:latin typeface="微软雅黑"/>
+                <a:ea typeface="微软雅黑"/>
+              </a:rPr>
+              <a:t>预计总还款</a:t>
+            </a:r>
+            <a:r>
+              <a:rPr sz="800" b="0" lang="zh-CN">
+                <a:solidFill>
+                  <a:srgbClr val="1F4E79"/>
+                </a:solidFill>
+                <a:latin typeface="微软雅黑"/>
+                <a:ea typeface="微软雅黑"/>
+              </a:rPr>
+              <a:t> </a:t>
+            </a:r>
+            <a:r>
+              <a:rPr sz="900" b="0" lang="zh-CN">
+                <a:solidFill>
+                  <a:srgbClr val="3D3C3A"/>
+                </a:solidFill>
+                <a:latin typeface="微软雅黑"/>
+                <a:ea typeface="微软雅黑"/>
+              </a:rPr>
+              <a:t>A$1,872</a:t>
+            </a:r>
+          </a:p>
+        </p:txBody>
+      </p:sp>
+      <p:sp>
+        <p:nvSpPr>
+          <p:cNvPr id="100115" name="Fa-g3-5-c"/>
+          <p:cNvSpPr txBox="1"/>
+          <p:nvPr/>
+        </p:nvSpPr>
+        <p:spPr>
+          <a:xfrm>
+            <a:off x="9811512" y="5815584"/>
+            <a:ext cx="1609344" cy="146304"/>
+          </a:xfrm>
+          <a:prstGeom prst="rect">
+            <a:avLst/>
+          </a:prstGeom>
+          <a:noFill/>
+        </p:spPr>
+        <p:txBody>
+          <a:bodyPr wrap="square" lIns="0" rIns="0" tIns="0" bIns="0">
+            <a:noAutofit/>
+          </a:bodyPr>
+          <a:lstStyle/>
+          <a:p>
+            <a:pPr>
+              <a:lnSpc>
+                <a:spcPct val="100000"/>
+              </a:lnSpc>
+            </a:pPr>
+            <a:r>
+              <a:rPr sz="800" b="0" lang="zh-CN">
+                <a:solidFill>
+                  <a:srgbClr val="1F4E79"/>
+                </a:solidFill>
+                <a:latin typeface="微软雅黑"/>
+                <a:ea typeface="微软雅黑"/>
+              </a:rPr>
+              <a:t>融资成本</a:t>
+            </a:r>
+            <a:r>
+              <a:rPr sz="800" b="0" lang="zh-CN">
+                <a:solidFill>
+                  <a:srgbClr val="1F4E79"/>
+                </a:solidFill>
+                <a:latin typeface="微软雅黑"/>
+                <a:ea typeface="微软雅黑"/>
+              </a:rPr>
+              <a:t> </a:t>
+            </a:r>
+            <a:r>
+              <a:rPr sz="900" b="0" lang="zh-CN">
+                <a:solidFill>
+                  <a:srgbClr val="3D3C3A"/>
+                </a:solidFill>
+                <a:latin typeface="微软雅黑"/>
+                <a:ea typeface="微软雅黑"/>
+              </a:rPr>
+              <a:t>A$372</a:t>
+            </a:r>
+          </a:p>
+        </p:txBody>
+      </p:sp>
+    </p:spTree>
   </p:cSld>
   <p:clrMapOvr>
     <a:masterClrMapping/>
